--- a/docs/model-lesson/model-lesson-template.pptx
+++ b/docs/model-lesson/model-lesson-template.pptx
@@ -27,6 +27,7 @@
     <p:sldId id="275" r:id="rIdS20"/>
     <p:sldId id="276" r:id="rIdS21"/>
     <p:sldId id="277" r:id="rIdS22"/>
+    <p:sldId id="278" r:id="rIdS23"/>
   </p:sldIdLst>
   <p:notesMasterIdLst>
     <p:notesMasterId r:id="rId16"/>
@@ -156,6 +157,7 @@
             <p14:sldId id="275"/>
             <p14:sldId id="276"/>
             <p14:sldId id="277"/>
+            <p14:sldId id="278"/>
           </p14:sldIdLst>
         </p14:section>
       </p14:sectionLst>
@@ -595,7 +597,7 @@
             <a:pPr rtl="1" algn="r"/>
             <a:r>
               <a:rPr lang="ar-SA" dirty="0"/>
-              <a:t>الشرائح الأربع الأخيرة مخفية (دليل المعلم): لا تظهر أثناء العرض، راجعها قبل الزيارة.</a:t>
+              <a:t>الشرائح الخمس الأخيرة مخفية (دليل المعلم): لا تظهر أثناء العرض، راجعها قبل الزيارة.</a:t>
             </a:r>
           </a:p>
         </p:txBody>
@@ -1011,7 +1013,21 @@
             <a:pPr rtl="1" algn="r"/>
             <a:r>
               <a:rPr lang="ar-SA" dirty="0"/>
-              <a:t>اكتب أمثلة محددة من مادتك بدل العبارات العامة، واطلب من الطلاب إضافة أمثلة أخرى.</a:t>
+              <a:t>ضمن زمن النشاط التعاوني: اطلب من كل مجموعة إكمال عبارة واحدة أو أكثر، ثم يقرأ المتحدث إجابتها.</a:t>
+            </a:r>
+          </a:p>
+          <a:p>
+            <a:pPr rtl="1" algn="r"/>
+            <a:r>
+              <a:rPr lang="ar-SA" dirty="0"/>
+              <a:t>بنود الاستمارة 20 و25 تقيس ما يُظهره الطلاب أنفسهم: الاعتزاز بالقيم والهوية الوطنية، والاعتزاز بثقافتهم مع احترام التنوع الثقافي. لذلك يُكمل الطالب العبارة بنفسه، لا المعلم.</a:t>
+            </a:r>
+          </a:p>
+          <a:p>
+            <a:pPr rtl="1" algn="r"/>
+            <a:r>
+              <a:rPr lang="ar-SA" dirty="0"/>
+              <a:t>أمثلة: في العلوم عالم مسلم أو مشروع وطني (نيوم، الطاقة المتجددة)، وفي الرياضيات الزخارف الإسلامية والعمارة، وفي اللغات أدب من ثقافات أخرى، وفي الاجتماعيات التراث الوطني ومواقع التراث العالمي في المملكة.</a:t>
             </a:r>
           </a:p>
           <a:p>
@@ -1019,13 +1035,6 @@
             <a:r>
               <a:rPr lang="ar-SA" dirty="0"/>
               <a:t>دمج القيم يكون طبيعيًا من سياق الدرس، لا بموعظة منفصلة.</a:t>
-            </a:r>
-          </a:p>
-          <a:p>
-            <a:pPr rtl="1" algn="r"/>
-            <a:r>
-              <a:rPr lang="ar-SA" dirty="0"/>
-              <a:t>الربط بالواقع ورؤية المملكة 2030 والمهن المستقبلية يعطي الدرس معنى ويرفع الدافعية.</a:t>
             </a:r>
           </a:p>
         </p:txBody>
@@ -1136,6 +1145,13 @@
             <a:pPr rtl="1" algn="r"/>
             <a:r>
               <a:rPr lang="ar-SA" dirty="0"/>
+              <a:t>«أكمل وحدك»: من ينهي مهمته ينتقل للمستوى التالي أو يتعلّم من مصدر إثراء دون انتظار المعلم؛ هذا بند «الاستقلالية والقدرة على التعلم الذاتي» (24).</a:t>
+            </a:r>
+          </a:p>
+          <a:p>
+            <a:pPr rtl="1" algn="r"/>
+            <a:r>
+              <a:rPr lang="ar-SA" dirty="0"/>
               <a:t>ما يلاحظه المقيّم: مراعاة الفروق الفردية، ومواد إضافية لذوي الصعوبات، وإثراء لسريعي التعلم والموهوبين.</a:t>
             </a:r>
           </a:p>
@@ -1344,6 +1360,13 @@
             <a:pPr rtl="1" algn="r"/>
             <a:r>
               <a:rPr lang="ar-SA" dirty="0"/>
+              <a:t>«أفخر اليوم بأنني...»: اطلب من طالبين إكمالها؛ تعزز الاتجاهات الإيجابية نحو الذات (بند 21).</a:t>
+            </a:r>
+          </a:p>
+          <a:p>
+            <a:pPr rtl="1" algn="r"/>
+            <a:r>
+              <a:rPr lang="ar-SA" dirty="0"/>
               <a:t>اختم بموعد الحصة القادمة وما يحتاجه الطلاب لها.</a:t>
             </a:r>
           </a:p>
@@ -1600,7 +1623,7 @@
             <a:pPr rtl="1" algn="r"/>
             <a:r>
               <a:rPr lang="ar-SA" dirty="0"/>
-              <a:t>هذه الشريحة والشرائح الثلاث بعدها مخفية: تظهر في وضع التحرير فقط، ولا تُعرض للطلاب.</a:t>
+              <a:t>هذه الشريحة والشرائح الأربع بعدها مخفية: تظهر في وضع التحرير فقط، ولا تُعرض للطلاب.</a:t>
             </a:r>
           </a:p>
         </p:txBody>
@@ -1780,14 +1803,21 @@
             <a:pPr rtl="1" algn="r"/>
             <a:r>
               <a:rPr lang="ar-SA" dirty="0"/>
-              <a:t>البنود السبعة عشر في بطاقة رصد الملاحظة الصفية، وكل بند يُقيَّم من 1 إلى 4، وأمام كل بند الموضع الذي يحققه في هذا القالب.</a:t>
+              <a:t>البنود الخمسة والعشرون في استمارة الملاحظة الصفية بمنصة هيئة تقويم التعليم والتدريب، ويُقدَّر كل بند: متحقق بدرجة منخفضة، أو متوسطة، أو مرتفعة، أو مرتفعة جدًا.</a:t>
             </a:r>
           </a:p>
           <a:p>
             <a:pPr rtl="1" algn="r"/>
             <a:r>
               <a:rPr lang="ar-SA" dirty="0"/>
-              <a:t>الدرجة 4 تحتاج شواهد ظاهرة يراها المقيّم: لا تكتفِ بذكر الإجراء، بل نفّذه أمامه (مثل: الطلاب يقيّمون أقرانهم فعلًا بالسلّم).</a:t>
+              <a:t>البنود من 20 إلى 25 تقيس ما يُظهره الطلاب أنفسهم، فاجعل لهم فرصة ظاهرة لإظهاره أمام المقيّم.</a:t>
+            </a:r>
+          </a:p>
+          <a:p>
+            <a:pPr rtl="1" algn="r"/>
+            <a:r>
+              <a:rPr lang="ar-SA" dirty="0"/>
+              <a:t>الدرجة «مرتفعة جدًا» تحتاج شواهد ظاهرة: لا تكتفِ بذكر الإجراء، بل نفّذه أمام المقيّم.</a:t>
             </a:r>
           </a:p>
           <a:p>
@@ -1884,21 +1914,21 @@
             <a:pPr rtl="1" algn="r"/>
             <a:r>
               <a:rPr lang="ar-SA" dirty="0"/>
-              <a:t>البنود السبعة عشر في بطاقة رصد الملاحظة الصفية، وكل بند يُقيَّم من 1 إلى 4، وأمام كل بند الموضع الذي يحققه في هذا القالب.</a:t>
+              <a:t>البنود الخمسة والعشرون في استمارة الملاحظة الصفية بمنصة هيئة تقويم التعليم والتدريب، ويُقدَّر كل بند: متحقق بدرجة منخفضة، أو متوسطة، أو مرتفعة، أو مرتفعة جدًا.</a:t>
             </a:r>
           </a:p>
           <a:p>
             <a:pPr rtl="1" algn="r"/>
             <a:r>
               <a:rPr lang="ar-SA" dirty="0"/>
-              <a:t>الدرجة 4 تحتاج شواهد ظاهرة يراها المقيّم: لا تكتفِ بذكر الإجراء، بل نفّذه أمامه (مثل: الطلاب يقيّمون أقرانهم فعلًا بالسلّم).</a:t>
+              <a:t>البنود من 20 إلى 25 تقيس ما يُظهره الطلاب أنفسهم، فاجعل لهم فرصة ظاهرة لإظهاره أمام المقيّم.</a:t>
             </a:r>
           </a:p>
           <a:p>
             <a:pPr rtl="1" algn="r"/>
             <a:r>
               <a:rPr lang="ar-SA" dirty="0"/>
-              <a:t>نصيحة: لا تحاول حشد كل الإستراتيجيات؛ ثلاث إستراتيجيات متقنة ومترابطة أفضل من سبع شكلية.</a:t>
+              <a:t>الدرجة «مرتفعة جدًا» تحتاج شواهد ظاهرة: لا تكتفِ بذكر الإجراء، بل نفّذه أمام المقيّم.</a:t>
             </a:r>
           </a:p>
         </p:txBody>
@@ -1981,14 +2011,28 @@
             <a:pPr rtl="1" algn="r"/>
             <a:r>
               <a:rPr lang="ar-SA" dirty="0"/>
-              <a:t>أمثلة للاستئناس؛ اختر ما يناسب درسك وطلابك، وطبّقه في الشرائح المقابلة: التهيئة، والنشاط التعاوني، والتقويم.</a:t>
+              <a:t>البنود الخمسة والعشرون في استمارة الملاحظة الصفية بمنصة هيئة تقويم التعليم والتدريب، ويُقدَّر كل بند: متحقق بدرجة منخفضة، أو متوسطة، أو مرتفعة، أو مرتفعة جدًا.</a:t>
             </a:r>
           </a:p>
           <a:p>
             <a:pPr rtl="1" algn="r"/>
             <a:r>
               <a:rPr lang="ar-SA" dirty="0"/>
-              <a:t>للمواد غير المذكورة (التربية البدنية، الفنية، المهارات الحياتية...) اتبع النمط نفسه: موقف محفّز، ثم ممارسة عملية في مجموعات، ثم عرض أو أداء قصير يُقيَّم بمعايير واضحة.</a:t>
+              <a:t>البنود من 20 إلى 25 تقيس ما يُظهره الطلاب أنفسهم، فاجعل لهم فرصة ظاهرة لإظهاره أمام المقيّم.</a:t>
+            </a:r>
+          </a:p>
+          <a:p>
+            <a:pPr rtl="1" algn="r"/>
+            <a:r>
+              <a:rPr lang="ar-SA" dirty="0"/>
+              <a:t>الدرجة «مرتفعة جدًا» تحتاج شواهد ظاهرة: لا تكتفِ بذكر الإجراء، بل نفّذه أمام المقيّم.</a:t>
+            </a:r>
+          </a:p>
+          <a:p>
+            <a:pPr rtl="1" algn="r"/>
+            <a:r>
+              <a:rPr lang="ar-SA" dirty="0"/>
+              <a:t>نصيحة: لا تحاول حشد كل الإستراتيجيات؛ ثلاث إستراتيجيات متقنة ومترابطة أفضل من سبع شكلية.</a:t>
             </a:r>
           </a:p>
         </p:txBody>
@@ -2011,6 +2055,96 @@
             <a:fld id="{F7021451-1387-4CA6-816F-3879F97B5CBC}" type="slidenum">
               <a:rPr lang="en-US"/>
               <a:t>22</a:t>
+            </a:fld>
+            <a:endParaRPr lang="en-US"/>
+          </a:p>
+        </p:txBody>
+      </p:sp>
+    </p:spTree>
+  </p:cSld>
+  <p:clrMapOvr>
+    <a:masterClrMapping/>
+  </p:clrMapOvr>
+</p:notes>
+</file>
+
+<file path=ppt/notesSlides/notesSlide23.xml><?xml version="1.0" encoding="utf-8"?>
+<p:notes xmlns:a="http://schemas.openxmlformats.org/drawingml/2006/main" xmlns:r="http://schemas.openxmlformats.org/officeDocument/2006/relationships" xmlns:p="http://schemas.openxmlformats.org/presentationml/2006/main">
+  <p:cSld>
+    <p:spTree>
+      <p:nvGrpSpPr>
+        <p:cNvPr id="1" name=""/>
+        <p:cNvGrpSpPr/>
+        <p:nvPr/>
+      </p:nvGrpSpPr>
+      <p:grpSpPr>
+        <a:xfrm>
+          <a:off x="0" y="0"/>
+          <a:ext cx="0" cy="0"/>
+          <a:chOff x="0" y="0"/>
+          <a:chExt cx="0" cy="0"/>
+        </a:xfrm>
+      </p:grpSpPr>
+      <p:sp>
+        <p:nvSpPr>
+          <p:cNvPr id="2" name="Slide Image Placeholder 1"/>
+          <p:cNvSpPr>
+            <a:spLocks noGrp="1" noRot="1" noChangeAspect="1"/>
+          </p:cNvSpPr>
+          <p:nvPr>
+            <p:ph type="sldImg"/>
+          </p:nvPr>
+        </p:nvSpPr>
+        <p:spPr/>
+      </p:sp>
+      <p:sp>
+        <p:nvSpPr>
+          <p:cNvPr id="3" name="Notes Placeholder 2"/>
+          <p:cNvSpPr>
+            <a:spLocks noGrp="1"/>
+          </p:cNvSpPr>
+          <p:nvPr>
+            <p:ph type="body" idx="1"/>
+          </p:nvPr>
+        </p:nvSpPr>
+        <p:spPr/>
+        <p:txBody>
+          <a:bodyPr/>
+          <a:lstStyle/>
+          <a:p>
+            <a:pPr rtl="1" algn="r"/>
+            <a:r>
+              <a:rPr lang="ar-SA" dirty="0"/>
+              <a:t>أمثلة للاستئناس؛ اختر ما يناسب درسك وطلابك، وطبّقه في الشرائح المقابلة: التهيئة، والنشاط التعاوني، والتقويم.</a:t>
+            </a:r>
+          </a:p>
+          <a:p>
+            <a:pPr rtl="1" algn="r"/>
+            <a:r>
+              <a:rPr lang="ar-SA" dirty="0"/>
+              <a:t>للمواد غير المذكورة (التربية البدنية، الفنية، المهارات الحياتية...) اتبع النمط نفسه: موقف محفّز، ثم ممارسة عملية في مجموعات، ثم عرض أو أداء قصير يُقيَّم بمعايير واضحة.</a:t>
+            </a:r>
+          </a:p>
+        </p:txBody>
+      </p:sp>
+      <p:sp>
+        <p:nvSpPr>
+          <p:cNvPr id="4" name="Slide Number Placeholder 3"/>
+          <p:cNvSpPr>
+            <a:spLocks noGrp="1"/>
+          </p:cNvSpPr>
+          <p:nvPr>
+            <p:ph type="sldNum" sz="quarter" idx="10"/>
+          </p:nvPr>
+        </p:nvSpPr>
+        <p:spPr/>
+        <p:txBody>
+          <a:bodyPr/>
+          <a:lstStyle/>
+          <a:p>
+            <a:fld id="{F7021451-1387-4CA6-816F-3879F97B5CBC}" type="slidenum">
+              <a:rPr lang="en-US"/>
+              <a:t>23</a:t>
             </a:fld>
             <a:endParaRPr lang="en-US"/>
           </a:p>
@@ -2079,6 +2213,20 @@
             <a:r>
               <a:rPr lang="ar-SA" dirty="0"/>
               <a:t>اتفق على إشارة صمت سريعة (رفع اليد، أو العد التنازلي 3–2–1).</a:t>
+            </a:r>
+          </a:p>
+          <a:p>
+            <a:pPr rtl="1" algn="r"/>
+            <a:r>
+              <a:rPr lang="ar-SA" dirty="0"/>
+              <a:t>«نحافظ على صحتنا» بند مستقل في الاستمارة (الالتزام بالممارسات الصحية): لاحظ الجلسة الصحيحة والتهوية والإضاءة ونظافة المكان، ونبّه إليها بلطف أثناء الحصة.</a:t>
+            </a:r>
+          </a:p>
+          <a:p>
+            <a:pPr rtl="1" algn="r"/>
+            <a:r>
+              <a:rPr lang="ar-SA" dirty="0"/>
+              <a:t>«الخطأ فرصة للتعلم»: احتفِ بالمحاولة لا بالإجابة الصحيحة وحدها؛ هذا يبني مناخًا آمنًا نفسيًا واتجاهات إيجابية نحو الذات (بندا 2 و21).</a:t>
             </a:r>
           </a:p>
           <a:p>
@@ -6902,7 +7050,7 @@
                 <a:latin typeface="IBM Plex Sans Arabic"/>
                 <a:cs typeface="IBM Plex Sans Arabic"/>
               </a:rPr>
-              <a:t>ما علاقة الدرس بحياتنا؟</a:t>
+              <a:t>ما علاقة الدرس بحياتنا وقيمنا؟</a:t>
             </a:r>
             <a:endParaRPr lang="ar-SA" sz="3000" dirty="0"/>
           </a:p>
@@ -6944,14 +7092,51 @@
       </p:sp>
       <p:sp>
         <p:nvSpPr>
-          <p:cNvPr id="6" name="Card 6"/>
+          <p:cNvPr id="6" name="Text 6"/>
+          <p:cNvSpPr txBox="1"/>
+          <p:nvPr/>
+        </p:nvSpPr>
+        <p:spPr>
+          <a:xfrm>
+            <a:off x="758952" y="1965960"/>
+            <a:ext cx="7927848" cy="274320"/>
+          </a:xfrm>
+          <a:prstGeom prst="rect">
+            <a:avLst/>
+          </a:prstGeom>
+          <a:noFill/>
+        </p:spPr>
+        <p:txBody>
+          <a:bodyPr wrap="square" lIns="0" tIns="0" rIns="0" bIns="0" rtlCol="1" anchor="t"/>
+          <a:lstStyle/>
+          <a:p>
+            <a:pPr rtl="1" algn="r" marL="0" indent="0">
+              <a:buNone/>
+            </a:pPr>
+            <a:r>
+              <a:rPr lang="ar-SA" altLang="en-US" sz="1200" dirty="0">
+                <a:solidFill>
+                  <a:srgbClr val="5E7268"/>
+                </a:solidFill>
+                <a:latin typeface="IBM Plex Sans Arabic"/>
+                <a:cs typeface="IBM Plex Sans Arabic"/>
+              </a:rPr>
+              <a:t>يُكمل الطالب كل عبارة بنفسه شفهيًا أو كتابةً:</a:t>
+            </a:r>
+            <a:endParaRPr lang="ar-SA" sz="1200" dirty="0"/>
+          </a:p>
+        </p:txBody>
+      </p:sp>
+      <p:sp>
+        <p:nvSpPr>
+          <p:cNvPr id="7" name="Card 7"/>
           <p:cNvSpPr/>
           <p:nvPr/>
         </p:nvSpPr>
         <p:spPr>
           <a:xfrm>
-            <a:off x="6080760" y="2148840"/>
-            <a:ext cx="2606040" cy="2240280"/>
+            <a:off x="6766560" y="2331720"/>
+            <a:ext cx="1920240" cy="2103120"/>
           </a:xfrm>
           <a:prstGeom prst="roundRect">
             <a:avLst>
@@ -6978,13 +7163,13 @@
       </p:sp>
       <p:sp>
         <p:nvSpPr>
-          <p:cNvPr id="7" name="Circle 7"/>
+          <p:cNvPr id="8" name="Circle 8"/>
           <p:cNvSpPr/>
           <p:nvPr/>
         </p:nvSpPr>
         <p:spPr>
           <a:xfrm>
-            <a:off x="7104888" y="2331720"/>
+            <a:off x="7452360" y="2468880"/>
             <a:ext cx="548640" cy="548640"/>
           </a:xfrm>
           <a:prstGeom prst="ellipse">
@@ -7003,7 +7188,7 @@
       </p:sp>
       <p:pic>
         <p:nvPicPr>
-          <p:cNvPr id="8" name="Image 8" descr="House"/>
+          <p:cNvPr id="9" name="Image 9" descr="House"/>
           <p:cNvPicPr>
             <a:picLocks noChangeAspect="1"/>
           </p:cNvPicPr>
@@ -7017,7 +7202,7 @@
         </p:blipFill>
         <p:spPr>
           <a:xfrm>
-            <a:off x="7223669" y="2450501"/>
+            <a:off x="7571141" y="2587661"/>
             <a:ext cx="311079" cy="311079"/>
           </a:xfrm>
           <a:prstGeom prst="rect">
@@ -7027,14 +7212,14 @@
       </p:pic>
       <p:sp>
         <p:nvSpPr>
-          <p:cNvPr id="9" name="Text 9"/>
+          <p:cNvPr id="10" name="Text 10"/>
           <p:cNvSpPr txBox="1"/>
           <p:nvPr/>
         </p:nvSpPr>
         <p:spPr>
           <a:xfrm>
-            <a:off x="6080760" y="3017520"/>
-            <a:ext cx="2606040" cy="411480"/>
+            <a:off x="6766560" y="3108960"/>
+            <a:ext cx="1920240" cy="365760"/>
           </a:xfrm>
           <a:prstGeom prst="rect">
             <a:avLst/>
@@ -7049,29 +7234,29 @@
               <a:buNone/>
             </a:pPr>
             <a:r>
-              <a:rPr lang="ar-SA" altLang="en-US" sz="1700" b="1" dirty="0">
+              <a:rPr lang="ar-SA" altLang="en-US" sz="1600" b="1" dirty="0">
                 <a:solidFill>
                   <a:srgbClr val="3E6350"/>
                 </a:solidFill>
                 <a:latin typeface="IBM Plex Sans Arabic"/>
                 <a:cs typeface="IBM Plex Sans Arabic"/>
               </a:rPr>
-              <a:t>في حياتي اليومية</a:t>
-            </a:r>
-            <a:endParaRPr lang="ar-SA" sz="1700" dirty="0"/>
-          </a:p>
-        </p:txBody>
-      </p:sp>
-      <p:sp>
-        <p:nvSpPr>
-          <p:cNvPr id="10" name="Text 10"/>
+              <a:t>في حياتي</a:t>
+            </a:r>
+            <a:endParaRPr lang="ar-SA" sz="1600" dirty="0"/>
+          </a:p>
+        </p:txBody>
+      </p:sp>
+      <p:sp>
+        <p:nvSpPr>
+          <p:cNvPr id="11" name="Text 11"/>
           <p:cNvSpPr txBox="1"/>
           <p:nvPr/>
         </p:nvSpPr>
         <p:spPr>
           <a:xfrm>
-            <a:off x="6309360" y="3474720"/>
-            <a:ext cx="2148840" cy="777240"/>
+            <a:off x="6903720" y="3520440"/>
+            <a:ext cx="1645920" cy="777240"/>
           </a:xfrm>
           <a:prstGeom prst="rect">
             <a:avLst/>
@@ -7084,34 +7269,34 @@
           <a:p>
             <a:pPr rtl="1" algn="ctr" marL="0" indent="0">
               <a:lnSpc>
-                <a:spcPct val="105000"/>
+                <a:spcPct val="110000"/>
               </a:lnSpc>
               <a:buNone/>
             </a:pPr>
             <a:r>
-              <a:rPr lang="ar-SA" altLang="en-US" sz="1300" dirty="0">
-                <a:solidFill>
-                  <a:srgbClr val="5E7268"/>
-                </a:solidFill>
-                <a:latin typeface="IBM Plex Sans Arabic"/>
-                <a:cs typeface="IBM Plex Sans Arabic"/>
-              </a:rPr>
-              <a:t>موقف حقيقي يستعمل فيه الطالب ما تعلّمه.</a:t>
-            </a:r>
-            <a:endParaRPr lang="ar-SA" sz="1300" dirty="0"/>
-          </a:p>
-        </p:txBody>
-      </p:sp>
-      <p:sp>
-        <p:nvSpPr>
-          <p:cNvPr id="11" name="Card 11"/>
+              <a:rPr lang="ar-SA" altLang="en-US" sz="1200" dirty="0">
+                <a:solidFill>
+                  <a:srgbClr val="1C3328"/>
+                </a:solidFill>
+                <a:latin typeface="IBM Plex Sans Arabic"/>
+                <a:cs typeface="IBM Plex Sans Arabic"/>
+              </a:rPr>
+              <a:t>أستعمل ما تعلّمته عندما ...</a:t>
+            </a:r>
+            <a:endParaRPr lang="ar-SA" sz="1200" dirty="0"/>
+          </a:p>
+        </p:txBody>
+      </p:sp>
+      <p:sp>
+        <p:nvSpPr>
+          <p:cNvPr id="12" name="Card 12"/>
           <p:cNvSpPr/>
           <p:nvPr/>
         </p:nvSpPr>
         <p:spPr>
           <a:xfrm>
-            <a:off x="3268980" y="2148840"/>
-            <a:ext cx="2606040" cy="2240280"/>
+            <a:off x="4764024" y="2331720"/>
+            <a:ext cx="1920240" cy="2103120"/>
           </a:xfrm>
           <a:prstGeom prst="roundRect">
             <a:avLst>
@@ -7138,13 +7323,13 @@
       </p:sp>
       <p:sp>
         <p:nvSpPr>
-          <p:cNvPr id="12" name="Circle 12"/>
+          <p:cNvPr id="13" name="Circle 13"/>
           <p:cNvSpPr/>
           <p:nvPr/>
         </p:nvSpPr>
         <p:spPr>
           <a:xfrm>
-            <a:off x="4293108" y="2331720"/>
+            <a:off x="5449824" y="2468880"/>
             <a:ext cx="548640" cy="548640"/>
           </a:xfrm>
           <a:prstGeom prst="ellipse">
@@ -7163,7 +7348,7 @@
       </p:sp>
       <p:pic>
         <p:nvPicPr>
-          <p:cNvPr id="13" name="Image 13" descr="Heart"/>
+          <p:cNvPr id="14" name="Image 14" descr="Heart"/>
           <p:cNvPicPr>
             <a:picLocks noChangeAspect="1"/>
           </p:cNvPicPr>
@@ -7177,7 +7362,7 @@
         </p:blipFill>
         <p:spPr>
           <a:xfrm>
-            <a:off x="4411889" y="2450501"/>
+            <a:off x="5568605" y="2587661"/>
             <a:ext cx="311079" cy="311079"/>
           </a:xfrm>
           <a:prstGeom prst="rect">
@@ -7187,14 +7372,14 @@
       </p:pic>
       <p:sp>
         <p:nvSpPr>
-          <p:cNvPr id="14" name="Text 14"/>
+          <p:cNvPr id="15" name="Text 15"/>
           <p:cNvSpPr txBox="1"/>
           <p:nvPr/>
         </p:nvSpPr>
         <p:spPr>
           <a:xfrm>
-            <a:off x="3268980" y="3017520"/>
-            <a:ext cx="2606040" cy="411480"/>
+            <a:off x="4764024" y="3108960"/>
+            <a:ext cx="1920240" cy="365760"/>
           </a:xfrm>
           <a:prstGeom prst="rect">
             <a:avLst/>
@@ -7209,29 +7394,29 @@
               <a:buNone/>
             </a:pPr>
             <a:r>
-              <a:rPr lang="ar-SA" altLang="en-US" sz="1700" b="1" dirty="0">
+              <a:rPr lang="ar-SA" altLang="en-US" sz="1600" b="1" dirty="0">
                 <a:solidFill>
                   <a:srgbClr val="3E6350"/>
                 </a:solidFill>
                 <a:latin typeface="IBM Plex Sans Arabic"/>
                 <a:cs typeface="IBM Plex Sans Arabic"/>
               </a:rPr>
-              <a:t>قيمة نتعلّمها</a:t>
-            </a:r>
-            <a:endParaRPr lang="ar-SA" sz="1700" dirty="0"/>
-          </a:p>
-        </p:txBody>
-      </p:sp>
-      <p:sp>
-        <p:nvSpPr>
-          <p:cNvPr id="15" name="Text 15"/>
+              <a:t>قيمة أعتز بها</a:t>
+            </a:r>
+            <a:endParaRPr lang="ar-SA" sz="1600" dirty="0"/>
+          </a:p>
+        </p:txBody>
+      </p:sp>
+      <p:sp>
+        <p:nvSpPr>
+          <p:cNvPr id="16" name="Text 16"/>
           <p:cNvSpPr txBox="1"/>
           <p:nvPr/>
         </p:nvSpPr>
         <p:spPr>
           <a:xfrm>
-            <a:off x="3497580" y="3474720"/>
-            <a:ext cx="2148840" cy="777240"/>
+            <a:off x="4901184" y="3520440"/>
+            <a:ext cx="1645920" cy="777240"/>
           </a:xfrm>
           <a:prstGeom prst="rect">
             <a:avLst/>
@@ -7244,34 +7429,34 @@
           <a:p>
             <a:pPr rtl="1" algn="ctr" marL="0" indent="0">
               <a:lnSpc>
-                <a:spcPct val="105000"/>
+                <a:spcPct val="110000"/>
               </a:lnSpc>
               <a:buNone/>
             </a:pPr>
             <a:r>
-              <a:rPr lang="ar-SA" altLang="en-US" sz="1300" dirty="0">
-                <a:solidFill>
-                  <a:srgbClr val="5E7268"/>
-                </a:solidFill>
-                <a:latin typeface="IBM Plex Sans Arabic"/>
-                <a:cs typeface="IBM Plex Sans Arabic"/>
-              </a:rPr>
-              <a:t>قيمة أو سلوك يرتبط بالدرس دون تكلّف.</a:t>
-            </a:r>
-            <a:endParaRPr lang="ar-SA" sz="1300" dirty="0"/>
-          </a:p>
-        </p:txBody>
-      </p:sp>
-      <p:sp>
-        <p:nvSpPr>
-          <p:cNvPr id="16" name="Card 16"/>
+              <a:rPr lang="ar-SA" altLang="en-US" sz="1200" dirty="0">
+                <a:solidFill>
+                  <a:srgbClr val="1C3328"/>
+                </a:solidFill>
+                <a:latin typeface="IBM Plex Sans Arabic"/>
+                <a:cs typeface="IBM Plex Sans Arabic"/>
+              </a:rPr>
+              <a:t>من هذا الدرس أعتز بقيمة ...</a:t>
+            </a:r>
+            <a:endParaRPr lang="ar-SA" sz="1200" dirty="0"/>
+          </a:p>
+        </p:txBody>
+      </p:sp>
+      <p:sp>
+        <p:nvSpPr>
+          <p:cNvPr id="17" name="Card 17"/>
           <p:cNvSpPr/>
           <p:nvPr/>
         </p:nvSpPr>
         <p:spPr>
           <a:xfrm>
-            <a:off x="457200" y="2148840"/>
-            <a:ext cx="2606040" cy="2240280"/>
+            <a:off x="2761488" y="2331720"/>
+            <a:ext cx="1920240" cy="2103120"/>
           </a:xfrm>
           <a:prstGeom prst="roundRect">
             <a:avLst>
@@ -7298,13 +7483,13 @@
       </p:sp>
       <p:sp>
         <p:nvSpPr>
-          <p:cNvPr id="17" name="Circle 17"/>
+          <p:cNvPr id="18" name="Circle 18"/>
           <p:cNvSpPr/>
           <p:nvPr/>
         </p:nvSpPr>
         <p:spPr>
           <a:xfrm>
-            <a:off x="1481328" y="2331720"/>
+            <a:off x="3447288" y="2468880"/>
             <a:ext cx="548640" cy="548640"/>
           </a:xfrm>
           <a:prstGeom prst="ellipse">
@@ -7323,7 +7508,7 @@
       </p:sp>
       <p:pic>
         <p:nvPicPr>
-          <p:cNvPr id="18" name="Image 18" descr="Flag"/>
+          <p:cNvPr id="19" name="Image 19" descr="Flag"/>
           <p:cNvPicPr>
             <a:picLocks noChangeAspect="1"/>
           </p:cNvPicPr>
@@ -7337,7 +7522,7 @@
         </p:blipFill>
         <p:spPr>
           <a:xfrm>
-            <a:off x="1600109" y="2450501"/>
+            <a:off x="3566069" y="2587661"/>
             <a:ext cx="311079" cy="311079"/>
           </a:xfrm>
           <a:prstGeom prst="rect">
@@ -7347,14 +7532,14 @@
       </p:pic>
       <p:sp>
         <p:nvSpPr>
-          <p:cNvPr id="19" name="Text 19"/>
+          <p:cNvPr id="20" name="Text 20"/>
           <p:cNvSpPr txBox="1"/>
           <p:nvPr/>
         </p:nvSpPr>
         <p:spPr>
           <a:xfrm>
-            <a:off x="457200" y="3017520"/>
-            <a:ext cx="2606040" cy="411480"/>
+            <a:off x="2761488" y="3108960"/>
+            <a:ext cx="1920240" cy="365760"/>
           </a:xfrm>
           <a:prstGeom prst="rect">
             <a:avLst/>
@@ -7369,29 +7554,29 @@
               <a:buNone/>
             </a:pPr>
             <a:r>
-              <a:rPr lang="ar-SA" altLang="en-US" sz="1700" b="1" dirty="0">
+              <a:rPr lang="ar-SA" altLang="en-US" sz="1600" b="1" dirty="0">
                 <a:solidFill>
                   <a:srgbClr val="3E6350"/>
                 </a:solidFill>
                 <a:latin typeface="IBM Plex Sans Arabic"/>
                 <a:cs typeface="IBM Plex Sans Arabic"/>
               </a:rPr>
-              <a:t>وطني ومستقبلي</a:t>
-            </a:r>
-            <a:endParaRPr lang="ar-SA" sz="1700" dirty="0"/>
-          </a:p>
-        </p:txBody>
-      </p:sp>
-      <p:sp>
-        <p:nvSpPr>
-          <p:cNvPr id="20" name="Text 20"/>
+              <a:t>وطني</a:t>
+            </a:r>
+            <a:endParaRPr lang="ar-SA" sz="1600" dirty="0"/>
+          </a:p>
+        </p:txBody>
+      </p:sp>
+      <p:sp>
+        <p:nvSpPr>
+          <p:cNvPr id="21" name="Text 21"/>
           <p:cNvSpPr txBox="1"/>
           <p:nvPr/>
         </p:nvSpPr>
         <p:spPr>
           <a:xfrm>
-            <a:off x="685800" y="3474720"/>
-            <a:ext cx="2148840" cy="777240"/>
+            <a:off x="2898648" y="3520440"/>
+            <a:ext cx="1645920" cy="777240"/>
           </a:xfrm>
           <a:prstGeom prst="rect">
             <a:avLst/>
@@ -7404,21 +7589,181 @@
           <a:p>
             <a:pPr rtl="1" algn="ctr" marL="0" indent="0">
               <a:lnSpc>
-                <a:spcPct val="105000"/>
+                <a:spcPct val="110000"/>
               </a:lnSpc>
               <a:buNone/>
             </a:pPr>
             <a:r>
-              <a:rPr lang="ar-SA" altLang="en-US" sz="1300" dirty="0">
-                <a:solidFill>
-                  <a:srgbClr val="5E7268"/>
-                </a:solidFill>
-                <a:latin typeface="IBM Plex Sans Arabic"/>
-                <a:cs typeface="IBM Plex Sans Arabic"/>
-              </a:rPr>
-              <a:t>ارتباط بمهنة أو مشروع وطني أو مستهدف من رؤية 2030.</a:t>
-            </a:r>
-            <a:endParaRPr lang="ar-SA" sz="1300" dirty="0"/>
+              <a:rPr lang="ar-SA" altLang="en-US" sz="1200" dirty="0">
+                <a:solidFill>
+                  <a:srgbClr val="1C3328"/>
+                </a:solidFill>
+                <a:latin typeface="IBM Plex Sans Arabic"/>
+                <a:cs typeface="IBM Plex Sans Arabic"/>
+              </a:rPr>
+              <a:t>إنجاز أو موروث وطني يرتبط بالدرس ...</a:t>
+            </a:r>
+            <a:endParaRPr lang="ar-SA" sz="1200" dirty="0"/>
+          </a:p>
+        </p:txBody>
+      </p:sp>
+      <p:sp>
+        <p:nvSpPr>
+          <p:cNvPr id="22" name="Card 22"/>
+          <p:cNvSpPr/>
+          <p:nvPr/>
+        </p:nvSpPr>
+        <p:spPr>
+          <a:xfrm>
+            <a:off x="758952" y="2331720"/>
+            <a:ext cx="1920240" cy="2103120"/>
+          </a:xfrm>
+          <a:prstGeom prst="roundRect">
+            <a:avLst>
+              <a:gd name="adj" fmla="val 6000"/>
+            </a:avLst>
+          </a:prstGeom>
+          <a:solidFill>
+            <a:srgbClr val="EDFAF2"/>
+          </a:solidFill>
+          <a:ln w="12700">
+            <a:solidFill>
+              <a:srgbClr val="D5E7DC"/>
+            </a:solidFill>
+            <a:prstDash val="solid"/>
+          </a:ln>
+          <a:effectLst>
+            <a:outerShdw blurRad="127000" dist="38100" dir="5400000" algn="bl" rotWithShape="0">
+              <a:srgbClr val="3E6350">
+                <a:alpha val="12000"/>
+              </a:srgbClr>
+            </a:outerShdw>
+          </a:effectLst>
+        </p:spPr>
+      </p:sp>
+      <p:sp>
+        <p:nvSpPr>
+          <p:cNvPr id="23" name="Circle 23"/>
+          <p:cNvSpPr/>
+          <p:nvPr/>
+        </p:nvSpPr>
+        <p:spPr>
+          <a:xfrm>
+            <a:off x="1444752" y="2468880"/>
+            <a:ext cx="548640" cy="548640"/>
+          </a:xfrm>
+          <a:prstGeom prst="ellipse">
+            <a:avLst/>
+          </a:prstGeom>
+          <a:solidFill>
+            <a:srgbClr val="89D7AD"/>
+          </a:solidFill>
+          <a:ln w="12700">
+            <a:solidFill>
+              <a:srgbClr val="89D7AD"/>
+            </a:solidFill>
+            <a:prstDash val="solid"/>
+          </a:ln>
+        </p:spPr>
+      </p:sp>
+      <p:pic>
+        <p:nvPicPr>
+          <p:cNvPr id="24" name="Image 24" descr="Globe"/>
+          <p:cNvPicPr>
+            <a:picLocks noChangeAspect="1"/>
+          </p:cNvPicPr>
+          <p:nvPr/>
+        </p:nvPicPr>
+        <p:blipFill>
+          <a:blip r:embed="rId4"/>
+          <a:stretch>
+            <a:fillRect/>
+          </a:stretch>
+        </p:blipFill>
+        <p:spPr>
+          <a:xfrm>
+            <a:off x="1563533" y="2587661"/>
+            <a:ext cx="311079" cy="311079"/>
+          </a:xfrm>
+          <a:prstGeom prst="rect">
+            <a:avLst/>
+          </a:prstGeom>
+        </p:spPr>
+      </p:pic>
+      <p:sp>
+        <p:nvSpPr>
+          <p:cNvPr id="25" name="Text 25"/>
+          <p:cNvSpPr txBox="1"/>
+          <p:nvPr/>
+        </p:nvSpPr>
+        <p:spPr>
+          <a:xfrm>
+            <a:off x="758952" y="3108960"/>
+            <a:ext cx="1920240" cy="365760"/>
+          </a:xfrm>
+          <a:prstGeom prst="rect">
+            <a:avLst/>
+          </a:prstGeom>
+          <a:noFill/>
+        </p:spPr>
+        <p:txBody>
+          <a:bodyPr wrap="square" lIns="0" tIns="0" rIns="0" bIns="0" rtlCol="1" anchor="t"/>
+          <a:lstStyle/>
+          <a:p>
+            <a:pPr rtl="1" algn="ctr" marL="0" indent="0">
+              <a:buNone/>
+            </a:pPr>
+            <a:r>
+              <a:rPr lang="ar-SA" altLang="en-US" sz="1600" b="1" dirty="0">
+                <a:solidFill>
+                  <a:srgbClr val="3E6350"/>
+                </a:solidFill>
+                <a:latin typeface="IBM Plex Sans Arabic"/>
+                <a:cs typeface="IBM Plex Sans Arabic"/>
+              </a:rPr>
+              <a:t>ثقافات العالم</a:t>
+            </a:r>
+            <a:endParaRPr lang="ar-SA" sz="1600" dirty="0"/>
+          </a:p>
+        </p:txBody>
+      </p:sp>
+      <p:sp>
+        <p:nvSpPr>
+          <p:cNvPr id="26" name="Text 26"/>
+          <p:cNvSpPr txBox="1"/>
+          <p:nvPr/>
+        </p:nvSpPr>
+        <p:spPr>
+          <a:xfrm>
+            <a:off x="896112" y="3520440"/>
+            <a:ext cx="1645920" cy="777240"/>
+          </a:xfrm>
+          <a:prstGeom prst="rect">
+            <a:avLst/>
+          </a:prstGeom>
+          <a:noFill/>
+        </p:spPr>
+        <p:txBody>
+          <a:bodyPr wrap="square" lIns="0" tIns="0" rIns="0" bIns="0" rtlCol="1" anchor="t"/>
+          <a:lstStyle/>
+          <a:p>
+            <a:pPr rtl="1" algn="ctr" marL="0" indent="0">
+              <a:lnSpc>
+                <a:spcPct val="110000"/>
+              </a:lnSpc>
+              <a:buNone/>
+            </a:pPr>
+            <a:r>
+              <a:rPr lang="ar-SA" altLang="en-US" sz="1200" dirty="0">
+                <a:solidFill>
+                  <a:srgbClr val="1C3328"/>
+                </a:solidFill>
+                <a:latin typeface="IBM Plex Sans Arabic"/>
+                <a:cs typeface="IBM Plex Sans Arabic"/>
+              </a:rPr>
+              <a:t>كيف يُرى هذا في ثقافات أخرى؟ وماذا نتعلّم منها؟</a:t>
+            </a:r>
+            <a:endParaRPr lang="ar-SA" sz="1200" dirty="0"/>
           </a:p>
         </p:txBody>
       </p:sp>
@@ -7679,7 +8024,7 @@
         <p:spPr>
           <a:xfrm>
             <a:off x="6766560" y="2103120"/>
-            <a:ext cx="1920240" cy="2331720"/>
+            <a:ext cx="1920240" cy="1828800"/>
           </a:xfrm>
           <a:prstGeom prst="roundRect">
             <a:avLst>
@@ -7835,8 +8180,8 @@
         </p:nvSpPr>
         <p:spPr>
           <a:xfrm>
-            <a:off x="6903720" y="2926080"/>
-            <a:ext cx="1645920" cy="1005840"/>
+            <a:off x="6903720" y="2880360"/>
+            <a:ext cx="1645920" cy="731520"/>
           </a:xfrm>
           <a:prstGeom prst="rect">
             <a:avLst/>
@@ -7849,7 +8194,7 @@
           <a:p>
             <a:pPr rtl="1" algn="r" marL="0" indent="0">
               <a:lnSpc>
-                <a:spcPct val="110000"/>
+                <a:spcPct val="105000"/>
               </a:lnSpc>
               <a:buNone/>
             </a:pPr>
@@ -7876,7 +8221,7 @@
         <p:spPr>
           <a:xfrm>
             <a:off x="4764024" y="2103120"/>
-            <a:ext cx="1920240" cy="2331720"/>
+            <a:ext cx="1920240" cy="1828800"/>
           </a:xfrm>
           <a:prstGeom prst="roundRect">
             <a:avLst>
@@ -8032,8 +8377,8 @@
         </p:nvSpPr>
         <p:spPr>
           <a:xfrm>
-            <a:off x="4901184" y="2926080"/>
-            <a:ext cx="1645920" cy="1005840"/>
+            <a:off x="4901184" y="2880360"/>
+            <a:ext cx="1645920" cy="731520"/>
           </a:xfrm>
           <a:prstGeom prst="rect">
             <a:avLst/>
@@ -8046,7 +8391,7 @@
           <a:p>
             <a:pPr rtl="1" algn="r" marL="0" indent="0">
               <a:lnSpc>
-                <a:spcPct val="110000"/>
+                <a:spcPct val="105000"/>
               </a:lnSpc>
               <a:buNone/>
             </a:pPr>
@@ -8072,7 +8417,7 @@
         </p:nvSpPr>
         <p:spPr>
           <a:xfrm>
-            <a:off x="4901184" y="4041648"/>
+            <a:off x="4901184" y="3611880"/>
             <a:ext cx="1645920" cy="274320"/>
           </a:xfrm>
           <a:prstGeom prst="rect">
@@ -8110,7 +8455,7 @@
         <p:spPr>
           <a:xfrm>
             <a:off x="2761488" y="2103120"/>
-            <a:ext cx="1920240" cy="2331720"/>
+            <a:ext cx="1920240" cy="1828800"/>
           </a:xfrm>
           <a:prstGeom prst="roundRect">
             <a:avLst>
@@ -8266,8 +8611,8 @@
         </p:nvSpPr>
         <p:spPr>
           <a:xfrm>
-            <a:off x="2898648" y="2926080"/>
-            <a:ext cx="1645920" cy="1005840"/>
+            <a:off x="2898648" y="2880360"/>
+            <a:ext cx="1645920" cy="731520"/>
           </a:xfrm>
           <a:prstGeom prst="rect">
             <a:avLst/>
@@ -8280,7 +8625,7 @@
           <a:p>
             <a:pPr rtl="1" algn="r" marL="0" indent="0">
               <a:lnSpc>
-                <a:spcPct val="110000"/>
+                <a:spcPct val="105000"/>
               </a:lnSpc>
               <a:buNone/>
             </a:pPr>
@@ -8306,7 +8651,7 @@
         </p:nvSpPr>
         <p:spPr>
           <a:xfrm>
-            <a:off x="2898648" y="4041648"/>
+            <a:off x="2898648" y="3611880"/>
             <a:ext cx="1645920" cy="274320"/>
           </a:xfrm>
           <a:prstGeom prst="rect">
@@ -8344,7 +8689,7 @@
         <p:spPr>
           <a:xfrm>
             <a:off x="758952" y="2103120"/>
-            <a:ext cx="1920240" cy="2331720"/>
+            <a:ext cx="1920240" cy="1828800"/>
           </a:xfrm>
           <a:prstGeom prst="roundRect">
             <a:avLst>
@@ -8500,8 +8845,8 @@
         </p:nvSpPr>
         <p:spPr>
           <a:xfrm>
-            <a:off x="896112" y="2926080"/>
-            <a:ext cx="1645920" cy="1005840"/>
+            <a:off x="896112" y="2880360"/>
+            <a:ext cx="1645920" cy="731520"/>
           </a:xfrm>
           <a:prstGeom prst="rect">
             <a:avLst/>
@@ -8514,7 +8859,7 @@
           <a:p>
             <a:pPr rtl="1" algn="r" marL="0" indent="0">
               <a:lnSpc>
-                <a:spcPct val="110000"/>
+                <a:spcPct val="105000"/>
               </a:lnSpc>
               <a:buNone/>
             </a:pPr>
@@ -8540,7 +8885,7 @@
         </p:nvSpPr>
         <p:spPr>
           <a:xfrm>
-            <a:off x="896112" y="4041648"/>
+            <a:off x="896112" y="3611880"/>
             <a:ext cx="1645920" cy="274320"/>
           </a:xfrm>
           <a:prstGeom prst="rect">
@@ -8566,6 +8911,111 @@
               <a:t>★★★</a:t>
             </a:r>
             <a:endParaRPr lang="ar-SA" sz="1400" dirty="0"/>
+          </a:p>
+        </p:txBody>
+      </p:sp>
+      <p:sp>
+        <p:nvSpPr>
+          <p:cNvPr id="36" name="Card 36"/>
+          <p:cNvSpPr/>
+          <p:nvPr/>
+        </p:nvSpPr>
+        <p:spPr>
+          <a:xfrm>
+            <a:off x="758952" y="4041648"/>
+            <a:ext cx="7927848" cy="438912"/>
+          </a:xfrm>
+          <a:prstGeom prst="roundRect">
+            <a:avLst>
+              <a:gd name="adj" fmla="val 20000"/>
+            </a:avLst>
+          </a:prstGeom>
+          <a:solidFill>
+            <a:srgbClr val="EDFAF2"/>
+          </a:solidFill>
+          <a:ln w="12700">
+            <a:solidFill>
+              <a:srgbClr val="D5E7DC"/>
+            </a:solidFill>
+            <a:prstDash val="solid"/>
+          </a:ln>
+          <a:effectLst>
+            <a:outerShdw blurRad="127000" dist="38100" dir="5400000" algn="bl" rotWithShape="0">
+              <a:srgbClr val="3E6350">
+                <a:alpha val="12000"/>
+              </a:srgbClr>
+            </a:outerShdw>
+          </a:effectLst>
+        </p:spPr>
+      </p:sp>
+      <p:pic>
+        <p:nvPicPr>
+          <p:cNvPr id="37" name="Image 37" descr="انطلاق"/>
+          <p:cNvPicPr>
+            <a:picLocks noChangeAspect="1"/>
+          </p:cNvPicPr>
+          <p:nvPr/>
+        </p:nvPicPr>
+        <p:blipFill>
+          <a:blip r:embed="rId6"/>
+          <a:stretch>
+            <a:fillRect/>
+          </a:stretch>
+        </p:blipFill>
+        <p:spPr>
+          <a:xfrm>
+            <a:off x="8229600" y="4123944"/>
+            <a:ext cx="274320" cy="274320"/>
+          </a:xfrm>
+          <a:prstGeom prst="rect">
+            <a:avLst/>
+          </a:prstGeom>
+        </p:spPr>
+      </p:pic>
+      <p:sp>
+        <p:nvSpPr>
+          <p:cNvPr id="38" name="Text 38"/>
+          <p:cNvSpPr txBox="1"/>
+          <p:nvPr/>
+        </p:nvSpPr>
+        <p:spPr>
+          <a:xfrm>
+            <a:off x="960120" y="4041648"/>
+            <a:ext cx="7178040" cy="438912"/>
+          </a:xfrm>
+          <a:prstGeom prst="rect">
+            <a:avLst/>
+          </a:prstGeom>
+          <a:noFill/>
+        </p:spPr>
+        <p:txBody>
+          <a:bodyPr wrap="square" lIns="0" tIns="0" rIns="0" bIns="0" rtlCol="1" anchor="ctr"/>
+          <a:lstStyle/>
+          <a:p>
+            <a:pPr rtl="1" algn="r" marL="0" indent="0">
+              <a:buNone/>
+            </a:pPr>
+            <a:r>
+              <a:rPr lang="ar-SA" altLang="en-US" sz="1300" b="1" dirty="0">
+                <a:solidFill>
+                  <a:srgbClr val="3E6350"/>
+                </a:solidFill>
+                <a:latin typeface="IBM Plex Sans Arabic"/>
+                <a:cs typeface="IBM Plex Sans Arabic"/>
+              </a:rPr>
+              <a:t>أنهيت مهمتك؟ أكمل وحدك: </a:t>
+            </a:r>
+            <a:r>
+              <a:rPr lang="ar-SA" altLang="en-US" sz="1200" dirty="0">
+                <a:solidFill>
+                  <a:srgbClr val="1C3328"/>
+                </a:solidFill>
+                <a:latin typeface="IBM Plex Sans Arabic"/>
+                <a:cs typeface="IBM Plex Sans Arabic"/>
+              </a:rPr>
+              <a:t>انتقل إلى المستوى التالي، أو تعلّم ذاتيًا من مصدر الإثراء.</a:t>
+            </a:r>
+            <a:endParaRPr lang="ar-SA" sz="1200" dirty="0"/>
           </a:p>
         </p:txBody>
       </p:sp>
@@ -9717,7 +10167,7 @@
           <a:p>
             <a:pPr rtl="1" algn="r" marL="285750" indent="-285750">
               <a:spcAft>
-                <a:spcPts val="800"/>
+                <a:spcPts val="600"/>
               </a:spcAft>
               <a:buSzPct val="100000"/>
               <a:buChar char="•"/>
@@ -9737,7 +10187,7 @@
           <a:p>
             <a:pPr rtl="1" algn="r" marL="285750" indent="-285750">
               <a:spcAft>
-                <a:spcPts val="800"/>
+                <a:spcPts val="600"/>
               </a:spcAft>
               <a:buSzPct val="100000"/>
               <a:buChar char="•"/>
@@ -9757,7 +10207,7 @@
           <a:p>
             <a:pPr rtl="1" algn="r" marL="285750" indent="-285750">
               <a:spcAft>
-                <a:spcPts val="800"/>
+                <a:spcPts val="600"/>
               </a:spcAft>
               <a:buSzPct val="100000"/>
               <a:buChar char="•"/>
@@ -9771,6 +10221,26 @@
                 <a:cs typeface="IBM Plex Sans Arabic"/>
               </a:rPr>
               <a:t>نربطها بأهداف الحصة.</a:t>
+            </a:r>
+            <a:endParaRPr lang="ar-SA" sz="1400" dirty="0"/>
+          </a:p>
+          <a:p>
+            <a:pPr rtl="1" algn="r" marL="285750" indent="-285750">
+              <a:spcAft>
+                <a:spcPts val="600"/>
+              </a:spcAft>
+              <a:buSzPct val="100000"/>
+              <a:buChar char="•"/>
+            </a:pPr>
+            <a:r>
+              <a:rPr lang="ar-SA" altLang="en-US" sz="1400" dirty="0">
+                <a:solidFill>
+                  <a:srgbClr val="1C3328"/>
+                </a:solidFill>
+                <a:latin typeface="IBM Plex Sans Arabic"/>
+                <a:cs typeface="IBM Plex Sans Arabic"/>
+              </a:rPr>
+              <a:t>أفخر اليوم بأنني ...</a:t>
             </a:r>
             <a:endParaRPr lang="ar-SA" sz="1400" dirty="0"/>
           </a:p>
@@ -10652,7 +11122,7 @@
                 <a:latin typeface="IBM Plex Sans Arabic"/>
                 <a:cs typeface="IBM Plex Sans Arabic"/>
               </a:rPr>
-              <a:t>مصدر أو تحدٍّ لمن يريد التوسع.</a:t>
+              <a:t>مصدر للتعلم الذاتي أو تحدٍّ للتوسع.</a:t>
             </a:r>
             <a:endParaRPr lang="ar-SA" sz="1200" dirty="0"/>
           </a:p>
@@ -12595,7 +13065,7 @@
                 <a:latin typeface="IBM Plex Sans Arabic"/>
                 <a:cs typeface="IBM Plex Sans Arabic"/>
               </a:rPr>
-              <a:t>استمارة الهيئة</a:t>
+              <a:t>منصة الهيئة</a:t>
             </a:r>
             <a:endParaRPr lang="ar-SA" sz="1200" dirty="0"/>
           </a:p>
@@ -12632,7 +13102,7 @@
                 <a:latin typeface="IBM Plex Sans Arabic"/>
                 <a:cs typeface="IBM Plex Sans Arabic"/>
               </a:rPr>
-              <a:t>بنود الملاحظة الصفية (1 من 2)</a:t>
+              <a:t>بنود الملاحظة الصفية (1 من 3)</a:t>
             </a:r>
             <a:endParaRPr lang="ar-SA" sz="3000" dirty="0"/>
           </a:p>
@@ -12689,8 +13159,8 @@
             <a:tbl>
               <a:tblPr rtl="1" firstRow="1" bandRow="1"/>
               <a:tblGrid>
-                <a:gridCol w="4160520"/>
-                <a:gridCol w="3657600"/>
+                <a:gridCol w="4023360"/>
+                <a:gridCol w="3794760"/>
                 <a:gridCol w="411480"/>
               </a:tblGrid>
               <a:tr h="242316">
@@ -12842,7 +13312,7 @@
                           <a:latin typeface="IBM Plex Sans Arabic"/>
                           <a:cs typeface="IBM Plex Sans Arabic"/>
                         </a:rPr>
-                        <a:t>التهيئة (مصادر حسية)، والمسارات الأربعة</a:t>
+                        <a:t>قيمة أعتز بها، ووطني</a:t>
                       </a:r>
                     </a:p>
                   </a:txBody>
@@ -12886,7 +13356,7 @@
                           <a:latin typeface="IBM Plex Sans Arabic"/>
                           <a:cs typeface="IBM Plex Sans Arabic"/>
                         </a:rPr>
-                        <a:t>مصادر وأنشطة متنوعة تلبي ذوي الإعاقة والموهوبين</a:t>
+                        <a:t>تعزيز القيم الإسلامية والهوية الوطنية</a:t>
                       </a:r>
                     </a:p>
                   </a:txBody>
@@ -12976,7 +13446,7 @@
                           <a:latin typeface="IBM Plex Sans Arabic"/>
                           <a:cs typeface="IBM Plex Sans Arabic"/>
                         </a:rPr>
-                        <a:t>خريطة الحصة، وشارة الزمن في كل مرحلة</a:t>
+                        <a:t>الاتفاقات، و«الخطأ فرصة للتعلم»</a:t>
                       </a:r>
                     </a:p>
                   </a:txBody>
@@ -13020,7 +13490,7 @@
                           <a:latin typeface="IBM Plex Sans Arabic"/>
                           <a:cs typeface="IBM Plex Sans Arabic"/>
                         </a:rPr>
-                        <a:t>إدارة الوقت بفاعلية ومرونة</a:t>
+                        <a:t>مناخ آمن للتعلم نفسيًا واجتماعيًا</a:t>
                       </a:r>
                     </a:p>
                   </a:txBody>
@@ -13065,6 +13535,274 @@
                           <a:cs typeface="IBM Plex Sans Arabic"/>
                         </a:rPr>
                         <a:t>2</a:t>
+                      </a:r>
+                    </a:p>
+                  </a:txBody>
+                  <a:tcPr marL="73152" marR="73152" marT="27432" marB="27432" anchor="ctr">
+                    <a:lnL w="9525">
+                      <a:solidFill>
+                        <a:srgbClr val="D5E7DC"/>
+                      </a:solidFill>
+                    </a:lnL>
+                    <a:lnR w="9525">
+                      <a:solidFill>
+                        <a:srgbClr val="D5E7DC"/>
+                      </a:solidFill>
+                    </a:lnR>
+                    <a:lnT w="9525">
+                      <a:solidFill>
+                        <a:srgbClr val="D5E7DC"/>
+                      </a:solidFill>
+                    </a:lnT>
+                    <a:lnB w="9525">
+                      <a:solidFill>
+                        <a:srgbClr val="D5E7DC"/>
+                      </a:solidFill>
+                    </a:lnB>
+                    <a:solidFill>
+                      <a:srgbClr val="F6FBF8"/>
+                    </a:solidFill>
+                  </a:tcPr>
+                </a:tc>
+              </a:tr>
+              <a:tr h="242316">
+                <a:tc>
+                  <a:txBody>
+                    <a:bodyPr/>
+                    <a:lstStyle/>
+                    <a:p>
+                      <a:pPr rtl="1" algn="r"/>
+                      <a:r>
+                        <a:rPr lang="ar-SA" altLang="en-US" sz="1000" dirty="0">
+                          <a:solidFill>
+                            <a:srgbClr val="1C3328"/>
+                          </a:solidFill>
+                          <a:latin typeface="IBM Plex Sans Arabic"/>
+                          <a:cs typeface="IBM Plex Sans Arabic"/>
+                        </a:rPr>
+                        <a:t>مصادر حسية، و«ادعمني» و«تحدَّ»</a:t>
+                      </a:r>
+                    </a:p>
+                  </a:txBody>
+                  <a:tcPr marL="73152" marR="73152" marT="27432" marB="27432" anchor="ctr">
+                    <a:lnL w="9525">
+                      <a:solidFill>
+                        <a:srgbClr val="D5E7DC"/>
+                      </a:solidFill>
+                    </a:lnL>
+                    <a:lnR w="9525">
+                      <a:solidFill>
+                        <a:srgbClr val="D5E7DC"/>
+                      </a:solidFill>
+                    </a:lnR>
+                    <a:lnT w="9525">
+                      <a:solidFill>
+                        <a:srgbClr val="D5E7DC"/>
+                      </a:solidFill>
+                    </a:lnT>
+                    <a:lnB w="9525">
+                      <a:solidFill>
+                        <a:srgbClr val="D5E7DC"/>
+                      </a:solidFill>
+                    </a:lnB>
+                    <a:solidFill>
+                      <a:srgbClr val="FFFFFF"/>
+                    </a:solidFill>
+                  </a:tcPr>
+                </a:tc>
+                <a:tc>
+                  <a:txBody>
+                    <a:bodyPr/>
+                    <a:lstStyle/>
+                    <a:p>
+                      <a:pPr rtl="1" algn="r"/>
+                      <a:r>
+                        <a:rPr lang="ar-SA" altLang="en-US" sz="1000" dirty="0">
+                          <a:solidFill>
+                            <a:srgbClr val="1C3328"/>
+                          </a:solidFill>
+                          <a:latin typeface="IBM Plex Sans Arabic"/>
+                          <a:cs typeface="IBM Plex Sans Arabic"/>
+                        </a:rPr>
+                        <a:t>مصادر وأنشطة متنوعة لذوي الإعاقة والموهوبين</a:t>
+                      </a:r>
+                    </a:p>
+                  </a:txBody>
+                  <a:tcPr marL="73152" marR="73152" marT="27432" marB="27432" anchor="ctr">
+                    <a:lnL w="9525">
+                      <a:solidFill>
+                        <a:srgbClr val="D5E7DC"/>
+                      </a:solidFill>
+                    </a:lnL>
+                    <a:lnR w="9525">
+                      <a:solidFill>
+                        <a:srgbClr val="D5E7DC"/>
+                      </a:solidFill>
+                    </a:lnR>
+                    <a:lnT w="9525">
+                      <a:solidFill>
+                        <a:srgbClr val="D5E7DC"/>
+                      </a:solidFill>
+                    </a:lnT>
+                    <a:lnB w="9525">
+                      <a:solidFill>
+                        <a:srgbClr val="D5E7DC"/>
+                      </a:solidFill>
+                    </a:lnB>
+                    <a:solidFill>
+                      <a:srgbClr val="FFFFFF"/>
+                    </a:solidFill>
+                  </a:tcPr>
+                </a:tc>
+                <a:tc>
+                  <a:txBody>
+                    <a:bodyPr/>
+                    <a:lstStyle/>
+                    <a:p>
+                      <a:pPr rtl="1" algn="r"/>
+                      <a:r>
+                        <a:rPr lang="ar-SA" altLang="en-US" sz="1000" b="1" dirty="0">
+                          <a:solidFill>
+                            <a:srgbClr val="3E6350"/>
+                          </a:solidFill>
+                          <a:latin typeface="IBM Plex Sans Arabic"/>
+                          <a:cs typeface="IBM Plex Sans Arabic"/>
+                        </a:rPr>
+                        <a:t>3</a:t>
+                      </a:r>
+                    </a:p>
+                  </a:txBody>
+                  <a:tcPr marL="73152" marR="73152" marT="27432" marB="27432" anchor="ctr">
+                    <a:lnL w="9525">
+                      <a:solidFill>
+                        <a:srgbClr val="D5E7DC"/>
+                      </a:solidFill>
+                    </a:lnL>
+                    <a:lnR w="9525">
+                      <a:solidFill>
+                        <a:srgbClr val="D5E7DC"/>
+                      </a:solidFill>
+                    </a:lnR>
+                    <a:lnT w="9525">
+                      <a:solidFill>
+                        <a:srgbClr val="D5E7DC"/>
+                      </a:solidFill>
+                    </a:lnT>
+                    <a:lnB w="9525">
+                      <a:solidFill>
+                        <a:srgbClr val="D5E7DC"/>
+                      </a:solidFill>
+                    </a:lnB>
+                    <a:solidFill>
+                      <a:srgbClr val="FFFFFF"/>
+                    </a:solidFill>
+                  </a:tcPr>
+                </a:tc>
+              </a:tr>
+              <a:tr h="242316">
+                <a:tc>
+                  <a:txBody>
+                    <a:bodyPr/>
+                    <a:lstStyle/>
+                    <a:p>
+                      <a:pPr rtl="1" algn="r"/>
+                      <a:r>
+                        <a:rPr lang="ar-SA" altLang="en-US" sz="1000" dirty="0">
+                          <a:solidFill>
+                            <a:srgbClr val="1C3328"/>
+                          </a:solidFill>
+                          <a:latin typeface="IBM Plex Sans Arabic"/>
+                          <a:cs typeface="IBM Plex Sans Arabic"/>
+                        </a:rPr>
+                        <a:t>خريطة الحصة، وشارة الزمن</a:t>
+                      </a:r>
+                    </a:p>
+                  </a:txBody>
+                  <a:tcPr marL="73152" marR="73152" marT="27432" marB="27432" anchor="ctr">
+                    <a:lnL w="9525">
+                      <a:solidFill>
+                        <a:srgbClr val="D5E7DC"/>
+                      </a:solidFill>
+                    </a:lnL>
+                    <a:lnR w="9525">
+                      <a:solidFill>
+                        <a:srgbClr val="D5E7DC"/>
+                      </a:solidFill>
+                    </a:lnR>
+                    <a:lnT w="9525">
+                      <a:solidFill>
+                        <a:srgbClr val="D5E7DC"/>
+                      </a:solidFill>
+                    </a:lnT>
+                    <a:lnB w="9525">
+                      <a:solidFill>
+                        <a:srgbClr val="D5E7DC"/>
+                      </a:solidFill>
+                    </a:lnB>
+                    <a:solidFill>
+                      <a:srgbClr val="F6FBF8"/>
+                    </a:solidFill>
+                  </a:tcPr>
+                </a:tc>
+                <a:tc>
+                  <a:txBody>
+                    <a:bodyPr/>
+                    <a:lstStyle/>
+                    <a:p>
+                      <a:pPr rtl="1" algn="r"/>
+                      <a:r>
+                        <a:rPr lang="ar-SA" altLang="en-US" sz="1000" dirty="0">
+                          <a:solidFill>
+                            <a:srgbClr val="1C3328"/>
+                          </a:solidFill>
+                          <a:latin typeface="IBM Plex Sans Arabic"/>
+                          <a:cs typeface="IBM Plex Sans Arabic"/>
+                        </a:rPr>
+                        <a:t>إدارة الوقت بفاعلية</a:t>
+                      </a:r>
+                    </a:p>
+                  </a:txBody>
+                  <a:tcPr marL="73152" marR="73152" marT="27432" marB="27432" anchor="ctr">
+                    <a:lnL w="9525">
+                      <a:solidFill>
+                        <a:srgbClr val="D5E7DC"/>
+                      </a:solidFill>
+                    </a:lnL>
+                    <a:lnR w="9525">
+                      <a:solidFill>
+                        <a:srgbClr val="D5E7DC"/>
+                      </a:solidFill>
+                    </a:lnR>
+                    <a:lnT w="9525">
+                      <a:solidFill>
+                        <a:srgbClr val="D5E7DC"/>
+                      </a:solidFill>
+                    </a:lnT>
+                    <a:lnB w="9525">
+                      <a:solidFill>
+                        <a:srgbClr val="D5E7DC"/>
+                      </a:solidFill>
+                    </a:lnB>
+                    <a:solidFill>
+                      <a:srgbClr val="F6FBF8"/>
+                    </a:solidFill>
+                  </a:tcPr>
+                </a:tc>
+                <a:tc>
+                  <a:txBody>
+                    <a:bodyPr/>
+                    <a:lstStyle/>
+                    <a:p>
+                      <a:pPr rtl="1" algn="r"/>
+                      <a:r>
+                        <a:rPr lang="ar-SA" altLang="en-US" sz="1000" b="1" dirty="0">
+                          <a:solidFill>
+                            <a:srgbClr val="3E6350"/>
+                          </a:solidFill>
+                          <a:latin typeface="IBM Plex Sans Arabic"/>
+                          <a:cs typeface="IBM Plex Sans Arabic"/>
+                        </a:rPr>
+                        <a:t>4</a:t>
                       </a:r>
                     </a:p>
                   </a:txBody>
@@ -13198,7 +13936,7 @@
                           <a:latin typeface="IBM Plex Sans Arabic"/>
                           <a:cs typeface="IBM Plex Sans Arabic"/>
                         </a:rPr>
-                        <a:t>3</a:t>
+                        <a:t>5</a:t>
                       </a:r>
                     </a:p>
                   </a:txBody>
@@ -13244,7 +13982,7 @@
                           <a:latin typeface="IBM Plex Sans Arabic"/>
                           <a:cs typeface="IBM Plex Sans Arabic"/>
                         </a:rPr>
-                        <a:t>الغلاف (موقع الدرس)، ونسخة التوزيع</a:t>
+                        <a:t>التهيئة، والمفاهيم، وأوراق العمل</a:t>
                       </a:r>
                     </a:p>
                   </a:txBody>
@@ -13288,7 +14026,7 @@
                           <a:latin typeface="IBM Plex Sans Arabic"/>
                           <a:cs typeface="IBM Plex Sans Arabic"/>
                         </a:rPr>
-                        <a:t>توافق التنفيذ مع توزيع المنهج</a:t>
+                        <a:t>مصادر تعلم متنوعة تدعم المنهج</a:t>
                       </a:r>
                     </a:p>
                   </a:txBody>
@@ -13332,7 +14070,7 @@
                           <a:latin typeface="IBM Plex Sans Arabic"/>
                           <a:cs typeface="IBM Plex Sans Arabic"/>
                         </a:rPr>
-                        <a:t>4</a:t>
+                        <a:t>6</a:t>
                       </a:r>
                     </a:p>
                   </a:txBody>
@@ -13422,275 +14160,7 @@
                           <a:latin typeface="IBM Plex Sans Arabic"/>
                           <a:cs typeface="IBM Plex Sans Arabic"/>
                         </a:rPr>
-                        <a:t>إستراتيجيات متسقة مع النواتج وتعلم نشط</a:t>
-                      </a:r>
-                    </a:p>
-                  </a:txBody>
-                  <a:tcPr marL="73152" marR="73152" marT="27432" marB="27432" anchor="ctr">
-                    <a:lnL w="9525">
-                      <a:solidFill>
-                        <a:srgbClr val="D5E7DC"/>
-                      </a:solidFill>
-                    </a:lnL>
-                    <a:lnR w="9525">
-                      <a:solidFill>
-                        <a:srgbClr val="D5E7DC"/>
-                      </a:solidFill>
-                    </a:lnR>
-                    <a:lnT w="9525">
-                      <a:solidFill>
-                        <a:srgbClr val="D5E7DC"/>
-                      </a:solidFill>
-                    </a:lnT>
-                    <a:lnB w="9525">
-                      <a:solidFill>
-                        <a:srgbClr val="D5E7DC"/>
-                      </a:solidFill>
-                    </a:lnB>
-                    <a:solidFill>
-                      <a:srgbClr val="FFFFFF"/>
-                    </a:solidFill>
-                  </a:tcPr>
-                </a:tc>
-                <a:tc>
-                  <a:txBody>
-                    <a:bodyPr/>
-                    <a:lstStyle/>
-                    <a:p>
-                      <a:pPr rtl="1" algn="r"/>
-                      <a:r>
-                        <a:rPr lang="ar-SA" altLang="en-US" sz="1000" b="1" dirty="0">
-                          <a:solidFill>
-                            <a:srgbClr val="3E6350"/>
-                          </a:solidFill>
-                          <a:latin typeface="IBM Plex Sans Arabic"/>
-                          <a:cs typeface="IBM Plex Sans Arabic"/>
-                        </a:rPr>
-                        <a:t>5</a:t>
-                      </a:r>
-                    </a:p>
-                  </a:txBody>
-                  <a:tcPr marL="73152" marR="73152" marT="27432" marB="27432" anchor="ctr">
-                    <a:lnL w="9525">
-                      <a:solidFill>
-                        <a:srgbClr val="D5E7DC"/>
-                      </a:solidFill>
-                    </a:lnL>
-                    <a:lnR w="9525">
-                      <a:solidFill>
-                        <a:srgbClr val="D5E7DC"/>
-                      </a:solidFill>
-                    </a:lnR>
-                    <a:lnT w="9525">
-                      <a:solidFill>
-                        <a:srgbClr val="D5E7DC"/>
-                      </a:solidFill>
-                    </a:lnT>
-                    <a:lnB w="9525">
-                      <a:solidFill>
-                        <a:srgbClr val="D5E7DC"/>
-                      </a:solidFill>
-                    </a:lnB>
-                    <a:solidFill>
-                      <a:srgbClr val="FFFFFF"/>
-                    </a:solidFill>
-                  </a:tcPr>
-                </a:tc>
-              </a:tr>
-              <a:tr h="242316">
-                <a:tc>
-                  <a:txBody>
-                    <a:bodyPr/>
-                    <a:lstStyle/>
-                    <a:p>
-                      <a:pPr rtl="1" algn="r"/>
-                      <a:r>
-                        <a:rPr lang="ar-SA" altLang="en-US" sz="1000" dirty="0">
-                          <a:solidFill>
-                            <a:srgbClr val="1C3328"/>
-                          </a:solidFill>
-                          <a:latin typeface="IBM Plex Sans Arabic"/>
-                          <a:cs typeface="IBM Plex Sans Arabic"/>
-                        </a:rPr>
-                        <a:t>ماذا نعرف؟، وتحقّق من فهمك، والمسارات</a:t>
-                      </a:r>
-                    </a:p>
-                  </a:txBody>
-                  <a:tcPr marL="73152" marR="73152" marT="27432" marB="27432" anchor="ctr">
-                    <a:lnL w="9525">
-                      <a:solidFill>
-                        <a:srgbClr val="D5E7DC"/>
-                      </a:solidFill>
-                    </a:lnL>
-                    <a:lnR w="9525">
-                      <a:solidFill>
-                        <a:srgbClr val="D5E7DC"/>
-                      </a:solidFill>
-                    </a:lnR>
-                    <a:lnT w="9525">
-                      <a:solidFill>
-                        <a:srgbClr val="D5E7DC"/>
-                      </a:solidFill>
-                    </a:lnT>
-                    <a:lnB w="9525">
-                      <a:solidFill>
-                        <a:srgbClr val="D5E7DC"/>
-                      </a:solidFill>
-                    </a:lnB>
-                    <a:solidFill>
-                      <a:srgbClr val="F6FBF8"/>
-                    </a:solidFill>
-                  </a:tcPr>
-                </a:tc>
-                <a:tc>
-                  <a:txBody>
-                    <a:bodyPr/>
-                    <a:lstStyle/>
-                    <a:p>
-                      <a:pPr rtl="1" algn="r"/>
-                      <a:r>
-                        <a:rPr lang="ar-SA" altLang="en-US" sz="1000" dirty="0">
-                          <a:solidFill>
-                            <a:srgbClr val="1C3328"/>
-                          </a:solidFill>
-                          <a:latin typeface="IBM Plex Sans Arabic"/>
-                          <a:cs typeface="IBM Plex Sans Arabic"/>
-                        </a:rPr>
-                        <a:t>تشخيص المستويات وتنويع الإستراتيجيات</a:t>
-                      </a:r>
-                    </a:p>
-                  </a:txBody>
-                  <a:tcPr marL="73152" marR="73152" marT="27432" marB="27432" anchor="ctr">
-                    <a:lnL w="9525">
-                      <a:solidFill>
-                        <a:srgbClr val="D5E7DC"/>
-                      </a:solidFill>
-                    </a:lnL>
-                    <a:lnR w="9525">
-                      <a:solidFill>
-                        <a:srgbClr val="D5E7DC"/>
-                      </a:solidFill>
-                    </a:lnR>
-                    <a:lnT w="9525">
-                      <a:solidFill>
-                        <a:srgbClr val="D5E7DC"/>
-                      </a:solidFill>
-                    </a:lnT>
-                    <a:lnB w="9525">
-                      <a:solidFill>
-                        <a:srgbClr val="D5E7DC"/>
-                      </a:solidFill>
-                    </a:lnB>
-                    <a:solidFill>
-                      <a:srgbClr val="F6FBF8"/>
-                    </a:solidFill>
-                  </a:tcPr>
-                </a:tc>
-                <a:tc>
-                  <a:txBody>
-                    <a:bodyPr/>
-                    <a:lstStyle/>
-                    <a:p>
-                      <a:pPr rtl="1" algn="r"/>
-                      <a:r>
-                        <a:rPr lang="ar-SA" altLang="en-US" sz="1000" b="1" dirty="0">
-                          <a:solidFill>
-                            <a:srgbClr val="3E6350"/>
-                          </a:solidFill>
-                          <a:latin typeface="IBM Plex Sans Arabic"/>
-                          <a:cs typeface="IBM Plex Sans Arabic"/>
-                        </a:rPr>
-                        <a:t>6</a:t>
-                      </a:r>
-                    </a:p>
-                  </a:txBody>
-                  <a:tcPr marL="73152" marR="73152" marT="27432" marB="27432" anchor="ctr">
-                    <a:lnL w="9525">
-                      <a:solidFill>
-                        <a:srgbClr val="D5E7DC"/>
-                      </a:solidFill>
-                    </a:lnL>
-                    <a:lnR w="9525">
-                      <a:solidFill>
-                        <a:srgbClr val="D5E7DC"/>
-                      </a:solidFill>
-                    </a:lnR>
-                    <a:lnT w="9525">
-                      <a:solidFill>
-                        <a:srgbClr val="D5E7DC"/>
-                      </a:solidFill>
-                    </a:lnT>
-                    <a:lnB w="9525">
-                      <a:solidFill>
-                        <a:srgbClr val="D5E7DC"/>
-                      </a:solidFill>
-                    </a:lnB>
-                    <a:solidFill>
-                      <a:srgbClr val="F6FBF8"/>
-                    </a:solidFill>
-                  </a:tcPr>
-                </a:tc>
-              </a:tr>
-              <a:tr h="242316">
-                <a:tc>
-                  <a:txBody>
-                    <a:bodyPr/>
-                    <a:lstStyle/>
-                    <a:p>
-                      <a:pPr rtl="1" algn="r"/>
-                      <a:r>
-                        <a:rPr lang="ar-SA" altLang="en-US" sz="1000" dirty="0">
-                          <a:solidFill>
-                            <a:srgbClr val="1C3328"/>
-                          </a:solidFill>
-                          <a:latin typeface="IBM Plex Sans Arabic"/>
-                          <a:cs typeface="IBM Plex Sans Arabic"/>
-                        </a:rPr>
-                        <a:t>الاستجابة الرقمية، وQR، وواجب مدرستي</a:t>
-                      </a:r>
-                    </a:p>
-                  </a:txBody>
-                  <a:tcPr marL="73152" marR="73152" marT="27432" marB="27432" anchor="ctr">
-                    <a:lnL w="9525">
-                      <a:solidFill>
-                        <a:srgbClr val="D5E7DC"/>
-                      </a:solidFill>
-                    </a:lnL>
-                    <a:lnR w="9525">
-                      <a:solidFill>
-                        <a:srgbClr val="D5E7DC"/>
-                      </a:solidFill>
-                    </a:lnR>
-                    <a:lnT w="9525">
-                      <a:solidFill>
-                        <a:srgbClr val="D5E7DC"/>
-                      </a:solidFill>
-                    </a:lnT>
-                    <a:lnB w="9525">
-                      <a:solidFill>
-                        <a:srgbClr val="D5E7DC"/>
-                      </a:solidFill>
-                    </a:lnB>
-                    <a:solidFill>
-                      <a:srgbClr val="FFFFFF"/>
-                    </a:solidFill>
-                  </a:tcPr>
-                </a:tc>
-                <a:tc>
-                  <a:txBody>
-                    <a:bodyPr/>
-                    <a:lstStyle/>
-                    <a:p>
-                      <a:pPr rtl="1" algn="r"/>
-                      <a:r>
-                        <a:rPr lang="ar-SA" altLang="en-US" sz="1000" dirty="0">
-                          <a:solidFill>
-                            <a:srgbClr val="1C3328"/>
-                          </a:solidFill>
-                          <a:latin typeface="IBM Plex Sans Arabic"/>
-                          <a:cs typeface="IBM Plex Sans Arabic"/>
-                        </a:rPr>
-                        <a:t>الدمج بين التعلم الصفي والإلكتروني</a:t>
+                        <a:t>أنشطة وإستراتيجيات تستوفي نواتج التعلم</a:t>
                       </a:r>
                     </a:p>
                   </a:txBody>
@@ -13780,7 +14250,7 @@
                           <a:latin typeface="IBM Plex Sans Arabic"/>
                           <a:cs typeface="IBM Plex Sans Arabic"/>
                         </a:rPr>
-                        <a:t>علاقة الدرس بحياتنا، ومسار «تحدَّ»</a:t>
+                        <a:t>ماذا نعرف؟، والمسارات الأربعة</a:t>
                       </a:r>
                     </a:p>
                   </a:txBody>
@@ -13824,7 +14294,7 @@
                           <a:latin typeface="IBM Plex Sans Arabic"/>
                           <a:cs typeface="IBM Plex Sans Arabic"/>
                         </a:rPr>
-                        <a:t>أنشطة تطبيقية ترتبط بحياة المتعلمين</a:t>
+                        <a:t>تنوع الإستراتيجيات وفق القدرات</a:t>
                       </a:r>
                     </a:p>
                   </a:txBody>
@@ -13914,7 +14384,7 @@
                           <a:latin typeface="IBM Plex Sans Arabic"/>
                           <a:cs typeface="IBM Plex Sans Arabic"/>
                         </a:rPr>
-                        <a:t>مهمة المجموعة، وبطاقة الخروج</a:t>
+                        <a:t>الاستجابة الرقمية، وQR، وبحث «تحدَّ»</a:t>
                       </a:r>
                     </a:p>
                   </a:txBody>
@@ -13958,7 +14428,7 @@
                           <a:latin typeface="IBM Plex Sans Arabic"/>
                           <a:cs typeface="IBM Plex Sans Arabic"/>
                         </a:rPr>
-                        <a:t>مهارات القراءة والكتابة والحساب</a:t>
+                        <a:t>مصادر تعلم رقمية</a:t>
                       </a:r>
                     </a:p>
                   </a:txBody>
@@ -14120,7 +14590,7 @@
                 <a:latin typeface="IBM Plex Sans Arabic"/>
                 <a:cs typeface="IBM Plex Sans Arabic"/>
               </a:rPr>
-              <a:t>استمارة الهيئة</a:t>
+              <a:t>منصة الهيئة</a:t>
             </a:r>
             <a:endParaRPr lang="ar-SA" sz="1200" dirty="0"/>
           </a:p>
@@ -14157,7 +14627,7 @@
                 <a:latin typeface="IBM Plex Sans Arabic"/>
                 <a:cs typeface="IBM Plex Sans Arabic"/>
               </a:rPr>
-              <a:t>بنود الملاحظة الصفية (2 من 2)</a:t>
+              <a:t>بنود الملاحظة الصفية (2 من 3)</a:t>
             </a:r>
             <a:endParaRPr lang="ar-SA" sz="3000" dirty="0"/>
           </a:p>
@@ -14214,8 +14684,8 @@
             <a:tbl>
               <a:tblPr rtl="1" firstRow="1" bandRow="1"/>
               <a:tblGrid>
-                <a:gridCol w="4160520"/>
-                <a:gridCol w="3657600"/>
+                <a:gridCol w="4023360"/>
+                <a:gridCol w="3794760"/>
                 <a:gridCol w="411480"/>
               </a:tblGrid>
               <a:tr h="242316">
@@ -14367,7 +14837,7 @@
                           <a:latin typeface="IBM Plex Sans Arabic"/>
                           <a:cs typeface="IBM Plex Sans Arabic"/>
                         </a:rPr>
-                        <a:t>سؤال التفكير، وهدف التحليل، و«تحدَّ»</a:t>
+                        <a:t>في حياتي، ومهمة المجموعة</a:t>
                       </a:r>
                     </a:p>
                   </a:txBody>
@@ -14411,7 +14881,7 @@
                           <a:latin typeface="IBM Plex Sans Arabic"/>
                           <a:cs typeface="IBM Plex Sans Arabic"/>
                         </a:rPr>
-                        <a:t>التفكير الناقد والإبداعي وحل المشكلات</a:t>
+                        <a:t>تطبيقات عملية ترتبط بالحياة</a:t>
                       </a:r>
                     </a:p>
                   </a:txBody>
@@ -14501,7 +14971,7 @@
                           <a:latin typeface="IBM Plex Sans Arabic"/>
                           <a:cs typeface="IBM Plex Sans Arabic"/>
                         </a:rPr>
-                        <a:t>الاتفاقات الصفية، والتعاوني، والأقران</a:t>
+                        <a:t>مهمة المجموعة، وبطاقة الخروج</a:t>
                       </a:r>
                     </a:p>
                   </a:txBody>
@@ -14545,7 +15015,7 @@
                           <a:latin typeface="IBM Plex Sans Arabic"/>
                           <a:cs typeface="IBM Plex Sans Arabic"/>
                         </a:rPr>
-                        <a:t>التواصل والتعاطف والاحترام المتبادل</a:t>
+                        <a:t>تنمية القراءة والكتابة</a:t>
                       </a:r>
                     </a:p>
                   </a:txBody>
@@ -14635,7 +15105,7 @@
                           <a:latin typeface="IBM Plex Sans Arabic"/>
                           <a:cs typeface="IBM Plex Sans Arabic"/>
                         </a:rPr>
-                        <a:t>مسار «تحدَّ» (مصدر موثوق)، والواجب</a:t>
+                        <a:t>مهمة المجموعة (احسبوا أو نظّموا في جدول)</a:t>
                       </a:r>
                     </a:p>
                   </a:txBody>
@@ -14679,7 +15149,7 @@
                           <a:latin typeface="IBM Plex Sans Arabic"/>
                           <a:cs typeface="IBM Plex Sans Arabic"/>
                         </a:rPr>
-                        <a:t>مهارات البحث والتقنية الرقمية</a:t>
+                        <a:t>تنمية المهارات العددية</a:t>
                       </a:r>
                     </a:p>
                   </a:txBody>
@@ -14769,7 +15239,275 @@
                           <a:latin typeface="IBM Plex Sans Arabic"/>
                           <a:cs typeface="IBM Plex Sans Arabic"/>
                         </a:rPr>
-                        <a:t>التهيئة، ونقاط المجموعات، والاحتفاء</a:t>
+                        <a:t>سؤال التفكير، و«تحدَّ»</a:t>
+                      </a:r>
+                    </a:p>
+                  </a:txBody>
+                  <a:tcPr marL="73152" marR="73152" marT="27432" marB="27432" anchor="ctr">
+                    <a:lnL w="9525">
+                      <a:solidFill>
+                        <a:srgbClr val="D5E7DC"/>
+                      </a:solidFill>
+                    </a:lnL>
+                    <a:lnR w="9525">
+                      <a:solidFill>
+                        <a:srgbClr val="D5E7DC"/>
+                      </a:solidFill>
+                    </a:lnR>
+                    <a:lnT w="9525">
+                      <a:solidFill>
+                        <a:srgbClr val="D5E7DC"/>
+                      </a:solidFill>
+                    </a:lnT>
+                    <a:lnB w="9525">
+                      <a:solidFill>
+                        <a:srgbClr val="D5E7DC"/>
+                      </a:solidFill>
+                    </a:lnB>
+                    <a:solidFill>
+                      <a:srgbClr val="F6FBF8"/>
+                    </a:solidFill>
+                  </a:tcPr>
+                </a:tc>
+                <a:tc>
+                  <a:txBody>
+                    <a:bodyPr/>
+                    <a:lstStyle/>
+                    <a:p>
+                      <a:pPr rtl="1" algn="r"/>
+                      <a:r>
+                        <a:rPr lang="ar-SA" altLang="en-US" sz="1000" dirty="0">
+                          <a:solidFill>
+                            <a:srgbClr val="1C3328"/>
+                          </a:solidFill>
+                          <a:latin typeface="IBM Plex Sans Arabic"/>
+                          <a:cs typeface="IBM Plex Sans Arabic"/>
+                        </a:rPr>
+                        <a:t>التفكير والبحث والابتكار</a:t>
+                      </a:r>
+                    </a:p>
+                  </a:txBody>
+                  <a:tcPr marL="73152" marR="73152" marT="27432" marB="27432" anchor="ctr">
+                    <a:lnL w="9525">
+                      <a:solidFill>
+                        <a:srgbClr val="D5E7DC"/>
+                      </a:solidFill>
+                    </a:lnL>
+                    <a:lnR w="9525">
+                      <a:solidFill>
+                        <a:srgbClr val="D5E7DC"/>
+                      </a:solidFill>
+                    </a:lnR>
+                    <a:lnT w="9525">
+                      <a:solidFill>
+                        <a:srgbClr val="D5E7DC"/>
+                      </a:solidFill>
+                    </a:lnT>
+                    <a:lnB w="9525">
+                      <a:solidFill>
+                        <a:srgbClr val="D5E7DC"/>
+                      </a:solidFill>
+                    </a:lnB>
+                    <a:solidFill>
+                      <a:srgbClr val="F6FBF8"/>
+                    </a:solidFill>
+                  </a:tcPr>
+                </a:tc>
+                <a:tc>
+                  <a:txBody>
+                    <a:bodyPr/>
+                    <a:lstStyle/>
+                    <a:p>
+                      <a:pPr rtl="1" algn="r"/>
+                      <a:r>
+                        <a:rPr lang="ar-SA" altLang="en-US" sz="1000" b="1" dirty="0">
+                          <a:solidFill>
+                            <a:srgbClr val="3E6350"/>
+                          </a:solidFill>
+                          <a:latin typeface="IBM Plex Sans Arabic"/>
+                          <a:cs typeface="IBM Plex Sans Arabic"/>
+                        </a:rPr>
+                        <a:t>13</a:t>
+                      </a:r>
+                    </a:p>
+                  </a:txBody>
+                  <a:tcPr marL="73152" marR="73152" marT="27432" marB="27432" anchor="ctr">
+                    <a:lnL w="9525">
+                      <a:solidFill>
+                        <a:srgbClr val="D5E7DC"/>
+                      </a:solidFill>
+                    </a:lnL>
+                    <a:lnR w="9525">
+                      <a:solidFill>
+                        <a:srgbClr val="D5E7DC"/>
+                      </a:solidFill>
+                    </a:lnR>
+                    <a:lnT w="9525">
+                      <a:solidFill>
+                        <a:srgbClr val="D5E7DC"/>
+                      </a:solidFill>
+                    </a:lnT>
+                    <a:lnB w="9525">
+                      <a:solidFill>
+                        <a:srgbClr val="D5E7DC"/>
+                      </a:solidFill>
+                    </a:lnB>
+                    <a:solidFill>
+                      <a:srgbClr val="F6FBF8"/>
+                    </a:solidFill>
+                  </a:tcPr>
+                </a:tc>
+              </a:tr>
+              <a:tr h="242316">
+                <a:tc>
+                  <a:txBody>
+                    <a:bodyPr/>
+                    <a:lstStyle/>
+                    <a:p>
+                      <a:pPr rtl="1" algn="r"/>
+                      <a:r>
+                        <a:rPr lang="ar-SA" altLang="en-US" sz="1000" dirty="0">
+                          <a:solidFill>
+                            <a:srgbClr val="1C3328"/>
+                          </a:solidFill>
+                          <a:latin typeface="IBM Plex Sans Arabic"/>
+                          <a:cs typeface="IBM Plex Sans Arabic"/>
+                        </a:rPr>
+                        <a:t>التعاوني، وتقويم الأقران</a:t>
+                      </a:r>
+                    </a:p>
+                  </a:txBody>
+                  <a:tcPr marL="73152" marR="73152" marT="27432" marB="27432" anchor="ctr">
+                    <a:lnL w="9525">
+                      <a:solidFill>
+                        <a:srgbClr val="D5E7DC"/>
+                      </a:solidFill>
+                    </a:lnL>
+                    <a:lnR w="9525">
+                      <a:solidFill>
+                        <a:srgbClr val="D5E7DC"/>
+                      </a:solidFill>
+                    </a:lnR>
+                    <a:lnT w="9525">
+                      <a:solidFill>
+                        <a:srgbClr val="D5E7DC"/>
+                      </a:solidFill>
+                    </a:lnT>
+                    <a:lnB w="9525">
+                      <a:solidFill>
+                        <a:srgbClr val="D5E7DC"/>
+                      </a:solidFill>
+                    </a:lnB>
+                    <a:solidFill>
+                      <a:srgbClr val="FFFFFF"/>
+                    </a:solidFill>
+                  </a:tcPr>
+                </a:tc>
+                <a:tc>
+                  <a:txBody>
+                    <a:bodyPr/>
+                    <a:lstStyle/>
+                    <a:p>
+                      <a:pPr rtl="1" algn="r"/>
+                      <a:r>
+                        <a:rPr lang="ar-SA" altLang="en-US" sz="1000" dirty="0">
+                          <a:solidFill>
+                            <a:srgbClr val="1C3328"/>
+                          </a:solidFill>
+                          <a:latin typeface="IBM Plex Sans Arabic"/>
+                          <a:cs typeface="IBM Plex Sans Arabic"/>
+                        </a:rPr>
+                        <a:t>المهارات العاطفية والاجتماعية</a:t>
+                      </a:r>
+                    </a:p>
+                  </a:txBody>
+                  <a:tcPr marL="73152" marR="73152" marT="27432" marB="27432" anchor="ctr">
+                    <a:lnL w="9525">
+                      <a:solidFill>
+                        <a:srgbClr val="D5E7DC"/>
+                      </a:solidFill>
+                    </a:lnL>
+                    <a:lnR w="9525">
+                      <a:solidFill>
+                        <a:srgbClr val="D5E7DC"/>
+                      </a:solidFill>
+                    </a:lnR>
+                    <a:lnT w="9525">
+                      <a:solidFill>
+                        <a:srgbClr val="D5E7DC"/>
+                      </a:solidFill>
+                    </a:lnT>
+                    <a:lnB w="9525">
+                      <a:solidFill>
+                        <a:srgbClr val="D5E7DC"/>
+                      </a:solidFill>
+                    </a:lnB>
+                    <a:solidFill>
+                      <a:srgbClr val="FFFFFF"/>
+                    </a:solidFill>
+                  </a:tcPr>
+                </a:tc>
+                <a:tc>
+                  <a:txBody>
+                    <a:bodyPr/>
+                    <a:lstStyle/>
+                    <a:p>
+                      <a:pPr rtl="1" algn="r"/>
+                      <a:r>
+                        <a:rPr lang="ar-SA" altLang="en-US" sz="1000" b="1" dirty="0">
+                          <a:solidFill>
+                            <a:srgbClr val="3E6350"/>
+                          </a:solidFill>
+                          <a:latin typeface="IBM Plex Sans Arabic"/>
+                          <a:cs typeface="IBM Plex Sans Arabic"/>
+                        </a:rPr>
+                        <a:t>14</a:t>
+                      </a:r>
+                    </a:p>
+                  </a:txBody>
+                  <a:tcPr marL="73152" marR="73152" marT="27432" marB="27432" anchor="ctr">
+                    <a:lnL w="9525">
+                      <a:solidFill>
+                        <a:srgbClr val="D5E7DC"/>
+                      </a:solidFill>
+                    </a:lnL>
+                    <a:lnR w="9525">
+                      <a:solidFill>
+                        <a:srgbClr val="D5E7DC"/>
+                      </a:solidFill>
+                    </a:lnR>
+                    <a:lnT w="9525">
+                      <a:solidFill>
+                        <a:srgbClr val="D5E7DC"/>
+                      </a:solidFill>
+                    </a:lnT>
+                    <a:lnB w="9525">
+                      <a:solidFill>
+                        <a:srgbClr val="D5E7DC"/>
+                      </a:solidFill>
+                    </a:lnB>
+                    <a:solidFill>
+                      <a:srgbClr val="FFFFFF"/>
+                    </a:solidFill>
+                  </a:tcPr>
+                </a:tc>
+              </a:tr>
+              <a:tr h="242316">
+                <a:tc>
+                  <a:txBody>
+                    <a:bodyPr/>
+                    <a:lstStyle/>
+                    <a:p>
+                      <a:pPr rtl="1" algn="r"/>
+                      <a:r>
+                        <a:rPr lang="ar-SA" altLang="en-US" sz="1000" dirty="0">
+                          <a:solidFill>
+                            <a:srgbClr val="1C3328"/>
+                          </a:solidFill>
+                          <a:latin typeface="IBM Plex Sans Arabic"/>
+                          <a:cs typeface="IBM Plex Sans Arabic"/>
+                        </a:rPr>
+                        <a:t>نقاط المجموعات، والاحتفاء بالفائز</a:t>
                       </a:r>
                     </a:p>
                   </a:txBody>
@@ -14857,7 +15595,7 @@
                           <a:latin typeface="IBM Plex Sans Arabic"/>
                           <a:cs typeface="IBM Plex Sans Arabic"/>
                         </a:rPr>
-                        <a:t>13</a:t>
+                        <a:t>15</a:t>
                       </a:r>
                     </a:p>
                   </a:txBody>
@@ -14903,7 +15641,7 @@
                           <a:latin typeface="IBM Plex Sans Arabic"/>
                           <a:cs typeface="IBM Plex Sans Arabic"/>
                         </a:rPr>
-                        <a:t>الحصة كلها: تعاون وأدوار وتحدٍّ</a:t>
+                        <a:t>الحصة كلها: أدوار وتعاون وتحدٍّ</a:t>
                       </a:r>
                     </a:p>
                   </a:txBody>
@@ -14991,7 +15729,7 @@
                           <a:latin typeface="IBM Plex Sans Arabic"/>
                           <a:cs typeface="IBM Plex Sans Arabic"/>
                         </a:rPr>
-                        <a:t>14</a:t>
+                        <a:t>16</a:t>
                       </a:r>
                     </a:p>
                   </a:txBody>
@@ -15037,7 +15775,7 @@
                           <a:latin typeface="IBM Plex Sans Arabic"/>
                           <a:cs typeface="IBM Plex Sans Arabic"/>
                         </a:rPr>
-                        <a:t>ماذا نعرف؟، والتحقق، والخروج، وإشارة المرور</a:t>
+                        <a:t>ماذا نعرف؟، والتحقق، والخروج</a:t>
                       </a:r>
                     </a:p>
                   </a:txBody>
@@ -15081,275 +15819,7 @@
                           <a:latin typeface="IBM Plex Sans Arabic"/>
                           <a:cs typeface="IBM Plex Sans Arabic"/>
                         </a:rPr>
-                        <a:t>تقويم تشخيصي وتكويني وختامي وذاتي</a:t>
-                      </a:r>
-                    </a:p>
-                  </a:txBody>
-                  <a:tcPr marL="73152" marR="73152" marT="27432" marB="27432" anchor="ctr">
-                    <a:lnL w="9525">
-                      <a:solidFill>
-                        <a:srgbClr val="D5E7DC"/>
-                      </a:solidFill>
-                    </a:lnL>
-                    <a:lnR w="9525">
-                      <a:solidFill>
-                        <a:srgbClr val="D5E7DC"/>
-                      </a:solidFill>
-                    </a:lnR>
-                    <a:lnT w="9525">
-                      <a:solidFill>
-                        <a:srgbClr val="D5E7DC"/>
-                      </a:solidFill>
-                    </a:lnT>
-                    <a:lnB w="9525">
-                      <a:solidFill>
-                        <a:srgbClr val="D5E7DC"/>
-                      </a:solidFill>
-                    </a:lnB>
-                    <a:solidFill>
-                      <a:srgbClr val="F6FBF8"/>
-                    </a:solidFill>
-                  </a:tcPr>
-                </a:tc>
-                <a:tc>
-                  <a:txBody>
-                    <a:bodyPr/>
-                    <a:lstStyle/>
-                    <a:p>
-                      <a:pPr rtl="1" algn="r"/>
-                      <a:r>
-                        <a:rPr lang="ar-SA" altLang="en-US" sz="1000" b="1" dirty="0">
-                          <a:solidFill>
-                            <a:srgbClr val="3E6350"/>
-                          </a:solidFill>
-                          <a:latin typeface="IBM Plex Sans Arabic"/>
-                          <a:cs typeface="IBM Plex Sans Arabic"/>
-                        </a:rPr>
-                        <a:t>15</a:t>
-                      </a:r>
-                    </a:p>
-                  </a:txBody>
-                  <a:tcPr marL="73152" marR="73152" marT="27432" marB="27432" anchor="ctr">
-                    <a:lnL w="9525">
-                      <a:solidFill>
-                        <a:srgbClr val="D5E7DC"/>
-                      </a:solidFill>
-                    </a:lnL>
-                    <a:lnR w="9525">
-                      <a:solidFill>
-                        <a:srgbClr val="D5E7DC"/>
-                      </a:solidFill>
-                    </a:lnR>
-                    <a:lnT w="9525">
-                      <a:solidFill>
-                        <a:srgbClr val="D5E7DC"/>
-                      </a:solidFill>
-                    </a:lnT>
-                    <a:lnB w="9525">
-                      <a:solidFill>
-                        <a:srgbClr val="D5E7DC"/>
-                      </a:solidFill>
-                    </a:lnB>
-                    <a:solidFill>
-                      <a:srgbClr val="F6FBF8"/>
-                    </a:solidFill>
-                  </a:tcPr>
-                </a:tc>
-              </a:tr>
-              <a:tr h="242316">
-                <a:tc>
-                  <a:txBody>
-                    <a:bodyPr/>
-                    <a:lstStyle/>
-                    <a:p>
-                      <a:pPr rtl="1" algn="r"/>
-                      <a:r>
-                        <a:rPr lang="ar-SA" altLang="en-US" sz="1000" dirty="0">
-                          <a:solidFill>
-                            <a:srgbClr val="1C3328"/>
-                          </a:solidFill>
-                          <a:latin typeface="IBM Plex Sans Arabic"/>
-                          <a:cs typeface="IBM Plex Sans Arabic"/>
-                        </a:rPr>
-                        <a:t>معايير النجاح، وسلّم تقويم الأقران</a:t>
-                      </a:r>
-                    </a:p>
-                  </a:txBody>
-                  <a:tcPr marL="73152" marR="73152" marT="27432" marB="27432" anchor="ctr">
-                    <a:lnL w="9525">
-                      <a:solidFill>
-                        <a:srgbClr val="D5E7DC"/>
-                      </a:solidFill>
-                    </a:lnL>
-                    <a:lnR w="9525">
-                      <a:solidFill>
-                        <a:srgbClr val="D5E7DC"/>
-                      </a:solidFill>
-                    </a:lnR>
-                    <a:lnT w="9525">
-                      <a:solidFill>
-                        <a:srgbClr val="D5E7DC"/>
-                      </a:solidFill>
-                    </a:lnT>
-                    <a:lnB w="9525">
-                      <a:solidFill>
-                        <a:srgbClr val="D5E7DC"/>
-                      </a:solidFill>
-                    </a:lnB>
-                    <a:solidFill>
-                      <a:srgbClr val="FFFFFF"/>
-                    </a:solidFill>
-                  </a:tcPr>
-                </a:tc>
-                <a:tc>
-                  <a:txBody>
-                    <a:bodyPr/>
-                    <a:lstStyle/>
-                    <a:p>
-                      <a:pPr rtl="1" algn="r"/>
-                      <a:r>
-                        <a:rPr lang="ar-SA" altLang="en-US" sz="1000" dirty="0">
-                          <a:solidFill>
-                            <a:srgbClr val="1C3328"/>
-                          </a:solidFill>
-                          <a:latin typeface="IBM Plex Sans Arabic"/>
-                          <a:cs typeface="IBM Plex Sans Arabic"/>
-                        </a:rPr>
-                        <a:t>تقويم متمايز بمحكات واضحة</a:t>
-                      </a:r>
-                    </a:p>
-                  </a:txBody>
-                  <a:tcPr marL="73152" marR="73152" marT="27432" marB="27432" anchor="ctr">
-                    <a:lnL w="9525">
-                      <a:solidFill>
-                        <a:srgbClr val="D5E7DC"/>
-                      </a:solidFill>
-                    </a:lnL>
-                    <a:lnR w="9525">
-                      <a:solidFill>
-                        <a:srgbClr val="D5E7DC"/>
-                      </a:solidFill>
-                    </a:lnR>
-                    <a:lnT w="9525">
-                      <a:solidFill>
-                        <a:srgbClr val="D5E7DC"/>
-                      </a:solidFill>
-                    </a:lnT>
-                    <a:lnB w="9525">
-                      <a:solidFill>
-                        <a:srgbClr val="D5E7DC"/>
-                      </a:solidFill>
-                    </a:lnB>
-                    <a:solidFill>
-                      <a:srgbClr val="FFFFFF"/>
-                    </a:solidFill>
-                  </a:tcPr>
-                </a:tc>
-                <a:tc>
-                  <a:txBody>
-                    <a:bodyPr/>
-                    <a:lstStyle/>
-                    <a:p>
-                      <a:pPr rtl="1" algn="r"/>
-                      <a:r>
-                        <a:rPr lang="ar-SA" altLang="en-US" sz="1000" b="1" dirty="0">
-                          <a:solidFill>
-                            <a:srgbClr val="3E6350"/>
-                          </a:solidFill>
-                          <a:latin typeface="IBM Plex Sans Arabic"/>
-                          <a:cs typeface="IBM Plex Sans Arabic"/>
-                        </a:rPr>
-                        <a:t>16</a:t>
-                      </a:r>
-                    </a:p>
-                  </a:txBody>
-                  <a:tcPr marL="73152" marR="73152" marT="27432" marB="27432" anchor="ctr">
-                    <a:lnL w="9525">
-                      <a:solidFill>
-                        <a:srgbClr val="D5E7DC"/>
-                      </a:solidFill>
-                    </a:lnL>
-                    <a:lnR w="9525">
-                      <a:solidFill>
-                        <a:srgbClr val="D5E7DC"/>
-                      </a:solidFill>
-                    </a:lnR>
-                    <a:lnT w="9525">
-                      <a:solidFill>
-                        <a:srgbClr val="D5E7DC"/>
-                      </a:solidFill>
-                    </a:lnT>
-                    <a:lnB w="9525">
-                      <a:solidFill>
-                        <a:srgbClr val="D5E7DC"/>
-                      </a:solidFill>
-                    </a:lnB>
-                    <a:solidFill>
-                      <a:srgbClr val="FFFFFF"/>
-                    </a:solidFill>
-                  </a:tcPr>
-                </a:tc>
-              </a:tr>
-              <a:tr h="242316">
-                <a:tc>
-                  <a:txBody>
-                    <a:bodyPr/>
-                    <a:lstStyle/>
-                    <a:p>
-                      <a:pPr rtl="1" algn="r"/>
-                      <a:r>
-                        <a:rPr lang="ar-SA" altLang="en-US" sz="1000" dirty="0">
-                          <a:solidFill>
-                            <a:srgbClr val="1C3328"/>
-                          </a:solidFill>
-                          <a:latin typeface="IBM Plex Sans Arabic"/>
-                          <a:cs typeface="IBM Plex Sans Arabic"/>
-                        </a:rPr>
-                        <a:t>التجوال، و«نجمتان وأمنية»، والتحقق</a:t>
-                      </a:r>
-                    </a:p>
-                  </a:txBody>
-                  <a:tcPr marL="73152" marR="73152" marT="27432" marB="27432" anchor="ctr">
-                    <a:lnL w="9525">
-                      <a:solidFill>
-                        <a:srgbClr val="D5E7DC"/>
-                      </a:solidFill>
-                    </a:lnL>
-                    <a:lnR w="9525">
-                      <a:solidFill>
-                        <a:srgbClr val="D5E7DC"/>
-                      </a:solidFill>
-                    </a:lnR>
-                    <a:lnT w="9525">
-                      <a:solidFill>
-                        <a:srgbClr val="D5E7DC"/>
-                      </a:solidFill>
-                    </a:lnT>
-                    <a:lnB w="9525">
-                      <a:solidFill>
-                        <a:srgbClr val="D5E7DC"/>
-                      </a:solidFill>
-                    </a:lnB>
-                    <a:solidFill>
-                      <a:srgbClr val="F6FBF8"/>
-                    </a:solidFill>
-                  </a:tcPr>
-                </a:tc>
-                <a:tc>
-                  <a:txBody>
-                    <a:bodyPr/>
-                    <a:lstStyle/>
-                    <a:p>
-                      <a:pPr rtl="1" algn="r"/>
-                      <a:r>
-                        <a:rPr lang="ar-SA" altLang="en-US" sz="1000" dirty="0">
-                          <a:solidFill>
-                            <a:srgbClr val="1C3328"/>
-                          </a:solidFill>
-                          <a:latin typeface="IBM Plex Sans Arabic"/>
-                          <a:cs typeface="IBM Plex Sans Arabic"/>
-                        </a:rPr>
-                        <a:t>تغذية راجعة تحسّن الأداء</a:t>
+                        <a:t>تقويم تشخيصي وبنائي وختامي يكشف الفروق</a:t>
                       </a:r>
                     </a:p>
                   </a:txBody>
@@ -15511,6 +15981,1397 @@
                 <a:latin typeface="IBM Plex Sans Arabic"/>
                 <a:cs typeface="IBM Plex Sans Arabic"/>
               </a:rPr>
+              <a:t>منصة الهيئة</a:t>
+            </a:r>
+            <a:endParaRPr lang="ar-SA" sz="1200" dirty="0"/>
+          </a:p>
+        </p:txBody>
+      </p:sp>
+      <p:sp>
+        <p:nvSpPr>
+          <p:cNvPr id="4" name="Title 4"/>
+          <p:cNvSpPr txBox="1"/>
+          <p:nvPr/>
+        </p:nvSpPr>
+        <p:spPr>
+          <a:xfrm>
+            <a:off x="457200" y="1280160"/>
+            <a:ext cx="8229600" cy="640080"/>
+          </a:xfrm>
+          <a:prstGeom prst="rect">
+            <a:avLst/>
+          </a:prstGeom>
+          <a:noFill/>
+        </p:spPr>
+        <p:txBody>
+          <a:bodyPr wrap="square" lIns="0" tIns="0" rIns="0" bIns="0" rtlCol="1" anchor="t"/>
+          <a:lstStyle/>
+          <a:p>
+            <a:pPr rtl="1" algn="r" marL="0" indent="0">
+              <a:buNone/>
+            </a:pPr>
+            <a:r>
+              <a:rPr lang="ar-SA" altLang="en-US" sz="3000" b="1" dirty="0">
+                <a:solidFill>
+                  <a:srgbClr val="1C3328"/>
+                </a:solidFill>
+                <a:latin typeface="IBM Plex Sans Arabic"/>
+                <a:cs typeface="IBM Plex Sans Arabic"/>
+              </a:rPr>
+              <a:t>بنود الملاحظة الصفية (3 من 3)</a:t>
+            </a:r>
+            <a:endParaRPr lang="ar-SA" sz="3000" dirty="0"/>
+          </a:p>
+        </p:txBody>
+      </p:sp>
+      <p:sp>
+        <p:nvSpPr>
+          <p:cNvPr id="5" name="Slide Number 5"/>
+          <p:cNvSpPr txBox="1"/>
+          <p:nvPr/>
+        </p:nvSpPr>
+        <p:spPr>
+          <a:xfrm>
+            <a:off x="8412480" y="4709160"/>
+            <a:ext cx="365760" cy="274320"/>
+          </a:xfrm>
+          <a:prstGeom prst="rect">
+            <a:avLst/>
+          </a:prstGeom>
+          <a:noFill/>
+        </p:spPr>
+        <p:txBody>
+          <a:bodyPr wrap="square" lIns="0" tIns="0" rIns="0" bIns="0" anchor="t"/>
+          <a:lstStyle/>
+          <a:p>
+            <a:pPr algn="r"/>
+            <a:fld id="{B6F15528-21DE-4FAA-801E-634DDDAF4B2B}" type="slidenum">
+              <a:rPr lang="en-US" sz="900" dirty="0">
+                <a:solidFill>
+                  <a:srgbClr val="5E7268"/>
+                </a:solidFill>
+                <a:latin typeface="IBM Plex Sans Arabic"/>
+                <a:cs typeface="IBM Plex Sans Arabic"/>
+              </a:rPr>
+              <a:t>‹#›</a:t>
+            </a:fld>
+          </a:p>
+        </p:txBody>
+      </p:sp>
+      <p:graphicFrame>
+        <p:nvGraphicFramePr>
+          <p:cNvPr id="6" name="Table 6"/>
+          <p:cNvGraphicFramePr>
+            <a:graphicFrameLocks noGrp="1"/>
+          </p:cNvGraphicFramePr>
+          <p:nvPr/>
+        </p:nvGraphicFramePr>
+        <p:xfrm>
+          <a:off x="457200" y="2011680"/>
+          <a:ext cx="8229600" cy="2180844"/>
+        </p:xfrm>
+        <a:graphic>
+          <a:graphicData uri="http://schemas.openxmlformats.org/drawingml/2006/table">
+            <a:tbl>
+              <a:tblPr rtl="1" firstRow="1" bandRow="1"/>
+              <a:tblGrid>
+                <a:gridCol w="4023360"/>
+                <a:gridCol w="3794760"/>
+                <a:gridCol w="411480"/>
+              </a:tblGrid>
+              <a:tr h="242316">
+                <a:tc>
+                  <a:txBody>
+                    <a:bodyPr/>
+                    <a:lstStyle/>
+                    <a:p>
+                      <a:pPr rtl="1" algn="ctr"/>
+                      <a:r>
+                        <a:rPr lang="ar-SA" altLang="en-US" sz="1000" b="1" dirty="0">
+                          <a:solidFill>
+                            <a:srgbClr val="FFFFFF"/>
+                          </a:solidFill>
+                          <a:latin typeface="IBM Plex Sans Arabic"/>
+                          <a:cs typeface="IBM Plex Sans Arabic"/>
+                        </a:rPr>
+                        <a:t>أين يتحقق في القالب</a:t>
+                      </a:r>
+                    </a:p>
+                  </a:txBody>
+                  <a:tcPr marL="73152" marR="73152" marT="27432" marB="27432" anchor="ctr">
+                    <a:lnL w="9525">
+                      <a:solidFill>
+                        <a:srgbClr val="D5E7DC"/>
+                      </a:solidFill>
+                    </a:lnL>
+                    <a:lnR w="9525">
+                      <a:solidFill>
+                        <a:srgbClr val="D5E7DC"/>
+                      </a:solidFill>
+                    </a:lnR>
+                    <a:lnT w="9525">
+                      <a:solidFill>
+                        <a:srgbClr val="D5E7DC"/>
+                      </a:solidFill>
+                    </a:lnT>
+                    <a:lnB w="9525">
+                      <a:solidFill>
+                        <a:srgbClr val="D5E7DC"/>
+                      </a:solidFill>
+                    </a:lnB>
+                    <a:solidFill>
+                      <a:srgbClr val="3E6350"/>
+                    </a:solidFill>
+                  </a:tcPr>
+                </a:tc>
+                <a:tc>
+                  <a:txBody>
+                    <a:bodyPr/>
+                    <a:lstStyle/>
+                    <a:p>
+                      <a:pPr rtl="1" algn="ctr"/>
+                      <a:r>
+                        <a:rPr lang="ar-SA" altLang="en-US" sz="1000" b="1" dirty="0">
+                          <a:solidFill>
+                            <a:srgbClr val="FFFFFF"/>
+                          </a:solidFill>
+                          <a:latin typeface="IBM Plex Sans Arabic"/>
+                          <a:cs typeface="IBM Plex Sans Arabic"/>
+                        </a:rPr>
+                        <a:t>بند الاستمارة</a:t>
+                      </a:r>
+                    </a:p>
+                  </a:txBody>
+                  <a:tcPr marL="73152" marR="73152" marT="27432" marB="27432" anchor="ctr">
+                    <a:lnL w="9525">
+                      <a:solidFill>
+                        <a:srgbClr val="D5E7DC"/>
+                      </a:solidFill>
+                    </a:lnL>
+                    <a:lnR w="9525">
+                      <a:solidFill>
+                        <a:srgbClr val="D5E7DC"/>
+                      </a:solidFill>
+                    </a:lnR>
+                    <a:lnT w="9525">
+                      <a:solidFill>
+                        <a:srgbClr val="D5E7DC"/>
+                      </a:solidFill>
+                    </a:lnT>
+                    <a:lnB w="9525">
+                      <a:solidFill>
+                        <a:srgbClr val="D5E7DC"/>
+                      </a:solidFill>
+                    </a:lnB>
+                    <a:solidFill>
+                      <a:srgbClr val="3E6350"/>
+                    </a:solidFill>
+                  </a:tcPr>
+                </a:tc>
+                <a:tc>
+                  <a:txBody>
+                    <a:bodyPr/>
+                    <a:lstStyle/>
+                    <a:p>
+                      <a:pPr rtl="1" algn="ctr"/>
+                      <a:r>
+                        <a:rPr lang="ar-SA" altLang="en-US" sz="1000" b="1" dirty="0">
+                          <a:solidFill>
+                            <a:srgbClr val="FFFFFF"/>
+                          </a:solidFill>
+                          <a:latin typeface="IBM Plex Sans Arabic"/>
+                          <a:cs typeface="IBM Plex Sans Arabic"/>
+                        </a:rPr>
+                        <a:t>م</a:t>
+                      </a:r>
+                    </a:p>
+                  </a:txBody>
+                  <a:tcPr marL="73152" marR="73152" marT="27432" marB="27432" anchor="ctr">
+                    <a:lnL w="9525">
+                      <a:solidFill>
+                        <a:srgbClr val="D5E7DC"/>
+                      </a:solidFill>
+                    </a:lnL>
+                    <a:lnR w="9525">
+                      <a:solidFill>
+                        <a:srgbClr val="D5E7DC"/>
+                      </a:solidFill>
+                    </a:lnR>
+                    <a:lnT w="9525">
+                      <a:solidFill>
+                        <a:srgbClr val="D5E7DC"/>
+                      </a:solidFill>
+                    </a:lnT>
+                    <a:lnB w="9525">
+                      <a:solidFill>
+                        <a:srgbClr val="D5E7DC"/>
+                      </a:solidFill>
+                    </a:lnB>
+                    <a:solidFill>
+                      <a:srgbClr val="3E6350"/>
+                    </a:solidFill>
+                  </a:tcPr>
+                </a:tc>
+              </a:tr>
+              <a:tr h="242316">
+                <a:tc>
+                  <a:txBody>
+                    <a:bodyPr/>
+                    <a:lstStyle/>
+                    <a:p>
+                      <a:pPr rtl="1" algn="r"/>
+                      <a:r>
+                        <a:rPr lang="ar-SA" altLang="en-US" sz="1000" dirty="0">
+                          <a:solidFill>
+                            <a:srgbClr val="1C3328"/>
+                          </a:solidFill>
+                          <a:latin typeface="IBM Plex Sans Arabic"/>
+                          <a:cs typeface="IBM Plex Sans Arabic"/>
+                        </a:rPr>
+                        <a:t>بطاقة الخروج، ومعايير النجاح</a:t>
+                      </a:r>
+                    </a:p>
+                  </a:txBody>
+                  <a:tcPr marL="73152" marR="73152" marT="27432" marB="27432" anchor="ctr">
+                    <a:lnL w="9525">
+                      <a:solidFill>
+                        <a:srgbClr val="D5E7DC"/>
+                      </a:solidFill>
+                    </a:lnL>
+                    <a:lnR w="9525">
+                      <a:solidFill>
+                        <a:srgbClr val="D5E7DC"/>
+                      </a:solidFill>
+                    </a:lnR>
+                    <a:lnT w="9525">
+                      <a:solidFill>
+                        <a:srgbClr val="D5E7DC"/>
+                      </a:solidFill>
+                    </a:lnT>
+                    <a:lnB w="9525">
+                      <a:solidFill>
+                        <a:srgbClr val="D5E7DC"/>
+                      </a:solidFill>
+                    </a:lnB>
+                    <a:solidFill>
+                      <a:srgbClr val="FFFFFF"/>
+                    </a:solidFill>
+                  </a:tcPr>
+                </a:tc>
+                <a:tc>
+                  <a:txBody>
+                    <a:bodyPr/>
+                    <a:lstStyle/>
+                    <a:p>
+                      <a:pPr rtl="1" algn="r"/>
+                      <a:r>
+                        <a:rPr lang="ar-SA" altLang="en-US" sz="1000" dirty="0">
+                          <a:solidFill>
+                            <a:srgbClr val="1C3328"/>
+                          </a:solidFill>
+                          <a:latin typeface="IBM Plex Sans Arabic"/>
+                          <a:cs typeface="IBM Plex Sans Arabic"/>
+                        </a:rPr>
+                        <a:t>قياس تحقق نواتج التعلم</a:t>
+                      </a:r>
+                    </a:p>
+                  </a:txBody>
+                  <a:tcPr marL="73152" marR="73152" marT="27432" marB="27432" anchor="ctr">
+                    <a:lnL w="9525">
+                      <a:solidFill>
+                        <a:srgbClr val="D5E7DC"/>
+                      </a:solidFill>
+                    </a:lnL>
+                    <a:lnR w="9525">
+                      <a:solidFill>
+                        <a:srgbClr val="D5E7DC"/>
+                      </a:solidFill>
+                    </a:lnR>
+                    <a:lnT w="9525">
+                      <a:solidFill>
+                        <a:srgbClr val="D5E7DC"/>
+                      </a:solidFill>
+                    </a:lnT>
+                    <a:lnB w="9525">
+                      <a:solidFill>
+                        <a:srgbClr val="D5E7DC"/>
+                      </a:solidFill>
+                    </a:lnB>
+                    <a:solidFill>
+                      <a:srgbClr val="FFFFFF"/>
+                    </a:solidFill>
+                  </a:tcPr>
+                </a:tc>
+                <a:tc>
+                  <a:txBody>
+                    <a:bodyPr/>
+                    <a:lstStyle/>
+                    <a:p>
+                      <a:pPr rtl="1" algn="r"/>
+                      <a:r>
+                        <a:rPr lang="ar-SA" altLang="en-US" sz="1000" b="1" dirty="0">
+                          <a:solidFill>
+                            <a:srgbClr val="3E6350"/>
+                          </a:solidFill>
+                          <a:latin typeface="IBM Plex Sans Arabic"/>
+                          <a:cs typeface="IBM Plex Sans Arabic"/>
+                        </a:rPr>
+                        <a:t>18</a:t>
+                      </a:r>
+                    </a:p>
+                  </a:txBody>
+                  <a:tcPr marL="73152" marR="73152" marT="27432" marB="27432" anchor="ctr">
+                    <a:lnL w="9525">
+                      <a:solidFill>
+                        <a:srgbClr val="D5E7DC"/>
+                      </a:solidFill>
+                    </a:lnL>
+                    <a:lnR w="9525">
+                      <a:solidFill>
+                        <a:srgbClr val="D5E7DC"/>
+                      </a:solidFill>
+                    </a:lnR>
+                    <a:lnT w="9525">
+                      <a:solidFill>
+                        <a:srgbClr val="D5E7DC"/>
+                      </a:solidFill>
+                    </a:lnT>
+                    <a:lnB w="9525">
+                      <a:solidFill>
+                        <a:srgbClr val="D5E7DC"/>
+                      </a:solidFill>
+                    </a:lnB>
+                    <a:solidFill>
+                      <a:srgbClr val="FFFFFF"/>
+                    </a:solidFill>
+                  </a:tcPr>
+                </a:tc>
+              </a:tr>
+              <a:tr h="242316">
+                <a:tc>
+                  <a:txBody>
+                    <a:bodyPr/>
+                    <a:lstStyle/>
+                    <a:p>
+                      <a:pPr rtl="1" algn="r"/>
+                      <a:r>
+                        <a:rPr lang="ar-SA" altLang="en-US" sz="1000" dirty="0">
+                          <a:solidFill>
+                            <a:srgbClr val="1C3328"/>
+                          </a:solidFill>
+                          <a:latin typeface="IBM Plex Sans Arabic"/>
+                          <a:cs typeface="IBM Plex Sans Arabic"/>
+                        </a:rPr>
+                        <a:t>التجوال، و«نجمتان وأمنية»</a:t>
+                      </a:r>
+                    </a:p>
+                  </a:txBody>
+                  <a:tcPr marL="73152" marR="73152" marT="27432" marB="27432" anchor="ctr">
+                    <a:lnL w="9525">
+                      <a:solidFill>
+                        <a:srgbClr val="D5E7DC"/>
+                      </a:solidFill>
+                    </a:lnL>
+                    <a:lnR w="9525">
+                      <a:solidFill>
+                        <a:srgbClr val="D5E7DC"/>
+                      </a:solidFill>
+                    </a:lnR>
+                    <a:lnT w="9525">
+                      <a:solidFill>
+                        <a:srgbClr val="D5E7DC"/>
+                      </a:solidFill>
+                    </a:lnT>
+                    <a:lnB w="9525">
+                      <a:solidFill>
+                        <a:srgbClr val="D5E7DC"/>
+                      </a:solidFill>
+                    </a:lnB>
+                    <a:solidFill>
+                      <a:srgbClr val="F6FBF8"/>
+                    </a:solidFill>
+                  </a:tcPr>
+                </a:tc>
+                <a:tc>
+                  <a:txBody>
+                    <a:bodyPr/>
+                    <a:lstStyle/>
+                    <a:p>
+                      <a:pPr rtl="1" algn="r"/>
+                      <a:r>
+                        <a:rPr lang="ar-SA" altLang="en-US" sz="1000" dirty="0">
+                          <a:solidFill>
+                            <a:srgbClr val="1C3328"/>
+                          </a:solidFill>
+                          <a:latin typeface="IBM Plex Sans Arabic"/>
+                          <a:cs typeface="IBM Plex Sans Arabic"/>
+                        </a:rPr>
+                        <a:t>تغذية راجعة متنوعة تحسّن الأداء</a:t>
+                      </a:r>
+                    </a:p>
+                  </a:txBody>
+                  <a:tcPr marL="73152" marR="73152" marT="27432" marB="27432" anchor="ctr">
+                    <a:lnL w="9525">
+                      <a:solidFill>
+                        <a:srgbClr val="D5E7DC"/>
+                      </a:solidFill>
+                    </a:lnL>
+                    <a:lnR w="9525">
+                      <a:solidFill>
+                        <a:srgbClr val="D5E7DC"/>
+                      </a:solidFill>
+                    </a:lnR>
+                    <a:lnT w="9525">
+                      <a:solidFill>
+                        <a:srgbClr val="D5E7DC"/>
+                      </a:solidFill>
+                    </a:lnT>
+                    <a:lnB w="9525">
+                      <a:solidFill>
+                        <a:srgbClr val="D5E7DC"/>
+                      </a:solidFill>
+                    </a:lnB>
+                    <a:solidFill>
+                      <a:srgbClr val="F6FBF8"/>
+                    </a:solidFill>
+                  </a:tcPr>
+                </a:tc>
+                <a:tc>
+                  <a:txBody>
+                    <a:bodyPr/>
+                    <a:lstStyle/>
+                    <a:p>
+                      <a:pPr rtl="1" algn="r"/>
+                      <a:r>
+                        <a:rPr lang="ar-SA" altLang="en-US" sz="1000" b="1" dirty="0">
+                          <a:solidFill>
+                            <a:srgbClr val="3E6350"/>
+                          </a:solidFill>
+                          <a:latin typeface="IBM Plex Sans Arabic"/>
+                          <a:cs typeface="IBM Plex Sans Arabic"/>
+                        </a:rPr>
+                        <a:t>19</a:t>
+                      </a:r>
+                    </a:p>
+                  </a:txBody>
+                  <a:tcPr marL="73152" marR="73152" marT="27432" marB="27432" anchor="ctr">
+                    <a:lnL w="9525">
+                      <a:solidFill>
+                        <a:srgbClr val="D5E7DC"/>
+                      </a:solidFill>
+                    </a:lnL>
+                    <a:lnR w="9525">
+                      <a:solidFill>
+                        <a:srgbClr val="D5E7DC"/>
+                      </a:solidFill>
+                    </a:lnR>
+                    <a:lnT w="9525">
+                      <a:solidFill>
+                        <a:srgbClr val="D5E7DC"/>
+                      </a:solidFill>
+                    </a:lnT>
+                    <a:lnB w="9525">
+                      <a:solidFill>
+                        <a:srgbClr val="D5E7DC"/>
+                      </a:solidFill>
+                    </a:lnB>
+                    <a:solidFill>
+                      <a:srgbClr val="F6FBF8"/>
+                    </a:solidFill>
+                  </a:tcPr>
+                </a:tc>
+              </a:tr>
+              <a:tr h="242316">
+                <a:tc>
+                  <a:txBody>
+                    <a:bodyPr/>
+                    <a:lstStyle/>
+                    <a:p>
+                      <a:pPr rtl="1" algn="r"/>
+                      <a:r>
+                        <a:rPr lang="ar-SA" altLang="en-US" sz="1000" dirty="0">
+                          <a:solidFill>
+                            <a:srgbClr val="1C3328"/>
+                          </a:solidFill>
+                          <a:latin typeface="IBM Plex Sans Arabic"/>
+                          <a:cs typeface="IBM Plex Sans Arabic"/>
+                        </a:rPr>
+                        <a:t>الطالب يُكمل: قيمة أعتز بها، ووطني</a:t>
+                      </a:r>
+                    </a:p>
+                  </a:txBody>
+                  <a:tcPr marL="73152" marR="73152" marT="27432" marB="27432" anchor="ctr">
+                    <a:lnL w="9525">
+                      <a:solidFill>
+                        <a:srgbClr val="D5E7DC"/>
+                      </a:solidFill>
+                    </a:lnL>
+                    <a:lnR w="9525">
+                      <a:solidFill>
+                        <a:srgbClr val="D5E7DC"/>
+                      </a:solidFill>
+                    </a:lnR>
+                    <a:lnT w="9525">
+                      <a:solidFill>
+                        <a:srgbClr val="D5E7DC"/>
+                      </a:solidFill>
+                    </a:lnT>
+                    <a:lnB w="9525">
+                      <a:solidFill>
+                        <a:srgbClr val="D5E7DC"/>
+                      </a:solidFill>
+                    </a:lnB>
+                    <a:solidFill>
+                      <a:srgbClr val="FFFFFF"/>
+                    </a:solidFill>
+                  </a:tcPr>
+                </a:tc>
+                <a:tc>
+                  <a:txBody>
+                    <a:bodyPr/>
+                    <a:lstStyle/>
+                    <a:p>
+                      <a:pPr rtl="1" algn="r"/>
+                      <a:r>
+                        <a:rPr lang="ar-SA" altLang="en-US" sz="1000" dirty="0">
+                          <a:solidFill>
+                            <a:srgbClr val="1C3328"/>
+                          </a:solidFill>
+                          <a:latin typeface="IBM Plex Sans Arabic"/>
+                          <a:cs typeface="IBM Plex Sans Arabic"/>
+                        </a:rPr>
+                        <a:t>الطلاب يعتزون بالقيم والهوية الوطنية</a:t>
+                      </a:r>
+                    </a:p>
+                  </a:txBody>
+                  <a:tcPr marL="73152" marR="73152" marT="27432" marB="27432" anchor="ctr">
+                    <a:lnL w="9525">
+                      <a:solidFill>
+                        <a:srgbClr val="D5E7DC"/>
+                      </a:solidFill>
+                    </a:lnL>
+                    <a:lnR w="9525">
+                      <a:solidFill>
+                        <a:srgbClr val="D5E7DC"/>
+                      </a:solidFill>
+                    </a:lnR>
+                    <a:lnT w="9525">
+                      <a:solidFill>
+                        <a:srgbClr val="D5E7DC"/>
+                      </a:solidFill>
+                    </a:lnT>
+                    <a:lnB w="9525">
+                      <a:solidFill>
+                        <a:srgbClr val="D5E7DC"/>
+                      </a:solidFill>
+                    </a:lnB>
+                    <a:solidFill>
+                      <a:srgbClr val="FFFFFF"/>
+                    </a:solidFill>
+                  </a:tcPr>
+                </a:tc>
+                <a:tc>
+                  <a:txBody>
+                    <a:bodyPr/>
+                    <a:lstStyle/>
+                    <a:p>
+                      <a:pPr rtl="1" algn="r"/>
+                      <a:r>
+                        <a:rPr lang="ar-SA" altLang="en-US" sz="1000" b="1" dirty="0">
+                          <a:solidFill>
+                            <a:srgbClr val="3E6350"/>
+                          </a:solidFill>
+                          <a:latin typeface="IBM Plex Sans Arabic"/>
+                          <a:cs typeface="IBM Plex Sans Arabic"/>
+                        </a:rPr>
+                        <a:t>20</a:t>
+                      </a:r>
+                    </a:p>
+                  </a:txBody>
+                  <a:tcPr marL="73152" marR="73152" marT="27432" marB="27432" anchor="ctr">
+                    <a:lnL w="9525">
+                      <a:solidFill>
+                        <a:srgbClr val="D5E7DC"/>
+                      </a:solidFill>
+                    </a:lnL>
+                    <a:lnR w="9525">
+                      <a:solidFill>
+                        <a:srgbClr val="D5E7DC"/>
+                      </a:solidFill>
+                    </a:lnR>
+                    <a:lnT w="9525">
+                      <a:solidFill>
+                        <a:srgbClr val="D5E7DC"/>
+                      </a:solidFill>
+                    </a:lnT>
+                    <a:lnB w="9525">
+                      <a:solidFill>
+                        <a:srgbClr val="D5E7DC"/>
+                      </a:solidFill>
+                    </a:lnB>
+                    <a:solidFill>
+                      <a:srgbClr val="FFFFFF"/>
+                    </a:solidFill>
+                  </a:tcPr>
+                </a:tc>
+              </a:tr>
+              <a:tr h="242316">
+                <a:tc>
+                  <a:txBody>
+                    <a:bodyPr/>
+                    <a:lstStyle/>
+                    <a:p>
+                      <a:pPr rtl="1" algn="r"/>
+                      <a:r>
+                        <a:rPr lang="ar-SA" altLang="en-US" sz="1000" dirty="0">
+                          <a:solidFill>
+                            <a:srgbClr val="1C3328"/>
+                          </a:solidFill>
+                          <a:latin typeface="IBM Plex Sans Arabic"/>
+                          <a:cs typeface="IBM Plex Sans Arabic"/>
+                        </a:rPr>
+                        <a:t>«أفخر اليوم بأنني»، و«أعجبني في عرضكم»</a:t>
+                      </a:r>
+                    </a:p>
+                  </a:txBody>
+                  <a:tcPr marL="73152" marR="73152" marT="27432" marB="27432" anchor="ctr">
+                    <a:lnL w="9525">
+                      <a:solidFill>
+                        <a:srgbClr val="D5E7DC"/>
+                      </a:solidFill>
+                    </a:lnL>
+                    <a:lnR w="9525">
+                      <a:solidFill>
+                        <a:srgbClr val="D5E7DC"/>
+                      </a:solidFill>
+                    </a:lnR>
+                    <a:lnT w="9525">
+                      <a:solidFill>
+                        <a:srgbClr val="D5E7DC"/>
+                      </a:solidFill>
+                    </a:lnT>
+                    <a:lnB w="9525">
+                      <a:solidFill>
+                        <a:srgbClr val="D5E7DC"/>
+                      </a:solidFill>
+                    </a:lnB>
+                    <a:solidFill>
+                      <a:srgbClr val="F6FBF8"/>
+                    </a:solidFill>
+                  </a:tcPr>
+                </a:tc>
+                <a:tc>
+                  <a:txBody>
+                    <a:bodyPr/>
+                    <a:lstStyle/>
+                    <a:p>
+                      <a:pPr rtl="1" algn="r"/>
+                      <a:r>
+                        <a:rPr lang="ar-SA" altLang="en-US" sz="1000" dirty="0">
+                          <a:solidFill>
+                            <a:srgbClr val="1C3328"/>
+                          </a:solidFill>
+                          <a:latin typeface="IBM Plex Sans Arabic"/>
+                          <a:cs typeface="IBM Plex Sans Arabic"/>
+                        </a:rPr>
+                        <a:t>اتجاهات إيجابية نحو الذات والآخرين</a:t>
+                      </a:r>
+                    </a:p>
+                  </a:txBody>
+                  <a:tcPr marL="73152" marR="73152" marT="27432" marB="27432" anchor="ctr">
+                    <a:lnL w="9525">
+                      <a:solidFill>
+                        <a:srgbClr val="D5E7DC"/>
+                      </a:solidFill>
+                    </a:lnL>
+                    <a:lnR w="9525">
+                      <a:solidFill>
+                        <a:srgbClr val="D5E7DC"/>
+                      </a:solidFill>
+                    </a:lnR>
+                    <a:lnT w="9525">
+                      <a:solidFill>
+                        <a:srgbClr val="D5E7DC"/>
+                      </a:solidFill>
+                    </a:lnT>
+                    <a:lnB w="9525">
+                      <a:solidFill>
+                        <a:srgbClr val="D5E7DC"/>
+                      </a:solidFill>
+                    </a:lnB>
+                    <a:solidFill>
+                      <a:srgbClr val="F6FBF8"/>
+                    </a:solidFill>
+                  </a:tcPr>
+                </a:tc>
+                <a:tc>
+                  <a:txBody>
+                    <a:bodyPr/>
+                    <a:lstStyle/>
+                    <a:p>
+                      <a:pPr rtl="1" algn="r"/>
+                      <a:r>
+                        <a:rPr lang="ar-SA" altLang="en-US" sz="1000" b="1" dirty="0">
+                          <a:solidFill>
+                            <a:srgbClr val="3E6350"/>
+                          </a:solidFill>
+                          <a:latin typeface="IBM Plex Sans Arabic"/>
+                          <a:cs typeface="IBM Plex Sans Arabic"/>
+                        </a:rPr>
+                        <a:t>21</a:t>
+                      </a:r>
+                    </a:p>
+                  </a:txBody>
+                  <a:tcPr marL="73152" marR="73152" marT="27432" marB="27432" anchor="ctr">
+                    <a:lnL w="9525">
+                      <a:solidFill>
+                        <a:srgbClr val="D5E7DC"/>
+                      </a:solidFill>
+                    </a:lnL>
+                    <a:lnR w="9525">
+                      <a:solidFill>
+                        <a:srgbClr val="D5E7DC"/>
+                      </a:solidFill>
+                    </a:lnR>
+                    <a:lnT w="9525">
+                      <a:solidFill>
+                        <a:srgbClr val="D5E7DC"/>
+                      </a:solidFill>
+                    </a:lnT>
+                    <a:lnB w="9525">
+                      <a:solidFill>
+                        <a:srgbClr val="D5E7DC"/>
+                      </a:solidFill>
+                    </a:lnB>
+                    <a:solidFill>
+                      <a:srgbClr val="F6FBF8"/>
+                    </a:solidFill>
+                  </a:tcPr>
+                </a:tc>
+              </a:tr>
+              <a:tr h="242316">
+                <a:tc>
+                  <a:txBody>
+                    <a:bodyPr/>
+                    <a:lstStyle/>
+                    <a:p>
+                      <a:pPr rtl="1" algn="r"/>
+                      <a:r>
+                        <a:rPr lang="ar-SA" altLang="en-US" sz="1000" dirty="0">
+                          <a:solidFill>
+                            <a:srgbClr val="1C3328"/>
+                          </a:solidFill>
+                          <a:latin typeface="IBM Plex Sans Arabic"/>
+                          <a:cs typeface="IBM Plex Sans Arabic"/>
+                        </a:rPr>
+                        <a:t>«نحافظ على صحتنا» في الاتفاقات</a:t>
+                      </a:r>
+                    </a:p>
+                  </a:txBody>
+                  <a:tcPr marL="73152" marR="73152" marT="27432" marB="27432" anchor="ctr">
+                    <a:lnL w="9525">
+                      <a:solidFill>
+                        <a:srgbClr val="D5E7DC"/>
+                      </a:solidFill>
+                    </a:lnL>
+                    <a:lnR w="9525">
+                      <a:solidFill>
+                        <a:srgbClr val="D5E7DC"/>
+                      </a:solidFill>
+                    </a:lnR>
+                    <a:lnT w="9525">
+                      <a:solidFill>
+                        <a:srgbClr val="D5E7DC"/>
+                      </a:solidFill>
+                    </a:lnT>
+                    <a:lnB w="9525">
+                      <a:solidFill>
+                        <a:srgbClr val="D5E7DC"/>
+                      </a:solidFill>
+                    </a:lnB>
+                    <a:solidFill>
+                      <a:srgbClr val="FFFFFF"/>
+                    </a:solidFill>
+                  </a:tcPr>
+                </a:tc>
+                <a:tc>
+                  <a:txBody>
+                    <a:bodyPr/>
+                    <a:lstStyle/>
+                    <a:p>
+                      <a:pPr rtl="1" algn="r"/>
+                      <a:r>
+                        <a:rPr lang="ar-SA" altLang="en-US" sz="1000" dirty="0">
+                          <a:solidFill>
+                            <a:srgbClr val="1C3328"/>
+                          </a:solidFill>
+                          <a:latin typeface="IBM Plex Sans Arabic"/>
+                          <a:cs typeface="IBM Plex Sans Arabic"/>
+                        </a:rPr>
+                        <a:t>الالتزام بالممارسات الصحية</a:t>
+                      </a:r>
+                    </a:p>
+                  </a:txBody>
+                  <a:tcPr marL="73152" marR="73152" marT="27432" marB="27432" anchor="ctr">
+                    <a:lnL w="9525">
+                      <a:solidFill>
+                        <a:srgbClr val="D5E7DC"/>
+                      </a:solidFill>
+                    </a:lnL>
+                    <a:lnR w="9525">
+                      <a:solidFill>
+                        <a:srgbClr val="D5E7DC"/>
+                      </a:solidFill>
+                    </a:lnR>
+                    <a:lnT w="9525">
+                      <a:solidFill>
+                        <a:srgbClr val="D5E7DC"/>
+                      </a:solidFill>
+                    </a:lnT>
+                    <a:lnB w="9525">
+                      <a:solidFill>
+                        <a:srgbClr val="D5E7DC"/>
+                      </a:solidFill>
+                    </a:lnB>
+                    <a:solidFill>
+                      <a:srgbClr val="FFFFFF"/>
+                    </a:solidFill>
+                  </a:tcPr>
+                </a:tc>
+                <a:tc>
+                  <a:txBody>
+                    <a:bodyPr/>
+                    <a:lstStyle/>
+                    <a:p>
+                      <a:pPr rtl="1" algn="r"/>
+                      <a:r>
+                        <a:rPr lang="ar-SA" altLang="en-US" sz="1000" b="1" dirty="0">
+                          <a:solidFill>
+                            <a:srgbClr val="3E6350"/>
+                          </a:solidFill>
+                          <a:latin typeface="IBM Plex Sans Arabic"/>
+                          <a:cs typeface="IBM Plex Sans Arabic"/>
+                        </a:rPr>
+                        <a:t>22</a:t>
+                      </a:r>
+                    </a:p>
+                  </a:txBody>
+                  <a:tcPr marL="73152" marR="73152" marT="27432" marB="27432" anchor="ctr">
+                    <a:lnL w="9525">
+                      <a:solidFill>
+                        <a:srgbClr val="D5E7DC"/>
+                      </a:solidFill>
+                    </a:lnL>
+                    <a:lnR w="9525">
+                      <a:solidFill>
+                        <a:srgbClr val="D5E7DC"/>
+                      </a:solidFill>
+                    </a:lnR>
+                    <a:lnT w="9525">
+                      <a:solidFill>
+                        <a:srgbClr val="D5E7DC"/>
+                      </a:solidFill>
+                    </a:lnT>
+                    <a:lnB w="9525">
+                      <a:solidFill>
+                        <a:srgbClr val="D5E7DC"/>
+                      </a:solidFill>
+                    </a:lnB>
+                    <a:solidFill>
+                      <a:srgbClr val="FFFFFF"/>
+                    </a:solidFill>
+                  </a:tcPr>
+                </a:tc>
+              </a:tr>
+              <a:tr h="242316">
+                <a:tc>
+                  <a:txBody>
+                    <a:bodyPr/>
+                    <a:lstStyle/>
+                    <a:p>
+                      <a:pPr rtl="1" algn="r"/>
+                      <a:r>
+                        <a:rPr lang="ar-SA" altLang="en-US" sz="1000" dirty="0">
+                          <a:solidFill>
+                            <a:srgbClr val="1C3328"/>
+                          </a:solidFill>
+                          <a:latin typeface="IBM Plex Sans Arabic"/>
+                          <a:cs typeface="IBM Plex Sans Arabic"/>
+                        </a:rPr>
+                        <a:t>الاتفاقات الصفية، وإشارة الصمت</a:t>
+                      </a:r>
+                    </a:p>
+                  </a:txBody>
+                  <a:tcPr marL="73152" marR="73152" marT="27432" marB="27432" anchor="ctr">
+                    <a:lnL w="9525">
+                      <a:solidFill>
+                        <a:srgbClr val="D5E7DC"/>
+                      </a:solidFill>
+                    </a:lnL>
+                    <a:lnR w="9525">
+                      <a:solidFill>
+                        <a:srgbClr val="D5E7DC"/>
+                      </a:solidFill>
+                    </a:lnR>
+                    <a:lnT w="9525">
+                      <a:solidFill>
+                        <a:srgbClr val="D5E7DC"/>
+                      </a:solidFill>
+                    </a:lnT>
+                    <a:lnB w="9525">
+                      <a:solidFill>
+                        <a:srgbClr val="D5E7DC"/>
+                      </a:solidFill>
+                    </a:lnB>
+                    <a:solidFill>
+                      <a:srgbClr val="F6FBF8"/>
+                    </a:solidFill>
+                  </a:tcPr>
+                </a:tc>
+                <a:tc>
+                  <a:txBody>
+                    <a:bodyPr/>
+                    <a:lstStyle/>
+                    <a:p>
+                      <a:pPr rtl="1" algn="r"/>
+                      <a:r>
+                        <a:rPr lang="ar-SA" altLang="en-US" sz="1000" dirty="0">
+                          <a:solidFill>
+                            <a:srgbClr val="1C3328"/>
+                          </a:solidFill>
+                          <a:latin typeface="IBM Plex Sans Arabic"/>
+                          <a:cs typeface="IBM Plex Sans Arabic"/>
+                        </a:rPr>
+                        <a:t>الالتزام بقواعد السلوك والانضباط</a:t>
+                      </a:r>
+                    </a:p>
+                  </a:txBody>
+                  <a:tcPr marL="73152" marR="73152" marT="27432" marB="27432" anchor="ctr">
+                    <a:lnL w="9525">
+                      <a:solidFill>
+                        <a:srgbClr val="D5E7DC"/>
+                      </a:solidFill>
+                    </a:lnL>
+                    <a:lnR w="9525">
+                      <a:solidFill>
+                        <a:srgbClr val="D5E7DC"/>
+                      </a:solidFill>
+                    </a:lnR>
+                    <a:lnT w="9525">
+                      <a:solidFill>
+                        <a:srgbClr val="D5E7DC"/>
+                      </a:solidFill>
+                    </a:lnT>
+                    <a:lnB w="9525">
+                      <a:solidFill>
+                        <a:srgbClr val="D5E7DC"/>
+                      </a:solidFill>
+                    </a:lnB>
+                    <a:solidFill>
+                      <a:srgbClr val="F6FBF8"/>
+                    </a:solidFill>
+                  </a:tcPr>
+                </a:tc>
+                <a:tc>
+                  <a:txBody>
+                    <a:bodyPr/>
+                    <a:lstStyle/>
+                    <a:p>
+                      <a:pPr rtl="1" algn="r"/>
+                      <a:r>
+                        <a:rPr lang="ar-SA" altLang="en-US" sz="1000" b="1" dirty="0">
+                          <a:solidFill>
+                            <a:srgbClr val="3E6350"/>
+                          </a:solidFill>
+                          <a:latin typeface="IBM Plex Sans Arabic"/>
+                          <a:cs typeface="IBM Plex Sans Arabic"/>
+                        </a:rPr>
+                        <a:t>23</a:t>
+                      </a:r>
+                    </a:p>
+                  </a:txBody>
+                  <a:tcPr marL="73152" marR="73152" marT="27432" marB="27432" anchor="ctr">
+                    <a:lnL w="9525">
+                      <a:solidFill>
+                        <a:srgbClr val="D5E7DC"/>
+                      </a:solidFill>
+                    </a:lnL>
+                    <a:lnR w="9525">
+                      <a:solidFill>
+                        <a:srgbClr val="D5E7DC"/>
+                      </a:solidFill>
+                    </a:lnR>
+                    <a:lnT w="9525">
+                      <a:solidFill>
+                        <a:srgbClr val="D5E7DC"/>
+                      </a:solidFill>
+                    </a:lnT>
+                    <a:lnB w="9525">
+                      <a:solidFill>
+                        <a:srgbClr val="D5E7DC"/>
+                      </a:solidFill>
+                    </a:lnB>
+                    <a:solidFill>
+                      <a:srgbClr val="F6FBF8"/>
+                    </a:solidFill>
+                  </a:tcPr>
+                </a:tc>
+              </a:tr>
+              <a:tr h="242316">
+                <a:tc>
+                  <a:txBody>
+                    <a:bodyPr/>
+                    <a:lstStyle/>
+                    <a:p>
+                      <a:pPr rtl="1" algn="r"/>
+                      <a:r>
+                        <a:rPr lang="ar-SA" altLang="en-US" sz="1000" dirty="0">
+                          <a:solidFill>
+                            <a:srgbClr val="1C3328"/>
+                          </a:solidFill>
+                          <a:latin typeface="IBM Plex Sans Arabic"/>
+                          <a:cs typeface="IBM Plex Sans Arabic"/>
+                        </a:rPr>
+                        <a:t>اختيار المسار، و«أكمل وحدك»</a:t>
+                      </a:r>
+                    </a:p>
+                  </a:txBody>
+                  <a:tcPr marL="73152" marR="73152" marT="27432" marB="27432" anchor="ctr">
+                    <a:lnL w="9525">
+                      <a:solidFill>
+                        <a:srgbClr val="D5E7DC"/>
+                      </a:solidFill>
+                    </a:lnL>
+                    <a:lnR w="9525">
+                      <a:solidFill>
+                        <a:srgbClr val="D5E7DC"/>
+                      </a:solidFill>
+                    </a:lnR>
+                    <a:lnT w="9525">
+                      <a:solidFill>
+                        <a:srgbClr val="D5E7DC"/>
+                      </a:solidFill>
+                    </a:lnT>
+                    <a:lnB w="9525">
+                      <a:solidFill>
+                        <a:srgbClr val="D5E7DC"/>
+                      </a:solidFill>
+                    </a:lnB>
+                    <a:solidFill>
+                      <a:srgbClr val="FFFFFF"/>
+                    </a:solidFill>
+                  </a:tcPr>
+                </a:tc>
+                <a:tc>
+                  <a:txBody>
+                    <a:bodyPr/>
+                    <a:lstStyle/>
+                    <a:p>
+                      <a:pPr rtl="1" algn="r"/>
+                      <a:r>
+                        <a:rPr lang="ar-SA" altLang="en-US" sz="1000" dirty="0">
+                          <a:solidFill>
+                            <a:srgbClr val="1C3328"/>
+                          </a:solidFill>
+                          <a:latin typeface="IBM Plex Sans Arabic"/>
+                          <a:cs typeface="IBM Plex Sans Arabic"/>
+                        </a:rPr>
+                        <a:t>الاستقلالية والتعلم الذاتي</a:t>
+                      </a:r>
+                    </a:p>
+                  </a:txBody>
+                  <a:tcPr marL="73152" marR="73152" marT="27432" marB="27432" anchor="ctr">
+                    <a:lnL w="9525">
+                      <a:solidFill>
+                        <a:srgbClr val="D5E7DC"/>
+                      </a:solidFill>
+                    </a:lnL>
+                    <a:lnR w="9525">
+                      <a:solidFill>
+                        <a:srgbClr val="D5E7DC"/>
+                      </a:solidFill>
+                    </a:lnR>
+                    <a:lnT w="9525">
+                      <a:solidFill>
+                        <a:srgbClr val="D5E7DC"/>
+                      </a:solidFill>
+                    </a:lnT>
+                    <a:lnB w="9525">
+                      <a:solidFill>
+                        <a:srgbClr val="D5E7DC"/>
+                      </a:solidFill>
+                    </a:lnB>
+                    <a:solidFill>
+                      <a:srgbClr val="FFFFFF"/>
+                    </a:solidFill>
+                  </a:tcPr>
+                </a:tc>
+                <a:tc>
+                  <a:txBody>
+                    <a:bodyPr/>
+                    <a:lstStyle/>
+                    <a:p>
+                      <a:pPr rtl="1" algn="r"/>
+                      <a:r>
+                        <a:rPr lang="ar-SA" altLang="en-US" sz="1000" b="1" dirty="0">
+                          <a:solidFill>
+                            <a:srgbClr val="3E6350"/>
+                          </a:solidFill>
+                          <a:latin typeface="IBM Plex Sans Arabic"/>
+                          <a:cs typeface="IBM Plex Sans Arabic"/>
+                        </a:rPr>
+                        <a:t>24</a:t>
+                      </a:r>
+                    </a:p>
+                  </a:txBody>
+                  <a:tcPr marL="73152" marR="73152" marT="27432" marB="27432" anchor="ctr">
+                    <a:lnL w="9525">
+                      <a:solidFill>
+                        <a:srgbClr val="D5E7DC"/>
+                      </a:solidFill>
+                    </a:lnL>
+                    <a:lnR w="9525">
+                      <a:solidFill>
+                        <a:srgbClr val="D5E7DC"/>
+                      </a:solidFill>
+                    </a:lnR>
+                    <a:lnT w="9525">
+                      <a:solidFill>
+                        <a:srgbClr val="D5E7DC"/>
+                      </a:solidFill>
+                    </a:lnT>
+                    <a:lnB w="9525">
+                      <a:solidFill>
+                        <a:srgbClr val="D5E7DC"/>
+                      </a:solidFill>
+                    </a:lnB>
+                    <a:solidFill>
+                      <a:srgbClr val="FFFFFF"/>
+                    </a:solidFill>
+                  </a:tcPr>
+                </a:tc>
+              </a:tr>
+              <a:tr h="242316">
+                <a:tc>
+                  <a:txBody>
+                    <a:bodyPr/>
+                    <a:lstStyle/>
+                    <a:p>
+                      <a:pPr rtl="1" algn="r"/>
+                      <a:r>
+                        <a:rPr lang="ar-SA" altLang="en-US" sz="1000" dirty="0">
+                          <a:solidFill>
+                            <a:srgbClr val="1C3328"/>
+                          </a:solidFill>
+                          <a:latin typeface="IBM Plex Sans Arabic"/>
+                          <a:cs typeface="IBM Plex Sans Arabic"/>
+                        </a:rPr>
+                        <a:t>الطالب يُكمل: ثقافات العالم</a:t>
+                      </a:r>
+                    </a:p>
+                  </a:txBody>
+                  <a:tcPr marL="73152" marR="73152" marT="27432" marB="27432" anchor="ctr">
+                    <a:lnL w="9525">
+                      <a:solidFill>
+                        <a:srgbClr val="D5E7DC"/>
+                      </a:solidFill>
+                    </a:lnL>
+                    <a:lnR w="9525">
+                      <a:solidFill>
+                        <a:srgbClr val="D5E7DC"/>
+                      </a:solidFill>
+                    </a:lnR>
+                    <a:lnT w="9525">
+                      <a:solidFill>
+                        <a:srgbClr val="D5E7DC"/>
+                      </a:solidFill>
+                    </a:lnT>
+                    <a:lnB w="9525">
+                      <a:solidFill>
+                        <a:srgbClr val="D5E7DC"/>
+                      </a:solidFill>
+                    </a:lnB>
+                    <a:solidFill>
+                      <a:srgbClr val="F6FBF8"/>
+                    </a:solidFill>
+                  </a:tcPr>
+                </a:tc>
+                <a:tc>
+                  <a:txBody>
+                    <a:bodyPr/>
+                    <a:lstStyle/>
+                    <a:p>
+                      <a:pPr rtl="1" algn="r"/>
+                      <a:r>
+                        <a:rPr lang="ar-SA" altLang="en-US" sz="1000" dirty="0">
+                          <a:solidFill>
+                            <a:srgbClr val="1C3328"/>
+                          </a:solidFill>
+                          <a:latin typeface="IBM Plex Sans Arabic"/>
+                          <a:cs typeface="IBM Plex Sans Arabic"/>
+                        </a:rPr>
+                        <a:t>الاعتزاز بالثقافة واحترام التنوع الثقافي</a:t>
+                      </a:r>
+                    </a:p>
+                  </a:txBody>
+                  <a:tcPr marL="73152" marR="73152" marT="27432" marB="27432" anchor="ctr">
+                    <a:lnL w="9525">
+                      <a:solidFill>
+                        <a:srgbClr val="D5E7DC"/>
+                      </a:solidFill>
+                    </a:lnL>
+                    <a:lnR w="9525">
+                      <a:solidFill>
+                        <a:srgbClr val="D5E7DC"/>
+                      </a:solidFill>
+                    </a:lnR>
+                    <a:lnT w="9525">
+                      <a:solidFill>
+                        <a:srgbClr val="D5E7DC"/>
+                      </a:solidFill>
+                    </a:lnT>
+                    <a:lnB w="9525">
+                      <a:solidFill>
+                        <a:srgbClr val="D5E7DC"/>
+                      </a:solidFill>
+                    </a:lnB>
+                    <a:solidFill>
+                      <a:srgbClr val="F6FBF8"/>
+                    </a:solidFill>
+                  </a:tcPr>
+                </a:tc>
+                <a:tc>
+                  <a:txBody>
+                    <a:bodyPr/>
+                    <a:lstStyle/>
+                    <a:p>
+                      <a:pPr rtl="1" algn="r"/>
+                      <a:r>
+                        <a:rPr lang="ar-SA" altLang="en-US" sz="1000" b="1" dirty="0">
+                          <a:solidFill>
+                            <a:srgbClr val="3E6350"/>
+                          </a:solidFill>
+                          <a:latin typeface="IBM Plex Sans Arabic"/>
+                          <a:cs typeface="IBM Plex Sans Arabic"/>
+                        </a:rPr>
+                        <a:t>25</a:t>
+                      </a:r>
+                    </a:p>
+                  </a:txBody>
+                  <a:tcPr marL="73152" marR="73152" marT="27432" marB="27432" anchor="ctr">
+                    <a:lnL w="9525">
+                      <a:solidFill>
+                        <a:srgbClr val="D5E7DC"/>
+                      </a:solidFill>
+                    </a:lnL>
+                    <a:lnR w="9525">
+                      <a:solidFill>
+                        <a:srgbClr val="D5E7DC"/>
+                      </a:solidFill>
+                    </a:lnR>
+                    <a:lnT w="9525">
+                      <a:solidFill>
+                        <a:srgbClr val="D5E7DC"/>
+                      </a:solidFill>
+                    </a:lnT>
+                    <a:lnB w="9525">
+                      <a:solidFill>
+                        <a:srgbClr val="D5E7DC"/>
+                      </a:solidFill>
+                    </a:lnB>
+                    <a:solidFill>
+                      <a:srgbClr val="F6FBF8"/>
+                    </a:solidFill>
+                  </a:tcPr>
+                </a:tc>
+              </a:tr>
+            </a:tbl>
+          </a:graphicData>
+        </a:graphic>
+      </p:graphicFrame>
+    </p:spTree>
+  </p:cSld>
+  <p:clrMapOvr>
+    <a:masterClrMapping/>
+  </p:clrMapOvr>
+</p:sld>
+</file>
+
+<file path=ppt/slides/slide23.xml><?xml version="1.0" encoding="utf-8"?>
+<p:sld xmlns:a="http://schemas.openxmlformats.org/drawingml/2006/main" xmlns:r="http://schemas.openxmlformats.org/officeDocument/2006/relationships" xmlns:p="http://schemas.openxmlformats.org/presentationml/2006/main" show="0">
+  <p:cSld>
+    <p:spTree>
+      <p:nvGrpSpPr>
+        <p:cNvPr id="1" name=""/>
+        <p:cNvGrpSpPr/>
+        <p:nvPr/>
+      </p:nvGrpSpPr>
+      <p:grpSpPr>
+        <a:xfrm>
+          <a:off x="0" y="0"/>
+          <a:ext cx="0" cy="0"/>
+          <a:chOff x="0" y="0"/>
+          <a:chExt cx="0" cy="0"/>
+        </a:xfrm>
+      </p:grpSpPr>
+      <p:sp>
+        <p:nvSpPr>
+          <p:cNvPr id="2" name="Pill 2"/>
+          <p:cNvSpPr/>
+          <p:nvPr/>
+        </p:nvSpPr>
+        <p:spPr>
+          <a:xfrm>
+            <a:off x="7223760" y="868680"/>
+            <a:ext cx="1463040" cy="329184"/>
+          </a:xfrm>
+          <a:prstGeom prst="roundRect">
+            <a:avLst>
+              <a:gd name="adj" fmla="val 50000"/>
+            </a:avLst>
+          </a:prstGeom>
+          <a:solidFill>
+            <a:srgbClr val="89D7AD"/>
+          </a:solidFill>
+          <a:ln w="12700">
+            <a:solidFill>
+              <a:srgbClr val="89D7AD"/>
+            </a:solidFill>
+            <a:prstDash val="solid"/>
+          </a:ln>
+        </p:spPr>
+      </p:sp>
+      <p:sp>
+        <p:nvSpPr>
+          <p:cNvPr id="3" name="Label 3"/>
+          <p:cNvSpPr txBox="1"/>
+          <p:nvPr/>
+        </p:nvSpPr>
+        <p:spPr>
+          <a:xfrm>
+            <a:off x="7223760" y="868680"/>
+            <a:ext cx="1463040" cy="329184"/>
+          </a:xfrm>
+          <a:prstGeom prst="rect">
+            <a:avLst/>
+          </a:prstGeom>
+          <a:noFill/>
+        </p:spPr>
+        <p:txBody>
+          <a:bodyPr wrap="square" lIns="0" tIns="0" rIns="0" bIns="0" rtlCol="1" anchor="ctr"/>
+          <a:lstStyle/>
+          <a:p>
+            <a:pPr rtl="1" algn="ctr" marL="0" indent="0">
+              <a:buNone/>
+            </a:pPr>
+            <a:r>
+              <a:rPr lang="ar-SA" altLang="en-US" sz="1200" b="1" dirty="0">
+                <a:solidFill>
+                  <a:srgbClr val="16301F"/>
+                </a:solidFill>
+                <a:latin typeface="IBM Plex Sans Arabic"/>
+                <a:cs typeface="IBM Plex Sans Arabic"/>
+              </a:rPr>
               <a:t>حسب المادة</a:t>
             </a:r>
             <a:endParaRPr lang="ar-SA" sz="1200" dirty="0"/>
@@ -17206,8 +19067,8 @@
         </p:nvSpPr>
         <p:spPr>
           <a:xfrm>
-            <a:off x="6766560" y="2103120"/>
-            <a:ext cx="1920240" cy="1783080"/>
+            <a:off x="7210958" y="2103120"/>
+            <a:ext cx="1475842" cy="1783080"/>
           </a:xfrm>
           <a:prstGeom prst="roundRect">
             <a:avLst>
@@ -17240,8 +19101,8 @@
         </p:nvSpPr>
         <p:spPr>
           <a:xfrm>
-            <a:off x="7452360" y="2212848"/>
-            <a:ext cx="548640" cy="548640"/>
+            <a:off x="7697419" y="2212848"/>
+            <a:ext cx="502920" cy="502920"/>
           </a:xfrm>
           <a:prstGeom prst="ellipse">
             <a:avLst/>
@@ -17273,8 +19134,8 @@
         </p:blipFill>
         <p:spPr>
           <a:xfrm>
-            <a:off x="7571141" y="2331629"/>
-            <a:ext cx="311079" cy="311079"/>
+            <a:off x="7806301" y="2321730"/>
+            <a:ext cx="285156" cy="285156"/>
           </a:xfrm>
           <a:prstGeom prst="rect">
             <a:avLst/>
@@ -17289,8 +19150,8 @@
         </p:nvSpPr>
         <p:spPr>
           <a:xfrm>
-            <a:off x="6766560" y="2834640"/>
-            <a:ext cx="1920240" cy="365760"/>
+            <a:off x="7210958" y="2816352"/>
+            <a:ext cx="1475842" cy="365760"/>
           </a:xfrm>
           <a:prstGeom prst="rect">
             <a:avLst/>
@@ -17305,7 +19166,7 @@
               <a:buNone/>
             </a:pPr>
             <a:r>
-              <a:rPr lang="ar-SA" altLang="en-US" sz="1700" b="1" dirty="0">
+              <a:rPr lang="ar-SA" altLang="en-US" sz="1500" b="1" dirty="0">
                 <a:solidFill>
                   <a:srgbClr val="3E6350"/>
                 </a:solidFill>
@@ -17314,7 +19175,7 @@
               </a:rPr>
               <a:t>نُنصت باهتمام</a:t>
             </a:r>
-            <a:endParaRPr lang="ar-SA" sz="1700" dirty="0"/>
+            <a:endParaRPr lang="ar-SA" sz="1500" dirty="0"/>
           </a:p>
         </p:txBody>
       </p:sp>
@@ -17326,8 +19187,8 @@
         </p:nvSpPr>
         <p:spPr>
           <a:xfrm>
-            <a:off x="6903720" y="3218688"/>
-            <a:ext cx="1645920" cy="594360"/>
+            <a:off x="7302398" y="3200400"/>
+            <a:ext cx="1292962" cy="640080"/>
           </a:xfrm>
           <a:prstGeom prst="rect">
             <a:avLst/>
@@ -17339,10 +19200,13 @@
           <a:lstStyle/>
           <a:p>
             <a:pPr rtl="1" algn="ctr" marL="0" indent="0">
+              <a:lnSpc>
+                <a:spcPct val="105000"/>
+              </a:lnSpc>
               <a:buNone/>
             </a:pPr>
             <a:r>
-              <a:rPr lang="ar-SA" altLang="en-US" sz="1200" dirty="0">
+              <a:rPr lang="ar-SA" altLang="en-US" sz="1100" dirty="0">
                 <a:solidFill>
                   <a:srgbClr val="5E7268"/>
                 </a:solidFill>
@@ -17351,7 +19215,7 @@
               </a:rPr>
               <a:t>نستمع للمتحدث حتى يُنهي فكرته</a:t>
             </a:r>
-            <a:endParaRPr lang="ar-SA" sz="1200" dirty="0"/>
+            <a:endParaRPr lang="ar-SA" sz="1100" dirty="0"/>
           </a:p>
         </p:txBody>
       </p:sp>
@@ -17363,8 +19227,8 @@
         </p:nvSpPr>
         <p:spPr>
           <a:xfrm>
-            <a:off x="4764024" y="2103120"/>
-            <a:ext cx="1920240" cy="1783080"/>
+            <a:off x="5597957" y="2103120"/>
+            <a:ext cx="1475842" cy="1783080"/>
           </a:xfrm>
           <a:prstGeom prst="roundRect">
             <a:avLst>
@@ -17397,8 +19261,8 @@
         </p:nvSpPr>
         <p:spPr>
           <a:xfrm>
-            <a:off x="5449824" y="2212848"/>
-            <a:ext cx="548640" cy="548640"/>
+            <a:off x="6084418" y="2212848"/>
+            <a:ext cx="502920" cy="502920"/>
           </a:xfrm>
           <a:prstGeom prst="ellipse">
             <a:avLst/>
@@ -17430,8 +19294,8 @@
         </p:blipFill>
         <p:spPr>
           <a:xfrm>
-            <a:off x="5568605" y="2331629"/>
-            <a:ext cx="311079" cy="311079"/>
+            <a:off x="6193300" y="2321730"/>
+            <a:ext cx="285156" cy="285156"/>
           </a:xfrm>
           <a:prstGeom prst="rect">
             <a:avLst/>
@@ -17446,8 +19310,8 @@
         </p:nvSpPr>
         <p:spPr>
           <a:xfrm>
-            <a:off x="4764024" y="2834640"/>
-            <a:ext cx="1920240" cy="365760"/>
+            <a:off x="5597957" y="2816352"/>
+            <a:ext cx="1475842" cy="365760"/>
           </a:xfrm>
           <a:prstGeom prst="rect">
             <a:avLst/>
@@ -17462,7 +19326,7 @@
               <a:buNone/>
             </a:pPr>
             <a:r>
-              <a:rPr lang="ar-SA" altLang="en-US" sz="1700" b="1" dirty="0">
+              <a:rPr lang="ar-SA" altLang="en-US" sz="1500" b="1" dirty="0">
                 <a:solidFill>
                   <a:srgbClr val="3E6350"/>
                 </a:solidFill>
@@ -17471,7 +19335,7 @@
               </a:rPr>
               <a:t>نرفع أيدينا</a:t>
             </a:r>
-            <a:endParaRPr lang="ar-SA" sz="1700" dirty="0"/>
+            <a:endParaRPr lang="ar-SA" sz="1500" dirty="0"/>
           </a:p>
         </p:txBody>
       </p:sp>
@@ -17483,8 +19347,8 @@
         </p:nvSpPr>
         <p:spPr>
           <a:xfrm>
-            <a:off x="4901184" y="3218688"/>
-            <a:ext cx="1645920" cy="594360"/>
+            <a:off x="5689397" y="3200400"/>
+            <a:ext cx="1292962" cy="640080"/>
           </a:xfrm>
           <a:prstGeom prst="rect">
             <a:avLst/>
@@ -17496,10 +19360,13 @@
           <a:lstStyle/>
           <a:p>
             <a:pPr rtl="1" algn="ctr" marL="0" indent="0">
+              <a:lnSpc>
+                <a:spcPct val="105000"/>
+              </a:lnSpc>
               <a:buNone/>
             </a:pPr>
             <a:r>
-              <a:rPr lang="ar-SA" altLang="en-US" sz="1200" dirty="0">
+              <a:rPr lang="ar-SA" altLang="en-US" sz="1100" dirty="0">
                 <a:solidFill>
                   <a:srgbClr val="5E7268"/>
                 </a:solidFill>
@@ -17508,7 +19375,7 @@
               </a:rPr>
               <a:t>نستأذن قبل المشاركة ونحترم الدور</a:t>
             </a:r>
-            <a:endParaRPr lang="ar-SA" sz="1200" dirty="0"/>
+            <a:endParaRPr lang="ar-SA" sz="1100" dirty="0"/>
           </a:p>
         </p:txBody>
       </p:sp>
@@ -17520,8 +19387,8 @@
         </p:nvSpPr>
         <p:spPr>
           <a:xfrm>
-            <a:off x="2761488" y="2103120"/>
-            <a:ext cx="1920240" cy="1783080"/>
+            <a:off x="3984955" y="2103120"/>
+            <a:ext cx="1475842" cy="1783080"/>
           </a:xfrm>
           <a:prstGeom prst="roundRect">
             <a:avLst>
@@ -17554,8 +19421,8 @@
         </p:nvSpPr>
         <p:spPr>
           <a:xfrm>
-            <a:off x="3447288" y="2212848"/>
-            <a:ext cx="548640" cy="548640"/>
+            <a:off x="4471416" y="2212848"/>
+            <a:ext cx="502920" cy="502920"/>
           </a:xfrm>
           <a:prstGeom prst="ellipse">
             <a:avLst/>
@@ -17587,8 +19454,8 @@
         </p:blipFill>
         <p:spPr>
           <a:xfrm>
-            <a:off x="3566069" y="2331629"/>
-            <a:ext cx="311079" cy="311079"/>
+            <a:off x="4580298" y="2321730"/>
+            <a:ext cx="285156" cy="285156"/>
           </a:xfrm>
           <a:prstGeom prst="rect">
             <a:avLst/>
@@ -17603,8 +19470,8 @@
         </p:nvSpPr>
         <p:spPr>
           <a:xfrm>
-            <a:off x="2761488" y="2834640"/>
-            <a:ext cx="1920240" cy="365760"/>
+            <a:off x="3984955" y="2816352"/>
+            <a:ext cx="1475842" cy="365760"/>
           </a:xfrm>
           <a:prstGeom prst="rect">
             <a:avLst/>
@@ -17619,7 +19486,7 @@
               <a:buNone/>
             </a:pPr>
             <a:r>
-              <a:rPr lang="ar-SA" altLang="en-US" sz="1700" b="1" dirty="0">
+              <a:rPr lang="ar-SA" altLang="en-US" sz="1500" b="1" dirty="0">
                 <a:solidFill>
                   <a:srgbClr val="3E6350"/>
                 </a:solidFill>
@@ -17628,7 +19495,7 @@
               </a:rPr>
               <a:t>نلتزم بالوقت</a:t>
             </a:r>
-            <a:endParaRPr lang="ar-SA" sz="1700" dirty="0"/>
+            <a:endParaRPr lang="ar-SA" sz="1500" dirty="0"/>
           </a:p>
         </p:txBody>
       </p:sp>
@@ -17640,8 +19507,8 @@
         </p:nvSpPr>
         <p:spPr>
           <a:xfrm>
-            <a:off x="2898648" y="3218688"/>
-            <a:ext cx="1645920" cy="594360"/>
+            <a:off x="4076395" y="3200400"/>
+            <a:ext cx="1292962" cy="640080"/>
           </a:xfrm>
           <a:prstGeom prst="rect">
             <a:avLst/>
@@ -17653,10 +19520,13 @@
           <a:lstStyle/>
           <a:p>
             <a:pPr rtl="1" algn="ctr" marL="0" indent="0">
+              <a:lnSpc>
+                <a:spcPct val="105000"/>
+              </a:lnSpc>
               <a:buNone/>
             </a:pPr>
             <a:r>
-              <a:rPr lang="ar-SA" altLang="en-US" sz="1200" dirty="0">
+              <a:rPr lang="ar-SA" altLang="en-US" sz="1100" dirty="0">
                 <a:solidFill>
                   <a:srgbClr val="5E7268"/>
                 </a:solidFill>
@@ -17665,7 +19535,7 @@
               </a:rPr>
               <a:t>ننجز المهمة قبل انتهاء المؤقت</a:t>
             </a:r>
-            <a:endParaRPr lang="ar-SA" sz="1200" dirty="0"/>
+            <a:endParaRPr lang="ar-SA" sz="1100" dirty="0"/>
           </a:p>
         </p:txBody>
       </p:sp>
@@ -17677,8 +19547,8 @@
         </p:nvSpPr>
         <p:spPr>
           <a:xfrm>
-            <a:off x="758952" y="2103120"/>
-            <a:ext cx="1920240" cy="1783080"/>
+            <a:off x="2371954" y="2103120"/>
+            <a:ext cx="1475842" cy="1783080"/>
           </a:xfrm>
           <a:prstGeom prst="roundRect">
             <a:avLst>
@@ -17711,8 +19581,8 @@
         </p:nvSpPr>
         <p:spPr>
           <a:xfrm>
-            <a:off x="1444752" y="2212848"/>
-            <a:ext cx="548640" cy="548640"/>
+            <a:off x="2858414" y="2212848"/>
+            <a:ext cx="502920" cy="502920"/>
           </a:xfrm>
           <a:prstGeom prst="ellipse">
             <a:avLst/>
@@ -17744,8 +19614,8 @@
         </p:blipFill>
         <p:spPr>
           <a:xfrm>
-            <a:off x="1563533" y="2331629"/>
-            <a:ext cx="311079" cy="311079"/>
+            <a:off x="2967297" y="2321730"/>
+            <a:ext cx="285156" cy="285156"/>
           </a:xfrm>
           <a:prstGeom prst="rect">
             <a:avLst/>
@@ -17760,8 +19630,8 @@
         </p:nvSpPr>
         <p:spPr>
           <a:xfrm>
-            <a:off x="758952" y="2834640"/>
-            <a:ext cx="1920240" cy="365760"/>
+            <a:off x="2371954" y="2816352"/>
+            <a:ext cx="1475842" cy="365760"/>
           </a:xfrm>
           <a:prstGeom prst="rect">
             <a:avLst/>
@@ -17776,7 +19646,7 @@
               <a:buNone/>
             </a:pPr>
             <a:r>
-              <a:rPr lang="ar-SA" altLang="en-US" sz="1700" b="1" dirty="0">
+              <a:rPr lang="ar-SA" altLang="en-US" sz="1500" b="1" dirty="0">
                 <a:solidFill>
                   <a:srgbClr val="3E6350"/>
                 </a:solidFill>
@@ -17785,7 +19655,7 @@
               </a:rPr>
               <a:t>نتعاون ونحترم</a:t>
             </a:r>
-            <a:endParaRPr lang="ar-SA" sz="1700" dirty="0"/>
+            <a:endParaRPr lang="ar-SA" sz="1500" dirty="0"/>
           </a:p>
         </p:txBody>
       </p:sp>
@@ -17797,8 +19667,131 @@
         </p:nvSpPr>
         <p:spPr>
           <a:xfrm>
-            <a:off x="896112" y="3218688"/>
-            <a:ext cx="1645920" cy="594360"/>
+            <a:off x="2463394" y="3200400"/>
+            <a:ext cx="1292962" cy="640080"/>
+          </a:xfrm>
+          <a:prstGeom prst="rect">
+            <a:avLst/>
+          </a:prstGeom>
+          <a:noFill/>
+        </p:spPr>
+        <p:txBody>
+          <a:bodyPr wrap="square" lIns="0" tIns="0" rIns="0" bIns="0" rtlCol="1" anchor="t"/>
+          <a:lstStyle/>
+          <a:p>
+            <a:pPr rtl="1" algn="ctr" marL="0" indent="0">
+              <a:lnSpc>
+                <a:spcPct val="105000"/>
+              </a:lnSpc>
+              <a:buNone/>
+            </a:pPr>
+            <a:r>
+              <a:rPr lang="ar-SA" altLang="en-US" sz="1100" dirty="0">
+                <a:solidFill>
+                  <a:srgbClr val="5E7268"/>
+                </a:solidFill>
+                <a:latin typeface="IBM Plex Sans Arabic"/>
+                <a:cs typeface="IBM Plex Sans Arabic"/>
+              </a:rPr>
+              <a:t>النقد للفكرة لا للشخص، والخطأ فرصة للتعلم</a:t>
+            </a:r>
+            <a:endParaRPr lang="ar-SA" sz="1100" dirty="0"/>
+          </a:p>
+        </p:txBody>
+      </p:sp>
+      <p:sp>
+        <p:nvSpPr>
+          <p:cNvPr id="26" name="Card 26"/>
+          <p:cNvSpPr/>
+          <p:nvPr/>
+        </p:nvSpPr>
+        <p:spPr>
+          <a:xfrm>
+            <a:off x="758952" y="2103120"/>
+            <a:ext cx="1475842" cy="1783080"/>
+          </a:xfrm>
+          <a:prstGeom prst="roundRect">
+            <a:avLst>
+              <a:gd name="adj" fmla="val 6000"/>
+            </a:avLst>
+          </a:prstGeom>
+          <a:solidFill>
+            <a:srgbClr val="FFFFFF"/>
+          </a:solidFill>
+          <a:ln w="12700">
+            <a:solidFill>
+              <a:srgbClr val="D5E7DC"/>
+            </a:solidFill>
+            <a:prstDash val="solid"/>
+          </a:ln>
+          <a:effectLst>
+            <a:outerShdw blurRad="127000" dist="38100" dir="5400000" algn="bl" rotWithShape="0">
+              <a:srgbClr val="3E6350">
+                <a:alpha val="12000"/>
+              </a:srgbClr>
+            </a:outerShdw>
+          </a:effectLst>
+        </p:spPr>
+      </p:sp>
+      <p:sp>
+        <p:nvSpPr>
+          <p:cNvPr id="27" name="Circle 27"/>
+          <p:cNvSpPr/>
+          <p:nvPr/>
+        </p:nvSpPr>
+        <p:spPr>
+          <a:xfrm>
+            <a:off x="1245413" y="2212848"/>
+            <a:ext cx="502920" cy="502920"/>
+          </a:xfrm>
+          <a:prstGeom prst="ellipse">
+            <a:avLst/>
+          </a:prstGeom>
+          <a:solidFill>
+            <a:srgbClr val="89D7AD"/>
+          </a:solidFill>
+          <a:ln w="12700">
+            <a:solidFill>
+              <a:srgbClr val="89D7AD"/>
+            </a:solidFill>
+            <a:prstDash val="solid"/>
+          </a:ln>
+        </p:spPr>
+      </p:sp>
+      <p:pic>
+        <p:nvPicPr>
+          <p:cNvPr id="28" name="Image 28" descr="ShieldCheck"/>
+          <p:cNvPicPr>
+            <a:picLocks noChangeAspect="1"/>
+          </p:cNvPicPr>
+          <p:nvPr/>
+        </p:nvPicPr>
+        <p:blipFill>
+          <a:blip r:embed="rId5"/>
+          <a:stretch>
+            <a:fillRect/>
+          </a:stretch>
+        </p:blipFill>
+        <p:spPr>
+          <a:xfrm>
+            <a:off x="1354295" y="2321730"/>
+            <a:ext cx="285156" cy="285156"/>
+          </a:xfrm>
+          <a:prstGeom prst="rect">
+            <a:avLst/>
+          </a:prstGeom>
+        </p:spPr>
+      </p:pic>
+      <p:sp>
+        <p:nvSpPr>
+          <p:cNvPr id="29" name="Text 29"/>
+          <p:cNvSpPr txBox="1"/>
+          <p:nvPr/>
+        </p:nvSpPr>
+        <p:spPr>
+          <a:xfrm>
+            <a:off x="758952" y="2816352"/>
+            <a:ext cx="1475842" cy="365760"/>
           </a:xfrm>
           <a:prstGeom prst="rect">
             <a:avLst/>
@@ -17813,22 +19806,62 @@
               <a:buNone/>
             </a:pPr>
             <a:r>
-              <a:rPr lang="ar-SA" altLang="en-US" sz="1200" dirty="0">
+              <a:rPr lang="ar-SA" altLang="en-US" sz="1500" b="1" dirty="0">
+                <a:solidFill>
+                  <a:srgbClr val="3E6350"/>
+                </a:solidFill>
+                <a:latin typeface="IBM Plex Sans Arabic"/>
+                <a:cs typeface="IBM Plex Sans Arabic"/>
+              </a:rPr>
+              <a:t>نحافظ على صحتنا</a:t>
+            </a:r>
+            <a:endParaRPr lang="ar-SA" sz="1500" dirty="0"/>
+          </a:p>
+        </p:txBody>
+      </p:sp>
+      <p:sp>
+        <p:nvSpPr>
+          <p:cNvPr id="30" name="Text 30"/>
+          <p:cNvSpPr txBox="1"/>
+          <p:nvPr/>
+        </p:nvSpPr>
+        <p:spPr>
+          <a:xfrm>
+            <a:off x="850392" y="3200400"/>
+            <a:ext cx="1292962" cy="640080"/>
+          </a:xfrm>
+          <a:prstGeom prst="rect">
+            <a:avLst/>
+          </a:prstGeom>
+          <a:noFill/>
+        </p:spPr>
+        <p:txBody>
+          <a:bodyPr wrap="square" lIns="0" tIns="0" rIns="0" bIns="0" rtlCol="1" anchor="t"/>
+          <a:lstStyle/>
+          <a:p>
+            <a:pPr rtl="1" algn="ctr" marL="0" indent="0">
+              <a:lnSpc>
+                <a:spcPct val="105000"/>
+              </a:lnSpc>
+              <a:buNone/>
+            </a:pPr>
+            <a:r>
+              <a:rPr lang="ar-SA" altLang="en-US" sz="1100" dirty="0">
                 <a:solidFill>
                   <a:srgbClr val="5E7268"/>
                 </a:solidFill>
                 <a:latin typeface="IBM Plex Sans Arabic"/>
                 <a:cs typeface="IBM Plex Sans Arabic"/>
               </a:rPr>
-              <a:t>النقد للفكرة لا للشخص</a:t>
-            </a:r>
-            <a:endParaRPr lang="ar-SA" sz="1200" dirty="0"/>
-          </a:p>
-        </p:txBody>
-      </p:sp>
-      <p:sp>
-        <p:nvSpPr>
-          <p:cNvPr id="26" name="Card 26"/>
+              <a:t>جلسة صحيحة، ومكان نظيف ومرتب</a:t>
+            </a:r>
+            <a:endParaRPr lang="ar-SA" sz="1100" dirty="0"/>
+          </a:p>
+        </p:txBody>
+      </p:sp>
+      <p:sp>
+        <p:nvSpPr>
+          <p:cNvPr id="31" name="Card 31"/>
           <p:cNvSpPr/>
           <p:nvPr/>
         </p:nvSpPr>
@@ -17862,14 +19895,14 @@
       </p:sp>
       <p:pic>
         <p:nvPicPr>
-          <p:cNvPr id="27" name="Image 27" descr="كأس"/>
+          <p:cNvPr id="32" name="Image 32" descr="كأس"/>
           <p:cNvPicPr>
             <a:picLocks noChangeAspect="1"/>
           </p:cNvPicPr>
           <p:nvPr/>
         </p:nvPicPr>
         <p:blipFill>
-          <a:blip r:embed="rId5"/>
+          <a:blip r:embed="rId6"/>
           <a:stretch>
             <a:fillRect/>
           </a:stretch>
@@ -17886,7 +19919,7 @@
       </p:pic>
       <p:sp>
         <p:nvSpPr>
-          <p:cNvPr id="28" name="Text 28"/>
+          <p:cNvPr id="33" name="Text 33"/>
           <p:cNvSpPr txBox="1"/>
           <p:nvPr/>
         </p:nvSpPr>

--- a/docs/model-lesson/model-lesson-template.pptx
+++ b/docs/model-lesson/model-lesson-template.pptx
@@ -2233,7 +2233,7 @@
             <a:pPr rtl="1" algn="r"/>
             <a:r>
               <a:rPr lang="ar-SA" dirty="0"/>
-              <a:t>نقاط المجموعات: ارسم جدولًا صغيرًا على طرف السبورة بأسماء الفرق، وأضف النجوم أثناء الحصة، وأعلن الفائز في الغلق. هذا يخدم بند «أساليب التحفيز» (الثناء والمكافأة والاحتفاء بالمنجزات).</a:t>
+              <a:t>نقاط المجموعات: ارسم جدولًا صغيرًا على طرف السبورة بأسماء الفرق، وأضف النجوم أثناء الحصة، وأعلن الفائز في خلاصة الحصة. هذا يخدم بند «أساليب التحفيز» (الثناء والمكافأة والاحتفاء بالمنجزات).</a:t>
             </a:r>
           </a:p>
           <a:p>
@@ -2434,7 +2434,7 @@
             <a:pPr rtl="1" algn="r"/>
             <a:r>
               <a:rPr lang="ar-SA" dirty="0"/>
-              <a:t>عُد إلى العمود الثالث في الغلق؛ ربط بداية الحصة بنهايتها يُظهر للمقيّم تخطيطًا متماسكًا.</a:t>
+              <a:t>عُد إلى العمود الثالث في خلاصة الحصة؛ ربط بداية الحصة بنهايتها يُظهر للمقيّم تخطيطًا متماسكًا.</a:t>
             </a:r>
           </a:p>
           <a:p>
@@ -9909,7 +9909,7 @@
                 <a:latin typeface="IBM Plex Sans Arabic"/>
                 <a:cs typeface="IBM Plex Sans Arabic"/>
               </a:rPr>
-              <a:t>الغلق</a:t>
+              <a:t>الخلاصة</a:t>
             </a:r>
             <a:endParaRPr lang="ar-SA" sz="1200" dirty="0"/>
           </a:p>
@@ -12263,7 +12263,7 @@
                 <a:latin typeface="IBM Plex Sans Arabic"/>
                 <a:cs typeface="IBM Plex Sans Arabic"/>
               </a:rPr>
-              <a:t>الشرح والنمذجة</a:t>
+              <a:t>الشرح بالمثال</a:t>
             </a:r>
             <a:endParaRPr lang="ar-SA" sz="1100" dirty="0"/>
           </a:p>
@@ -12819,7 +12819,7 @@
                 <a:latin typeface="IBM Plex Sans Arabic"/>
                 <a:cs typeface="IBM Plex Sans Arabic"/>
               </a:rPr>
-              <a:t>الغلق والواجب</a:t>
+              <a:t>الخلاصة والواجب</a:t>
             </a:r>
             <a:endParaRPr lang="ar-SA" sz="1100" dirty="0"/>
           </a:p>
@@ -14116,7 +14116,7 @@
                           <a:latin typeface="IBM Plex Sans Arabic"/>
                           <a:cs typeface="IBM Plex Sans Arabic"/>
                         </a:rPr>
-                        <a:t>الأهداف، والنمذجة، والتعاوني</a:t>
+                        <a:t>الأهداف، والشرح بالمثال، والتعاوني</a:t>
                       </a:r>
                     </a:p>
                   </a:txBody>
@@ -23429,7 +23429,7 @@
                 <a:latin typeface="IBM Plex Sans Arabic"/>
                 <a:cs typeface="IBM Plex Sans Arabic"/>
               </a:rPr>
-              <a:t>الشرح والنمذجة</a:t>
+              <a:t>الشرح بالمثال</a:t>
             </a:r>
             <a:endParaRPr lang="ar-SA" sz="3000" dirty="0"/>
           </a:p>

--- a/docs/model-lesson/model-lesson-template.pptx
+++ b/docs/model-lesson/model-lesson-template.pptx
@@ -1461,7 +1461,7 @@
             <a:pPr rtl="1" algn="r"/>
             <a:r>
               <a:rPr lang="ar-SA" dirty="0"/>
-              <a:t>استعملها في الخلاصة للإعلان عن النتيجة: انقر على اسم كل مجموعة بعدد نجومها التي سجّلتها على السبورة أثناء الحصة، ثم احتفِ بالفائز.</a:t>
+              <a:t>استعملها في الخلاصة للإعلان عن النتيجة: انقر على النجوم الفارغة لكل مجموعة بعدد نجومها التي سجّلتها على السبورة أثناء الحصة، ثم احتفِ بالفائز.</a:t>
             </a:r>
           </a:p>
           <a:p>
@@ -5896,7 +5896,7 @@
         <p:cTn id="1" dur="indefinite" restart="never" nodeType="tmRoot">
           <p:childTnLst>
             <p:seq concurrent="1" nextAc="seek">
-              <p:cTn id="3" restart="whenNotActive" fill="hold" evtFilter="cancelBubble" nodeType="interactiveSeq">
+              <p:cTn id="2" restart="whenNotActive" fill="hold" evtFilter="cancelBubble" nodeType="interactiveSeq">
                 <p:stCondLst>
                   <p:cond evt="onClick" delay="0">
                     <p:tgtEl>
@@ -5909,9 +5909,9 @@
                 </p:endSync>
                 <p:childTnLst>
                   <p:par>
-                    <p:cTn id="15" fill="hold">
+                    <p:cTn id="3" fill="hold">
                       <p:stCondLst>
-                        <p:cond delay="indefinite"/>
+                        <p:cond delay="0"/>
                       </p:stCondLst>
                       <p:childTnLst>
                         <p:par>
@@ -5921,14 +5921,14 @@
                             </p:stCondLst>
                             <p:childTnLst>
                               <p:par>
-                                <p:cTn id="7" presetID="22" presetClass="exit" presetSubtype="8" fill="hold" grpId="0" nodeType="clickEffect">
+                                <p:cTn id="5" presetID="22" presetClass="exit" presetSubtype="8" fill="hold" grpId="0" nodeType="clickEffect">
                                   <p:stCondLst>
                                     <p:cond delay="0"/>
                                   </p:stCondLst>
                                   <p:childTnLst>
                                     <p:animEffect transition="out" filter="wipe(left)">
                                       <p:cBhvr>
-                                        <p:cTn id="5" dur="720000"/>
+                                        <p:cTn id="6" dur="720000"/>
                                         <p:tgtEl>
                                           <p:spTgt spid="7"/>
                                         </p:tgtEl>
@@ -5936,7 +5936,7 @@
                                     </p:animEffect>
                                     <p:set>
                                       <p:cBhvr>
-                                        <p:cTn id="6" dur="1" fill="hold">
+                                        <p:cTn id="7" dur="1" fill="hold">
                                           <p:stCondLst>
                                             <p:cond delay="719999"/>
                                           </p:stCondLst>
@@ -5965,14 +5965,14 @@
                             </p:stCondLst>
                             <p:childTnLst>
                               <p:par>
-                                <p:cTn id="11" presetID="10" presetClass="entr" presetSubtype="0" fill="hold" grpId="0" nodeType="afterEffect">
+                                <p:cTn id="9" presetID="10" presetClass="entr" presetSubtype="0" fill="hold" grpId="0" nodeType="afterEffect">
                                   <p:stCondLst>
                                     <p:cond delay="0"/>
                                   </p:stCondLst>
                                   <p:childTnLst>
                                     <p:set>
                                       <p:cBhvr>
-                                        <p:cTn id="9" dur="1" fill="hold">
+                                        <p:cTn id="10" dur="1" fill="hold">
                                           <p:stCondLst>
                                             <p:cond delay="0"/>
                                           </p:stCondLst>
@@ -5990,7 +5990,7 @@
                                     </p:set>
                                     <p:animEffect transition="in" filter="fade">
                                       <p:cBhvr>
-                                        <p:cTn id="10" dur="500"/>
+                                        <p:cTn id="11" dur="500"/>
                                         <p:tgtEl>
                                           <p:spTgt spid="8"/>
                                         </p:tgtEl>
@@ -6000,14 +6000,14 @@
                                 </p:cTn>
                               </p:par>
                               <p:par>
-                                <p:cTn id="14" presetID="10" presetClass="entr" presetSubtype="0" fill="hold" grpId="0" nodeType="withEffect">
+                                <p:cTn id="12" presetID="10" presetClass="entr" presetSubtype="0" fill="hold" grpId="0" nodeType="withEffect">
                                   <p:stCondLst>
                                     <p:cond delay="0"/>
                                   </p:stCondLst>
                                   <p:childTnLst>
                                     <p:set>
                                       <p:cBhvr>
-                                        <p:cTn id="12" dur="1" fill="hold">
+                                        <p:cTn id="13" dur="1" fill="hold">
                                           <p:stCondLst>
                                             <p:cond delay="0"/>
                                           </p:stCondLst>
@@ -6025,7 +6025,7 @@
                                     </p:set>
                                     <p:animEffect transition="in" filter="fade">
                                       <p:cBhvr>
-                                        <p:cTn id="13" dur="500"/>
+                                        <p:cTn id="14" dur="500"/>
                                         <p:tgtEl>
                                           <p:spTgt spid="9"/>
                                         </p:tgtEl>
@@ -7591,10 +7591,10 @@
         <p:cTn id="1" dur="indefinite" restart="never" nodeType="tmRoot">
           <p:childTnLst>
             <p:seq concurrent="1" nextAc="seek">
-              <p:cTn id="3" dur="indefinite" nodeType="mainSeq">
+              <p:cTn id="2" dur="indefinite" nodeType="mainSeq">
                 <p:childTnLst>
                   <p:par>
-                    <p:cTn id="15" fill="hold">
+                    <p:cTn id="3" fill="hold">
                       <p:stCondLst>
                         <p:cond delay="indefinite"/>
                       </p:stCondLst>
@@ -7606,14 +7606,14 @@
                             </p:stCondLst>
                             <p:childTnLst>
                               <p:par>
-                                <p:cTn id="7" presetID="22" presetClass="exit" presetSubtype="8" fill="hold" grpId="0" nodeType="clickEffect">
+                                <p:cTn id="5" presetID="22" presetClass="exit" presetSubtype="8" fill="hold" grpId="0" nodeType="clickEffect">
                                   <p:stCondLst>
                                     <p:cond delay="0"/>
                                   </p:stCondLst>
                                   <p:childTnLst>
                                     <p:animEffect transition="out" filter="wipe(left)">
                                       <p:cBhvr>
-                                        <p:cTn id="5" dur="5000"/>
+                                        <p:cTn id="6" dur="5000"/>
                                         <p:tgtEl>
                                           <p:spTgt spid="4"/>
                                         </p:tgtEl>
@@ -7621,7 +7621,7 @@
                                     </p:animEffect>
                                     <p:set>
                                       <p:cBhvr>
-                                        <p:cTn id="6" dur="1" fill="hold">
+                                        <p:cTn id="7" dur="1" fill="hold">
                                           <p:stCondLst>
                                             <p:cond delay="4999"/>
                                           </p:stCondLst>
@@ -7641,14 +7641,14 @@
                                 </p:cTn>
                               </p:par>
                               <p:par>
-                                <p:cTn id="10" presetID="22" presetClass="exit" presetSubtype="8" fill="hold" grpId="0" nodeType="withEffect">
+                                <p:cTn id="8" presetID="22" presetClass="exit" presetSubtype="8" fill="hold" grpId="0" nodeType="withEffect">
                                   <p:stCondLst>
                                     <p:cond delay="0"/>
                                   </p:stCondLst>
                                   <p:childTnLst>
                                     <p:animEffect transition="out" filter="wipe(left)">
                                       <p:cBhvr>
-                                        <p:cTn id="8" dur="5000"/>
+                                        <p:cTn id="9" dur="5000"/>
                                         <p:tgtEl>
                                           <p:spTgt spid="5"/>
                                         </p:tgtEl>
@@ -7656,7 +7656,7 @@
                                     </p:animEffect>
                                     <p:set>
                                       <p:cBhvr>
-                                        <p:cTn id="9" dur="1" fill="hold">
+                                        <p:cTn id="10" dur="1" fill="hold">
                                           <p:stCondLst>
                                             <p:cond delay="4999"/>
                                           </p:stCondLst>
@@ -7685,14 +7685,14 @@
                             </p:stCondLst>
                             <p:childTnLst>
                               <p:par>
-                                <p:cTn id="14" presetID="10" presetClass="entr" presetSubtype="0" fill="hold" grpId="0" nodeType="afterEffect">
+                                <p:cTn id="12" presetID="10" presetClass="entr" presetSubtype="0" fill="hold" grpId="0" nodeType="afterEffect">
                                   <p:stCondLst>
                                     <p:cond delay="0"/>
                                   </p:stCondLst>
                                   <p:childTnLst>
                                     <p:set>
                                       <p:cBhvr>
-                                        <p:cTn id="12" dur="1" fill="hold">
+                                        <p:cTn id="13" dur="1" fill="hold">
                                           <p:stCondLst>
                                             <p:cond delay="0"/>
                                           </p:stCondLst>
@@ -7710,7 +7710,7 @@
                                     </p:set>
                                     <p:animEffect transition="in" filter="fade">
                                       <p:cBhvr>
-                                        <p:cTn id="13" dur="500"/>
+                                        <p:cTn id="14" dur="500"/>
                                         <p:tgtEl>
                                           <p:spTgt spid="6"/>
                                         </p:tgtEl>
@@ -10015,7 +10015,7 @@
         <p:cTn id="1" dur="indefinite" restart="never" nodeType="tmRoot">
           <p:childTnLst>
             <p:seq concurrent="1" nextAc="seek">
-              <p:cTn id="3" restart="whenNotActive" fill="hold" evtFilter="cancelBubble" nodeType="interactiveSeq">
+              <p:cTn id="2" restart="whenNotActive" fill="hold" evtFilter="cancelBubble" nodeType="interactiveSeq">
                 <p:stCondLst>
                   <p:cond evt="onClick" delay="0">
                     <p:tgtEl>
@@ -10028,9 +10028,9 @@
                 </p:endSync>
                 <p:childTnLst>
                   <p:par>
-                    <p:cTn id="15" fill="hold">
+                    <p:cTn id="3" fill="hold">
                       <p:stCondLst>
-                        <p:cond delay="indefinite"/>
+                        <p:cond delay="0"/>
                       </p:stCondLst>
                       <p:childTnLst>
                         <p:par>
@@ -10040,14 +10040,14 @@
                             </p:stCondLst>
                             <p:childTnLst>
                               <p:par>
-                                <p:cTn id="7" presetID="22" presetClass="exit" presetSubtype="8" fill="hold" grpId="0" nodeType="clickEffect">
+                                <p:cTn id="5" presetID="22" presetClass="exit" presetSubtype="8" fill="hold" grpId="0" nodeType="clickEffect">
                                   <p:stCondLst>
                                     <p:cond delay="0"/>
                                   </p:stCondLst>
                                   <p:childTnLst>
                                     <p:animEffect transition="out" filter="wipe(left)">
                                       <p:cBhvr>
-                                        <p:cTn id="5" dur="480000"/>
+                                        <p:cTn id="6" dur="480000"/>
                                         <p:tgtEl>
                                           <p:spTgt spid="7"/>
                                         </p:tgtEl>
@@ -10055,7 +10055,7 @@
                                     </p:animEffect>
                                     <p:set>
                                       <p:cBhvr>
-                                        <p:cTn id="6" dur="1" fill="hold">
+                                        <p:cTn id="7" dur="1" fill="hold">
                                           <p:stCondLst>
                                             <p:cond delay="479999"/>
                                           </p:stCondLst>
@@ -10084,14 +10084,14 @@
                             </p:stCondLst>
                             <p:childTnLst>
                               <p:par>
-                                <p:cTn id="11" presetID="10" presetClass="entr" presetSubtype="0" fill="hold" grpId="0" nodeType="afterEffect">
+                                <p:cTn id="9" presetID="10" presetClass="entr" presetSubtype="0" fill="hold" grpId="0" nodeType="afterEffect">
                                   <p:stCondLst>
                                     <p:cond delay="0"/>
                                   </p:stCondLst>
                                   <p:childTnLst>
                                     <p:set>
                                       <p:cBhvr>
-                                        <p:cTn id="9" dur="1" fill="hold">
+                                        <p:cTn id="10" dur="1" fill="hold">
                                           <p:stCondLst>
                                             <p:cond delay="0"/>
                                           </p:stCondLst>
@@ -10109,7 +10109,7 @@
                                     </p:set>
                                     <p:animEffect transition="in" filter="fade">
                                       <p:cBhvr>
-                                        <p:cTn id="10" dur="500"/>
+                                        <p:cTn id="11" dur="500"/>
                                         <p:tgtEl>
                                           <p:spTgt spid="8"/>
                                         </p:tgtEl>
@@ -10119,14 +10119,14 @@
                                 </p:cTn>
                               </p:par>
                               <p:par>
-                                <p:cTn id="14" presetID="10" presetClass="entr" presetSubtype="0" fill="hold" grpId="0" nodeType="withEffect">
+                                <p:cTn id="12" presetID="10" presetClass="entr" presetSubtype="0" fill="hold" grpId="0" nodeType="withEffect">
                                   <p:stCondLst>
                                     <p:cond delay="0"/>
                                   </p:stCondLst>
                                   <p:childTnLst>
                                     <p:set>
                                       <p:cBhvr>
-                                        <p:cTn id="12" dur="1" fill="hold">
+                                        <p:cTn id="13" dur="1" fill="hold">
                                           <p:stCondLst>
                                             <p:cond delay="0"/>
                                           </p:stCondLst>
@@ -10144,7 +10144,7 @@
                                     </p:set>
                                     <p:animEffect transition="in" filter="fade">
                                       <p:cBhvr>
-                                        <p:cTn id="13" dur="500"/>
+                                        <p:cTn id="14" dur="500"/>
                                         <p:tgtEl>
                                           <p:spTgt spid="9"/>
                                         </p:tgtEl>
@@ -11131,7 +11131,7 @@
         <p:cTn id="1" dur="indefinite" restart="never" nodeType="tmRoot">
           <p:childTnLst>
             <p:seq concurrent="1" nextAc="seek">
-              <p:cTn id="3" restart="whenNotActive" fill="hold" evtFilter="cancelBubble" nodeType="interactiveSeq">
+              <p:cTn id="2" restart="whenNotActive" fill="hold" evtFilter="cancelBubble" nodeType="interactiveSeq">
                 <p:stCondLst>
                   <p:cond evt="onClick" delay="0">
                     <p:tgtEl>
@@ -11144,9 +11144,9 @@
                 </p:endSync>
                 <p:childTnLst>
                   <p:par>
-                    <p:cTn id="15" fill="hold">
+                    <p:cTn id="3" fill="hold">
                       <p:stCondLst>
-                        <p:cond delay="indefinite"/>
+                        <p:cond delay="0"/>
                       </p:stCondLst>
                       <p:childTnLst>
                         <p:par>
@@ -11156,14 +11156,14 @@
                             </p:stCondLst>
                             <p:childTnLst>
                               <p:par>
-                                <p:cTn id="7" presetID="22" presetClass="exit" presetSubtype="8" fill="hold" grpId="0" nodeType="clickEffect">
+                                <p:cTn id="5" presetID="22" presetClass="exit" presetSubtype="8" fill="hold" grpId="0" nodeType="clickEffect">
                                   <p:stCondLst>
                                     <p:cond delay="0"/>
                                   </p:stCondLst>
                                   <p:childTnLst>
                                     <p:animEffect transition="out" filter="wipe(left)">
                                       <p:cBhvr>
-                                        <p:cTn id="5" dur="420000"/>
+                                        <p:cTn id="6" dur="420000"/>
                                         <p:tgtEl>
                                           <p:spTgt spid="7"/>
                                         </p:tgtEl>
@@ -11171,7 +11171,7 @@
                                     </p:animEffect>
                                     <p:set>
                                       <p:cBhvr>
-                                        <p:cTn id="6" dur="1" fill="hold">
+                                        <p:cTn id="7" dur="1" fill="hold">
                                           <p:stCondLst>
                                             <p:cond delay="419999"/>
                                           </p:stCondLst>
@@ -11200,14 +11200,14 @@
                             </p:stCondLst>
                             <p:childTnLst>
                               <p:par>
-                                <p:cTn id="11" presetID="10" presetClass="entr" presetSubtype="0" fill="hold" grpId="0" nodeType="afterEffect">
+                                <p:cTn id="9" presetID="10" presetClass="entr" presetSubtype="0" fill="hold" grpId="0" nodeType="afterEffect">
                                   <p:stCondLst>
                                     <p:cond delay="0"/>
                                   </p:stCondLst>
                                   <p:childTnLst>
                                     <p:set>
                                       <p:cBhvr>
-                                        <p:cTn id="9" dur="1" fill="hold">
+                                        <p:cTn id="10" dur="1" fill="hold">
                                           <p:stCondLst>
                                             <p:cond delay="0"/>
                                           </p:stCondLst>
@@ -11225,7 +11225,7 @@
                                     </p:set>
                                     <p:animEffect transition="in" filter="fade">
                                       <p:cBhvr>
-                                        <p:cTn id="10" dur="500"/>
+                                        <p:cTn id="11" dur="500"/>
                                         <p:tgtEl>
                                           <p:spTgt spid="8"/>
                                         </p:tgtEl>
@@ -11235,14 +11235,14 @@
                                 </p:cTn>
                               </p:par>
                               <p:par>
-                                <p:cTn id="14" presetID="10" presetClass="entr" presetSubtype="0" fill="hold" grpId="0" nodeType="withEffect">
+                                <p:cTn id="12" presetID="10" presetClass="entr" presetSubtype="0" fill="hold" grpId="0" nodeType="withEffect">
                                   <p:stCondLst>
                                     <p:cond delay="0"/>
                                   </p:stCondLst>
                                   <p:childTnLst>
                                     <p:set>
                                       <p:cBhvr>
-                                        <p:cTn id="12" dur="1" fill="hold">
+                                        <p:cTn id="13" dur="1" fill="hold">
                                           <p:stCondLst>
                                             <p:cond delay="0"/>
                                           </p:stCondLst>
@@ -11260,7 +11260,7 @@
                                     </p:set>
                                     <p:animEffect transition="in" filter="fade">
                                       <p:cBhvr>
-                                        <p:cTn id="13" dur="500"/>
+                                        <p:cTn id="14" dur="500"/>
                                         <p:tgtEl>
                                           <p:spTgt spid="9"/>
                                         </p:tgtEl>
@@ -12207,7 +12207,7 @@
         <p:cTn id="1" dur="indefinite" restart="never" nodeType="tmRoot">
           <p:childTnLst>
             <p:seq concurrent="1" nextAc="seek">
-              <p:cTn id="3" restart="whenNotActive" fill="hold" evtFilter="cancelBubble" nodeType="interactiveSeq">
+              <p:cTn id="2" restart="whenNotActive" fill="hold" evtFilter="cancelBubble" nodeType="interactiveSeq">
                 <p:stCondLst>
                   <p:cond evt="onClick" delay="0">
                     <p:tgtEl>
@@ -12220,9 +12220,9 @@
                 </p:endSync>
                 <p:childTnLst>
                   <p:par>
-                    <p:cTn id="15" fill="hold">
+                    <p:cTn id="3" fill="hold">
                       <p:stCondLst>
-                        <p:cond delay="indefinite"/>
+                        <p:cond delay="0"/>
                       </p:stCondLst>
                       <p:childTnLst>
                         <p:par>
@@ -12232,14 +12232,14 @@
                             </p:stCondLst>
                             <p:childTnLst>
                               <p:par>
-                                <p:cTn id="7" presetID="22" presetClass="exit" presetSubtype="8" fill="hold" grpId="0" nodeType="clickEffect">
+                                <p:cTn id="5" presetID="22" presetClass="exit" presetSubtype="8" fill="hold" grpId="0" nodeType="clickEffect">
                                   <p:stCondLst>
                                     <p:cond delay="0"/>
                                   </p:stCondLst>
                                   <p:childTnLst>
                                     <p:animEffect transition="out" filter="wipe(left)">
                                       <p:cBhvr>
-                                        <p:cTn id="5" dur="300000"/>
+                                        <p:cTn id="6" dur="300000"/>
                                         <p:tgtEl>
                                           <p:spTgt spid="7"/>
                                         </p:tgtEl>
@@ -12247,7 +12247,7 @@
                                     </p:animEffect>
                                     <p:set>
                                       <p:cBhvr>
-                                        <p:cTn id="6" dur="1" fill="hold">
+                                        <p:cTn id="7" dur="1" fill="hold">
                                           <p:stCondLst>
                                             <p:cond delay="299999"/>
                                           </p:stCondLst>
@@ -12276,14 +12276,14 @@
                             </p:stCondLst>
                             <p:childTnLst>
                               <p:par>
-                                <p:cTn id="11" presetID="10" presetClass="entr" presetSubtype="0" fill="hold" grpId="0" nodeType="afterEffect">
+                                <p:cTn id="9" presetID="10" presetClass="entr" presetSubtype="0" fill="hold" grpId="0" nodeType="afterEffect">
                                   <p:stCondLst>
                                     <p:cond delay="0"/>
                                   </p:stCondLst>
                                   <p:childTnLst>
                                     <p:set>
                                       <p:cBhvr>
-                                        <p:cTn id="9" dur="1" fill="hold">
+                                        <p:cTn id="10" dur="1" fill="hold">
                                           <p:stCondLst>
                                             <p:cond delay="0"/>
                                           </p:stCondLst>
@@ -12301,7 +12301,7 @@
                                     </p:set>
                                     <p:animEffect transition="in" filter="fade">
                                       <p:cBhvr>
-                                        <p:cTn id="10" dur="500"/>
+                                        <p:cTn id="11" dur="500"/>
                                         <p:tgtEl>
                                           <p:spTgt spid="8"/>
                                         </p:tgtEl>
@@ -12311,14 +12311,14 @@
                                 </p:cTn>
                               </p:par>
                               <p:par>
-                                <p:cTn id="14" presetID="10" presetClass="entr" presetSubtype="0" fill="hold" grpId="0" nodeType="withEffect">
+                                <p:cTn id="12" presetID="10" presetClass="entr" presetSubtype="0" fill="hold" grpId="0" nodeType="withEffect">
                                   <p:stCondLst>
                                     <p:cond delay="0"/>
                                   </p:stCondLst>
                                   <p:childTnLst>
                                     <p:set>
                                       <p:cBhvr>
-                                        <p:cTn id="12" dur="1" fill="hold">
+                                        <p:cTn id="13" dur="1" fill="hold">
                                           <p:stCondLst>
                                             <p:cond delay="0"/>
                                           </p:stCondLst>
@@ -12336,7 +12336,7 @@
                                     </p:set>
                                     <p:animEffect transition="in" filter="fade">
                                       <p:cBhvr>
-                                        <p:cTn id="13" dur="500"/>
+                                        <p:cTn id="14" dur="500"/>
                                         <p:tgtEl>
                                           <p:spTgt spid="9"/>
                                         </p:tgtEl>
@@ -12652,14 +12652,88 @@
       </p:sp>
       <p:sp>
         <p:nvSpPr>
-          <p:cNvPr id="10" name="نجمة للمجموعة 1 10"/>
+          <p:cNvPr id="10" name="Text 10"/>
+          <p:cNvSpPr txBox="1"/>
+          <p:nvPr/>
+        </p:nvSpPr>
+        <p:spPr>
+          <a:xfrm>
+            <a:off x="6903720" y="2167128"/>
+            <a:ext cx="384048" cy="402336"/>
+          </a:xfrm>
+          <a:prstGeom prst="rect">
+            <a:avLst/>
+          </a:prstGeom>
+          <a:noFill/>
+        </p:spPr>
+        <p:txBody>
+          <a:bodyPr wrap="square" lIns="0" tIns="0" rIns="0" bIns="0" rtlCol="1" anchor="ctr"/>
+          <a:lstStyle/>
+          <a:p>
+            <a:pPr rtl="1" algn="ctr" marL="0" indent="0">
+              <a:buNone/>
+            </a:pPr>
+            <a:r>
+              <a:rPr lang="ar-SA" altLang="en-US" sz="2200" b="1" dirty="0">
+                <a:solidFill>
+                  <a:srgbClr val="C9D6CE"/>
+                </a:solidFill>
+                <a:latin typeface="IBM Plex Sans Arabic"/>
+                <a:cs typeface="IBM Plex Sans Arabic"/>
+              </a:rPr>
+              <a:t>☆</a:t>
+            </a:r>
+            <a:endParaRPr lang="ar-SA" sz="2200" dirty="0"/>
+          </a:p>
+        </p:txBody>
+      </p:sp>
+      <p:sp>
+        <p:nvSpPr>
+          <p:cNvPr id="11" name="Text 11"/>
+          <p:cNvSpPr txBox="1"/>
+          <p:nvPr/>
+        </p:nvSpPr>
+        <p:spPr>
+          <a:xfrm>
+            <a:off x="6903720" y="2167128"/>
+            <a:ext cx="384048" cy="402336"/>
+          </a:xfrm>
+          <a:prstGeom prst="rect">
+            <a:avLst/>
+          </a:prstGeom>
+          <a:noFill/>
+        </p:spPr>
+        <p:txBody>
+          <a:bodyPr wrap="square" lIns="0" tIns="0" rIns="0" bIns="0" rtlCol="1" anchor="ctr"/>
+          <a:lstStyle/>
+          <a:p>
+            <a:pPr rtl="1" algn="ctr" marL="0" indent="0">
+              <a:buNone/>
+            </a:pPr>
+            <a:r>
+              <a:rPr lang="ar-SA" altLang="en-US" sz="2200" b="1" dirty="0">
+                <a:solidFill>
+                  <a:srgbClr val="B8912F"/>
+                </a:solidFill>
+                <a:latin typeface="IBM Plex Sans Arabic"/>
+                <a:cs typeface="IBM Plex Sans Arabic"/>
+              </a:rPr>
+              <a:t>★</a:t>
+            </a:r>
+            <a:endParaRPr lang="ar-SA" sz="2200" dirty="0"/>
+          </a:p>
+        </p:txBody>
+      </p:sp>
+      <p:sp>
+        <p:nvSpPr>
+          <p:cNvPr id="12" name="نجمة 1 للمجموعة 1 12"/>
           <p:cNvSpPr/>
           <p:nvPr/>
         </p:nvSpPr>
         <p:spPr>
           <a:xfrm>
-            <a:off x="7406640" y="2185416"/>
-            <a:ext cx="1143000" cy="365760"/>
+            <a:off x="6903720" y="2167128"/>
+            <a:ext cx="384048" cy="402336"/>
           </a:xfrm>
           <a:prstGeom prst="rect">
             <a:avLst/>
@@ -12676,13 +12750,13 @@
       </p:sp>
       <p:sp>
         <p:nvSpPr>
-          <p:cNvPr id="11" name="Text 11"/>
+          <p:cNvPr id="13" name="Text 13"/>
           <p:cNvSpPr txBox="1"/>
           <p:nvPr/>
         </p:nvSpPr>
         <p:spPr>
           <a:xfrm>
-            <a:off x="6903720" y="2167128"/>
+            <a:off x="6464808" y="2167128"/>
             <a:ext cx="384048" cy="402336"/>
           </a:xfrm>
           <a:prstGeom prst="rect">
@@ -12713,13 +12787,13 @@
       </p:sp>
       <p:sp>
         <p:nvSpPr>
-          <p:cNvPr id="12" name="Text 12"/>
+          <p:cNvPr id="14" name="Text 14"/>
           <p:cNvSpPr txBox="1"/>
           <p:nvPr/>
         </p:nvSpPr>
         <p:spPr>
           <a:xfrm>
-            <a:off x="6903720" y="2167128"/>
+            <a:off x="6464808" y="2167128"/>
             <a:ext cx="384048" cy="402336"/>
           </a:xfrm>
           <a:prstGeom prst="rect">
@@ -12750,13 +12824,37 @@
       </p:sp>
       <p:sp>
         <p:nvSpPr>
-          <p:cNvPr id="13" name="Text 13"/>
+          <p:cNvPr id="15" name="نجمة 2 للمجموعة 1 15"/>
+          <p:cNvSpPr/>
+          <p:nvPr/>
+        </p:nvSpPr>
+        <p:spPr>
+          <a:xfrm>
+            <a:off x="6464808" y="2167128"/>
+            <a:ext cx="384048" cy="402336"/>
+          </a:xfrm>
+          <a:prstGeom prst="rect">
+            <a:avLst/>
+          </a:prstGeom>
+          <a:solidFill>
+            <a:srgbClr val="FFFFFF">
+              <a:alpha val="0"/>
+            </a:srgbClr>
+          </a:solidFill>
+          <a:ln>
+            <a:noFill/>
+          </a:ln>
+        </p:spPr>
+      </p:sp>
+      <p:sp>
+        <p:nvSpPr>
+          <p:cNvPr id="16" name="Text 16"/>
           <p:cNvSpPr txBox="1"/>
           <p:nvPr/>
         </p:nvSpPr>
         <p:spPr>
           <a:xfrm>
-            <a:off x="6464808" y="2167128"/>
+            <a:off x="6025896" y="2167128"/>
             <a:ext cx="384048" cy="402336"/>
           </a:xfrm>
           <a:prstGeom prst="rect">
@@ -12787,13 +12885,13 @@
       </p:sp>
       <p:sp>
         <p:nvSpPr>
-          <p:cNvPr id="14" name="Text 14"/>
+          <p:cNvPr id="17" name="Text 17"/>
           <p:cNvSpPr txBox="1"/>
           <p:nvPr/>
         </p:nvSpPr>
         <p:spPr>
           <a:xfrm>
-            <a:off x="6464808" y="2167128"/>
+            <a:off x="6025896" y="2167128"/>
             <a:ext cx="384048" cy="402336"/>
           </a:xfrm>
           <a:prstGeom prst="rect">
@@ -12824,13 +12922,37 @@
       </p:sp>
       <p:sp>
         <p:nvSpPr>
-          <p:cNvPr id="15" name="Text 15"/>
+          <p:cNvPr id="18" name="نجمة 3 للمجموعة 1 18"/>
+          <p:cNvSpPr/>
+          <p:nvPr/>
+        </p:nvSpPr>
+        <p:spPr>
+          <a:xfrm>
+            <a:off x="6025896" y="2167128"/>
+            <a:ext cx="384048" cy="402336"/>
+          </a:xfrm>
+          <a:prstGeom prst="rect">
+            <a:avLst/>
+          </a:prstGeom>
+          <a:solidFill>
+            <a:srgbClr val="FFFFFF">
+              <a:alpha val="0"/>
+            </a:srgbClr>
+          </a:solidFill>
+          <a:ln>
+            <a:noFill/>
+          </a:ln>
+        </p:spPr>
+      </p:sp>
+      <p:sp>
+        <p:nvSpPr>
+          <p:cNvPr id="19" name="Text 19"/>
           <p:cNvSpPr txBox="1"/>
           <p:nvPr/>
         </p:nvSpPr>
         <p:spPr>
           <a:xfrm>
-            <a:off x="6025896" y="2167128"/>
+            <a:off x="5586984" y="2167128"/>
             <a:ext cx="384048" cy="402336"/>
           </a:xfrm>
           <a:prstGeom prst="rect">
@@ -12861,13 +12983,13 @@
       </p:sp>
       <p:sp>
         <p:nvSpPr>
-          <p:cNvPr id="16" name="Text 16"/>
+          <p:cNvPr id="20" name="Text 20"/>
           <p:cNvSpPr txBox="1"/>
           <p:nvPr/>
         </p:nvSpPr>
         <p:spPr>
           <a:xfrm>
-            <a:off x="6025896" y="2167128"/>
+            <a:off x="5586984" y="2167128"/>
             <a:ext cx="384048" cy="402336"/>
           </a:xfrm>
           <a:prstGeom prst="rect">
@@ -12898,13 +13020,37 @@
       </p:sp>
       <p:sp>
         <p:nvSpPr>
-          <p:cNvPr id="17" name="Text 17"/>
+          <p:cNvPr id="21" name="نجمة 4 للمجموعة 1 21"/>
+          <p:cNvSpPr/>
+          <p:nvPr/>
+        </p:nvSpPr>
+        <p:spPr>
+          <a:xfrm>
+            <a:off x="5586984" y="2167128"/>
+            <a:ext cx="384048" cy="402336"/>
+          </a:xfrm>
+          <a:prstGeom prst="rect">
+            <a:avLst/>
+          </a:prstGeom>
+          <a:solidFill>
+            <a:srgbClr val="FFFFFF">
+              <a:alpha val="0"/>
+            </a:srgbClr>
+          </a:solidFill>
+          <a:ln>
+            <a:noFill/>
+          </a:ln>
+        </p:spPr>
+      </p:sp>
+      <p:sp>
+        <p:nvSpPr>
+          <p:cNvPr id="22" name="Text 22"/>
           <p:cNvSpPr txBox="1"/>
           <p:nvPr/>
         </p:nvSpPr>
         <p:spPr>
           <a:xfrm>
-            <a:off x="5586984" y="2167128"/>
+            <a:off x="5148072" y="2167128"/>
             <a:ext cx="384048" cy="402336"/>
           </a:xfrm>
           <a:prstGeom prst="rect">
@@ -12935,13 +13081,13 @@
       </p:sp>
       <p:sp>
         <p:nvSpPr>
-          <p:cNvPr id="18" name="Text 18"/>
+          <p:cNvPr id="23" name="Text 23"/>
           <p:cNvSpPr txBox="1"/>
           <p:nvPr/>
         </p:nvSpPr>
         <p:spPr>
           <a:xfrm>
-            <a:off x="5586984" y="2167128"/>
+            <a:off x="5148072" y="2167128"/>
             <a:ext cx="384048" cy="402336"/>
           </a:xfrm>
           <a:prstGeom prst="rect">
@@ -12972,8 +13118,8 @@
       </p:sp>
       <p:sp>
         <p:nvSpPr>
-          <p:cNvPr id="19" name="Text 19"/>
-          <p:cNvSpPr txBox="1"/>
+          <p:cNvPr id="24" name="نجمة 5 للمجموعة 1 24"/>
+          <p:cNvSpPr/>
           <p:nvPr/>
         </p:nvSpPr>
         <p:spPr>
@@ -12984,69 +13130,19 @@
           <a:prstGeom prst="rect">
             <a:avLst/>
           </a:prstGeom>
-          <a:noFill/>
-        </p:spPr>
-        <p:txBody>
-          <a:bodyPr wrap="square" lIns="0" tIns="0" rIns="0" bIns="0" rtlCol="1" anchor="ctr"/>
-          <a:lstStyle/>
-          <a:p>
-            <a:pPr rtl="1" algn="ctr" marL="0" indent="0">
-              <a:buNone/>
-            </a:pPr>
-            <a:r>
-              <a:rPr lang="ar-SA" altLang="en-US" sz="2200" b="1" dirty="0">
-                <a:solidFill>
-                  <a:srgbClr val="C9D6CE"/>
-                </a:solidFill>
-                <a:latin typeface="IBM Plex Sans Arabic"/>
-                <a:cs typeface="IBM Plex Sans Arabic"/>
-              </a:rPr>
-              <a:t>☆</a:t>
-            </a:r>
-            <a:endParaRPr lang="ar-SA" sz="2200" dirty="0"/>
-          </a:p>
-        </p:txBody>
-      </p:sp>
-      <p:sp>
-        <p:nvSpPr>
-          <p:cNvPr id="20" name="Text 20"/>
-          <p:cNvSpPr txBox="1"/>
-          <p:nvPr/>
-        </p:nvSpPr>
-        <p:spPr>
-          <a:xfrm>
-            <a:off x="5148072" y="2167128"/>
-            <a:ext cx="384048" cy="402336"/>
-          </a:xfrm>
-          <a:prstGeom prst="rect">
-            <a:avLst/>
-          </a:prstGeom>
-          <a:noFill/>
-        </p:spPr>
-        <p:txBody>
-          <a:bodyPr wrap="square" lIns="0" tIns="0" rIns="0" bIns="0" rtlCol="1" anchor="ctr"/>
-          <a:lstStyle/>
-          <a:p>
-            <a:pPr rtl="1" algn="ctr" marL="0" indent="0">
-              <a:buNone/>
-            </a:pPr>
-            <a:r>
-              <a:rPr lang="ar-SA" altLang="en-US" sz="2200" b="1" dirty="0">
-                <a:solidFill>
-                  <a:srgbClr val="B8912F"/>
-                </a:solidFill>
-                <a:latin typeface="IBM Plex Sans Arabic"/>
-                <a:cs typeface="IBM Plex Sans Arabic"/>
-              </a:rPr>
-              <a:t>★</a:t>
-            </a:r>
-            <a:endParaRPr lang="ar-SA" sz="2200" dirty="0"/>
-          </a:p>
-        </p:txBody>
-      </p:sp>
-      <p:sp>
-        <p:nvSpPr>
-          <p:cNvPr id="21" name="Card 21"/>
+          <a:solidFill>
+            <a:srgbClr val="FFFFFF">
+              <a:alpha val="0"/>
+            </a:srgbClr>
+          </a:solidFill>
+          <a:ln>
+            <a:noFill/>
+          </a:ln>
+        </p:spPr>
+      </p:sp>
+      <p:sp>
+        <p:nvSpPr>
+          <p:cNvPr id="25" name="Card 25"/>
           <p:cNvSpPr/>
           <p:nvPr/>
         </p:nvSpPr>
@@ -13080,7 +13176,7 @@
       </p:sp>
       <p:sp>
         <p:nvSpPr>
-          <p:cNvPr id="22" name="اسم المجموعة 22"/>
+          <p:cNvPr id="26" name="اسم المجموعة 26"/>
           <p:cNvSpPr/>
           <p:nvPr/>
         </p:nvSpPr>
@@ -13107,7 +13203,7 @@
       </p:sp>
       <p:sp>
         <p:nvSpPr>
-          <p:cNvPr id="23" name="Text 23"/>
+          <p:cNvPr id="27" name="Text 27"/>
           <p:cNvSpPr txBox="1"/>
           <p:nvPr/>
         </p:nvSpPr>
@@ -13144,14 +13240,88 @@
       </p:sp>
       <p:sp>
         <p:nvSpPr>
-          <p:cNvPr id="24" name="نجمة للمجموعة 2 24"/>
+          <p:cNvPr id="28" name="Text 28"/>
+          <p:cNvSpPr txBox="1"/>
+          <p:nvPr/>
+        </p:nvSpPr>
+        <p:spPr>
+          <a:xfrm>
+            <a:off x="2697480" y="2167128"/>
+            <a:ext cx="384048" cy="402336"/>
+          </a:xfrm>
+          <a:prstGeom prst="rect">
+            <a:avLst/>
+          </a:prstGeom>
+          <a:noFill/>
+        </p:spPr>
+        <p:txBody>
+          <a:bodyPr wrap="square" lIns="0" tIns="0" rIns="0" bIns="0" rtlCol="1" anchor="ctr"/>
+          <a:lstStyle/>
+          <a:p>
+            <a:pPr rtl="1" algn="ctr" marL="0" indent="0">
+              <a:buNone/>
+            </a:pPr>
+            <a:r>
+              <a:rPr lang="ar-SA" altLang="en-US" sz="2200" b="1" dirty="0">
+                <a:solidFill>
+                  <a:srgbClr val="C9D6CE"/>
+                </a:solidFill>
+                <a:latin typeface="IBM Plex Sans Arabic"/>
+                <a:cs typeface="IBM Plex Sans Arabic"/>
+              </a:rPr>
+              <a:t>☆</a:t>
+            </a:r>
+            <a:endParaRPr lang="ar-SA" sz="2200" dirty="0"/>
+          </a:p>
+        </p:txBody>
+      </p:sp>
+      <p:sp>
+        <p:nvSpPr>
+          <p:cNvPr id="29" name="Text 29"/>
+          <p:cNvSpPr txBox="1"/>
+          <p:nvPr/>
+        </p:nvSpPr>
+        <p:spPr>
+          <a:xfrm>
+            <a:off x="2697480" y="2167128"/>
+            <a:ext cx="384048" cy="402336"/>
+          </a:xfrm>
+          <a:prstGeom prst="rect">
+            <a:avLst/>
+          </a:prstGeom>
+          <a:noFill/>
+        </p:spPr>
+        <p:txBody>
+          <a:bodyPr wrap="square" lIns="0" tIns="0" rIns="0" bIns="0" rtlCol="1" anchor="ctr"/>
+          <a:lstStyle/>
+          <a:p>
+            <a:pPr rtl="1" algn="ctr" marL="0" indent="0">
+              <a:buNone/>
+            </a:pPr>
+            <a:r>
+              <a:rPr lang="ar-SA" altLang="en-US" sz="2200" b="1" dirty="0">
+                <a:solidFill>
+                  <a:srgbClr val="B8912F"/>
+                </a:solidFill>
+                <a:latin typeface="IBM Plex Sans Arabic"/>
+                <a:cs typeface="IBM Plex Sans Arabic"/>
+              </a:rPr>
+              <a:t>★</a:t>
+            </a:r>
+            <a:endParaRPr lang="ar-SA" sz="2200" dirty="0"/>
+          </a:p>
+        </p:txBody>
+      </p:sp>
+      <p:sp>
+        <p:nvSpPr>
+          <p:cNvPr id="30" name="نجمة 1 للمجموعة 2 30"/>
           <p:cNvSpPr/>
           <p:nvPr/>
         </p:nvSpPr>
         <p:spPr>
           <a:xfrm>
-            <a:off x="3200400" y="2185416"/>
-            <a:ext cx="1143000" cy="365760"/>
+            <a:off x="2697480" y="2167128"/>
+            <a:ext cx="384048" cy="402336"/>
           </a:xfrm>
           <a:prstGeom prst="rect">
             <a:avLst/>
@@ -13168,13 +13338,13 @@
       </p:sp>
       <p:sp>
         <p:nvSpPr>
-          <p:cNvPr id="25" name="Text 25"/>
+          <p:cNvPr id="31" name="Text 31"/>
           <p:cNvSpPr txBox="1"/>
           <p:nvPr/>
         </p:nvSpPr>
         <p:spPr>
           <a:xfrm>
-            <a:off x="2697480" y="2167128"/>
+            <a:off x="2258568" y="2167128"/>
             <a:ext cx="384048" cy="402336"/>
           </a:xfrm>
           <a:prstGeom prst="rect">
@@ -13205,13 +13375,13 @@
       </p:sp>
       <p:sp>
         <p:nvSpPr>
-          <p:cNvPr id="26" name="Text 26"/>
+          <p:cNvPr id="32" name="Text 32"/>
           <p:cNvSpPr txBox="1"/>
           <p:nvPr/>
         </p:nvSpPr>
         <p:spPr>
           <a:xfrm>
-            <a:off x="2697480" y="2167128"/>
+            <a:off x="2258568" y="2167128"/>
             <a:ext cx="384048" cy="402336"/>
           </a:xfrm>
           <a:prstGeom prst="rect">
@@ -13242,13 +13412,37 @@
       </p:sp>
       <p:sp>
         <p:nvSpPr>
-          <p:cNvPr id="27" name="Text 27"/>
+          <p:cNvPr id="33" name="نجمة 2 للمجموعة 2 33"/>
+          <p:cNvSpPr/>
+          <p:nvPr/>
+        </p:nvSpPr>
+        <p:spPr>
+          <a:xfrm>
+            <a:off x="2258568" y="2167128"/>
+            <a:ext cx="384048" cy="402336"/>
+          </a:xfrm>
+          <a:prstGeom prst="rect">
+            <a:avLst/>
+          </a:prstGeom>
+          <a:solidFill>
+            <a:srgbClr val="FFFFFF">
+              <a:alpha val="0"/>
+            </a:srgbClr>
+          </a:solidFill>
+          <a:ln>
+            <a:noFill/>
+          </a:ln>
+        </p:spPr>
+      </p:sp>
+      <p:sp>
+        <p:nvSpPr>
+          <p:cNvPr id="34" name="Text 34"/>
           <p:cNvSpPr txBox="1"/>
           <p:nvPr/>
         </p:nvSpPr>
         <p:spPr>
           <a:xfrm>
-            <a:off x="2258568" y="2167128"/>
+            <a:off x="1819656" y="2167128"/>
             <a:ext cx="384048" cy="402336"/>
           </a:xfrm>
           <a:prstGeom prst="rect">
@@ -13279,13 +13473,13 @@
       </p:sp>
       <p:sp>
         <p:nvSpPr>
-          <p:cNvPr id="28" name="Text 28"/>
+          <p:cNvPr id="35" name="Text 35"/>
           <p:cNvSpPr txBox="1"/>
           <p:nvPr/>
         </p:nvSpPr>
         <p:spPr>
           <a:xfrm>
-            <a:off x="2258568" y="2167128"/>
+            <a:off x="1819656" y="2167128"/>
             <a:ext cx="384048" cy="402336"/>
           </a:xfrm>
           <a:prstGeom prst="rect">
@@ -13316,13 +13510,37 @@
       </p:sp>
       <p:sp>
         <p:nvSpPr>
-          <p:cNvPr id="29" name="Text 29"/>
+          <p:cNvPr id="36" name="نجمة 3 للمجموعة 2 36"/>
+          <p:cNvSpPr/>
+          <p:nvPr/>
+        </p:nvSpPr>
+        <p:spPr>
+          <a:xfrm>
+            <a:off x="1819656" y="2167128"/>
+            <a:ext cx="384048" cy="402336"/>
+          </a:xfrm>
+          <a:prstGeom prst="rect">
+            <a:avLst/>
+          </a:prstGeom>
+          <a:solidFill>
+            <a:srgbClr val="FFFFFF">
+              <a:alpha val="0"/>
+            </a:srgbClr>
+          </a:solidFill>
+          <a:ln>
+            <a:noFill/>
+          </a:ln>
+        </p:spPr>
+      </p:sp>
+      <p:sp>
+        <p:nvSpPr>
+          <p:cNvPr id="37" name="Text 37"/>
           <p:cNvSpPr txBox="1"/>
           <p:nvPr/>
         </p:nvSpPr>
         <p:spPr>
           <a:xfrm>
-            <a:off x="1819656" y="2167128"/>
+            <a:off x="1380744" y="2167128"/>
             <a:ext cx="384048" cy="402336"/>
           </a:xfrm>
           <a:prstGeom prst="rect">
@@ -13353,13 +13571,13 @@
       </p:sp>
       <p:sp>
         <p:nvSpPr>
-          <p:cNvPr id="30" name="Text 30"/>
+          <p:cNvPr id="38" name="Text 38"/>
           <p:cNvSpPr txBox="1"/>
           <p:nvPr/>
         </p:nvSpPr>
         <p:spPr>
           <a:xfrm>
-            <a:off x="1819656" y="2167128"/>
+            <a:off x="1380744" y="2167128"/>
             <a:ext cx="384048" cy="402336"/>
           </a:xfrm>
           <a:prstGeom prst="rect">
@@ -13390,13 +13608,37 @@
       </p:sp>
       <p:sp>
         <p:nvSpPr>
-          <p:cNvPr id="31" name="Text 31"/>
+          <p:cNvPr id="39" name="نجمة 4 للمجموعة 2 39"/>
+          <p:cNvSpPr/>
+          <p:nvPr/>
+        </p:nvSpPr>
+        <p:spPr>
+          <a:xfrm>
+            <a:off x="1380744" y="2167128"/>
+            <a:ext cx="384048" cy="402336"/>
+          </a:xfrm>
+          <a:prstGeom prst="rect">
+            <a:avLst/>
+          </a:prstGeom>
+          <a:solidFill>
+            <a:srgbClr val="FFFFFF">
+              <a:alpha val="0"/>
+            </a:srgbClr>
+          </a:solidFill>
+          <a:ln>
+            <a:noFill/>
+          </a:ln>
+        </p:spPr>
+      </p:sp>
+      <p:sp>
+        <p:nvSpPr>
+          <p:cNvPr id="40" name="Text 40"/>
           <p:cNvSpPr txBox="1"/>
           <p:nvPr/>
         </p:nvSpPr>
         <p:spPr>
           <a:xfrm>
-            <a:off x="1380744" y="2167128"/>
+            <a:off x="941832" y="2167128"/>
             <a:ext cx="384048" cy="402336"/>
           </a:xfrm>
           <a:prstGeom prst="rect">
@@ -13427,13 +13669,13 @@
       </p:sp>
       <p:sp>
         <p:nvSpPr>
-          <p:cNvPr id="32" name="Text 32"/>
+          <p:cNvPr id="41" name="Text 41"/>
           <p:cNvSpPr txBox="1"/>
           <p:nvPr/>
         </p:nvSpPr>
         <p:spPr>
           <a:xfrm>
-            <a:off x="1380744" y="2167128"/>
+            <a:off x="941832" y="2167128"/>
             <a:ext cx="384048" cy="402336"/>
           </a:xfrm>
           <a:prstGeom prst="rect">
@@ -13464,8 +13706,8 @@
       </p:sp>
       <p:sp>
         <p:nvSpPr>
-          <p:cNvPr id="33" name="Text 33"/>
-          <p:cNvSpPr txBox="1"/>
+          <p:cNvPr id="42" name="نجمة 5 للمجموعة 2 42"/>
+          <p:cNvSpPr/>
           <p:nvPr/>
         </p:nvSpPr>
         <p:spPr>
@@ -13476,69 +13718,19 @@
           <a:prstGeom prst="rect">
             <a:avLst/>
           </a:prstGeom>
-          <a:noFill/>
-        </p:spPr>
-        <p:txBody>
-          <a:bodyPr wrap="square" lIns="0" tIns="0" rIns="0" bIns="0" rtlCol="1" anchor="ctr"/>
-          <a:lstStyle/>
-          <a:p>
-            <a:pPr rtl="1" algn="ctr" marL="0" indent="0">
-              <a:buNone/>
-            </a:pPr>
-            <a:r>
-              <a:rPr lang="ar-SA" altLang="en-US" sz="2200" b="1" dirty="0">
-                <a:solidFill>
-                  <a:srgbClr val="C9D6CE"/>
-                </a:solidFill>
-                <a:latin typeface="IBM Plex Sans Arabic"/>
-                <a:cs typeface="IBM Plex Sans Arabic"/>
-              </a:rPr>
-              <a:t>☆</a:t>
-            </a:r>
-            <a:endParaRPr lang="ar-SA" sz="2200" dirty="0"/>
-          </a:p>
-        </p:txBody>
-      </p:sp>
-      <p:sp>
-        <p:nvSpPr>
-          <p:cNvPr id="34" name="Text 34"/>
-          <p:cNvSpPr txBox="1"/>
-          <p:nvPr/>
-        </p:nvSpPr>
-        <p:spPr>
-          <a:xfrm>
-            <a:off x="941832" y="2167128"/>
-            <a:ext cx="384048" cy="402336"/>
-          </a:xfrm>
-          <a:prstGeom prst="rect">
-            <a:avLst/>
-          </a:prstGeom>
-          <a:noFill/>
-        </p:spPr>
-        <p:txBody>
-          <a:bodyPr wrap="square" lIns="0" tIns="0" rIns="0" bIns="0" rtlCol="1" anchor="ctr"/>
-          <a:lstStyle/>
-          <a:p>
-            <a:pPr rtl="1" algn="ctr" marL="0" indent="0">
-              <a:buNone/>
-            </a:pPr>
-            <a:r>
-              <a:rPr lang="ar-SA" altLang="en-US" sz="2200" b="1" dirty="0">
-                <a:solidFill>
-                  <a:srgbClr val="B8912F"/>
-                </a:solidFill>
-                <a:latin typeface="IBM Plex Sans Arabic"/>
-                <a:cs typeface="IBM Plex Sans Arabic"/>
-              </a:rPr>
-              <a:t>★</a:t>
-            </a:r>
-            <a:endParaRPr lang="ar-SA" sz="2200" dirty="0"/>
-          </a:p>
-        </p:txBody>
-      </p:sp>
-      <p:sp>
-        <p:nvSpPr>
-          <p:cNvPr id="35" name="Card 35"/>
+          <a:solidFill>
+            <a:srgbClr val="FFFFFF">
+              <a:alpha val="0"/>
+            </a:srgbClr>
+          </a:solidFill>
+          <a:ln>
+            <a:noFill/>
+          </a:ln>
+        </p:spPr>
+      </p:sp>
+      <p:sp>
+        <p:nvSpPr>
+          <p:cNvPr id="43" name="Card 43"/>
           <p:cNvSpPr/>
           <p:nvPr/>
         </p:nvSpPr>
@@ -13572,7 +13764,7 @@
       </p:sp>
       <p:sp>
         <p:nvSpPr>
-          <p:cNvPr id="36" name="اسم المجموعة 36"/>
+          <p:cNvPr id="44" name="اسم المجموعة 44"/>
           <p:cNvSpPr/>
           <p:nvPr/>
         </p:nvSpPr>
@@ -13599,7 +13791,7 @@
       </p:sp>
       <p:sp>
         <p:nvSpPr>
-          <p:cNvPr id="37" name="Text 37"/>
+          <p:cNvPr id="45" name="Text 45"/>
           <p:cNvSpPr txBox="1"/>
           <p:nvPr/>
         </p:nvSpPr>
@@ -13636,14 +13828,88 @@
       </p:sp>
       <p:sp>
         <p:nvSpPr>
-          <p:cNvPr id="38" name="نجمة للمجموعة 3 38"/>
+          <p:cNvPr id="46" name="Text 46"/>
+          <p:cNvSpPr txBox="1"/>
+          <p:nvPr/>
+        </p:nvSpPr>
+        <p:spPr>
+          <a:xfrm>
+            <a:off x="6903720" y="2916936"/>
+            <a:ext cx="384048" cy="402336"/>
+          </a:xfrm>
+          <a:prstGeom prst="rect">
+            <a:avLst/>
+          </a:prstGeom>
+          <a:noFill/>
+        </p:spPr>
+        <p:txBody>
+          <a:bodyPr wrap="square" lIns="0" tIns="0" rIns="0" bIns="0" rtlCol="1" anchor="ctr"/>
+          <a:lstStyle/>
+          <a:p>
+            <a:pPr rtl="1" algn="ctr" marL="0" indent="0">
+              <a:buNone/>
+            </a:pPr>
+            <a:r>
+              <a:rPr lang="ar-SA" altLang="en-US" sz="2200" b="1" dirty="0">
+                <a:solidFill>
+                  <a:srgbClr val="C9D6CE"/>
+                </a:solidFill>
+                <a:latin typeface="IBM Plex Sans Arabic"/>
+                <a:cs typeface="IBM Plex Sans Arabic"/>
+              </a:rPr>
+              <a:t>☆</a:t>
+            </a:r>
+            <a:endParaRPr lang="ar-SA" sz="2200" dirty="0"/>
+          </a:p>
+        </p:txBody>
+      </p:sp>
+      <p:sp>
+        <p:nvSpPr>
+          <p:cNvPr id="47" name="Text 47"/>
+          <p:cNvSpPr txBox="1"/>
+          <p:nvPr/>
+        </p:nvSpPr>
+        <p:spPr>
+          <a:xfrm>
+            <a:off x="6903720" y="2916936"/>
+            <a:ext cx="384048" cy="402336"/>
+          </a:xfrm>
+          <a:prstGeom prst="rect">
+            <a:avLst/>
+          </a:prstGeom>
+          <a:noFill/>
+        </p:spPr>
+        <p:txBody>
+          <a:bodyPr wrap="square" lIns="0" tIns="0" rIns="0" bIns="0" rtlCol="1" anchor="ctr"/>
+          <a:lstStyle/>
+          <a:p>
+            <a:pPr rtl="1" algn="ctr" marL="0" indent="0">
+              <a:buNone/>
+            </a:pPr>
+            <a:r>
+              <a:rPr lang="ar-SA" altLang="en-US" sz="2200" b="1" dirty="0">
+                <a:solidFill>
+                  <a:srgbClr val="B8912F"/>
+                </a:solidFill>
+                <a:latin typeface="IBM Plex Sans Arabic"/>
+                <a:cs typeface="IBM Plex Sans Arabic"/>
+              </a:rPr>
+              <a:t>★</a:t>
+            </a:r>
+            <a:endParaRPr lang="ar-SA" sz="2200" dirty="0"/>
+          </a:p>
+        </p:txBody>
+      </p:sp>
+      <p:sp>
+        <p:nvSpPr>
+          <p:cNvPr id="48" name="نجمة 1 للمجموعة 3 48"/>
           <p:cNvSpPr/>
           <p:nvPr/>
         </p:nvSpPr>
         <p:spPr>
           <a:xfrm>
-            <a:off x="7406640" y="2935224"/>
-            <a:ext cx="1143000" cy="365760"/>
+            <a:off x="6903720" y="2916936"/>
+            <a:ext cx="384048" cy="402336"/>
           </a:xfrm>
           <a:prstGeom prst="rect">
             <a:avLst/>
@@ -13660,13 +13926,13 @@
       </p:sp>
       <p:sp>
         <p:nvSpPr>
-          <p:cNvPr id="39" name="Text 39"/>
+          <p:cNvPr id="49" name="Text 49"/>
           <p:cNvSpPr txBox="1"/>
           <p:nvPr/>
         </p:nvSpPr>
         <p:spPr>
           <a:xfrm>
-            <a:off x="6903720" y="2916936"/>
+            <a:off x="6464808" y="2916936"/>
             <a:ext cx="384048" cy="402336"/>
           </a:xfrm>
           <a:prstGeom prst="rect">
@@ -13697,13 +13963,13 @@
       </p:sp>
       <p:sp>
         <p:nvSpPr>
-          <p:cNvPr id="40" name="Text 40"/>
+          <p:cNvPr id="50" name="Text 50"/>
           <p:cNvSpPr txBox="1"/>
           <p:nvPr/>
         </p:nvSpPr>
         <p:spPr>
           <a:xfrm>
-            <a:off x="6903720" y="2916936"/>
+            <a:off x="6464808" y="2916936"/>
             <a:ext cx="384048" cy="402336"/>
           </a:xfrm>
           <a:prstGeom prst="rect">
@@ -13734,13 +14000,37 @@
       </p:sp>
       <p:sp>
         <p:nvSpPr>
-          <p:cNvPr id="41" name="Text 41"/>
+          <p:cNvPr id="51" name="نجمة 2 للمجموعة 3 51"/>
+          <p:cNvSpPr/>
+          <p:nvPr/>
+        </p:nvSpPr>
+        <p:spPr>
+          <a:xfrm>
+            <a:off x="6464808" y="2916936"/>
+            <a:ext cx="384048" cy="402336"/>
+          </a:xfrm>
+          <a:prstGeom prst="rect">
+            <a:avLst/>
+          </a:prstGeom>
+          <a:solidFill>
+            <a:srgbClr val="FFFFFF">
+              <a:alpha val="0"/>
+            </a:srgbClr>
+          </a:solidFill>
+          <a:ln>
+            <a:noFill/>
+          </a:ln>
+        </p:spPr>
+      </p:sp>
+      <p:sp>
+        <p:nvSpPr>
+          <p:cNvPr id="52" name="Text 52"/>
           <p:cNvSpPr txBox="1"/>
           <p:nvPr/>
         </p:nvSpPr>
         <p:spPr>
           <a:xfrm>
-            <a:off x="6464808" y="2916936"/>
+            <a:off x="6025896" y="2916936"/>
             <a:ext cx="384048" cy="402336"/>
           </a:xfrm>
           <a:prstGeom prst="rect">
@@ -13771,13 +14061,13 @@
       </p:sp>
       <p:sp>
         <p:nvSpPr>
-          <p:cNvPr id="42" name="Text 42"/>
+          <p:cNvPr id="53" name="Text 53"/>
           <p:cNvSpPr txBox="1"/>
           <p:nvPr/>
         </p:nvSpPr>
         <p:spPr>
           <a:xfrm>
-            <a:off x="6464808" y="2916936"/>
+            <a:off x="6025896" y="2916936"/>
             <a:ext cx="384048" cy="402336"/>
           </a:xfrm>
           <a:prstGeom prst="rect">
@@ -13808,13 +14098,37 @@
       </p:sp>
       <p:sp>
         <p:nvSpPr>
-          <p:cNvPr id="43" name="Text 43"/>
+          <p:cNvPr id="54" name="نجمة 3 للمجموعة 3 54"/>
+          <p:cNvSpPr/>
+          <p:nvPr/>
+        </p:nvSpPr>
+        <p:spPr>
+          <a:xfrm>
+            <a:off x="6025896" y="2916936"/>
+            <a:ext cx="384048" cy="402336"/>
+          </a:xfrm>
+          <a:prstGeom prst="rect">
+            <a:avLst/>
+          </a:prstGeom>
+          <a:solidFill>
+            <a:srgbClr val="FFFFFF">
+              <a:alpha val="0"/>
+            </a:srgbClr>
+          </a:solidFill>
+          <a:ln>
+            <a:noFill/>
+          </a:ln>
+        </p:spPr>
+      </p:sp>
+      <p:sp>
+        <p:nvSpPr>
+          <p:cNvPr id="55" name="Text 55"/>
           <p:cNvSpPr txBox="1"/>
           <p:nvPr/>
         </p:nvSpPr>
         <p:spPr>
           <a:xfrm>
-            <a:off x="6025896" y="2916936"/>
+            <a:off x="5586984" y="2916936"/>
             <a:ext cx="384048" cy="402336"/>
           </a:xfrm>
           <a:prstGeom prst="rect">
@@ -13845,13 +14159,13 @@
       </p:sp>
       <p:sp>
         <p:nvSpPr>
-          <p:cNvPr id="44" name="Text 44"/>
+          <p:cNvPr id="56" name="Text 56"/>
           <p:cNvSpPr txBox="1"/>
           <p:nvPr/>
         </p:nvSpPr>
         <p:spPr>
           <a:xfrm>
-            <a:off x="6025896" y="2916936"/>
+            <a:off x="5586984" y="2916936"/>
             <a:ext cx="384048" cy="402336"/>
           </a:xfrm>
           <a:prstGeom prst="rect">
@@ -13882,13 +14196,37 @@
       </p:sp>
       <p:sp>
         <p:nvSpPr>
-          <p:cNvPr id="45" name="Text 45"/>
+          <p:cNvPr id="57" name="نجمة 4 للمجموعة 3 57"/>
+          <p:cNvSpPr/>
+          <p:nvPr/>
+        </p:nvSpPr>
+        <p:spPr>
+          <a:xfrm>
+            <a:off x="5586984" y="2916936"/>
+            <a:ext cx="384048" cy="402336"/>
+          </a:xfrm>
+          <a:prstGeom prst="rect">
+            <a:avLst/>
+          </a:prstGeom>
+          <a:solidFill>
+            <a:srgbClr val="FFFFFF">
+              <a:alpha val="0"/>
+            </a:srgbClr>
+          </a:solidFill>
+          <a:ln>
+            <a:noFill/>
+          </a:ln>
+        </p:spPr>
+      </p:sp>
+      <p:sp>
+        <p:nvSpPr>
+          <p:cNvPr id="58" name="Text 58"/>
           <p:cNvSpPr txBox="1"/>
           <p:nvPr/>
         </p:nvSpPr>
         <p:spPr>
           <a:xfrm>
-            <a:off x="5586984" y="2916936"/>
+            <a:off x="5148072" y="2916936"/>
             <a:ext cx="384048" cy="402336"/>
           </a:xfrm>
           <a:prstGeom prst="rect">
@@ -13919,13 +14257,13 @@
       </p:sp>
       <p:sp>
         <p:nvSpPr>
-          <p:cNvPr id="46" name="Text 46"/>
+          <p:cNvPr id="59" name="Text 59"/>
           <p:cNvSpPr txBox="1"/>
           <p:nvPr/>
         </p:nvSpPr>
         <p:spPr>
           <a:xfrm>
-            <a:off x="5586984" y="2916936"/>
+            <a:off x="5148072" y="2916936"/>
             <a:ext cx="384048" cy="402336"/>
           </a:xfrm>
           <a:prstGeom prst="rect">
@@ -13956,8 +14294,8 @@
       </p:sp>
       <p:sp>
         <p:nvSpPr>
-          <p:cNvPr id="47" name="Text 47"/>
-          <p:cNvSpPr txBox="1"/>
+          <p:cNvPr id="60" name="نجمة 5 للمجموعة 3 60"/>
+          <p:cNvSpPr/>
           <p:nvPr/>
         </p:nvSpPr>
         <p:spPr>
@@ -13968,69 +14306,19 @@
           <a:prstGeom prst="rect">
             <a:avLst/>
           </a:prstGeom>
-          <a:noFill/>
-        </p:spPr>
-        <p:txBody>
-          <a:bodyPr wrap="square" lIns="0" tIns="0" rIns="0" bIns="0" rtlCol="1" anchor="ctr"/>
-          <a:lstStyle/>
-          <a:p>
-            <a:pPr rtl="1" algn="ctr" marL="0" indent="0">
-              <a:buNone/>
-            </a:pPr>
-            <a:r>
-              <a:rPr lang="ar-SA" altLang="en-US" sz="2200" b="1" dirty="0">
-                <a:solidFill>
-                  <a:srgbClr val="C9D6CE"/>
-                </a:solidFill>
-                <a:latin typeface="IBM Plex Sans Arabic"/>
-                <a:cs typeface="IBM Plex Sans Arabic"/>
-              </a:rPr>
-              <a:t>☆</a:t>
-            </a:r>
-            <a:endParaRPr lang="ar-SA" sz="2200" dirty="0"/>
-          </a:p>
-        </p:txBody>
-      </p:sp>
-      <p:sp>
-        <p:nvSpPr>
-          <p:cNvPr id="48" name="Text 48"/>
-          <p:cNvSpPr txBox="1"/>
-          <p:nvPr/>
-        </p:nvSpPr>
-        <p:spPr>
-          <a:xfrm>
-            <a:off x="5148072" y="2916936"/>
-            <a:ext cx="384048" cy="402336"/>
-          </a:xfrm>
-          <a:prstGeom prst="rect">
-            <a:avLst/>
-          </a:prstGeom>
-          <a:noFill/>
-        </p:spPr>
-        <p:txBody>
-          <a:bodyPr wrap="square" lIns="0" tIns="0" rIns="0" bIns="0" rtlCol="1" anchor="ctr"/>
-          <a:lstStyle/>
-          <a:p>
-            <a:pPr rtl="1" algn="ctr" marL="0" indent="0">
-              <a:buNone/>
-            </a:pPr>
-            <a:r>
-              <a:rPr lang="ar-SA" altLang="en-US" sz="2200" b="1" dirty="0">
-                <a:solidFill>
-                  <a:srgbClr val="B8912F"/>
-                </a:solidFill>
-                <a:latin typeface="IBM Plex Sans Arabic"/>
-                <a:cs typeface="IBM Plex Sans Arabic"/>
-              </a:rPr>
-              <a:t>★</a:t>
-            </a:r>
-            <a:endParaRPr lang="ar-SA" sz="2200" dirty="0"/>
-          </a:p>
-        </p:txBody>
-      </p:sp>
-      <p:sp>
-        <p:nvSpPr>
-          <p:cNvPr id="49" name="Card 49"/>
+          <a:solidFill>
+            <a:srgbClr val="FFFFFF">
+              <a:alpha val="0"/>
+            </a:srgbClr>
+          </a:solidFill>
+          <a:ln>
+            <a:noFill/>
+          </a:ln>
+        </p:spPr>
+      </p:sp>
+      <p:sp>
+        <p:nvSpPr>
+          <p:cNvPr id="61" name="Card 61"/>
           <p:cNvSpPr/>
           <p:nvPr/>
         </p:nvSpPr>
@@ -14064,7 +14352,7 @@
       </p:sp>
       <p:sp>
         <p:nvSpPr>
-          <p:cNvPr id="50" name="اسم المجموعة 50"/>
+          <p:cNvPr id="62" name="اسم المجموعة 62"/>
           <p:cNvSpPr/>
           <p:nvPr/>
         </p:nvSpPr>
@@ -14091,7 +14379,7 @@
       </p:sp>
       <p:sp>
         <p:nvSpPr>
-          <p:cNvPr id="51" name="Text 51"/>
+          <p:cNvPr id="63" name="Text 63"/>
           <p:cNvSpPr txBox="1"/>
           <p:nvPr/>
         </p:nvSpPr>
@@ -14128,14 +14416,88 @@
       </p:sp>
       <p:sp>
         <p:nvSpPr>
-          <p:cNvPr id="52" name="نجمة للمجموعة 4 52"/>
+          <p:cNvPr id="64" name="Text 64"/>
+          <p:cNvSpPr txBox="1"/>
+          <p:nvPr/>
+        </p:nvSpPr>
+        <p:spPr>
+          <a:xfrm>
+            <a:off x="2697480" y="2916936"/>
+            <a:ext cx="384048" cy="402336"/>
+          </a:xfrm>
+          <a:prstGeom prst="rect">
+            <a:avLst/>
+          </a:prstGeom>
+          <a:noFill/>
+        </p:spPr>
+        <p:txBody>
+          <a:bodyPr wrap="square" lIns="0" tIns="0" rIns="0" bIns="0" rtlCol="1" anchor="ctr"/>
+          <a:lstStyle/>
+          <a:p>
+            <a:pPr rtl="1" algn="ctr" marL="0" indent="0">
+              <a:buNone/>
+            </a:pPr>
+            <a:r>
+              <a:rPr lang="ar-SA" altLang="en-US" sz="2200" b="1" dirty="0">
+                <a:solidFill>
+                  <a:srgbClr val="C9D6CE"/>
+                </a:solidFill>
+                <a:latin typeface="IBM Plex Sans Arabic"/>
+                <a:cs typeface="IBM Plex Sans Arabic"/>
+              </a:rPr>
+              <a:t>☆</a:t>
+            </a:r>
+            <a:endParaRPr lang="ar-SA" sz="2200" dirty="0"/>
+          </a:p>
+        </p:txBody>
+      </p:sp>
+      <p:sp>
+        <p:nvSpPr>
+          <p:cNvPr id="65" name="Text 65"/>
+          <p:cNvSpPr txBox="1"/>
+          <p:nvPr/>
+        </p:nvSpPr>
+        <p:spPr>
+          <a:xfrm>
+            <a:off x="2697480" y="2916936"/>
+            <a:ext cx="384048" cy="402336"/>
+          </a:xfrm>
+          <a:prstGeom prst="rect">
+            <a:avLst/>
+          </a:prstGeom>
+          <a:noFill/>
+        </p:spPr>
+        <p:txBody>
+          <a:bodyPr wrap="square" lIns="0" tIns="0" rIns="0" bIns="0" rtlCol="1" anchor="ctr"/>
+          <a:lstStyle/>
+          <a:p>
+            <a:pPr rtl="1" algn="ctr" marL="0" indent="0">
+              <a:buNone/>
+            </a:pPr>
+            <a:r>
+              <a:rPr lang="ar-SA" altLang="en-US" sz="2200" b="1" dirty="0">
+                <a:solidFill>
+                  <a:srgbClr val="B8912F"/>
+                </a:solidFill>
+                <a:latin typeface="IBM Plex Sans Arabic"/>
+                <a:cs typeface="IBM Plex Sans Arabic"/>
+              </a:rPr>
+              <a:t>★</a:t>
+            </a:r>
+            <a:endParaRPr lang="ar-SA" sz="2200" dirty="0"/>
+          </a:p>
+        </p:txBody>
+      </p:sp>
+      <p:sp>
+        <p:nvSpPr>
+          <p:cNvPr id="66" name="نجمة 1 للمجموعة 4 66"/>
           <p:cNvSpPr/>
           <p:nvPr/>
         </p:nvSpPr>
         <p:spPr>
           <a:xfrm>
-            <a:off x="3200400" y="2935224"/>
-            <a:ext cx="1143000" cy="365760"/>
+            <a:off x="2697480" y="2916936"/>
+            <a:ext cx="384048" cy="402336"/>
           </a:xfrm>
           <a:prstGeom prst="rect">
             <a:avLst/>
@@ -14152,13 +14514,13 @@
       </p:sp>
       <p:sp>
         <p:nvSpPr>
-          <p:cNvPr id="53" name="Text 53"/>
+          <p:cNvPr id="67" name="Text 67"/>
           <p:cNvSpPr txBox="1"/>
           <p:nvPr/>
         </p:nvSpPr>
         <p:spPr>
           <a:xfrm>
-            <a:off x="2697480" y="2916936"/>
+            <a:off x="2258568" y="2916936"/>
             <a:ext cx="384048" cy="402336"/>
           </a:xfrm>
           <a:prstGeom prst="rect">
@@ -14189,13 +14551,13 @@
       </p:sp>
       <p:sp>
         <p:nvSpPr>
-          <p:cNvPr id="54" name="Text 54"/>
+          <p:cNvPr id="68" name="Text 68"/>
           <p:cNvSpPr txBox="1"/>
           <p:nvPr/>
         </p:nvSpPr>
         <p:spPr>
           <a:xfrm>
-            <a:off x="2697480" y="2916936"/>
+            <a:off x="2258568" y="2916936"/>
             <a:ext cx="384048" cy="402336"/>
           </a:xfrm>
           <a:prstGeom prst="rect">
@@ -14226,13 +14588,37 @@
       </p:sp>
       <p:sp>
         <p:nvSpPr>
-          <p:cNvPr id="55" name="Text 55"/>
+          <p:cNvPr id="69" name="نجمة 2 للمجموعة 4 69"/>
+          <p:cNvSpPr/>
+          <p:nvPr/>
+        </p:nvSpPr>
+        <p:spPr>
+          <a:xfrm>
+            <a:off x="2258568" y="2916936"/>
+            <a:ext cx="384048" cy="402336"/>
+          </a:xfrm>
+          <a:prstGeom prst="rect">
+            <a:avLst/>
+          </a:prstGeom>
+          <a:solidFill>
+            <a:srgbClr val="FFFFFF">
+              <a:alpha val="0"/>
+            </a:srgbClr>
+          </a:solidFill>
+          <a:ln>
+            <a:noFill/>
+          </a:ln>
+        </p:spPr>
+      </p:sp>
+      <p:sp>
+        <p:nvSpPr>
+          <p:cNvPr id="70" name="Text 70"/>
           <p:cNvSpPr txBox="1"/>
           <p:nvPr/>
         </p:nvSpPr>
         <p:spPr>
           <a:xfrm>
-            <a:off x="2258568" y="2916936"/>
+            <a:off x="1819656" y="2916936"/>
             <a:ext cx="384048" cy="402336"/>
           </a:xfrm>
           <a:prstGeom prst="rect">
@@ -14263,13 +14649,13 @@
       </p:sp>
       <p:sp>
         <p:nvSpPr>
-          <p:cNvPr id="56" name="Text 56"/>
+          <p:cNvPr id="71" name="Text 71"/>
           <p:cNvSpPr txBox="1"/>
           <p:nvPr/>
         </p:nvSpPr>
         <p:spPr>
           <a:xfrm>
-            <a:off x="2258568" y="2916936"/>
+            <a:off x="1819656" y="2916936"/>
             <a:ext cx="384048" cy="402336"/>
           </a:xfrm>
           <a:prstGeom prst="rect">
@@ -14300,13 +14686,37 @@
       </p:sp>
       <p:sp>
         <p:nvSpPr>
-          <p:cNvPr id="57" name="Text 57"/>
+          <p:cNvPr id="72" name="نجمة 3 للمجموعة 4 72"/>
+          <p:cNvSpPr/>
+          <p:nvPr/>
+        </p:nvSpPr>
+        <p:spPr>
+          <a:xfrm>
+            <a:off x="1819656" y="2916936"/>
+            <a:ext cx="384048" cy="402336"/>
+          </a:xfrm>
+          <a:prstGeom prst="rect">
+            <a:avLst/>
+          </a:prstGeom>
+          <a:solidFill>
+            <a:srgbClr val="FFFFFF">
+              <a:alpha val="0"/>
+            </a:srgbClr>
+          </a:solidFill>
+          <a:ln>
+            <a:noFill/>
+          </a:ln>
+        </p:spPr>
+      </p:sp>
+      <p:sp>
+        <p:nvSpPr>
+          <p:cNvPr id="73" name="Text 73"/>
           <p:cNvSpPr txBox="1"/>
           <p:nvPr/>
         </p:nvSpPr>
         <p:spPr>
           <a:xfrm>
-            <a:off x="1819656" y="2916936"/>
+            <a:off x="1380744" y="2916936"/>
             <a:ext cx="384048" cy="402336"/>
           </a:xfrm>
           <a:prstGeom prst="rect">
@@ -14337,13 +14747,13 @@
       </p:sp>
       <p:sp>
         <p:nvSpPr>
-          <p:cNvPr id="58" name="Text 58"/>
+          <p:cNvPr id="74" name="Text 74"/>
           <p:cNvSpPr txBox="1"/>
           <p:nvPr/>
         </p:nvSpPr>
         <p:spPr>
           <a:xfrm>
-            <a:off x="1819656" y="2916936"/>
+            <a:off x="1380744" y="2916936"/>
             <a:ext cx="384048" cy="402336"/>
           </a:xfrm>
           <a:prstGeom prst="rect">
@@ -14374,13 +14784,37 @@
       </p:sp>
       <p:sp>
         <p:nvSpPr>
-          <p:cNvPr id="59" name="Text 59"/>
+          <p:cNvPr id="75" name="نجمة 4 للمجموعة 4 75"/>
+          <p:cNvSpPr/>
+          <p:nvPr/>
+        </p:nvSpPr>
+        <p:spPr>
+          <a:xfrm>
+            <a:off x="1380744" y="2916936"/>
+            <a:ext cx="384048" cy="402336"/>
+          </a:xfrm>
+          <a:prstGeom prst="rect">
+            <a:avLst/>
+          </a:prstGeom>
+          <a:solidFill>
+            <a:srgbClr val="FFFFFF">
+              <a:alpha val="0"/>
+            </a:srgbClr>
+          </a:solidFill>
+          <a:ln>
+            <a:noFill/>
+          </a:ln>
+        </p:spPr>
+      </p:sp>
+      <p:sp>
+        <p:nvSpPr>
+          <p:cNvPr id="76" name="Text 76"/>
           <p:cNvSpPr txBox="1"/>
           <p:nvPr/>
         </p:nvSpPr>
         <p:spPr>
           <a:xfrm>
-            <a:off x="1380744" y="2916936"/>
+            <a:off x="941832" y="2916936"/>
             <a:ext cx="384048" cy="402336"/>
           </a:xfrm>
           <a:prstGeom prst="rect">
@@ -14411,13 +14845,13 @@
       </p:sp>
       <p:sp>
         <p:nvSpPr>
-          <p:cNvPr id="60" name="Text 60"/>
+          <p:cNvPr id="77" name="Text 77"/>
           <p:cNvSpPr txBox="1"/>
           <p:nvPr/>
         </p:nvSpPr>
         <p:spPr>
           <a:xfrm>
-            <a:off x="1380744" y="2916936"/>
+            <a:off x="941832" y="2916936"/>
             <a:ext cx="384048" cy="402336"/>
           </a:xfrm>
           <a:prstGeom prst="rect">
@@ -14448,8 +14882,8 @@
       </p:sp>
       <p:sp>
         <p:nvSpPr>
-          <p:cNvPr id="61" name="Text 61"/>
-          <p:cNvSpPr txBox="1"/>
+          <p:cNvPr id="78" name="نجمة 5 للمجموعة 4 78"/>
+          <p:cNvSpPr/>
           <p:nvPr/>
         </p:nvSpPr>
         <p:spPr>
@@ -14460,69 +14894,19 @@
           <a:prstGeom prst="rect">
             <a:avLst/>
           </a:prstGeom>
-          <a:noFill/>
-        </p:spPr>
-        <p:txBody>
-          <a:bodyPr wrap="square" lIns="0" tIns="0" rIns="0" bIns="0" rtlCol="1" anchor="ctr"/>
-          <a:lstStyle/>
-          <a:p>
-            <a:pPr rtl="1" algn="ctr" marL="0" indent="0">
-              <a:buNone/>
-            </a:pPr>
-            <a:r>
-              <a:rPr lang="ar-SA" altLang="en-US" sz="2200" b="1" dirty="0">
-                <a:solidFill>
-                  <a:srgbClr val="C9D6CE"/>
-                </a:solidFill>
-                <a:latin typeface="IBM Plex Sans Arabic"/>
-                <a:cs typeface="IBM Plex Sans Arabic"/>
-              </a:rPr>
-              <a:t>☆</a:t>
-            </a:r>
-            <a:endParaRPr lang="ar-SA" sz="2200" dirty="0"/>
-          </a:p>
-        </p:txBody>
-      </p:sp>
-      <p:sp>
-        <p:nvSpPr>
-          <p:cNvPr id="62" name="Text 62"/>
-          <p:cNvSpPr txBox="1"/>
-          <p:nvPr/>
-        </p:nvSpPr>
-        <p:spPr>
-          <a:xfrm>
-            <a:off x="941832" y="2916936"/>
-            <a:ext cx="384048" cy="402336"/>
-          </a:xfrm>
-          <a:prstGeom prst="rect">
-            <a:avLst/>
-          </a:prstGeom>
-          <a:noFill/>
-        </p:spPr>
-        <p:txBody>
-          <a:bodyPr wrap="square" lIns="0" tIns="0" rIns="0" bIns="0" rtlCol="1" anchor="ctr"/>
-          <a:lstStyle/>
-          <a:p>
-            <a:pPr rtl="1" algn="ctr" marL="0" indent="0">
-              <a:buNone/>
-            </a:pPr>
-            <a:r>
-              <a:rPr lang="ar-SA" altLang="en-US" sz="2200" b="1" dirty="0">
-                <a:solidFill>
-                  <a:srgbClr val="B8912F"/>
-                </a:solidFill>
-                <a:latin typeface="IBM Plex Sans Arabic"/>
-                <a:cs typeface="IBM Plex Sans Arabic"/>
-              </a:rPr>
-              <a:t>★</a:t>
-            </a:r>
-            <a:endParaRPr lang="ar-SA" sz="2200" dirty="0"/>
-          </a:p>
-        </p:txBody>
-      </p:sp>
-      <p:sp>
-        <p:nvSpPr>
-          <p:cNvPr id="63" name="Card 63"/>
+          <a:solidFill>
+            <a:srgbClr val="FFFFFF">
+              <a:alpha val="0"/>
+            </a:srgbClr>
+          </a:solidFill>
+          <a:ln>
+            <a:noFill/>
+          </a:ln>
+        </p:spPr>
+      </p:sp>
+      <p:sp>
+        <p:nvSpPr>
+          <p:cNvPr id="79" name="Card 79"/>
           <p:cNvSpPr/>
           <p:nvPr/>
         </p:nvSpPr>
@@ -14556,7 +14940,7 @@
       </p:sp>
       <p:sp>
         <p:nvSpPr>
-          <p:cNvPr id="64" name="اسم المجموعة 64"/>
+          <p:cNvPr id="80" name="اسم المجموعة 80"/>
           <p:cNvSpPr/>
           <p:nvPr/>
         </p:nvSpPr>
@@ -14583,7 +14967,7 @@
       </p:sp>
       <p:sp>
         <p:nvSpPr>
-          <p:cNvPr id="65" name="Text 65"/>
+          <p:cNvPr id="81" name="Text 81"/>
           <p:cNvSpPr txBox="1"/>
           <p:nvPr/>
         </p:nvSpPr>
@@ -14620,14 +15004,88 @@
       </p:sp>
       <p:sp>
         <p:nvSpPr>
-          <p:cNvPr id="66" name="نجمة للمجموعة 5 66"/>
+          <p:cNvPr id="82" name="Text 82"/>
+          <p:cNvSpPr txBox="1"/>
+          <p:nvPr/>
+        </p:nvSpPr>
+        <p:spPr>
+          <a:xfrm>
+            <a:off x="6903720" y="3666744"/>
+            <a:ext cx="384048" cy="402336"/>
+          </a:xfrm>
+          <a:prstGeom prst="rect">
+            <a:avLst/>
+          </a:prstGeom>
+          <a:noFill/>
+        </p:spPr>
+        <p:txBody>
+          <a:bodyPr wrap="square" lIns="0" tIns="0" rIns="0" bIns="0" rtlCol="1" anchor="ctr"/>
+          <a:lstStyle/>
+          <a:p>
+            <a:pPr rtl="1" algn="ctr" marL="0" indent="0">
+              <a:buNone/>
+            </a:pPr>
+            <a:r>
+              <a:rPr lang="ar-SA" altLang="en-US" sz="2200" b="1" dirty="0">
+                <a:solidFill>
+                  <a:srgbClr val="C9D6CE"/>
+                </a:solidFill>
+                <a:latin typeface="IBM Plex Sans Arabic"/>
+                <a:cs typeface="IBM Plex Sans Arabic"/>
+              </a:rPr>
+              <a:t>☆</a:t>
+            </a:r>
+            <a:endParaRPr lang="ar-SA" sz="2200" dirty="0"/>
+          </a:p>
+        </p:txBody>
+      </p:sp>
+      <p:sp>
+        <p:nvSpPr>
+          <p:cNvPr id="83" name="Text 83"/>
+          <p:cNvSpPr txBox="1"/>
+          <p:nvPr/>
+        </p:nvSpPr>
+        <p:spPr>
+          <a:xfrm>
+            <a:off x="6903720" y="3666744"/>
+            <a:ext cx="384048" cy="402336"/>
+          </a:xfrm>
+          <a:prstGeom prst="rect">
+            <a:avLst/>
+          </a:prstGeom>
+          <a:noFill/>
+        </p:spPr>
+        <p:txBody>
+          <a:bodyPr wrap="square" lIns="0" tIns="0" rIns="0" bIns="0" rtlCol="1" anchor="ctr"/>
+          <a:lstStyle/>
+          <a:p>
+            <a:pPr rtl="1" algn="ctr" marL="0" indent="0">
+              <a:buNone/>
+            </a:pPr>
+            <a:r>
+              <a:rPr lang="ar-SA" altLang="en-US" sz="2200" b="1" dirty="0">
+                <a:solidFill>
+                  <a:srgbClr val="B8912F"/>
+                </a:solidFill>
+                <a:latin typeface="IBM Plex Sans Arabic"/>
+                <a:cs typeface="IBM Plex Sans Arabic"/>
+              </a:rPr>
+              <a:t>★</a:t>
+            </a:r>
+            <a:endParaRPr lang="ar-SA" sz="2200" dirty="0"/>
+          </a:p>
+        </p:txBody>
+      </p:sp>
+      <p:sp>
+        <p:nvSpPr>
+          <p:cNvPr id="84" name="نجمة 1 للمجموعة 5 84"/>
           <p:cNvSpPr/>
           <p:nvPr/>
         </p:nvSpPr>
         <p:spPr>
           <a:xfrm>
-            <a:off x="7406640" y="3685032"/>
-            <a:ext cx="1143000" cy="365760"/>
+            <a:off x="6903720" y="3666744"/>
+            <a:ext cx="384048" cy="402336"/>
           </a:xfrm>
           <a:prstGeom prst="rect">
             <a:avLst/>
@@ -14644,13 +15102,13 @@
       </p:sp>
       <p:sp>
         <p:nvSpPr>
-          <p:cNvPr id="67" name="Text 67"/>
+          <p:cNvPr id="85" name="Text 85"/>
           <p:cNvSpPr txBox="1"/>
           <p:nvPr/>
         </p:nvSpPr>
         <p:spPr>
           <a:xfrm>
-            <a:off x="6903720" y="3666744"/>
+            <a:off x="6464808" y="3666744"/>
             <a:ext cx="384048" cy="402336"/>
           </a:xfrm>
           <a:prstGeom prst="rect">
@@ -14681,13 +15139,13 @@
       </p:sp>
       <p:sp>
         <p:nvSpPr>
-          <p:cNvPr id="68" name="Text 68"/>
+          <p:cNvPr id="86" name="Text 86"/>
           <p:cNvSpPr txBox="1"/>
           <p:nvPr/>
         </p:nvSpPr>
         <p:spPr>
           <a:xfrm>
-            <a:off x="6903720" y="3666744"/>
+            <a:off x="6464808" y="3666744"/>
             <a:ext cx="384048" cy="402336"/>
           </a:xfrm>
           <a:prstGeom prst="rect">
@@ -14718,13 +15176,37 @@
       </p:sp>
       <p:sp>
         <p:nvSpPr>
-          <p:cNvPr id="69" name="Text 69"/>
+          <p:cNvPr id="87" name="نجمة 2 للمجموعة 5 87"/>
+          <p:cNvSpPr/>
+          <p:nvPr/>
+        </p:nvSpPr>
+        <p:spPr>
+          <a:xfrm>
+            <a:off x="6464808" y="3666744"/>
+            <a:ext cx="384048" cy="402336"/>
+          </a:xfrm>
+          <a:prstGeom prst="rect">
+            <a:avLst/>
+          </a:prstGeom>
+          <a:solidFill>
+            <a:srgbClr val="FFFFFF">
+              <a:alpha val="0"/>
+            </a:srgbClr>
+          </a:solidFill>
+          <a:ln>
+            <a:noFill/>
+          </a:ln>
+        </p:spPr>
+      </p:sp>
+      <p:sp>
+        <p:nvSpPr>
+          <p:cNvPr id="88" name="Text 88"/>
           <p:cNvSpPr txBox="1"/>
           <p:nvPr/>
         </p:nvSpPr>
         <p:spPr>
           <a:xfrm>
-            <a:off x="6464808" y="3666744"/>
+            <a:off x="6025896" y="3666744"/>
             <a:ext cx="384048" cy="402336"/>
           </a:xfrm>
           <a:prstGeom prst="rect">
@@ -14755,13 +15237,13 @@
       </p:sp>
       <p:sp>
         <p:nvSpPr>
-          <p:cNvPr id="70" name="Text 70"/>
+          <p:cNvPr id="89" name="Text 89"/>
           <p:cNvSpPr txBox="1"/>
           <p:nvPr/>
         </p:nvSpPr>
         <p:spPr>
           <a:xfrm>
-            <a:off x="6464808" y="3666744"/>
+            <a:off x="6025896" y="3666744"/>
             <a:ext cx="384048" cy="402336"/>
           </a:xfrm>
           <a:prstGeom prst="rect">
@@ -14792,13 +15274,37 @@
       </p:sp>
       <p:sp>
         <p:nvSpPr>
-          <p:cNvPr id="71" name="Text 71"/>
+          <p:cNvPr id="90" name="نجمة 3 للمجموعة 5 90"/>
+          <p:cNvSpPr/>
+          <p:nvPr/>
+        </p:nvSpPr>
+        <p:spPr>
+          <a:xfrm>
+            <a:off x="6025896" y="3666744"/>
+            <a:ext cx="384048" cy="402336"/>
+          </a:xfrm>
+          <a:prstGeom prst="rect">
+            <a:avLst/>
+          </a:prstGeom>
+          <a:solidFill>
+            <a:srgbClr val="FFFFFF">
+              <a:alpha val="0"/>
+            </a:srgbClr>
+          </a:solidFill>
+          <a:ln>
+            <a:noFill/>
+          </a:ln>
+        </p:spPr>
+      </p:sp>
+      <p:sp>
+        <p:nvSpPr>
+          <p:cNvPr id="91" name="Text 91"/>
           <p:cNvSpPr txBox="1"/>
           <p:nvPr/>
         </p:nvSpPr>
         <p:spPr>
           <a:xfrm>
-            <a:off x="6025896" y="3666744"/>
+            <a:off x="5586984" y="3666744"/>
             <a:ext cx="384048" cy="402336"/>
           </a:xfrm>
           <a:prstGeom prst="rect">
@@ -14829,13 +15335,13 @@
       </p:sp>
       <p:sp>
         <p:nvSpPr>
-          <p:cNvPr id="72" name="Text 72"/>
+          <p:cNvPr id="92" name="Text 92"/>
           <p:cNvSpPr txBox="1"/>
           <p:nvPr/>
         </p:nvSpPr>
         <p:spPr>
           <a:xfrm>
-            <a:off x="6025896" y="3666744"/>
+            <a:off x="5586984" y="3666744"/>
             <a:ext cx="384048" cy="402336"/>
           </a:xfrm>
           <a:prstGeom prst="rect">
@@ -14866,13 +15372,37 @@
       </p:sp>
       <p:sp>
         <p:nvSpPr>
-          <p:cNvPr id="73" name="Text 73"/>
+          <p:cNvPr id="93" name="نجمة 4 للمجموعة 5 93"/>
+          <p:cNvSpPr/>
+          <p:nvPr/>
+        </p:nvSpPr>
+        <p:spPr>
+          <a:xfrm>
+            <a:off x="5586984" y="3666744"/>
+            <a:ext cx="384048" cy="402336"/>
+          </a:xfrm>
+          <a:prstGeom prst="rect">
+            <a:avLst/>
+          </a:prstGeom>
+          <a:solidFill>
+            <a:srgbClr val="FFFFFF">
+              <a:alpha val="0"/>
+            </a:srgbClr>
+          </a:solidFill>
+          <a:ln>
+            <a:noFill/>
+          </a:ln>
+        </p:spPr>
+      </p:sp>
+      <p:sp>
+        <p:nvSpPr>
+          <p:cNvPr id="94" name="Text 94"/>
           <p:cNvSpPr txBox="1"/>
           <p:nvPr/>
         </p:nvSpPr>
         <p:spPr>
           <a:xfrm>
-            <a:off x="5586984" y="3666744"/>
+            <a:off x="5148072" y="3666744"/>
             <a:ext cx="384048" cy="402336"/>
           </a:xfrm>
           <a:prstGeom prst="rect">
@@ -14903,13 +15433,13 @@
       </p:sp>
       <p:sp>
         <p:nvSpPr>
-          <p:cNvPr id="74" name="Text 74"/>
+          <p:cNvPr id="95" name="Text 95"/>
           <p:cNvSpPr txBox="1"/>
           <p:nvPr/>
         </p:nvSpPr>
         <p:spPr>
           <a:xfrm>
-            <a:off x="5586984" y="3666744"/>
+            <a:off x="5148072" y="3666744"/>
             <a:ext cx="384048" cy="402336"/>
           </a:xfrm>
           <a:prstGeom prst="rect">
@@ -14940,8 +15470,8 @@
       </p:sp>
       <p:sp>
         <p:nvSpPr>
-          <p:cNvPr id="75" name="Text 75"/>
-          <p:cNvSpPr txBox="1"/>
+          <p:cNvPr id="96" name="نجمة 5 للمجموعة 5 96"/>
+          <p:cNvSpPr/>
           <p:nvPr/>
         </p:nvSpPr>
         <p:spPr>
@@ -14952,69 +15482,19 @@
           <a:prstGeom prst="rect">
             <a:avLst/>
           </a:prstGeom>
-          <a:noFill/>
-        </p:spPr>
-        <p:txBody>
-          <a:bodyPr wrap="square" lIns="0" tIns="0" rIns="0" bIns="0" rtlCol="1" anchor="ctr"/>
-          <a:lstStyle/>
-          <a:p>
-            <a:pPr rtl="1" algn="ctr" marL="0" indent="0">
-              <a:buNone/>
-            </a:pPr>
-            <a:r>
-              <a:rPr lang="ar-SA" altLang="en-US" sz="2200" b="1" dirty="0">
-                <a:solidFill>
-                  <a:srgbClr val="C9D6CE"/>
-                </a:solidFill>
-                <a:latin typeface="IBM Plex Sans Arabic"/>
-                <a:cs typeface="IBM Plex Sans Arabic"/>
-              </a:rPr>
-              <a:t>☆</a:t>
-            </a:r>
-            <a:endParaRPr lang="ar-SA" sz="2200" dirty="0"/>
-          </a:p>
-        </p:txBody>
-      </p:sp>
-      <p:sp>
-        <p:nvSpPr>
-          <p:cNvPr id="76" name="Text 76"/>
-          <p:cNvSpPr txBox="1"/>
-          <p:nvPr/>
-        </p:nvSpPr>
-        <p:spPr>
-          <a:xfrm>
-            <a:off x="5148072" y="3666744"/>
-            <a:ext cx="384048" cy="402336"/>
-          </a:xfrm>
-          <a:prstGeom prst="rect">
-            <a:avLst/>
-          </a:prstGeom>
-          <a:noFill/>
-        </p:spPr>
-        <p:txBody>
-          <a:bodyPr wrap="square" lIns="0" tIns="0" rIns="0" bIns="0" rtlCol="1" anchor="ctr"/>
-          <a:lstStyle/>
-          <a:p>
-            <a:pPr rtl="1" algn="ctr" marL="0" indent="0">
-              <a:buNone/>
-            </a:pPr>
-            <a:r>
-              <a:rPr lang="ar-SA" altLang="en-US" sz="2200" b="1" dirty="0">
-                <a:solidFill>
-                  <a:srgbClr val="B8912F"/>
-                </a:solidFill>
-                <a:latin typeface="IBM Plex Sans Arabic"/>
-                <a:cs typeface="IBM Plex Sans Arabic"/>
-              </a:rPr>
-              <a:t>★</a:t>
-            </a:r>
-            <a:endParaRPr lang="ar-SA" sz="2200" dirty="0"/>
-          </a:p>
-        </p:txBody>
-      </p:sp>
-      <p:sp>
-        <p:nvSpPr>
-          <p:cNvPr id="77" name="Card 77"/>
+          <a:solidFill>
+            <a:srgbClr val="FFFFFF">
+              <a:alpha val="0"/>
+            </a:srgbClr>
+          </a:solidFill>
+          <a:ln>
+            <a:noFill/>
+          </a:ln>
+        </p:spPr>
+      </p:sp>
+      <p:sp>
+        <p:nvSpPr>
+          <p:cNvPr id="97" name="Card 97"/>
           <p:cNvSpPr/>
           <p:nvPr/>
         </p:nvSpPr>
@@ -15048,7 +15528,7 @@
       </p:sp>
       <p:sp>
         <p:nvSpPr>
-          <p:cNvPr id="78" name="اسم المجموعة 78"/>
+          <p:cNvPr id="98" name="اسم المجموعة 98"/>
           <p:cNvSpPr/>
           <p:nvPr/>
         </p:nvSpPr>
@@ -15075,7 +15555,7 @@
       </p:sp>
       <p:sp>
         <p:nvSpPr>
-          <p:cNvPr id="79" name="Text 79"/>
+          <p:cNvPr id="99" name="Text 99"/>
           <p:cNvSpPr txBox="1"/>
           <p:nvPr/>
         </p:nvSpPr>
@@ -15112,14 +15592,88 @@
       </p:sp>
       <p:sp>
         <p:nvSpPr>
-          <p:cNvPr id="80" name="نجمة للمجموعة 6 80"/>
+          <p:cNvPr id="100" name="Text 100"/>
+          <p:cNvSpPr txBox="1"/>
+          <p:nvPr/>
+        </p:nvSpPr>
+        <p:spPr>
+          <a:xfrm>
+            <a:off x="2697480" y="3666744"/>
+            <a:ext cx="384048" cy="402336"/>
+          </a:xfrm>
+          <a:prstGeom prst="rect">
+            <a:avLst/>
+          </a:prstGeom>
+          <a:noFill/>
+        </p:spPr>
+        <p:txBody>
+          <a:bodyPr wrap="square" lIns="0" tIns="0" rIns="0" bIns="0" rtlCol="1" anchor="ctr"/>
+          <a:lstStyle/>
+          <a:p>
+            <a:pPr rtl="1" algn="ctr" marL="0" indent="0">
+              <a:buNone/>
+            </a:pPr>
+            <a:r>
+              <a:rPr lang="ar-SA" altLang="en-US" sz="2200" b="1" dirty="0">
+                <a:solidFill>
+                  <a:srgbClr val="C9D6CE"/>
+                </a:solidFill>
+                <a:latin typeface="IBM Plex Sans Arabic"/>
+                <a:cs typeface="IBM Plex Sans Arabic"/>
+              </a:rPr>
+              <a:t>☆</a:t>
+            </a:r>
+            <a:endParaRPr lang="ar-SA" sz="2200" dirty="0"/>
+          </a:p>
+        </p:txBody>
+      </p:sp>
+      <p:sp>
+        <p:nvSpPr>
+          <p:cNvPr id="101" name="Text 101"/>
+          <p:cNvSpPr txBox="1"/>
+          <p:nvPr/>
+        </p:nvSpPr>
+        <p:spPr>
+          <a:xfrm>
+            <a:off x="2697480" y="3666744"/>
+            <a:ext cx="384048" cy="402336"/>
+          </a:xfrm>
+          <a:prstGeom prst="rect">
+            <a:avLst/>
+          </a:prstGeom>
+          <a:noFill/>
+        </p:spPr>
+        <p:txBody>
+          <a:bodyPr wrap="square" lIns="0" tIns="0" rIns="0" bIns="0" rtlCol="1" anchor="ctr"/>
+          <a:lstStyle/>
+          <a:p>
+            <a:pPr rtl="1" algn="ctr" marL="0" indent="0">
+              <a:buNone/>
+            </a:pPr>
+            <a:r>
+              <a:rPr lang="ar-SA" altLang="en-US" sz="2200" b="1" dirty="0">
+                <a:solidFill>
+                  <a:srgbClr val="B8912F"/>
+                </a:solidFill>
+                <a:latin typeface="IBM Plex Sans Arabic"/>
+                <a:cs typeface="IBM Plex Sans Arabic"/>
+              </a:rPr>
+              <a:t>★</a:t>
+            </a:r>
+            <a:endParaRPr lang="ar-SA" sz="2200" dirty="0"/>
+          </a:p>
+        </p:txBody>
+      </p:sp>
+      <p:sp>
+        <p:nvSpPr>
+          <p:cNvPr id="102" name="نجمة 1 للمجموعة 6 102"/>
           <p:cNvSpPr/>
           <p:nvPr/>
         </p:nvSpPr>
         <p:spPr>
           <a:xfrm>
-            <a:off x="3200400" y="3685032"/>
-            <a:ext cx="1143000" cy="365760"/>
+            <a:off x="2697480" y="3666744"/>
+            <a:ext cx="384048" cy="402336"/>
           </a:xfrm>
           <a:prstGeom prst="rect">
             <a:avLst/>
@@ -15136,13 +15690,13 @@
       </p:sp>
       <p:sp>
         <p:nvSpPr>
-          <p:cNvPr id="81" name="Text 81"/>
+          <p:cNvPr id="103" name="Text 103"/>
           <p:cNvSpPr txBox="1"/>
           <p:nvPr/>
         </p:nvSpPr>
         <p:spPr>
           <a:xfrm>
-            <a:off x="2697480" y="3666744"/>
+            <a:off x="2258568" y="3666744"/>
             <a:ext cx="384048" cy="402336"/>
           </a:xfrm>
           <a:prstGeom prst="rect">
@@ -15173,13 +15727,13 @@
       </p:sp>
       <p:sp>
         <p:nvSpPr>
-          <p:cNvPr id="82" name="Text 82"/>
+          <p:cNvPr id="104" name="Text 104"/>
           <p:cNvSpPr txBox="1"/>
           <p:nvPr/>
         </p:nvSpPr>
         <p:spPr>
           <a:xfrm>
-            <a:off x="2697480" y="3666744"/>
+            <a:off x="2258568" y="3666744"/>
             <a:ext cx="384048" cy="402336"/>
           </a:xfrm>
           <a:prstGeom prst="rect">
@@ -15210,13 +15764,37 @@
       </p:sp>
       <p:sp>
         <p:nvSpPr>
-          <p:cNvPr id="83" name="Text 83"/>
+          <p:cNvPr id="105" name="نجمة 2 للمجموعة 6 105"/>
+          <p:cNvSpPr/>
+          <p:nvPr/>
+        </p:nvSpPr>
+        <p:spPr>
+          <a:xfrm>
+            <a:off x="2258568" y="3666744"/>
+            <a:ext cx="384048" cy="402336"/>
+          </a:xfrm>
+          <a:prstGeom prst="rect">
+            <a:avLst/>
+          </a:prstGeom>
+          <a:solidFill>
+            <a:srgbClr val="FFFFFF">
+              <a:alpha val="0"/>
+            </a:srgbClr>
+          </a:solidFill>
+          <a:ln>
+            <a:noFill/>
+          </a:ln>
+        </p:spPr>
+      </p:sp>
+      <p:sp>
+        <p:nvSpPr>
+          <p:cNvPr id="106" name="Text 106"/>
           <p:cNvSpPr txBox="1"/>
           <p:nvPr/>
         </p:nvSpPr>
         <p:spPr>
           <a:xfrm>
-            <a:off x="2258568" y="3666744"/>
+            <a:off x="1819656" y="3666744"/>
             <a:ext cx="384048" cy="402336"/>
           </a:xfrm>
           <a:prstGeom prst="rect">
@@ -15247,13 +15825,13 @@
       </p:sp>
       <p:sp>
         <p:nvSpPr>
-          <p:cNvPr id="84" name="Text 84"/>
+          <p:cNvPr id="107" name="Text 107"/>
           <p:cNvSpPr txBox="1"/>
           <p:nvPr/>
         </p:nvSpPr>
         <p:spPr>
           <a:xfrm>
-            <a:off x="2258568" y="3666744"/>
+            <a:off x="1819656" y="3666744"/>
             <a:ext cx="384048" cy="402336"/>
           </a:xfrm>
           <a:prstGeom prst="rect">
@@ -15284,13 +15862,37 @@
       </p:sp>
       <p:sp>
         <p:nvSpPr>
-          <p:cNvPr id="85" name="Text 85"/>
+          <p:cNvPr id="108" name="نجمة 3 للمجموعة 6 108"/>
+          <p:cNvSpPr/>
+          <p:nvPr/>
+        </p:nvSpPr>
+        <p:spPr>
+          <a:xfrm>
+            <a:off x="1819656" y="3666744"/>
+            <a:ext cx="384048" cy="402336"/>
+          </a:xfrm>
+          <a:prstGeom prst="rect">
+            <a:avLst/>
+          </a:prstGeom>
+          <a:solidFill>
+            <a:srgbClr val="FFFFFF">
+              <a:alpha val="0"/>
+            </a:srgbClr>
+          </a:solidFill>
+          <a:ln>
+            <a:noFill/>
+          </a:ln>
+        </p:spPr>
+      </p:sp>
+      <p:sp>
+        <p:nvSpPr>
+          <p:cNvPr id="109" name="Text 109"/>
           <p:cNvSpPr txBox="1"/>
           <p:nvPr/>
         </p:nvSpPr>
         <p:spPr>
           <a:xfrm>
-            <a:off x="1819656" y="3666744"/>
+            <a:off x="1380744" y="3666744"/>
             <a:ext cx="384048" cy="402336"/>
           </a:xfrm>
           <a:prstGeom prst="rect">
@@ -15321,13 +15923,13 @@
       </p:sp>
       <p:sp>
         <p:nvSpPr>
-          <p:cNvPr id="86" name="Text 86"/>
+          <p:cNvPr id="110" name="Text 110"/>
           <p:cNvSpPr txBox="1"/>
           <p:nvPr/>
         </p:nvSpPr>
         <p:spPr>
           <a:xfrm>
-            <a:off x="1819656" y="3666744"/>
+            <a:off x="1380744" y="3666744"/>
             <a:ext cx="384048" cy="402336"/>
           </a:xfrm>
           <a:prstGeom prst="rect">
@@ -15358,13 +15960,37 @@
       </p:sp>
       <p:sp>
         <p:nvSpPr>
-          <p:cNvPr id="87" name="Text 87"/>
+          <p:cNvPr id="111" name="نجمة 4 للمجموعة 6 111"/>
+          <p:cNvSpPr/>
+          <p:nvPr/>
+        </p:nvSpPr>
+        <p:spPr>
+          <a:xfrm>
+            <a:off x="1380744" y="3666744"/>
+            <a:ext cx="384048" cy="402336"/>
+          </a:xfrm>
+          <a:prstGeom prst="rect">
+            <a:avLst/>
+          </a:prstGeom>
+          <a:solidFill>
+            <a:srgbClr val="FFFFFF">
+              <a:alpha val="0"/>
+            </a:srgbClr>
+          </a:solidFill>
+          <a:ln>
+            <a:noFill/>
+          </a:ln>
+        </p:spPr>
+      </p:sp>
+      <p:sp>
+        <p:nvSpPr>
+          <p:cNvPr id="112" name="Text 112"/>
           <p:cNvSpPr txBox="1"/>
           <p:nvPr/>
         </p:nvSpPr>
         <p:spPr>
           <a:xfrm>
-            <a:off x="1380744" y="3666744"/>
+            <a:off x="941832" y="3666744"/>
             <a:ext cx="384048" cy="402336"/>
           </a:xfrm>
           <a:prstGeom prst="rect">
@@ -15395,13 +16021,13 @@
       </p:sp>
       <p:sp>
         <p:nvSpPr>
-          <p:cNvPr id="88" name="Text 88"/>
+          <p:cNvPr id="113" name="Text 113"/>
           <p:cNvSpPr txBox="1"/>
           <p:nvPr/>
         </p:nvSpPr>
         <p:spPr>
           <a:xfrm>
-            <a:off x="1380744" y="3666744"/>
+            <a:off x="941832" y="3666744"/>
             <a:ext cx="384048" cy="402336"/>
           </a:xfrm>
           <a:prstGeom prst="rect">
@@ -15432,8 +16058,8 @@
       </p:sp>
       <p:sp>
         <p:nvSpPr>
-          <p:cNvPr id="89" name="Text 89"/>
-          <p:cNvSpPr txBox="1"/>
+          <p:cNvPr id="114" name="نجمة 5 للمجموعة 6 114"/>
+          <p:cNvSpPr/>
           <p:nvPr/>
         </p:nvSpPr>
         <p:spPr>
@@ -15444,69 +16070,19 @@
           <a:prstGeom prst="rect">
             <a:avLst/>
           </a:prstGeom>
-          <a:noFill/>
-        </p:spPr>
-        <p:txBody>
-          <a:bodyPr wrap="square" lIns="0" tIns="0" rIns="0" bIns="0" rtlCol="1" anchor="ctr"/>
-          <a:lstStyle/>
-          <a:p>
-            <a:pPr rtl="1" algn="ctr" marL="0" indent="0">
-              <a:buNone/>
-            </a:pPr>
-            <a:r>
-              <a:rPr lang="ar-SA" altLang="en-US" sz="2200" b="1" dirty="0">
-                <a:solidFill>
-                  <a:srgbClr val="C9D6CE"/>
-                </a:solidFill>
-                <a:latin typeface="IBM Plex Sans Arabic"/>
-                <a:cs typeface="IBM Plex Sans Arabic"/>
-              </a:rPr>
-              <a:t>☆</a:t>
-            </a:r>
-            <a:endParaRPr lang="ar-SA" sz="2200" dirty="0"/>
-          </a:p>
-        </p:txBody>
-      </p:sp>
-      <p:sp>
-        <p:nvSpPr>
-          <p:cNvPr id="90" name="Text 90"/>
-          <p:cNvSpPr txBox="1"/>
-          <p:nvPr/>
-        </p:nvSpPr>
-        <p:spPr>
-          <a:xfrm>
-            <a:off x="941832" y="3666744"/>
-            <a:ext cx="384048" cy="402336"/>
-          </a:xfrm>
-          <a:prstGeom prst="rect">
-            <a:avLst/>
-          </a:prstGeom>
-          <a:noFill/>
-        </p:spPr>
-        <p:txBody>
-          <a:bodyPr wrap="square" lIns="0" tIns="0" rIns="0" bIns="0" rtlCol="1" anchor="ctr"/>
-          <a:lstStyle/>
-          <a:p>
-            <a:pPr rtl="1" algn="ctr" marL="0" indent="0">
-              <a:buNone/>
-            </a:pPr>
-            <a:r>
-              <a:rPr lang="ar-SA" altLang="en-US" sz="2200" b="1" dirty="0">
-                <a:solidFill>
-                  <a:srgbClr val="B8912F"/>
-                </a:solidFill>
-                <a:latin typeface="IBM Plex Sans Arabic"/>
-                <a:cs typeface="IBM Plex Sans Arabic"/>
-              </a:rPr>
-              <a:t>★</a:t>
-            </a:r>
-            <a:endParaRPr lang="ar-SA" sz="2200" dirty="0"/>
-          </a:p>
-        </p:txBody>
-      </p:sp>
-      <p:sp>
-        <p:nvSpPr>
-          <p:cNvPr id="91" name="Text 91"/>
+          <a:solidFill>
+            <a:srgbClr val="FFFFFF">
+              <a:alpha val="0"/>
+            </a:srgbClr>
+          </a:solidFill>
+          <a:ln>
+            <a:noFill/>
+          </a:ln>
+        </p:spPr>
+      </p:sp>
+      <p:sp>
+        <p:nvSpPr>
+          <p:cNvPr id="115" name="Text 115"/>
           <p:cNvSpPr txBox="1"/>
           <p:nvPr/>
         </p:nvSpPr>
@@ -15535,7 +16111,7 @@
                 <a:latin typeface="IBM Plex Sans Arabic"/>
                 <a:cs typeface="IBM Plex Sans Arabic"/>
               </a:rPr>
-              <a:t>انقر على اسم المجموعة لتضيف لها نجمة، وكل نقرة نجمة جديدة.</a:t>
+              <a:t>انقر على النجمة الفارغة لتمتلئ.</a:t>
             </a:r>
             <a:endParaRPr lang="ar-SA" sz="1000" dirty="0"/>
           </a:p>
@@ -15555,11 +16131,11 @@
         <p:cTn id="1" dur="indefinite" restart="never" nodeType="tmRoot">
           <p:childTnLst>
             <p:seq concurrent="1" nextAc="seek">
-              <p:cTn id="3" restart="whenNotActive" fill="hold" evtFilter="cancelBubble" nodeType="interactiveSeq">
+              <p:cTn id="2" restart="whenNotActive" fill="hold" evtFilter="cancelBubble" nodeType="interactiveSeq">
                 <p:stCondLst>
                   <p:cond evt="onClick" delay="0">
                     <p:tgtEl>
-                      <p:spTgt spid="10"/>
+                      <p:spTgt spid="12"/>
                     </p:tgtEl>
                   </p:cond>
                 </p:stCondLst>
@@ -15568,9 +16144,9 @@
                 </p:endSync>
                 <p:childTnLst>
                   <p:par>
-                    <p:cTn id="8" fill="hold">
+                    <p:cTn id="3" fill="hold">
                       <p:stCondLst>
-                        <p:cond delay="indefinite"/>
+                        <p:cond delay="0"/>
                       </p:stCondLst>
                       <p:childTnLst>
                         <p:par>
@@ -15580,20 +16156,20 @@
                             </p:stCondLst>
                             <p:childTnLst>
                               <p:par>
-                                <p:cTn id="7" presetID="10" presetClass="entr" presetSubtype="0" fill="hold" grpId="0" nodeType="clickEffect">
+                                <p:cTn id="5" presetID="10" presetClass="entr" presetSubtype="0" fill="hold" grpId="0" nodeType="clickEffect">
                                   <p:stCondLst>
                                     <p:cond delay="0"/>
                                   </p:stCondLst>
                                   <p:childTnLst>
                                     <p:set>
                                       <p:cBhvr>
-                                        <p:cTn id="5" dur="1" fill="hold">
+                                        <p:cTn id="6" dur="1" fill="hold">
                                           <p:stCondLst>
                                             <p:cond delay="0"/>
                                           </p:stCondLst>
                                         </p:cTn>
                                         <p:tgtEl>
-                                          <p:spTgt spid="12"/>
+                                          <p:spTgt spid="11"/>
                                         </p:tgtEl>
                                         <p:attrNameLst>
                                           <p:attrName>style.visibility</p:attrName>
@@ -15605,9 +16181,9 @@
                                     </p:set>
                                     <p:animEffect transition="in" filter="fade">
                                       <p:cBhvr>
-                                        <p:cTn id="6" dur="300"/>
+                                        <p:cTn id="7" dur="300"/>
                                         <p:tgtEl>
-                                          <p:spTgt spid="12"/>
+                                          <p:spTgt spid="11"/>
                                         </p:tgtEl>
                                       </p:cBhvr>
                                     </p:animEffect>
@@ -15620,27 +16196,50 @@
                       </p:childTnLst>
                     </p:cTn>
                   </p:par>
+                </p:childTnLst>
+              </p:cTn>
+              <p:nextCondLst>
+                <p:cond evt="onNext" delay="0">
+                  <p:tgtEl>
+                    <p:sldTgt/>
+                  </p:tgtEl>
+                </p:cond>
+              </p:nextCondLst>
+            </p:seq>
+            <p:seq concurrent="1" nextAc="seek">
+              <p:cTn id="8" restart="whenNotActive" fill="hold" evtFilter="cancelBubble" nodeType="interactiveSeq">
+                <p:stCondLst>
+                  <p:cond evt="onClick" delay="0">
+                    <p:tgtEl>
+                      <p:spTgt spid="15"/>
+                    </p:tgtEl>
+                  </p:cond>
+                </p:stCondLst>
+                <p:endSync evt="end" delay="0">
+                  <p:rtn val="all"/>
+                </p:endSync>
+                <p:childTnLst>
                   <p:par>
-                    <p:cTn id="13" fill="hold">
+                    <p:cTn id="9" fill="hold">
                       <p:stCondLst>
-                        <p:cond delay="indefinite"/>
+                        <p:cond delay="0"/>
                       </p:stCondLst>
                       <p:childTnLst>
                         <p:par>
-                          <p:cTn id="9" fill="hold">
+                          <p:cTn id="10" fill="hold">
                             <p:stCondLst>
                               <p:cond delay="0"/>
                             </p:stCondLst>
                             <p:childTnLst>
                               <p:par>
-                                <p:cTn id="12" presetID="10" presetClass="entr" presetSubtype="0" fill="hold" grpId="0" nodeType="clickEffect">
+                                <p:cTn id="11" presetID="10" presetClass="entr" presetSubtype="0" fill="hold" grpId="0" nodeType="clickEffect">
                                   <p:stCondLst>
                                     <p:cond delay="0"/>
                                   </p:stCondLst>
                                   <p:childTnLst>
                                     <p:set>
                                       <p:cBhvr>
-                                        <p:cTn id="10" dur="1" fill="hold">
+                                        <p:cTn id="12" dur="1" fill="hold">
                                           <p:stCondLst>
                                             <p:cond delay="0"/>
                                           </p:stCondLst>
@@ -15658,7 +16257,7 @@
                                     </p:set>
                                     <p:animEffect transition="in" filter="fade">
                                       <p:cBhvr>
-                                        <p:cTn id="11" dur="300"/>
+                                        <p:cTn id="13" dur="300"/>
                                         <p:tgtEl>
                                           <p:spTgt spid="14"/>
                                         </p:tgtEl>
@@ -15673,14 +16272,37 @@
                       </p:childTnLst>
                     </p:cTn>
                   </p:par>
+                </p:childTnLst>
+              </p:cTn>
+              <p:nextCondLst>
+                <p:cond evt="onNext" delay="0">
+                  <p:tgtEl>
+                    <p:sldTgt/>
+                  </p:tgtEl>
+                </p:cond>
+              </p:nextCondLst>
+            </p:seq>
+            <p:seq concurrent="1" nextAc="seek">
+              <p:cTn id="14" restart="whenNotActive" fill="hold" evtFilter="cancelBubble" nodeType="interactiveSeq">
+                <p:stCondLst>
+                  <p:cond evt="onClick" delay="0">
+                    <p:tgtEl>
+                      <p:spTgt spid="18"/>
+                    </p:tgtEl>
+                  </p:cond>
+                </p:stCondLst>
+                <p:endSync evt="end" delay="0">
+                  <p:rtn val="all"/>
+                </p:endSync>
+                <p:childTnLst>
                   <p:par>
-                    <p:cTn id="18" fill="hold">
+                    <p:cTn id="15" fill="hold">
                       <p:stCondLst>
-                        <p:cond delay="indefinite"/>
+                        <p:cond delay="0"/>
                       </p:stCondLst>
                       <p:childTnLst>
                         <p:par>
-                          <p:cTn id="14" fill="hold">
+                          <p:cTn id="16" fill="hold">
                             <p:stCondLst>
                               <p:cond delay="0"/>
                             </p:stCondLst>
@@ -15693,13 +16315,13 @@
                                   <p:childTnLst>
                                     <p:set>
                                       <p:cBhvr>
-                                        <p:cTn id="15" dur="1" fill="hold">
+                                        <p:cTn id="18" dur="1" fill="hold">
                                           <p:stCondLst>
                                             <p:cond delay="0"/>
                                           </p:stCondLst>
                                         </p:cTn>
                                         <p:tgtEl>
-                                          <p:spTgt spid="16"/>
+                                          <p:spTgt spid="17"/>
                                         </p:tgtEl>
                                         <p:attrNameLst>
                                           <p:attrName>style.visibility</p:attrName>
@@ -15711,9 +16333,9 @@
                                     </p:set>
                                     <p:animEffect transition="in" filter="fade">
                                       <p:cBhvr>
-                                        <p:cTn id="16" dur="300"/>
+                                        <p:cTn id="19" dur="300"/>
                                         <p:tgtEl>
-                                          <p:spTgt spid="16"/>
+                                          <p:spTgt spid="17"/>
                                         </p:tgtEl>
                                       </p:cBhvr>
                                     </p:animEffect>
@@ -15726,80 +16348,50 @@
                       </p:childTnLst>
                     </p:cTn>
                   </p:par>
+                </p:childTnLst>
+              </p:cTn>
+              <p:nextCondLst>
+                <p:cond evt="onNext" delay="0">
+                  <p:tgtEl>
+                    <p:sldTgt/>
+                  </p:tgtEl>
+                </p:cond>
+              </p:nextCondLst>
+            </p:seq>
+            <p:seq concurrent="1" nextAc="seek">
+              <p:cTn id="20" restart="whenNotActive" fill="hold" evtFilter="cancelBubble" nodeType="interactiveSeq">
+                <p:stCondLst>
+                  <p:cond evt="onClick" delay="0">
+                    <p:tgtEl>
+                      <p:spTgt spid="21"/>
+                    </p:tgtEl>
+                  </p:cond>
+                </p:stCondLst>
+                <p:endSync evt="end" delay="0">
+                  <p:rtn val="all"/>
+                </p:endSync>
+                <p:childTnLst>
                   <p:par>
-                    <p:cTn id="23" fill="hold">
+                    <p:cTn id="21" fill="hold">
                       <p:stCondLst>
-                        <p:cond delay="indefinite"/>
+                        <p:cond delay="0"/>
                       </p:stCondLst>
                       <p:childTnLst>
                         <p:par>
-                          <p:cTn id="19" fill="hold">
+                          <p:cTn id="22" fill="hold">
                             <p:stCondLst>
                               <p:cond delay="0"/>
                             </p:stCondLst>
                             <p:childTnLst>
                               <p:par>
-                                <p:cTn id="22" presetID="10" presetClass="entr" presetSubtype="0" fill="hold" grpId="0" nodeType="clickEffect">
+                                <p:cTn id="23" presetID="10" presetClass="entr" presetSubtype="0" fill="hold" grpId="0" nodeType="clickEffect">
                                   <p:stCondLst>
                                     <p:cond delay="0"/>
                                   </p:stCondLst>
                                   <p:childTnLst>
                                     <p:set>
                                       <p:cBhvr>
-                                        <p:cTn id="20" dur="1" fill="hold">
-                                          <p:stCondLst>
-                                            <p:cond delay="0"/>
-                                          </p:stCondLst>
-                                        </p:cTn>
-                                        <p:tgtEl>
-                                          <p:spTgt spid="18"/>
-                                        </p:tgtEl>
-                                        <p:attrNameLst>
-                                          <p:attrName>style.visibility</p:attrName>
-                                        </p:attrNameLst>
-                                      </p:cBhvr>
-                                      <p:to>
-                                        <p:strVal val="visible"/>
-                                      </p:to>
-                                    </p:set>
-                                    <p:animEffect transition="in" filter="fade">
-                                      <p:cBhvr>
-                                        <p:cTn id="21" dur="300"/>
-                                        <p:tgtEl>
-                                          <p:spTgt spid="18"/>
-                                        </p:tgtEl>
-                                      </p:cBhvr>
-                                    </p:animEffect>
-                                  </p:childTnLst>
-                                </p:cTn>
-                              </p:par>
-                            </p:childTnLst>
-                          </p:cTn>
-                        </p:par>
-                      </p:childTnLst>
-                    </p:cTn>
-                  </p:par>
-                  <p:par>
-                    <p:cTn id="28" fill="hold">
-                      <p:stCondLst>
-                        <p:cond delay="indefinite"/>
-                      </p:stCondLst>
-                      <p:childTnLst>
-                        <p:par>
-                          <p:cTn id="24" fill="hold">
-                            <p:stCondLst>
-                              <p:cond delay="0"/>
-                            </p:stCondLst>
-                            <p:childTnLst>
-                              <p:par>
-                                <p:cTn id="27" presetID="10" presetClass="entr" presetSubtype="0" fill="hold" grpId="0" nodeType="clickEffect">
-                                  <p:stCondLst>
-                                    <p:cond delay="0"/>
-                                  </p:stCondLst>
-                                  <p:childTnLst>
-                                    <p:set>
-                                      <p:cBhvr>
-                                        <p:cTn id="25" dur="1" fill="hold">
+                                        <p:cTn id="24" dur="1" fill="hold">
                                           <p:stCondLst>
                                             <p:cond delay="0"/>
                                           </p:stCondLst>
@@ -15817,7 +16409,7 @@
                                     </p:set>
                                     <p:animEffect transition="in" filter="fade">
                                       <p:cBhvr>
-                                        <p:cTn id="26" dur="300"/>
+                                        <p:cTn id="25" dur="300"/>
                                         <p:tgtEl>
                                           <p:spTgt spid="20"/>
                                         </p:tgtEl>
@@ -15843,7 +16435,7 @@
               </p:nextCondLst>
             </p:seq>
             <p:seq concurrent="1" nextAc="seek">
-              <p:cTn id="29" restart="whenNotActive" fill="hold" evtFilter="cancelBubble" nodeType="interactiveSeq">
+              <p:cTn id="26" restart="whenNotActive" fill="hold" evtFilter="cancelBubble" nodeType="interactiveSeq">
                 <p:stCondLst>
                   <p:cond evt="onClick" delay="0">
                     <p:tgtEl>
@@ -15856,32 +16448,32 @@
                 </p:endSync>
                 <p:childTnLst>
                   <p:par>
-                    <p:cTn id="34" fill="hold">
+                    <p:cTn id="27" fill="hold">
                       <p:stCondLst>
-                        <p:cond delay="indefinite"/>
+                        <p:cond delay="0"/>
                       </p:stCondLst>
                       <p:childTnLst>
                         <p:par>
-                          <p:cTn id="30" fill="hold">
+                          <p:cTn id="28" fill="hold">
                             <p:stCondLst>
                               <p:cond delay="0"/>
                             </p:stCondLst>
                             <p:childTnLst>
                               <p:par>
-                                <p:cTn id="33" presetID="10" presetClass="entr" presetSubtype="0" fill="hold" grpId="0" nodeType="clickEffect">
+                                <p:cTn id="29" presetID="10" presetClass="entr" presetSubtype="0" fill="hold" grpId="0" nodeType="clickEffect">
                                   <p:stCondLst>
                                     <p:cond delay="0"/>
                                   </p:stCondLst>
                                   <p:childTnLst>
                                     <p:set>
                                       <p:cBhvr>
-                                        <p:cTn id="31" dur="1" fill="hold">
+                                        <p:cTn id="30" dur="1" fill="hold">
                                           <p:stCondLst>
                                             <p:cond delay="0"/>
                                           </p:stCondLst>
                                         </p:cTn>
                                         <p:tgtEl>
-                                          <p:spTgt spid="26"/>
+                                          <p:spTgt spid="23"/>
                                         </p:tgtEl>
                                         <p:attrNameLst>
                                           <p:attrName>style.visibility</p:attrName>
@@ -15893,221 +16485,9 @@
                                     </p:set>
                                     <p:animEffect transition="in" filter="fade">
                                       <p:cBhvr>
-                                        <p:cTn id="32" dur="300"/>
+                                        <p:cTn id="31" dur="300"/>
                                         <p:tgtEl>
-                                          <p:spTgt spid="26"/>
-                                        </p:tgtEl>
-                                      </p:cBhvr>
-                                    </p:animEffect>
-                                  </p:childTnLst>
-                                </p:cTn>
-                              </p:par>
-                            </p:childTnLst>
-                          </p:cTn>
-                        </p:par>
-                      </p:childTnLst>
-                    </p:cTn>
-                  </p:par>
-                  <p:par>
-                    <p:cTn id="39" fill="hold">
-                      <p:stCondLst>
-                        <p:cond delay="indefinite"/>
-                      </p:stCondLst>
-                      <p:childTnLst>
-                        <p:par>
-                          <p:cTn id="35" fill="hold">
-                            <p:stCondLst>
-                              <p:cond delay="0"/>
-                            </p:stCondLst>
-                            <p:childTnLst>
-                              <p:par>
-                                <p:cTn id="38" presetID="10" presetClass="entr" presetSubtype="0" fill="hold" grpId="0" nodeType="clickEffect">
-                                  <p:stCondLst>
-                                    <p:cond delay="0"/>
-                                  </p:stCondLst>
-                                  <p:childTnLst>
-                                    <p:set>
-                                      <p:cBhvr>
-                                        <p:cTn id="36" dur="1" fill="hold">
-                                          <p:stCondLst>
-                                            <p:cond delay="0"/>
-                                          </p:stCondLst>
-                                        </p:cTn>
-                                        <p:tgtEl>
-                                          <p:spTgt spid="28"/>
-                                        </p:tgtEl>
-                                        <p:attrNameLst>
-                                          <p:attrName>style.visibility</p:attrName>
-                                        </p:attrNameLst>
-                                      </p:cBhvr>
-                                      <p:to>
-                                        <p:strVal val="visible"/>
-                                      </p:to>
-                                    </p:set>
-                                    <p:animEffect transition="in" filter="fade">
-                                      <p:cBhvr>
-                                        <p:cTn id="37" dur="300"/>
-                                        <p:tgtEl>
-                                          <p:spTgt spid="28"/>
-                                        </p:tgtEl>
-                                      </p:cBhvr>
-                                    </p:animEffect>
-                                  </p:childTnLst>
-                                </p:cTn>
-                              </p:par>
-                            </p:childTnLst>
-                          </p:cTn>
-                        </p:par>
-                      </p:childTnLst>
-                    </p:cTn>
-                  </p:par>
-                  <p:par>
-                    <p:cTn id="44" fill="hold">
-                      <p:stCondLst>
-                        <p:cond delay="indefinite"/>
-                      </p:stCondLst>
-                      <p:childTnLst>
-                        <p:par>
-                          <p:cTn id="40" fill="hold">
-                            <p:stCondLst>
-                              <p:cond delay="0"/>
-                            </p:stCondLst>
-                            <p:childTnLst>
-                              <p:par>
-                                <p:cTn id="43" presetID="10" presetClass="entr" presetSubtype="0" fill="hold" grpId="0" nodeType="clickEffect">
-                                  <p:stCondLst>
-                                    <p:cond delay="0"/>
-                                  </p:stCondLst>
-                                  <p:childTnLst>
-                                    <p:set>
-                                      <p:cBhvr>
-                                        <p:cTn id="41" dur="1" fill="hold">
-                                          <p:stCondLst>
-                                            <p:cond delay="0"/>
-                                          </p:stCondLst>
-                                        </p:cTn>
-                                        <p:tgtEl>
-                                          <p:spTgt spid="30"/>
-                                        </p:tgtEl>
-                                        <p:attrNameLst>
-                                          <p:attrName>style.visibility</p:attrName>
-                                        </p:attrNameLst>
-                                      </p:cBhvr>
-                                      <p:to>
-                                        <p:strVal val="visible"/>
-                                      </p:to>
-                                    </p:set>
-                                    <p:animEffect transition="in" filter="fade">
-                                      <p:cBhvr>
-                                        <p:cTn id="42" dur="300"/>
-                                        <p:tgtEl>
-                                          <p:spTgt spid="30"/>
-                                        </p:tgtEl>
-                                      </p:cBhvr>
-                                    </p:animEffect>
-                                  </p:childTnLst>
-                                </p:cTn>
-                              </p:par>
-                            </p:childTnLst>
-                          </p:cTn>
-                        </p:par>
-                      </p:childTnLst>
-                    </p:cTn>
-                  </p:par>
-                  <p:par>
-                    <p:cTn id="49" fill="hold">
-                      <p:stCondLst>
-                        <p:cond delay="indefinite"/>
-                      </p:stCondLst>
-                      <p:childTnLst>
-                        <p:par>
-                          <p:cTn id="45" fill="hold">
-                            <p:stCondLst>
-                              <p:cond delay="0"/>
-                            </p:stCondLst>
-                            <p:childTnLst>
-                              <p:par>
-                                <p:cTn id="48" presetID="10" presetClass="entr" presetSubtype="0" fill="hold" grpId="0" nodeType="clickEffect">
-                                  <p:stCondLst>
-                                    <p:cond delay="0"/>
-                                  </p:stCondLst>
-                                  <p:childTnLst>
-                                    <p:set>
-                                      <p:cBhvr>
-                                        <p:cTn id="46" dur="1" fill="hold">
-                                          <p:stCondLst>
-                                            <p:cond delay="0"/>
-                                          </p:stCondLst>
-                                        </p:cTn>
-                                        <p:tgtEl>
-                                          <p:spTgt spid="32"/>
-                                        </p:tgtEl>
-                                        <p:attrNameLst>
-                                          <p:attrName>style.visibility</p:attrName>
-                                        </p:attrNameLst>
-                                      </p:cBhvr>
-                                      <p:to>
-                                        <p:strVal val="visible"/>
-                                      </p:to>
-                                    </p:set>
-                                    <p:animEffect transition="in" filter="fade">
-                                      <p:cBhvr>
-                                        <p:cTn id="47" dur="300"/>
-                                        <p:tgtEl>
-                                          <p:spTgt spid="32"/>
-                                        </p:tgtEl>
-                                      </p:cBhvr>
-                                    </p:animEffect>
-                                  </p:childTnLst>
-                                </p:cTn>
-                              </p:par>
-                            </p:childTnLst>
-                          </p:cTn>
-                        </p:par>
-                      </p:childTnLst>
-                    </p:cTn>
-                  </p:par>
-                  <p:par>
-                    <p:cTn id="54" fill="hold">
-                      <p:stCondLst>
-                        <p:cond delay="indefinite"/>
-                      </p:stCondLst>
-                      <p:childTnLst>
-                        <p:par>
-                          <p:cTn id="50" fill="hold">
-                            <p:stCondLst>
-                              <p:cond delay="0"/>
-                            </p:stCondLst>
-                            <p:childTnLst>
-                              <p:par>
-                                <p:cTn id="53" presetID="10" presetClass="entr" presetSubtype="0" fill="hold" grpId="0" nodeType="clickEffect">
-                                  <p:stCondLst>
-                                    <p:cond delay="0"/>
-                                  </p:stCondLst>
-                                  <p:childTnLst>
-                                    <p:set>
-                                      <p:cBhvr>
-                                        <p:cTn id="51" dur="1" fill="hold">
-                                          <p:stCondLst>
-                                            <p:cond delay="0"/>
-                                          </p:stCondLst>
-                                        </p:cTn>
-                                        <p:tgtEl>
-                                          <p:spTgt spid="34"/>
-                                        </p:tgtEl>
-                                        <p:attrNameLst>
-                                          <p:attrName>style.visibility</p:attrName>
-                                        </p:attrNameLst>
-                                      </p:cBhvr>
-                                      <p:to>
-                                        <p:strVal val="visible"/>
-                                      </p:to>
-                                    </p:set>
-                                    <p:animEffect transition="in" filter="fade">
-                                      <p:cBhvr>
-                                        <p:cTn id="52" dur="300"/>
-                                        <p:tgtEl>
-                                          <p:spTgt spid="34"/>
+                                          <p:spTgt spid="23"/>
                                         </p:tgtEl>
                                       </p:cBhvr>
                                     </p:animEffect>
@@ -16131,11 +16511,11 @@
               </p:nextCondLst>
             </p:seq>
             <p:seq concurrent="1" nextAc="seek">
-              <p:cTn id="55" restart="whenNotActive" fill="hold" evtFilter="cancelBubble" nodeType="interactiveSeq">
+              <p:cTn id="32" restart="whenNotActive" fill="hold" evtFilter="cancelBubble" nodeType="interactiveSeq">
                 <p:stCondLst>
                   <p:cond evt="onClick" delay="0">
                     <p:tgtEl>
-                      <p:spTgt spid="38"/>
+                      <p:spTgt spid="30"/>
                     </p:tgtEl>
                   </p:cond>
                 </p:stCondLst>
@@ -16144,32 +16524,32 @@
                 </p:endSync>
                 <p:childTnLst>
                   <p:par>
-                    <p:cTn id="60" fill="hold">
+                    <p:cTn id="33" fill="hold">
                       <p:stCondLst>
-                        <p:cond delay="indefinite"/>
+                        <p:cond delay="0"/>
                       </p:stCondLst>
                       <p:childTnLst>
                         <p:par>
-                          <p:cTn id="56" fill="hold">
+                          <p:cTn id="34" fill="hold">
                             <p:stCondLst>
                               <p:cond delay="0"/>
                             </p:stCondLst>
                             <p:childTnLst>
                               <p:par>
-                                <p:cTn id="59" presetID="10" presetClass="entr" presetSubtype="0" fill="hold" grpId="0" nodeType="clickEffect">
+                                <p:cTn id="35" presetID="10" presetClass="entr" presetSubtype="0" fill="hold" grpId="0" nodeType="clickEffect">
                                   <p:stCondLst>
                                     <p:cond delay="0"/>
                                   </p:stCondLst>
                                   <p:childTnLst>
                                     <p:set>
                                       <p:cBhvr>
-                                        <p:cTn id="57" dur="1" fill="hold">
+                                        <p:cTn id="36" dur="1" fill="hold">
                                           <p:stCondLst>
                                             <p:cond delay="0"/>
                                           </p:stCondLst>
                                         </p:cTn>
                                         <p:tgtEl>
-                                          <p:spTgt spid="40"/>
+                                          <p:spTgt spid="29"/>
                                         </p:tgtEl>
                                         <p:attrNameLst>
                                           <p:attrName>style.visibility</p:attrName>
@@ -16181,221 +16561,9 @@
                                     </p:set>
                                     <p:animEffect transition="in" filter="fade">
                                       <p:cBhvr>
-                                        <p:cTn id="58" dur="300"/>
+                                        <p:cTn id="37" dur="300"/>
                                         <p:tgtEl>
-                                          <p:spTgt spid="40"/>
-                                        </p:tgtEl>
-                                      </p:cBhvr>
-                                    </p:animEffect>
-                                  </p:childTnLst>
-                                </p:cTn>
-                              </p:par>
-                            </p:childTnLst>
-                          </p:cTn>
-                        </p:par>
-                      </p:childTnLst>
-                    </p:cTn>
-                  </p:par>
-                  <p:par>
-                    <p:cTn id="65" fill="hold">
-                      <p:stCondLst>
-                        <p:cond delay="indefinite"/>
-                      </p:stCondLst>
-                      <p:childTnLst>
-                        <p:par>
-                          <p:cTn id="61" fill="hold">
-                            <p:stCondLst>
-                              <p:cond delay="0"/>
-                            </p:stCondLst>
-                            <p:childTnLst>
-                              <p:par>
-                                <p:cTn id="64" presetID="10" presetClass="entr" presetSubtype="0" fill="hold" grpId="0" nodeType="clickEffect">
-                                  <p:stCondLst>
-                                    <p:cond delay="0"/>
-                                  </p:stCondLst>
-                                  <p:childTnLst>
-                                    <p:set>
-                                      <p:cBhvr>
-                                        <p:cTn id="62" dur="1" fill="hold">
-                                          <p:stCondLst>
-                                            <p:cond delay="0"/>
-                                          </p:stCondLst>
-                                        </p:cTn>
-                                        <p:tgtEl>
-                                          <p:spTgt spid="42"/>
-                                        </p:tgtEl>
-                                        <p:attrNameLst>
-                                          <p:attrName>style.visibility</p:attrName>
-                                        </p:attrNameLst>
-                                      </p:cBhvr>
-                                      <p:to>
-                                        <p:strVal val="visible"/>
-                                      </p:to>
-                                    </p:set>
-                                    <p:animEffect transition="in" filter="fade">
-                                      <p:cBhvr>
-                                        <p:cTn id="63" dur="300"/>
-                                        <p:tgtEl>
-                                          <p:spTgt spid="42"/>
-                                        </p:tgtEl>
-                                      </p:cBhvr>
-                                    </p:animEffect>
-                                  </p:childTnLst>
-                                </p:cTn>
-                              </p:par>
-                            </p:childTnLst>
-                          </p:cTn>
-                        </p:par>
-                      </p:childTnLst>
-                    </p:cTn>
-                  </p:par>
-                  <p:par>
-                    <p:cTn id="70" fill="hold">
-                      <p:stCondLst>
-                        <p:cond delay="indefinite"/>
-                      </p:stCondLst>
-                      <p:childTnLst>
-                        <p:par>
-                          <p:cTn id="66" fill="hold">
-                            <p:stCondLst>
-                              <p:cond delay="0"/>
-                            </p:stCondLst>
-                            <p:childTnLst>
-                              <p:par>
-                                <p:cTn id="69" presetID="10" presetClass="entr" presetSubtype="0" fill="hold" grpId="0" nodeType="clickEffect">
-                                  <p:stCondLst>
-                                    <p:cond delay="0"/>
-                                  </p:stCondLst>
-                                  <p:childTnLst>
-                                    <p:set>
-                                      <p:cBhvr>
-                                        <p:cTn id="67" dur="1" fill="hold">
-                                          <p:stCondLst>
-                                            <p:cond delay="0"/>
-                                          </p:stCondLst>
-                                        </p:cTn>
-                                        <p:tgtEl>
-                                          <p:spTgt spid="44"/>
-                                        </p:tgtEl>
-                                        <p:attrNameLst>
-                                          <p:attrName>style.visibility</p:attrName>
-                                        </p:attrNameLst>
-                                      </p:cBhvr>
-                                      <p:to>
-                                        <p:strVal val="visible"/>
-                                      </p:to>
-                                    </p:set>
-                                    <p:animEffect transition="in" filter="fade">
-                                      <p:cBhvr>
-                                        <p:cTn id="68" dur="300"/>
-                                        <p:tgtEl>
-                                          <p:spTgt spid="44"/>
-                                        </p:tgtEl>
-                                      </p:cBhvr>
-                                    </p:animEffect>
-                                  </p:childTnLst>
-                                </p:cTn>
-                              </p:par>
-                            </p:childTnLst>
-                          </p:cTn>
-                        </p:par>
-                      </p:childTnLst>
-                    </p:cTn>
-                  </p:par>
-                  <p:par>
-                    <p:cTn id="75" fill="hold">
-                      <p:stCondLst>
-                        <p:cond delay="indefinite"/>
-                      </p:stCondLst>
-                      <p:childTnLst>
-                        <p:par>
-                          <p:cTn id="71" fill="hold">
-                            <p:stCondLst>
-                              <p:cond delay="0"/>
-                            </p:stCondLst>
-                            <p:childTnLst>
-                              <p:par>
-                                <p:cTn id="74" presetID="10" presetClass="entr" presetSubtype="0" fill="hold" grpId="0" nodeType="clickEffect">
-                                  <p:stCondLst>
-                                    <p:cond delay="0"/>
-                                  </p:stCondLst>
-                                  <p:childTnLst>
-                                    <p:set>
-                                      <p:cBhvr>
-                                        <p:cTn id="72" dur="1" fill="hold">
-                                          <p:stCondLst>
-                                            <p:cond delay="0"/>
-                                          </p:stCondLst>
-                                        </p:cTn>
-                                        <p:tgtEl>
-                                          <p:spTgt spid="46"/>
-                                        </p:tgtEl>
-                                        <p:attrNameLst>
-                                          <p:attrName>style.visibility</p:attrName>
-                                        </p:attrNameLst>
-                                      </p:cBhvr>
-                                      <p:to>
-                                        <p:strVal val="visible"/>
-                                      </p:to>
-                                    </p:set>
-                                    <p:animEffect transition="in" filter="fade">
-                                      <p:cBhvr>
-                                        <p:cTn id="73" dur="300"/>
-                                        <p:tgtEl>
-                                          <p:spTgt spid="46"/>
-                                        </p:tgtEl>
-                                      </p:cBhvr>
-                                    </p:animEffect>
-                                  </p:childTnLst>
-                                </p:cTn>
-                              </p:par>
-                            </p:childTnLst>
-                          </p:cTn>
-                        </p:par>
-                      </p:childTnLst>
-                    </p:cTn>
-                  </p:par>
-                  <p:par>
-                    <p:cTn id="80" fill="hold">
-                      <p:stCondLst>
-                        <p:cond delay="indefinite"/>
-                      </p:stCondLst>
-                      <p:childTnLst>
-                        <p:par>
-                          <p:cTn id="76" fill="hold">
-                            <p:stCondLst>
-                              <p:cond delay="0"/>
-                            </p:stCondLst>
-                            <p:childTnLst>
-                              <p:par>
-                                <p:cTn id="79" presetID="10" presetClass="entr" presetSubtype="0" fill="hold" grpId="0" nodeType="clickEffect">
-                                  <p:stCondLst>
-                                    <p:cond delay="0"/>
-                                  </p:stCondLst>
-                                  <p:childTnLst>
-                                    <p:set>
-                                      <p:cBhvr>
-                                        <p:cTn id="77" dur="1" fill="hold">
-                                          <p:stCondLst>
-                                            <p:cond delay="0"/>
-                                          </p:stCondLst>
-                                        </p:cTn>
-                                        <p:tgtEl>
-                                          <p:spTgt spid="48"/>
-                                        </p:tgtEl>
-                                        <p:attrNameLst>
-                                          <p:attrName>style.visibility</p:attrName>
-                                        </p:attrNameLst>
-                                      </p:cBhvr>
-                                      <p:to>
-                                        <p:strVal val="visible"/>
-                                      </p:to>
-                                    </p:set>
-                                    <p:animEffect transition="in" filter="fade">
-                                      <p:cBhvr>
-                                        <p:cTn id="78" dur="300"/>
-                                        <p:tgtEl>
-                                          <p:spTgt spid="48"/>
+                                          <p:spTgt spid="29"/>
                                         </p:tgtEl>
                                       </p:cBhvr>
                                     </p:animEffect>
@@ -16419,11 +16587,11 @@
               </p:nextCondLst>
             </p:seq>
             <p:seq concurrent="1" nextAc="seek">
-              <p:cTn id="81" restart="whenNotActive" fill="hold" evtFilter="cancelBubble" nodeType="interactiveSeq">
+              <p:cTn id="38" restart="whenNotActive" fill="hold" evtFilter="cancelBubble" nodeType="interactiveSeq">
                 <p:stCondLst>
                   <p:cond evt="onClick" delay="0">
                     <p:tgtEl>
-                      <p:spTgt spid="52"/>
+                      <p:spTgt spid="33"/>
                     </p:tgtEl>
                   </p:cond>
                 </p:stCondLst>
@@ -16432,32 +16600,32 @@
                 </p:endSync>
                 <p:childTnLst>
                   <p:par>
-                    <p:cTn id="86" fill="hold">
+                    <p:cTn id="39" fill="hold">
                       <p:stCondLst>
-                        <p:cond delay="indefinite"/>
+                        <p:cond delay="0"/>
                       </p:stCondLst>
                       <p:childTnLst>
                         <p:par>
-                          <p:cTn id="82" fill="hold">
+                          <p:cTn id="40" fill="hold">
                             <p:stCondLst>
                               <p:cond delay="0"/>
                             </p:stCondLst>
                             <p:childTnLst>
                               <p:par>
-                                <p:cTn id="85" presetID="10" presetClass="entr" presetSubtype="0" fill="hold" grpId="0" nodeType="clickEffect">
+                                <p:cTn id="41" presetID="10" presetClass="entr" presetSubtype="0" fill="hold" grpId="0" nodeType="clickEffect">
                                   <p:stCondLst>
                                     <p:cond delay="0"/>
                                   </p:stCondLst>
                                   <p:childTnLst>
                                     <p:set>
                                       <p:cBhvr>
-                                        <p:cTn id="83" dur="1" fill="hold">
+                                        <p:cTn id="42" dur="1" fill="hold">
                                           <p:stCondLst>
                                             <p:cond delay="0"/>
                                           </p:stCondLst>
                                         </p:cTn>
                                         <p:tgtEl>
-                                          <p:spTgt spid="54"/>
+                                          <p:spTgt spid="32"/>
                                         </p:tgtEl>
                                         <p:attrNameLst>
                                           <p:attrName>style.visibility</p:attrName>
@@ -16469,221 +16637,9 @@
                                     </p:set>
                                     <p:animEffect transition="in" filter="fade">
                                       <p:cBhvr>
-                                        <p:cTn id="84" dur="300"/>
+                                        <p:cTn id="43" dur="300"/>
                                         <p:tgtEl>
-                                          <p:spTgt spid="54"/>
-                                        </p:tgtEl>
-                                      </p:cBhvr>
-                                    </p:animEffect>
-                                  </p:childTnLst>
-                                </p:cTn>
-                              </p:par>
-                            </p:childTnLst>
-                          </p:cTn>
-                        </p:par>
-                      </p:childTnLst>
-                    </p:cTn>
-                  </p:par>
-                  <p:par>
-                    <p:cTn id="91" fill="hold">
-                      <p:stCondLst>
-                        <p:cond delay="indefinite"/>
-                      </p:stCondLst>
-                      <p:childTnLst>
-                        <p:par>
-                          <p:cTn id="87" fill="hold">
-                            <p:stCondLst>
-                              <p:cond delay="0"/>
-                            </p:stCondLst>
-                            <p:childTnLst>
-                              <p:par>
-                                <p:cTn id="90" presetID="10" presetClass="entr" presetSubtype="0" fill="hold" grpId="0" nodeType="clickEffect">
-                                  <p:stCondLst>
-                                    <p:cond delay="0"/>
-                                  </p:stCondLst>
-                                  <p:childTnLst>
-                                    <p:set>
-                                      <p:cBhvr>
-                                        <p:cTn id="88" dur="1" fill="hold">
-                                          <p:stCondLst>
-                                            <p:cond delay="0"/>
-                                          </p:stCondLst>
-                                        </p:cTn>
-                                        <p:tgtEl>
-                                          <p:spTgt spid="56"/>
-                                        </p:tgtEl>
-                                        <p:attrNameLst>
-                                          <p:attrName>style.visibility</p:attrName>
-                                        </p:attrNameLst>
-                                      </p:cBhvr>
-                                      <p:to>
-                                        <p:strVal val="visible"/>
-                                      </p:to>
-                                    </p:set>
-                                    <p:animEffect transition="in" filter="fade">
-                                      <p:cBhvr>
-                                        <p:cTn id="89" dur="300"/>
-                                        <p:tgtEl>
-                                          <p:spTgt spid="56"/>
-                                        </p:tgtEl>
-                                      </p:cBhvr>
-                                    </p:animEffect>
-                                  </p:childTnLst>
-                                </p:cTn>
-                              </p:par>
-                            </p:childTnLst>
-                          </p:cTn>
-                        </p:par>
-                      </p:childTnLst>
-                    </p:cTn>
-                  </p:par>
-                  <p:par>
-                    <p:cTn id="96" fill="hold">
-                      <p:stCondLst>
-                        <p:cond delay="indefinite"/>
-                      </p:stCondLst>
-                      <p:childTnLst>
-                        <p:par>
-                          <p:cTn id="92" fill="hold">
-                            <p:stCondLst>
-                              <p:cond delay="0"/>
-                            </p:stCondLst>
-                            <p:childTnLst>
-                              <p:par>
-                                <p:cTn id="95" presetID="10" presetClass="entr" presetSubtype="0" fill="hold" grpId="0" nodeType="clickEffect">
-                                  <p:stCondLst>
-                                    <p:cond delay="0"/>
-                                  </p:stCondLst>
-                                  <p:childTnLst>
-                                    <p:set>
-                                      <p:cBhvr>
-                                        <p:cTn id="93" dur="1" fill="hold">
-                                          <p:stCondLst>
-                                            <p:cond delay="0"/>
-                                          </p:stCondLst>
-                                        </p:cTn>
-                                        <p:tgtEl>
-                                          <p:spTgt spid="58"/>
-                                        </p:tgtEl>
-                                        <p:attrNameLst>
-                                          <p:attrName>style.visibility</p:attrName>
-                                        </p:attrNameLst>
-                                      </p:cBhvr>
-                                      <p:to>
-                                        <p:strVal val="visible"/>
-                                      </p:to>
-                                    </p:set>
-                                    <p:animEffect transition="in" filter="fade">
-                                      <p:cBhvr>
-                                        <p:cTn id="94" dur="300"/>
-                                        <p:tgtEl>
-                                          <p:spTgt spid="58"/>
-                                        </p:tgtEl>
-                                      </p:cBhvr>
-                                    </p:animEffect>
-                                  </p:childTnLst>
-                                </p:cTn>
-                              </p:par>
-                            </p:childTnLst>
-                          </p:cTn>
-                        </p:par>
-                      </p:childTnLst>
-                    </p:cTn>
-                  </p:par>
-                  <p:par>
-                    <p:cTn id="101" fill="hold">
-                      <p:stCondLst>
-                        <p:cond delay="indefinite"/>
-                      </p:stCondLst>
-                      <p:childTnLst>
-                        <p:par>
-                          <p:cTn id="97" fill="hold">
-                            <p:stCondLst>
-                              <p:cond delay="0"/>
-                            </p:stCondLst>
-                            <p:childTnLst>
-                              <p:par>
-                                <p:cTn id="100" presetID="10" presetClass="entr" presetSubtype="0" fill="hold" grpId="0" nodeType="clickEffect">
-                                  <p:stCondLst>
-                                    <p:cond delay="0"/>
-                                  </p:stCondLst>
-                                  <p:childTnLst>
-                                    <p:set>
-                                      <p:cBhvr>
-                                        <p:cTn id="98" dur="1" fill="hold">
-                                          <p:stCondLst>
-                                            <p:cond delay="0"/>
-                                          </p:stCondLst>
-                                        </p:cTn>
-                                        <p:tgtEl>
-                                          <p:spTgt spid="60"/>
-                                        </p:tgtEl>
-                                        <p:attrNameLst>
-                                          <p:attrName>style.visibility</p:attrName>
-                                        </p:attrNameLst>
-                                      </p:cBhvr>
-                                      <p:to>
-                                        <p:strVal val="visible"/>
-                                      </p:to>
-                                    </p:set>
-                                    <p:animEffect transition="in" filter="fade">
-                                      <p:cBhvr>
-                                        <p:cTn id="99" dur="300"/>
-                                        <p:tgtEl>
-                                          <p:spTgt spid="60"/>
-                                        </p:tgtEl>
-                                      </p:cBhvr>
-                                    </p:animEffect>
-                                  </p:childTnLst>
-                                </p:cTn>
-                              </p:par>
-                            </p:childTnLst>
-                          </p:cTn>
-                        </p:par>
-                      </p:childTnLst>
-                    </p:cTn>
-                  </p:par>
-                  <p:par>
-                    <p:cTn id="106" fill="hold">
-                      <p:stCondLst>
-                        <p:cond delay="indefinite"/>
-                      </p:stCondLst>
-                      <p:childTnLst>
-                        <p:par>
-                          <p:cTn id="102" fill="hold">
-                            <p:stCondLst>
-                              <p:cond delay="0"/>
-                            </p:stCondLst>
-                            <p:childTnLst>
-                              <p:par>
-                                <p:cTn id="105" presetID="10" presetClass="entr" presetSubtype="0" fill="hold" grpId="0" nodeType="clickEffect">
-                                  <p:stCondLst>
-                                    <p:cond delay="0"/>
-                                  </p:stCondLst>
-                                  <p:childTnLst>
-                                    <p:set>
-                                      <p:cBhvr>
-                                        <p:cTn id="103" dur="1" fill="hold">
-                                          <p:stCondLst>
-                                            <p:cond delay="0"/>
-                                          </p:stCondLst>
-                                        </p:cTn>
-                                        <p:tgtEl>
-                                          <p:spTgt spid="62"/>
-                                        </p:tgtEl>
-                                        <p:attrNameLst>
-                                          <p:attrName>style.visibility</p:attrName>
-                                        </p:attrNameLst>
-                                      </p:cBhvr>
-                                      <p:to>
-                                        <p:strVal val="visible"/>
-                                      </p:to>
-                                    </p:set>
-                                    <p:animEffect transition="in" filter="fade">
-                                      <p:cBhvr>
-                                        <p:cTn id="104" dur="300"/>
-                                        <p:tgtEl>
-                                          <p:spTgt spid="62"/>
+                                          <p:spTgt spid="32"/>
                                         </p:tgtEl>
                                       </p:cBhvr>
                                     </p:animEffect>
@@ -16707,11 +16663,11 @@
               </p:nextCondLst>
             </p:seq>
             <p:seq concurrent="1" nextAc="seek">
-              <p:cTn id="107" restart="whenNotActive" fill="hold" evtFilter="cancelBubble" nodeType="interactiveSeq">
+              <p:cTn id="44" restart="whenNotActive" fill="hold" evtFilter="cancelBubble" nodeType="interactiveSeq">
                 <p:stCondLst>
                   <p:cond evt="onClick" delay="0">
                     <p:tgtEl>
-                      <p:spTgt spid="66"/>
+                      <p:spTgt spid="36"/>
                     </p:tgtEl>
                   </p:cond>
                 </p:stCondLst>
@@ -16720,32 +16676,32 @@
                 </p:endSync>
                 <p:childTnLst>
                   <p:par>
-                    <p:cTn id="112" fill="hold">
+                    <p:cTn id="45" fill="hold">
                       <p:stCondLst>
-                        <p:cond delay="indefinite"/>
+                        <p:cond delay="0"/>
                       </p:stCondLst>
                       <p:childTnLst>
                         <p:par>
-                          <p:cTn id="108" fill="hold">
+                          <p:cTn id="46" fill="hold">
                             <p:stCondLst>
                               <p:cond delay="0"/>
                             </p:stCondLst>
                             <p:childTnLst>
                               <p:par>
-                                <p:cTn id="111" presetID="10" presetClass="entr" presetSubtype="0" fill="hold" grpId="0" nodeType="clickEffect">
+                                <p:cTn id="47" presetID="10" presetClass="entr" presetSubtype="0" fill="hold" grpId="0" nodeType="clickEffect">
                                   <p:stCondLst>
                                     <p:cond delay="0"/>
                                   </p:stCondLst>
                                   <p:childTnLst>
                                     <p:set>
                                       <p:cBhvr>
-                                        <p:cTn id="109" dur="1" fill="hold">
+                                        <p:cTn id="48" dur="1" fill="hold">
                                           <p:stCondLst>
                                             <p:cond delay="0"/>
                                           </p:stCondLst>
                                         </p:cTn>
                                         <p:tgtEl>
-                                          <p:spTgt spid="68"/>
+                                          <p:spTgt spid="35"/>
                                         </p:tgtEl>
                                         <p:attrNameLst>
                                           <p:attrName>style.visibility</p:attrName>
@@ -16757,221 +16713,9 @@
                                     </p:set>
                                     <p:animEffect transition="in" filter="fade">
                                       <p:cBhvr>
-                                        <p:cTn id="110" dur="300"/>
+                                        <p:cTn id="49" dur="300"/>
                                         <p:tgtEl>
-                                          <p:spTgt spid="68"/>
-                                        </p:tgtEl>
-                                      </p:cBhvr>
-                                    </p:animEffect>
-                                  </p:childTnLst>
-                                </p:cTn>
-                              </p:par>
-                            </p:childTnLst>
-                          </p:cTn>
-                        </p:par>
-                      </p:childTnLst>
-                    </p:cTn>
-                  </p:par>
-                  <p:par>
-                    <p:cTn id="117" fill="hold">
-                      <p:stCondLst>
-                        <p:cond delay="indefinite"/>
-                      </p:stCondLst>
-                      <p:childTnLst>
-                        <p:par>
-                          <p:cTn id="113" fill="hold">
-                            <p:stCondLst>
-                              <p:cond delay="0"/>
-                            </p:stCondLst>
-                            <p:childTnLst>
-                              <p:par>
-                                <p:cTn id="116" presetID="10" presetClass="entr" presetSubtype="0" fill="hold" grpId="0" nodeType="clickEffect">
-                                  <p:stCondLst>
-                                    <p:cond delay="0"/>
-                                  </p:stCondLst>
-                                  <p:childTnLst>
-                                    <p:set>
-                                      <p:cBhvr>
-                                        <p:cTn id="114" dur="1" fill="hold">
-                                          <p:stCondLst>
-                                            <p:cond delay="0"/>
-                                          </p:stCondLst>
-                                        </p:cTn>
-                                        <p:tgtEl>
-                                          <p:spTgt spid="70"/>
-                                        </p:tgtEl>
-                                        <p:attrNameLst>
-                                          <p:attrName>style.visibility</p:attrName>
-                                        </p:attrNameLst>
-                                      </p:cBhvr>
-                                      <p:to>
-                                        <p:strVal val="visible"/>
-                                      </p:to>
-                                    </p:set>
-                                    <p:animEffect transition="in" filter="fade">
-                                      <p:cBhvr>
-                                        <p:cTn id="115" dur="300"/>
-                                        <p:tgtEl>
-                                          <p:spTgt spid="70"/>
-                                        </p:tgtEl>
-                                      </p:cBhvr>
-                                    </p:animEffect>
-                                  </p:childTnLst>
-                                </p:cTn>
-                              </p:par>
-                            </p:childTnLst>
-                          </p:cTn>
-                        </p:par>
-                      </p:childTnLst>
-                    </p:cTn>
-                  </p:par>
-                  <p:par>
-                    <p:cTn id="122" fill="hold">
-                      <p:stCondLst>
-                        <p:cond delay="indefinite"/>
-                      </p:stCondLst>
-                      <p:childTnLst>
-                        <p:par>
-                          <p:cTn id="118" fill="hold">
-                            <p:stCondLst>
-                              <p:cond delay="0"/>
-                            </p:stCondLst>
-                            <p:childTnLst>
-                              <p:par>
-                                <p:cTn id="121" presetID="10" presetClass="entr" presetSubtype="0" fill="hold" grpId="0" nodeType="clickEffect">
-                                  <p:stCondLst>
-                                    <p:cond delay="0"/>
-                                  </p:stCondLst>
-                                  <p:childTnLst>
-                                    <p:set>
-                                      <p:cBhvr>
-                                        <p:cTn id="119" dur="1" fill="hold">
-                                          <p:stCondLst>
-                                            <p:cond delay="0"/>
-                                          </p:stCondLst>
-                                        </p:cTn>
-                                        <p:tgtEl>
-                                          <p:spTgt spid="72"/>
-                                        </p:tgtEl>
-                                        <p:attrNameLst>
-                                          <p:attrName>style.visibility</p:attrName>
-                                        </p:attrNameLst>
-                                      </p:cBhvr>
-                                      <p:to>
-                                        <p:strVal val="visible"/>
-                                      </p:to>
-                                    </p:set>
-                                    <p:animEffect transition="in" filter="fade">
-                                      <p:cBhvr>
-                                        <p:cTn id="120" dur="300"/>
-                                        <p:tgtEl>
-                                          <p:spTgt spid="72"/>
-                                        </p:tgtEl>
-                                      </p:cBhvr>
-                                    </p:animEffect>
-                                  </p:childTnLst>
-                                </p:cTn>
-                              </p:par>
-                            </p:childTnLst>
-                          </p:cTn>
-                        </p:par>
-                      </p:childTnLst>
-                    </p:cTn>
-                  </p:par>
-                  <p:par>
-                    <p:cTn id="127" fill="hold">
-                      <p:stCondLst>
-                        <p:cond delay="indefinite"/>
-                      </p:stCondLst>
-                      <p:childTnLst>
-                        <p:par>
-                          <p:cTn id="123" fill="hold">
-                            <p:stCondLst>
-                              <p:cond delay="0"/>
-                            </p:stCondLst>
-                            <p:childTnLst>
-                              <p:par>
-                                <p:cTn id="126" presetID="10" presetClass="entr" presetSubtype="0" fill="hold" grpId="0" nodeType="clickEffect">
-                                  <p:stCondLst>
-                                    <p:cond delay="0"/>
-                                  </p:stCondLst>
-                                  <p:childTnLst>
-                                    <p:set>
-                                      <p:cBhvr>
-                                        <p:cTn id="124" dur="1" fill="hold">
-                                          <p:stCondLst>
-                                            <p:cond delay="0"/>
-                                          </p:stCondLst>
-                                        </p:cTn>
-                                        <p:tgtEl>
-                                          <p:spTgt spid="74"/>
-                                        </p:tgtEl>
-                                        <p:attrNameLst>
-                                          <p:attrName>style.visibility</p:attrName>
-                                        </p:attrNameLst>
-                                      </p:cBhvr>
-                                      <p:to>
-                                        <p:strVal val="visible"/>
-                                      </p:to>
-                                    </p:set>
-                                    <p:animEffect transition="in" filter="fade">
-                                      <p:cBhvr>
-                                        <p:cTn id="125" dur="300"/>
-                                        <p:tgtEl>
-                                          <p:spTgt spid="74"/>
-                                        </p:tgtEl>
-                                      </p:cBhvr>
-                                    </p:animEffect>
-                                  </p:childTnLst>
-                                </p:cTn>
-                              </p:par>
-                            </p:childTnLst>
-                          </p:cTn>
-                        </p:par>
-                      </p:childTnLst>
-                    </p:cTn>
-                  </p:par>
-                  <p:par>
-                    <p:cTn id="132" fill="hold">
-                      <p:stCondLst>
-                        <p:cond delay="indefinite"/>
-                      </p:stCondLst>
-                      <p:childTnLst>
-                        <p:par>
-                          <p:cTn id="128" fill="hold">
-                            <p:stCondLst>
-                              <p:cond delay="0"/>
-                            </p:stCondLst>
-                            <p:childTnLst>
-                              <p:par>
-                                <p:cTn id="131" presetID="10" presetClass="entr" presetSubtype="0" fill="hold" grpId="0" nodeType="clickEffect">
-                                  <p:stCondLst>
-                                    <p:cond delay="0"/>
-                                  </p:stCondLst>
-                                  <p:childTnLst>
-                                    <p:set>
-                                      <p:cBhvr>
-                                        <p:cTn id="129" dur="1" fill="hold">
-                                          <p:stCondLst>
-                                            <p:cond delay="0"/>
-                                          </p:stCondLst>
-                                        </p:cTn>
-                                        <p:tgtEl>
-                                          <p:spTgt spid="76"/>
-                                        </p:tgtEl>
-                                        <p:attrNameLst>
-                                          <p:attrName>style.visibility</p:attrName>
-                                        </p:attrNameLst>
-                                      </p:cBhvr>
-                                      <p:to>
-                                        <p:strVal val="visible"/>
-                                      </p:to>
-                                    </p:set>
-                                    <p:animEffect transition="in" filter="fade">
-                                      <p:cBhvr>
-                                        <p:cTn id="130" dur="300"/>
-                                        <p:tgtEl>
-                                          <p:spTgt spid="76"/>
+                                          <p:spTgt spid="35"/>
                                         </p:tgtEl>
                                       </p:cBhvr>
                                     </p:animEffect>
@@ -16995,11 +16739,11 @@
               </p:nextCondLst>
             </p:seq>
             <p:seq concurrent="1" nextAc="seek">
-              <p:cTn id="133" restart="whenNotActive" fill="hold" evtFilter="cancelBubble" nodeType="interactiveSeq">
+              <p:cTn id="50" restart="whenNotActive" fill="hold" evtFilter="cancelBubble" nodeType="interactiveSeq">
                 <p:stCondLst>
                   <p:cond evt="onClick" delay="0">
                     <p:tgtEl>
-                      <p:spTgt spid="80"/>
+                      <p:spTgt spid="39"/>
                     </p:tgtEl>
                   </p:cond>
                 </p:stCondLst>
@@ -17008,32 +16752,32 @@
                 </p:endSync>
                 <p:childTnLst>
                   <p:par>
-                    <p:cTn id="138" fill="hold">
+                    <p:cTn id="51" fill="hold">
                       <p:stCondLst>
-                        <p:cond delay="indefinite"/>
+                        <p:cond delay="0"/>
                       </p:stCondLst>
                       <p:childTnLst>
                         <p:par>
-                          <p:cTn id="134" fill="hold">
+                          <p:cTn id="52" fill="hold">
                             <p:stCondLst>
                               <p:cond delay="0"/>
                             </p:stCondLst>
                             <p:childTnLst>
                               <p:par>
-                                <p:cTn id="137" presetID="10" presetClass="entr" presetSubtype="0" fill="hold" grpId="0" nodeType="clickEffect">
+                                <p:cTn id="53" presetID="10" presetClass="entr" presetSubtype="0" fill="hold" grpId="0" nodeType="clickEffect">
                                   <p:stCondLst>
                                     <p:cond delay="0"/>
                                   </p:stCondLst>
                                   <p:childTnLst>
                                     <p:set>
                                       <p:cBhvr>
-                                        <p:cTn id="135" dur="1" fill="hold">
+                                        <p:cTn id="54" dur="1" fill="hold">
                                           <p:stCondLst>
                                             <p:cond delay="0"/>
                                           </p:stCondLst>
                                         </p:cTn>
                                         <p:tgtEl>
-                                          <p:spTgt spid="82"/>
+                                          <p:spTgt spid="38"/>
                                         </p:tgtEl>
                                         <p:attrNameLst>
                                           <p:attrName>style.visibility</p:attrName>
@@ -17045,9 +16789,9 @@
                                     </p:set>
                                     <p:animEffect transition="in" filter="fade">
                                       <p:cBhvr>
-                                        <p:cTn id="136" dur="300"/>
+                                        <p:cTn id="55" dur="300"/>
                                         <p:tgtEl>
-                                          <p:spTgt spid="82"/>
+                                          <p:spTgt spid="38"/>
                                         </p:tgtEl>
                                       </p:cBhvr>
                                     </p:animEffect>
@@ -17060,33 +16804,56 @@
                       </p:childTnLst>
                     </p:cTn>
                   </p:par>
+                </p:childTnLst>
+              </p:cTn>
+              <p:nextCondLst>
+                <p:cond evt="onNext" delay="0">
+                  <p:tgtEl>
+                    <p:sldTgt/>
+                  </p:tgtEl>
+                </p:cond>
+              </p:nextCondLst>
+            </p:seq>
+            <p:seq concurrent="1" nextAc="seek">
+              <p:cTn id="56" restart="whenNotActive" fill="hold" evtFilter="cancelBubble" nodeType="interactiveSeq">
+                <p:stCondLst>
+                  <p:cond evt="onClick" delay="0">
+                    <p:tgtEl>
+                      <p:spTgt spid="42"/>
+                    </p:tgtEl>
+                  </p:cond>
+                </p:stCondLst>
+                <p:endSync evt="end" delay="0">
+                  <p:rtn val="all"/>
+                </p:endSync>
+                <p:childTnLst>
                   <p:par>
-                    <p:cTn id="143" fill="hold">
+                    <p:cTn id="57" fill="hold">
                       <p:stCondLst>
-                        <p:cond delay="indefinite"/>
+                        <p:cond delay="0"/>
                       </p:stCondLst>
                       <p:childTnLst>
                         <p:par>
-                          <p:cTn id="139" fill="hold">
+                          <p:cTn id="58" fill="hold">
                             <p:stCondLst>
                               <p:cond delay="0"/>
                             </p:stCondLst>
                             <p:childTnLst>
                               <p:par>
-                                <p:cTn id="142" presetID="10" presetClass="entr" presetSubtype="0" fill="hold" grpId="0" nodeType="clickEffect">
+                                <p:cTn id="59" presetID="10" presetClass="entr" presetSubtype="0" fill="hold" grpId="0" nodeType="clickEffect">
                                   <p:stCondLst>
                                     <p:cond delay="0"/>
                                   </p:stCondLst>
                                   <p:childTnLst>
                                     <p:set>
                                       <p:cBhvr>
-                                        <p:cTn id="140" dur="1" fill="hold">
+                                        <p:cTn id="60" dur="1" fill="hold">
                                           <p:stCondLst>
                                             <p:cond delay="0"/>
                                           </p:stCondLst>
                                         </p:cTn>
                                         <p:tgtEl>
-                                          <p:spTgt spid="84"/>
+                                          <p:spTgt spid="41"/>
                                         </p:tgtEl>
                                         <p:attrNameLst>
                                           <p:attrName>style.visibility</p:attrName>
@@ -17098,9 +16865,9 @@
                                     </p:set>
                                     <p:animEffect transition="in" filter="fade">
                                       <p:cBhvr>
-                                        <p:cTn id="141" dur="300"/>
+                                        <p:cTn id="61" dur="300"/>
                                         <p:tgtEl>
-                                          <p:spTgt spid="84"/>
+                                          <p:spTgt spid="41"/>
                                         </p:tgtEl>
                                       </p:cBhvr>
                                     </p:animEffect>
@@ -17113,27 +16880,886 @@
                       </p:childTnLst>
                     </p:cTn>
                   </p:par>
+                </p:childTnLst>
+              </p:cTn>
+              <p:nextCondLst>
+                <p:cond evt="onNext" delay="0">
+                  <p:tgtEl>
+                    <p:sldTgt/>
+                  </p:tgtEl>
+                </p:cond>
+              </p:nextCondLst>
+            </p:seq>
+            <p:seq concurrent="1" nextAc="seek">
+              <p:cTn id="62" restart="whenNotActive" fill="hold" evtFilter="cancelBubble" nodeType="interactiveSeq">
+                <p:stCondLst>
+                  <p:cond evt="onClick" delay="0">
+                    <p:tgtEl>
+                      <p:spTgt spid="48"/>
+                    </p:tgtEl>
+                  </p:cond>
+                </p:stCondLst>
+                <p:endSync evt="end" delay="0">
+                  <p:rtn val="all"/>
+                </p:endSync>
+                <p:childTnLst>
                   <p:par>
-                    <p:cTn id="148" fill="hold">
+                    <p:cTn id="63" fill="hold">
                       <p:stCondLst>
-                        <p:cond delay="indefinite"/>
+                        <p:cond delay="0"/>
                       </p:stCondLst>
                       <p:childTnLst>
                         <p:par>
-                          <p:cTn id="144" fill="hold">
+                          <p:cTn id="64" fill="hold">
                             <p:stCondLst>
                               <p:cond delay="0"/>
                             </p:stCondLst>
                             <p:childTnLst>
                               <p:par>
-                                <p:cTn id="147" presetID="10" presetClass="entr" presetSubtype="0" fill="hold" grpId="0" nodeType="clickEffect">
+                                <p:cTn id="65" presetID="10" presetClass="entr" presetSubtype="0" fill="hold" grpId="0" nodeType="clickEffect">
                                   <p:stCondLst>
                                     <p:cond delay="0"/>
                                   </p:stCondLst>
                                   <p:childTnLst>
                                     <p:set>
                                       <p:cBhvr>
-                                        <p:cTn id="145" dur="1" fill="hold">
+                                        <p:cTn id="66" dur="1" fill="hold">
+                                          <p:stCondLst>
+                                            <p:cond delay="0"/>
+                                          </p:stCondLst>
+                                        </p:cTn>
+                                        <p:tgtEl>
+                                          <p:spTgt spid="47"/>
+                                        </p:tgtEl>
+                                        <p:attrNameLst>
+                                          <p:attrName>style.visibility</p:attrName>
+                                        </p:attrNameLst>
+                                      </p:cBhvr>
+                                      <p:to>
+                                        <p:strVal val="visible"/>
+                                      </p:to>
+                                    </p:set>
+                                    <p:animEffect transition="in" filter="fade">
+                                      <p:cBhvr>
+                                        <p:cTn id="67" dur="300"/>
+                                        <p:tgtEl>
+                                          <p:spTgt spid="47"/>
+                                        </p:tgtEl>
+                                      </p:cBhvr>
+                                    </p:animEffect>
+                                  </p:childTnLst>
+                                </p:cTn>
+                              </p:par>
+                            </p:childTnLst>
+                          </p:cTn>
+                        </p:par>
+                      </p:childTnLst>
+                    </p:cTn>
+                  </p:par>
+                </p:childTnLst>
+              </p:cTn>
+              <p:nextCondLst>
+                <p:cond evt="onNext" delay="0">
+                  <p:tgtEl>
+                    <p:sldTgt/>
+                  </p:tgtEl>
+                </p:cond>
+              </p:nextCondLst>
+            </p:seq>
+            <p:seq concurrent="1" nextAc="seek">
+              <p:cTn id="68" restart="whenNotActive" fill="hold" evtFilter="cancelBubble" nodeType="interactiveSeq">
+                <p:stCondLst>
+                  <p:cond evt="onClick" delay="0">
+                    <p:tgtEl>
+                      <p:spTgt spid="51"/>
+                    </p:tgtEl>
+                  </p:cond>
+                </p:stCondLst>
+                <p:endSync evt="end" delay="0">
+                  <p:rtn val="all"/>
+                </p:endSync>
+                <p:childTnLst>
+                  <p:par>
+                    <p:cTn id="69" fill="hold">
+                      <p:stCondLst>
+                        <p:cond delay="0"/>
+                      </p:stCondLst>
+                      <p:childTnLst>
+                        <p:par>
+                          <p:cTn id="70" fill="hold">
+                            <p:stCondLst>
+                              <p:cond delay="0"/>
+                            </p:stCondLst>
+                            <p:childTnLst>
+                              <p:par>
+                                <p:cTn id="71" presetID="10" presetClass="entr" presetSubtype="0" fill="hold" grpId="0" nodeType="clickEffect">
+                                  <p:stCondLst>
+                                    <p:cond delay="0"/>
+                                  </p:stCondLst>
+                                  <p:childTnLst>
+                                    <p:set>
+                                      <p:cBhvr>
+                                        <p:cTn id="72" dur="1" fill="hold">
+                                          <p:stCondLst>
+                                            <p:cond delay="0"/>
+                                          </p:stCondLst>
+                                        </p:cTn>
+                                        <p:tgtEl>
+                                          <p:spTgt spid="50"/>
+                                        </p:tgtEl>
+                                        <p:attrNameLst>
+                                          <p:attrName>style.visibility</p:attrName>
+                                        </p:attrNameLst>
+                                      </p:cBhvr>
+                                      <p:to>
+                                        <p:strVal val="visible"/>
+                                      </p:to>
+                                    </p:set>
+                                    <p:animEffect transition="in" filter="fade">
+                                      <p:cBhvr>
+                                        <p:cTn id="73" dur="300"/>
+                                        <p:tgtEl>
+                                          <p:spTgt spid="50"/>
+                                        </p:tgtEl>
+                                      </p:cBhvr>
+                                    </p:animEffect>
+                                  </p:childTnLst>
+                                </p:cTn>
+                              </p:par>
+                            </p:childTnLst>
+                          </p:cTn>
+                        </p:par>
+                      </p:childTnLst>
+                    </p:cTn>
+                  </p:par>
+                </p:childTnLst>
+              </p:cTn>
+              <p:nextCondLst>
+                <p:cond evt="onNext" delay="0">
+                  <p:tgtEl>
+                    <p:sldTgt/>
+                  </p:tgtEl>
+                </p:cond>
+              </p:nextCondLst>
+            </p:seq>
+            <p:seq concurrent="1" nextAc="seek">
+              <p:cTn id="74" restart="whenNotActive" fill="hold" evtFilter="cancelBubble" nodeType="interactiveSeq">
+                <p:stCondLst>
+                  <p:cond evt="onClick" delay="0">
+                    <p:tgtEl>
+                      <p:spTgt spid="54"/>
+                    </p:tgtEl>
+                  </p:cond>
+                </p:stCondLst>
+                <p:endSync evt="end" delay="0">
+                  <p:rtn val="all"/>
+                </p:endSync>
+                <p:childTnLst>
+                  <p:par>
+                    <p:cTn id="75" fill="hold">
+                      <p:stCondLst>
+                        <p:cond delay="0"/>
+                      </p:stCondLst>
+                      <p:childTnLst>
+                        <p:par>
+                          <p:cTn id="76" fill="hold">
+                            <p:stCondLst>
+                              <p:cond delay="0"/>
+                            </p:stCondLst>
+                            <p:childTnLst>
+                              <p:par>
+                                <p:cTn id="77" presetID="10" presetClass="entr" presetSubtype="0" fill="hold" grpId="0" nodeType="clickEffect">
+                                  <p:stCondLst>
+                                    <p:cond delay="0"/>
+                                  </p:stCondLst>
+                                  <p:childTnLst>
+                                    <p:set>
+                                      <p:cBhvr>
+                                        <p:cTn id="78" dur="1" fill="hold">
+                                          <p:stCondLst>
+                                            <p:cond delay="0"/>
+                                          </p:stCondLst>
+                                        </p:cTn>
+                                        <p:tgtEl>
+                                          <p:spTgt spid="53"/>
+                                        </p:tgtEl>
+                                        <p:attrNameLst>
+                                          <p:attrName>style.visibility</p:attrName>
+                                        </p:attrNameLst>
+                                      </p:cBhvr>
+                                      <p:to>
+                                        <p:strVal val="visible"/>
+                                      </p:to>
+                                    </p:set>
+                                    <p:animEffect transition="in" filter="fade">
+                                      <p:cBhvr>
+                                        <p:cTn id="79" dur="300"/>
+                                        <p:tgtEl>
+                                          <p:spTgt spid="53"/>
+                                        </p:tgtEl>
+                                      </p:cBhvr>
+                                    </p:animEffect>
+                                  </p:childTnLst>
+                                </p:cTn>
+                              </p:par>
+                            </p:childTnLst>
+                          </p:cTn>
+                        </p:par>
+                      </p:childTnLst>
+                    </p:cTn>
+                  </p:par>
+                </p:childTnLst>
+              </p:cTn>
+              <p:nextCondLst>
+                <p:cond evt="onNext" delay="0">
+                  <p:tgtEl>
+                    <p:sldTgt/>
+                  </p:tgtEl>
+                </p:cond>
+              </p:nextCondLst>
+            </p:seq>
+            <p:seq concurrent="1" nextAc="seek">
+              <p:cTn id="80" restart="whenNotActive" fill="hold" evtFilter="cancelBubble" nodeType="interactiveSeq">
+                <p:stCondLst>
+                  <p:cond evt="onClick" delay="0">
+                    <p:tgtEl>
+                      <p:spTgt spid="57"/>
+                    </p:tgtEl>
+                  </p:cond>
+                </p:stCondLst>
+                <p:endSync evt="end" delay="0">
+                  <p:rtn val="all"/>
+                </p:endSync>
+                <p:childTnLst>
+                  <p:par>
+                    <p:cTn id="81" fill="hold">
+                      <p:stCondLst>
+                        <p:cond delay="0"/>
+                      </p:stCondLst>
+                      <p:childTnLst>
+                        <p:par>
+                          <p:cTn id="82" fill="hold">
+                            <p:stCondLst>
+                              <p:cond delay="0"/>
+                            </p:stCondLst>
+                            <p:childTnLst>
+                              <p:par>
+                                <p:cTn id="83" presetID="10" presetClass="entr" presetSubtype="0" fill="hold" grpId="0" nodeType="clickEffect">
+                                  <p:stCondLst>
+                                    <p:cond delay="0"/>
+                                  </p:stCondLst>
+                                  <p:childTnLst>
+                                    <p:set>
+                                      <p:cBhvr>
+                                        <p:cTn id="84" dur="1" fill="hold">
+                                          <p:stCondLst>
+                                            <p:cond delay="0"/>
+                                          </p:stCondLst>
+                                        </p:cTn>
+                                        <p:tgtEl>
+                                          <p:spTgt spid="56"/>
+                                        </p:tgtEl>
+                                        <p:attrNameLst>
+                                          <p:attrName>style.visibility</p:attrName>
+                                        </p:attrNameLst>
+                                      </p:cBhvr>
+                                      <p:to>
+                                        <p:strVal val="visible"/>
+                                      </p:to>
+                                    </p:set>
+                                    <p:animEffect transition="in" filter="fade">
+                                      <p:cBhvr>
+                                        <p:cTn id="85" dur="300"/>
+                                        <p:tgtEl>
+                                          <p:spTgt spid="56"/>
+                                        </p:tgtEl>
+                                      </p:cBhvr>
+                                    </p:animEffect>
+                                  </p:childTnLst>
+                                </p:cTn>
+                              </p:par>
+                            </p:childTnLst>
+                          </p:cTn>
+                        </p:par>
+                      </p:childTnLst>
+                    </p:cTn>
+                  </p:par>
+                </p:childTnLst>
+              </p:cTn>
+              <p:nextCondLst>
+                <p:cond evt="onNext" delay="0">
+                  <p:tgtEl>
+                    <p:sldTgt/>
+                  </p:tgtEl>
+                </p:cond>
+              </p:nextCondLst>
+            </p:seq>
+            <p:seq concurrent="1" nextAc="seek">
+              <p:cTn id="86" restart="whenNotActive" fill="hold" evtFilter="cancelBubble" nodeType="interactiveSeq">
+                <p:stCondLst>
+                  <p:cond evt="onClick" delay="0">
+                    <p:tgtEl>
+                      <p:spTgt spid="60"/>
+                    </p:tgtEl>
+                  </p:cond>
+                </p:stCondLst>
+                <p:endSync evt="end" delay="0">
+                  <p:rtn val="all"/>
+                </p:endSync>
+                <p:childTnLst>
+                  <p:par>
+                    <p:cTn id="87" fill="hold">
+                      <p:stCondLst>
+                        <p:cond delay="0"/>
+                      </p:stCondLst>
+                      <p:childTnLst>
+                        <p:par>
+                          <p:cTn id="88" fill="hold">
+                            <p:stCondLst>
+                              <p:cond delay="0"/>
+                            </p:stCondLst>
+                            <p:childTnLst>
+                              <p:par>
+                                <p:cTn id="89" presetID="10" presetClass="entr" presetSubtype="0" fill="hold" grpId="0" nodeType="clickEffect">
+                                  <p:stCondLst>
+                                    <p:cond delay="0"/>
+                                  </p:stCondLst>
+                                  <p:childTnLst>
+                                    <p:set>
+                                      <p:cBhvr>
+                                        <p:cTn id="90" dur="1" fill="hold">
+                                          <p:stCondLst>
+                                            <p:cond delay="0"/>
+                                          </p:stCondLst>
+                                        </p:cTn>
+                                        <p:tgtEl>
+                                          <p:spTgt spid="59"/>
+                                        </p:tgtEl>
+                                        <p:attrNameLst>
+                                          <p:attrName>style.visibility</p:attrName>
+                                        </p:attrNameLst>
+                                      </p:cBhvr>
+                                      <p:to>
+                                        <p:strVal val="visible"/>
+                                      </p:to>
+                                    </p:set>
+                                    <p:animEffect transition="in" filter="fade">
+                                      <p:cBhvr>
+                                        <p:cTn id="91" dur="300"/>
+                                        <p:tgtEl>
+                                          <p:spTgt spid="59"/>
+                                        </p:tgtEl>
+                                      </p:cBhvr>
+                                    </p:animEffect>
+                                  </p:childTnLst>
+                                </p:cTn>
+                              </p:par>
+                            </p:childTnLst>
+                          </p:cTn>
+                        </p:par>
+                      </p:childTnLst>
+                    </p:cTn>
+                  </p:par>
+                </p:childTnLst>
+              </p:cTn>
+              <p:nextCondLst>
+                <p:cond evt="onNext" delay="0">
+                  <p:tgtEl>
+                    <p:sldTgt/>
+                  </p:tgtEl>
+                </p:cond>
+              </p:nextCondLst>
+            </p:seq>
+            <p:seq concurrent="1" nextAc="seek">
+              <p:cTn id="92" restart="whenNotActive" fill="hold" evtFilter="cancelBubble" nodeType="interactiveSeq">
+                <p:stCondLst>
+                  <p:cond evt="onClick" delay="0">
+                    <p:tgtEl>
+                      <p:spTgt spid="66"/>
+                    </p:tgtEl>
+                  </p:cond>
+                </p:stCondLst>
+                <p:endSync evt="end" delay="0">
+                  <p:rtn val="all"/>
+                </p:endSync>
+                <p:childTnLst>
+                  <p:par>
+                    <p:cTn id="93" fill="hold">
+                      <p:stCondLst>
+                        <p:cond delay="0"/>
+                      </p:stCondLst>
+                      <p:childTnLst>
+                        <p:par>
+                          <p:cTn id="94" fill="hold">
+                            <p:stCondLst>
+                              <p:cond delay="0"/>
+                            </p:stCondLst>
+                            <p:childTnLst>
+                              <p:par>
+                                <p:cTn id="95" presetID="10" presetClass="entr" presetSubtype="0" fill="hold" grpId="0" nodeType="clickEffect">
+                                  <p:stCondLst>
+                                    <p:cond delay="0"/>
+                                  </p:stCondLst>
+                                  <p:childTnLst>
+                                    <p:set>
+                                      <p:cBhvr>
+                                        <p:cTn id="96" dur="1" fill="hold">
+                                          <p:stCondLst>
+                                            <p:cond delay="0"/>
+                                          </p:stCondLst>
+                                        </p:cTn>
+                                        <p:tgtEl>
+                                          <p:spTgt spid="65"/>
+                                        </p:tgtEl>
+                                        <p:attrNameLst>
+                                          <p:attrName>style.visibility</p:attrName>
+                                        </p:attrNameLst>
+                                      </p:cBhvr>
+                                      <p:to>
+                                        <p:strVal val="visible"/>
+                                      </p:to>
+                                    </p:set>
+                                    <p:animEffect transition="in" filter="fade">
+                                      <p:cBhvr>
+                                        <p:cTn id="97" dur="300"/>
+                                        <p:tgtEl>
+                                          <p:spTgt spid="65"/>
+                                        </p:tgtEl>
+                                      </p:cBhvr>
+                                    </p:animEffect>
+                                  </p:childTnLst>
+                                </p:cTn>
+                              </p:par>
+                            </p:childTnLst>
+                          </p:cTn>
+                        </p:par>
+                      </p:childTnLst>
+                    </p:cTn>
+                  </p:par>
+                </p:childTnLst>
+              </p:cTn>
+              <p:nextCondLst>
+                <p:cond evt="onNext" delay="0">
+                  <p:tgtEl>
+                    <p:sldTgt/>
+                  </p:tgtEl>
+                </p:cond>
+              </p:nextCondLst>
+            </p:seq>
+            <p:seq concurrent="1" nextAc="seek">
+              <p:cTn id="98" restart="whenNotActive" fill="hold" evtFilter="cancelBubble" nodeType="interactiveSeq">
+                <p:stCondLst>
+                  <p:cond evt="onClick" delay="0">
+                    <p:tgtEl>
+                      <p:spTgt spid="69"/>
+                    </p:tgtEl>
+                  </p:cond>
+                </p:stCondLst>
+                <p:endSync evt="end" delay="0">
+                  <p:rtn val="all"/>
+                </p:endSync>
+                <p:childTnLst>
+                  <p:par>
+                    <p:cTn id="99" fill="hold">
+                      <p:stCondLst>
+                        <p:cond delay="0"/>
+                      </p:stCondLst>
+                      <p:childTnLst>
+                        <p:par>
+                          <p:cTn id="100" fill="hold">
+                            <p:stCondLst>
+                              <p:cond delay="0"/>
+                            </p:stCondLst>
+                            <p:childTnLst>
+                              <p:par>
+                                <p:cTn id="101" presetID="10" presetClass="entr" presetSubtype="0" fill="hold" grpId="0" nodeType="clickEffect">
+                                  <p:stCondLst>
+                                    <p:cond delay="0"/>
+                                  </p:stCondLst>
+                                  <p:childTnLst>
+                                    <p:set>
+                                      <p:cBhvr>
+                                        <p:cTn id="102" dur="1" fill="hold">
+                                          <p:stCondLst>
+                                            <p:cond delay="0"/>
+                                          </p:stCondLst>
+                                        </p:cTn>
+                                        <p:tgtEl>
+                                          <p:spTgt spid="68"/>
+                                        </p:tgtEl>
+                                        <p:attrNameLst>
+                                          <p:attrName>style.visibility</p:attrName>
+                                        </p:attrNameLst>
+                                      </p:cBhvr>
+                                      <p:to>
+                                        <p:strVal val="visible"/>
+                                      </p:to>
+                                    </p:set>
+                                    <p:animEffect transition="in" filter="fade">
+                                      <p:cBhvr>
+                                        <p:cTn id="103" dur="300"/>
+                                        <p:tgtEl>
+                                          <p:spTgt spid="68"/>
+                                        </p:tgtEl>
+                                      </p:cBhvr>
+                                    </p:animEffect>
+                                  </p:childTnLst>
+                                </p:cTn>
+                              </p:par>
+                            </p:childTnLst>
+                          </p:cTn>
+                        </p:par>
+                      </p:childTnLst>
+                    </p:cTn>
+                  </p:par>
+                </p:childTnLst>
+              </p:cTn>
+              <p:nextCondLst>
+                <p:cond evt="onNext" delay="0">
+                  <p:tgtEl>
+                    <p:sldTgt/>
+                  </p:tgtEl>
+                </p:cond>
+              </p:nextCondLst>
+            </p:seq>
+            <p:seq concurrent="1" nextAc="seek">
+              <p:cTn id="104" restart="whenNotActive" fill="hold" evtFilter="cancelBubble" nodeType="interactiveSeq">
+                <p:stCondLst>
+                  <p:cond evt="onClick" delay="0">
+                    <p:tgtEl>
+                      <p:spTgt spid="72"/>
+                    </p:tgtEl>
+                  </p:cond>
+                </p:stCondLst>
+                <p:endSync evt="end" delay="0">
+                  <p:rtn val="all"/>
+                </p:endSync>
+                <p:childTnLst>
+                  <p:par>
+                    <p:cTn id="105" fill="hold">
+                      <p:stCondLst>
+                        <p:cond delay="0"/>
+                      </p:stCondLst>
+                      <p:childTnLst>
+                        <p:par>
+                          <p:cTn id="106" fill="hold">
+                            <p:stCondLst>
+                              <p:cond delay="0"/>
+                            </p:stCondLst>
+                            <p:childTnLst>
+                              <p:par>
+                                <p:cTn id="107" presetID="10" presetClass="entr" presetSubtype="0" fill="hold" grpId="0" nodeType="clickEffect">
+                                  <p:stCondLst>
+                                    <p:cond delay="0"/>
+                                  </p:stCondLst>
+                                  <p:childTnLst>
+                                    <p:set>
+                                      <p:cBhvr>
+                                        <p:cTn id="108" dur="1" fill="hold">
+                                          <p:stCondLst>
+                                            <p:cond delay="0"/>
+                                          </p:stCondLst>
+                                        </p:cTn>
+                                        <p:tgtEl>
+                                          <p:spTgt spid="71"/>
+                                        </p:tgtEl>
+                                        <p:attrNameLst>
+                                          <p:attrName>style.visibility</p:attrName>
+                                        </p:attrNameLst>
+                                      </p:cBhvr>
+                                      <p:to>
+                                        <p:strVal val="visible"/>
+                                      </p:to>
+                                    </p:set>
+                                    <p:animEffect transition="in" filter="fade">
+                                      <p:cBhvr>
+                                        <p:cTn id="109" dur="300"/>
+                                        <p:tgtEl>
+                                          <p:spTgt spid="71"/>
+                                        </p:tgtEl>
+                                      </p:cBhvr>
+                                    </p:animEffect>
+                                  </p:childTnLst>
+                                </p:cTn>
+                              </p:par>
+                            </p:childTnLst>
+                          </p:cTn>
+                        </p:par>
+                      </p:childTnLst>
+                    </p:cTn>
+                  </p:par>
+                </p:childTnLst>
+              </p:cTn>
+              <p:nextCondLst>
+                <p:cond evt="onNext" delay="0">
+                  <p:tgtEl>
+                    <p:sldTgt/>
+                  </p:tgtEl>
+                </p:cond>
+              </p:nextCondLst>
+            </p:seq>
+            <p:seq concurrent="1" nextAc="seek">
+              <p:cTn id="110" restart="whenNotActive" fill="hold" evtFilter="cancelBubble" nodeType="interactiveSeq">
+                <p:stCondLst>
+                  <p:cond evt="onClick" delay="0">
+                    <p:tgtEl>
+                      <p:spTgt spid="75"/>
+                    </p:tgtEl>
+                  </p:cond>
+                </p:stCondLst>
+                <p:endSync evt="end" delay="0">
+                  <p:rtn val="all"/>
+                </p:endSync>
+                <p:childTnLst>
+                  <p:par>
+                    <p:cTn id="111" fill="hold">
+                      <p:stCondLst>
+                        <p:cond delay="0"/>
+                      </p:stCondLst>
+                      <p:childTnLst>
+                        <p:par>
+                          <p:cTn id="112" fill="hold">
+                            <p:stCondLst>
+                              <p:cond delay="0"/>
+                            </p:stCondLst>
+                            <p:childTnLst>
+                              <p:par>
+                                <p:cTn id="113" presetID="10" presetClass="entr" presetSubtype="0" fill="hold" grpId="0" nodeType="clickEffect">
+                                  <p:stCondLst>
+                                    <p:cond delay="0"/>
+                                  </p:stCondLst>
+                                  <p:childTnLst>
+                                    <p:set>
+                                      <p:cBhvr>
+                                        <p:cTn id="114" dur="1" fill="hold">
+                                          <p:stCondLst>
+                                            <p:cond delay="0"/>
+                                          </p:stCondLst>
+                                        </p:cTn>
+                                        <p:tgtEl>
+                                          <p:spTgt spid="74"/>
+                                        </p:tgtEl>
+                                        <p:attrNameLst>
+                                          <p:attrName>style.visibility</p:attrName>
+                                        </p:attrNameLst>
+                                      </p:cBhvr>
+                                      <p:to>
+                                        <p:strVal val="visible"/>
+                                      </p:to>
+                                    </p:set>
+                                    <p:animEffect transition="in" filter="fade">
+                                      <p:cBhvr>
+                                        <p:cTn id="115" dur="300"/>
+                                        <p:tgtEl>
+                                          <p:spTgt spid="74"/>
+                                        </p:tgtEl>
+                                      </p:cBhvr>
+                                    </p:animEffect>
+                                  </p:childTnLst>
+                                </p:cTn>
+                              </p:par>
+                            </p:childTnLst>
+                          </p:cTn>
+                        </p:par>
+                      </p:childTnLst>
+                    </p:cTn>
+                  </p:par>
+                </p:childTnLst>
+              </p:cTn>
+              <p:nextCondLst>
+                <p:cond evt="onNext" delay="0">
+                  <p:tgtEl>
+                    <p:sldTgt/>
+                  </p:tgtEl>
+                </p:cond>
+              </p:nextCondLst>
+            </p:seq>
+            <p:seq concurrent="1" nextAc="seek">
+              <p:cTn id="116" restart="whenNotActive" fill="hold" evtFilter="cancelBubble" nodeType="interactiveSeq">
+                <p:stCondLst>
+                  <p:cond evt="onClick" delay="0">
+                    <p:tgtEl>
+                      <p:spTgt spid="78"/>
+                    </p:tgtEl>
+                  </p:cond>
+                </p:stCondLst>
+                <p:endSync evt="end" delay="0">
+                  <p:rtn val="all"/>
+                </p:endSync>
+                <p:childTnLst>
+                  <p:par>
+                    <p:cTn id="117" fill="hold">
+                      <p:stCondLst>
+                        <p:cond delay="0"/>
+                      </p:stCondLst>
+                      <p:childTnLst>
+                        <p:par>
+                          <p:cTn id="118" fill="hold">
+                            <p:stCondLst>
+                              <p:cond delay="0"/>
+                            </p:stCondLst>
+                            <p:childTnLst>
+                              <p:par>
+                                <p:cTn id="119" presetID="10" presetClass="entr" presetSubtype="0" fill="hold" grpId="0" nodeType="clickEffect">
+                                  <p:stCondLst>
+                                    <p:cond delay="0"/>
+                                  </p:stCondLst>
+                                  <p:childTnLst>
+                                    <p:set>
+                                      <p:cBhvr>
+                                        <p:cTn id="120" dur="1" fill="hold">
+                                          <p:stCondLst>
+                                            <p:cond delay="0"/>
+                                          </p:stCondLst>
+                                        </p:cTn>
+                                        <p:tgtEl>
+                                          <p:spTgt spid="77"/>
+                                        </p:tgtEl>
+                                        <p:attrNameLst>
+                                          <p:attrName>style.visibility</p:attrName>
+                                        </p:attrNameLst>
+                                      </p:cBhvr>
+                                      <p:to>
+                                        <p:strVal val="visible"/>
+                                      </p:to>
+                                    </p:set>
+                                    <p:animEffect transition="in" filter="fade">
+                                      <p:cBhvr>
+                                        <p:cTn id="121" dur="300"/>
+                                        <p:tgtEl>
+                                          <p:spTgt spid="77"/>
+                                        </p:tgtEl>
+                                      </p:cBhvr>
+                                    </p:animEffect>
+                                  </p:childTnLst>
+                                </p:cTn>
+                              </p:par>
+                            </p:childTnLst>
+                          </p:cTn>
+                        </p:par>
+                      </p:childTnLst>
+                    </p:cTn>
+                  </p:par>
+                </p:childTnLst>
+              </p:cTn>
+              <p:nextCondLst>
+                <p:cond evt="onNext" delay="0">
+                  <p:tgtEl>
+                    <p:sldTgt/>
+                  </p:tgtEl>
+                </p:cond>
+              </p:nextCondLst>
+            </p:seq>
+            <p:seq concurrent="1" nextAc="seek">
+              <p:cTn id="122" restart="whenNotActive" fill="hold" evtFilter="cancelBubble" nodeType="interactiveSeq">
+                <p:stCondLst>
+                  <p:cond evt="onClick" delay="0">
+                    <p:tgtEl>
+                      <p:spTgt spid="84"/>
+                    </p:tgtEl>
+                  </p:cond>
+                </p:stCondLst>
+                <p:endSync evt="end" delay="0">
+                  <p:rtn val="all"/>
+                </p:endSync>
+                <p:childTnLst>
+                  <p:par>
+                    <p:cTn id="123" fill="hold">
+                      <p:stCondLst>
+                        <p:cond delay="0"/>
+                      </p:stCondLst>
+                      <p:childTnLst>
+                        <p:par>
+                          <p:cTn id="124" fill="hold">
+                            <p:stCondLst>
+                              <p:cond delay="0"/>
+                            </p:stCondLst>
+                            <p:childTnLst>
+                              <p:par>
+                                <p:cTn id="125" presetID="10" presetClass="entr" presetSubtype="0" fill="hold" grpId="0" nodeType="clickEffect">
+                                  <p:stCondLst>
+                                    <p:cond delay="0"/>
+                                  </p:stCondLst>
+                                  <p:childTnLst>
+                                    <p:set>
+                                      <p:cBhvr>
+                                        <p:cTn id="126" dur="1" fill="hold">
+                                          <p:stCondLst>
+                                            <p:cond delay="0"/>
+                                          </p:stCondLst>
+                                        </p:cTn>
+                                        <p:tgtEl>
+                                          <p:spTgt spid="83"/>
+                                        </p:tgtEl>
+                                        <p:attrNameLst>
+                                          <p:attrName>style.visibility</p:attrName>
+                                        </p:attrNameLst>
+                                      </p:cBhvr>
+                                      <p:to>
+                                        <p:strVal val="visible"/>
+                                      </p:to>
+                                    </p:set>
+                                    <p:animEffect transition="in" filter="fade">
+                                      <p:cBhvr>
+                                        <p:cTn id="127" dur="300"/>
+                                        <p:tgtEl>
+                                          <p:spTgt spid="83"/>
+                                        </p:tgtEl>
+                                      </p:cBhvr>
+                                    </p:animEffect>
+                                  </p:childTnLst>
+                                </p:cTn>
+                              </p:par>
+                            </p:childTnLst>
+                          </p:cTn>
+                        </p:par>
+                      </p:childTnLst>
+                    </p:cTn>
+                  </p:par>
+                </p:childTnLst>
+              </p:cTn>
+              <p:nextCondLst>
+                <p:cond evt="onNext" delay="0">
+                  <p:tgtEl>
+                    <p:sldTgt/>
+                  </p:tgtEl>
+                </p:cond>
+              </p:nextCondLst>
+            </p:seq>
+            <p:seq concurrent="1" nextAc="seek">
+              <p:cTn id="128" restart="whenNotActive" fill="hold" evtFilter="cancelBubble" nodeType="interactiveSeq">
+                <p:stCondLst>
+                  <p:cond evt="onClick" delay="0">
+                    <p:tgtEl>
+                      <p:spTgt spid="87"/>
+                    </p:tgtEl>
+                  </p:cond>
+                </p:stCondLst>
+                <p:endSync evt="end" delay="0">
+                  <p:rtn val="all"/>
+                </p:endSync>
+                <p:childTnLst>
+                  <p:par>
+                    <p:cTn id="129" fill="hold">
+                      <p:stCondLst>
+                        <p:cond delay="0"/>
+                      </p:stCondLst>
+                      <p:childTnLst>
+                        <p:par>
+                          <p:cTn id="130" fill="hold">
+                            <p:stCondLst>
+                              <p:cond delay="0"/>
+                            </p:stCondLst>
+                            <p:childTnLst>
+                              <p:par>
+                                <p:cTn id="131" presetID="10" presetClass="entr" presetSubtype="0" fill="hold" grpId="0" nodeType="clickEffect">
+                                  <p:stCondLst>
+                                    <p:cond delay="0"/>
+                                  </p:stCondLst>
+                                  <p:childTnLst>
+                                    <p:set>
+                                      <p:cBhvr>
+                                        <p:cTn id="132" dur="1" fill="hold">
                                           <p:stCondLst>
                                             <p:cond delay="0"/>
                                           </p:stCondLst>
@@ -17151,7 +17777,7 @@
                                     </p:set>
                                     <p:animEffect transition="in" filter="fade">
                                       <p:cBhvr>
-                                        <p:cTn id="146" dur="300"/>
+                                        <p:cTn id="133" dur="300"/>
                                         <p:tgtEl>
                                           <p:spTgt spid="86"/>
                                         </p:tgtEl>
@@ -17166,20 +17792,195 @@
                       </p:childTnLst>
                     </p:cTn>
                   </p:par>
+                </p:childTnLst>
+              </p:cTn>
+              <p:nextCondLst>
+                <p:cond evt="onNext" delay="0">
+                  <p:tgtEl>
+                    <p:sldTgt/>
+                  </p:tgtEl>
+                </p:cond>
+              </p:nextCondLst>
+            </p:seq>
+            <p:seq concurrent="1" nextAc="seek">
+              <p:cTn id="134" restart="whenNotActive" fill="hold" evtFilter="cancelBubble" nodeType="interactiveSeq">
+                <p:stCondLst>
+                  <p:cond evt="onClick" delay="0">
+                    <p:tgtEl>
+                      <p:spTgt spid="90"/>
+                    </p:tgtEl>
+                  </p:cond>
+                </p:stCondLst>
+                <p:endSync evt="end" delay="0">
+                  <p:rtn val="all"/>
+                </p:endSync>
+                <p:childTnLst>
                   <p:par>
-                    <p:cTn id="153" fill="hold">
+                    <p:cTn id="135" fill="hold">
                       <p:stCondLst>
-                        <p:cond delay="indefinite"/>
+                        <p:cond delay="0"/>
                       </p:stCondLst>
                       <p:childTnLst>
                         <p:par>
-                          <p:cTn id="149" fill="hold">
+                          <p:cTn id="136" fill="hold">
                             <p:stCondLst>
                               <p:cond delay="0"/>
                             </p:stCondLst>
                             <p:childTnLst>
                               <p:par>
-                                <p:cTn id="152" presetID="10" presetClass="entr" presetSubtype="0" fill="hold" grpId="0" nodeType="clickEffect">
+                                <p:cTn id="137" presetID="10" presetClass="entr" presetSubtype="0" fill="hold" grpId="0" nodeType="clickEffect">
+                                  <p:stCondLst>
+                                    <p:cond delay="0"/>
+                                  </p:stCondLst>
+                                  <p:childTnLst>
+                                    <p:set>
+                                      <p:cBhvr>
+                                        <p:cTn id="138" dur="1" fill="hold">
+                                          <p:stCondLst>
+                                            <p:cond delay="0"/>
+                                          </p:stCondLst>
+                                        </p:cTn>
+                                        <p:tgtEl>
+                                          <p:spTgt spid="89"/>
+                                        </p:tgtEl>
+                                        <p:attrNameLst>
+                                          <p:attrName>style.visibility</p:attrName>
+                                        </p:attrNameLst>
+                                      </p:cBhvr>
+                                      <p:to>
+                                        <p:strVal val="visible"/>
+                                      </p:to>
+                                    </p:set>
+                                    <p:animEffect transition="in" filter="fade">
+                                      <p:cBhvr>
+                                        <p:cTn id="139" dur="300"/>
+                                        <p:tgtEl>
+                                          <p:spTgt spid="89"/>
+                                        </p:tgtEl>
+                                      </p:cBhvr>
+                                    </p:animEffect>
+                                  </p:childTnLst>
+                                </p:cTn>
+                              </p:par>
+                            </p:childTnLst>
+                          </p:cTn>
+                        </p:par>
+                      </p:childTnLst>
+                    </p:cTn>
+                  </p:par>
+                </p:childTnLst>
+              </p:cTn>
+              <p:nextCondLst>
+                <p:cond evt="onNext" delay="0">
+                  <p:tgtEl>
+                    <p:sldTgt/>
+                  </p:tgtEl>
+                </p:cond>
+              </p:nextCondLst>
+            </p:seq>
+            <p:seq concurrent="1" nextAc="seek">
+              <p:cTn id="140" restart="whenNotActive" fill="hold" evtFilter="cancelBubble" nodeType="interactiveSeq">
+                <p:stCondLst>
+                  <p:cond evt="onClick" delay="0">
+                    <p:tgtEl>
+                      <p:spTgt spid="93"/>
+                    </p:tgtEl>
+                  </p:cond>
+                </p:stCondLst>
+                <p:endSync evt="end" delay="0">
+                  <p:rtn val="all"/>
+                </p:endSync>
+                <p:childTnLst>
+                  <p:par>
+                    <p:cTn id="141" fill="hold">
+                      <p:stCondLst>
+                        <p:cond delay="0"/>
+                      </p:stCondLst>
+                      <p:childTnLst>
+                        <p:par>
+                          <p:cTn id="142" fill="hold">
+                            <p:stCondLst>
+                              <p:cond delay="0"/>
+                            </p:stCondLst>
+                            <p:childTnLst>
+                              <p:par>
+                                <p:cTn id="143" presetID="10" presetClass="entr" presetSubtype="0" fill="hold" grpId="0" nodeType="clickEffect">
+                                  <p:stCondLst>
+                                    <p:cond delay="0"/>
+                                  </p:stCondLst>
+                                  <p:childTnLst>
+                                    <p:set>
+                                      <p:cBhvr>
+                                        <p:cTn id="144" dur="1" fill="hold">
+                                          <p:stCondLst>
+                                            <p:cond delay="0"/>
+                                          </p:stCondLst>
+                                        </p:cTn>
+                                        <p:tgtEl>
+                                          <p:spTgt spid="92"/>
+                                        </p:tgtEl>
+                                        <p:attrNameLst>
+                                          <p:attrName>style.visibility</p:attrName>
+                                        </p:attrNameLst>
+                                      </p:cBhvr>
+                                      <p:to>
+                                        <p:strVal val="visible"/>
+                                      </p:to>
+                                    </p:set>
+                                    <p:animEffect transition="in" filter="fade">
+                                      <p:cBhvr>
+                                        <p:cTn id="145" dur="300"/>
+                                        <p:tgtEl>
+                                          <p:spTgt spid="92"/>
+                                        </p:tgtEl>
+                                      </p:cBhvr>
+                                    </p:animEffect>
+                                  </p:childTnLst>
+                                </p:cTn>
+                              </p:par>
+                            </p:childTnLst>
+                          </p:cTn>
+                        </p:par>
+                      </p:childTnLst>
+                    </p:cTn>
+                  </p:par>
+                </p:childTnLst>
+              </p:cTn>
+              <p:nextCondLst>
+                <p:cond evt="onNext" delay="0">
+                  <p:tgtEl>
+                    <p:sldTgt/>
+                  </p:tgtEl>
+                </p:cond>
+              </p:nextCondLst>
+            </p:seq>
+            <p:seq concurrent="1" nextAc="seek">
+              <p:cTn id="146" restart="whenNotActive" fill="hold" evtFilter="cancelBubble" nodeType="interactiveSeq">
+                <p:stCondLst>
+                  <p:cond evt="onClick" delay="0">
+                    <p:tgtEl>
+                      <p:spTgt spid="96"/>
+                    </p:tgtEl>
+                  </p:cond>
+                </p:stCondLst>
+                <p:endSync evt="end" delay="0">
+                  <p:rtn val="all"/>
+                </p:endSync>
+                <p:childTnLst>
+                  <p:par>
+                    <p:cTn id="147" fill="hold">
+                      <p:stCondLst>
+                        <p:cond delay="0"/>
+                      </p:stCondLst>
+                      <p:childTnLst>
+                        <p:par>
+                          <p:cTn id="148" fill="hold">
+                            <p:stCondLst>
+                              <p:cond delay="0"/>
+                            </p:stCondLst>
+                            <p:childTnLst>
+                              <p:par>
+                                <p:cTn id="149" presetID="10" presetClass="entr" presetSubtype="0" fill="hold" grpId="0" nodeType="clickEffect">
                                   <p:stCondLst>
                                     <p:cond delay="0"/>
                                   </p:stCondLst>
@@ -17192,7 +17993,7 @@
                                           </p:stCondLst>
                                         </p:cTn>
                                         <p:tgtEl>
-                                          <p:spTgt spid="88"/>
+                                          <p:spTgt spid="95"/>
                                         </p:tgtEl>
                                         <p:attrNameLst>
                                           <p:attrName>style.visibility</p:attrName>
@@ -17206,7 +18007,7 @@
                                       <p:cBhvr>
                                         <p:cTn id="151" dur="300"/>
                                         <p:tgtEl>
-                                          <p:spTgt spid="88"/>
+                                          <p:spTgt spid="95"/>
                                         </p:tgtEl>
                                       </p:cBhvr>
                                     </p:animEffect>
@@ -17219,10 +18020,33 @@
                       </p:childTnLst>
                     </p:cTn>
                   </p:par>
+                </p:childTnLst>
+              </p:cTn>
+              <p:nextCondLst>
+                <p:cond evt="onNext" delay="0">
+                  <p:tgtEl>
+                    <p:sldTgt/>
+                  </p:tgtEl>
+                </p:cond>
+              </p:nextCondLst>
+            </p:seq>
+            <p:seq concurrent="1" nextAc="seek">
+              <p:cTn id="152" restart="whenNotActive" fill="hold" evtFilter="cancelBubble" nodeType="interactiveSeq">
+                <p:stCondLst>
+                  <p:cond evt="onClick" delay="0">
+                    <p:tgtEl>
+                      <p:spTgt spid="102"/>
+                    </p:tgtEl>
+                  </p:cond>
+                </p:stCondLst>
+                <p:endSync evt="end" delay="0">
+                  <p:rtn val="all"/>
+                </p:endSync>
+                <p:childTnLst>
                   <p:par>
-                    <p:cTn id="158" fill="hold">
+                    <p:cTn id="153" fill="hold">
                       <p:stCondLst>
-                        <p:cond delay="indefinite"/>
+                        <p:cond delay="0"/>
                       </p:stCondLst>
                       <p:childTnLst>
                         <p:par>
@@ -17232,20 +18056,20 @@
                             </p:stCondLst>
                             <p:childTnLst>
                               <p:par>
-                                <p:cTn id="157" presetID="10" presetClass="entr" presetSubtype="0" fill="hold" grpId="0" nodeType="clickEffect">
+                                <p:cTn id="155" presetID="10" presetClass="entr" presetSubtype="0" fill="hold" grpId="0" nodeType="clickEffect">
                                   <p:stCondLst>
                                     <p:cond delay="0"/>
                                   </p:stCondLst>
                                   <p:childTnLst>
                                     <p:set>
                                       <p:cBhvr>
-                                        <p:cTn id="155" dur="1" fill="hold">
+                                        <p:cTn id="156" dur="1" fill="hold">
                                           <p:stCondLst>
                                             <p:cond delay="0"/>
                                           </p:stCondLst>
                                         </p:cTn>
                                         <p:tgtEl>
-                                          <p:spTgt spid="90"/>
+                                          <p:spTgt spid="101"/>
                                         </p:tgtEl>
                                         <p:attrNameLst>
                                           <p:attrName>style.visibility</p:attrName>
@@ -17257,9 +18081,313 @@
                                     </p:set>
                                     <p:animEffect transition="in" filter="fade">
                                       <p:cBhvr>
-                                        <p:cTn id="156" dur="300"/>
+                                        <p:cTn id="157" dur="300"/>
                                         <p:tgtEl>
-                                          <p:spTgt spid="90"/>
+                                          <p:spTgt spid="101"/>
+                                        </p:tgtEl>
+                                      </p:cBhvr>
+                                    </p:animEffect>
+                                  </p:childTnLst>
+                                </p:cTn>
+                              </p:par>
+                            </p:childTnLst>
+                          </p:cTn>
+                        </p:par>
+                      </p:childTnLst>
+                    </p:cTn>
+                  </p:par>
+                </p:childTnLst>
+              </p:cTn>
+              <p:nextCondLst>
+                <p:cond evt="onNext" delay="0">
+                  <p:tgtEl>
+                    <p:sldTgt/>
+                  </p:tgtEl>
+                </p:cond>
+              </p:nextCondLst>
+            </p:seq>
+            <p:seq concurrent="1" nextAc="seek">
+              <p:cTn id="158" restart="whenNotActive" fill="hold" evtFilter="cancelBubble" nodeType="interactiveSeq">
+                <p:stCondLst>
+                  <p:cond evt="onClick" delay="0">
+                    <p:tgtEl>
+                      <p:spTgt spid="105"/>
+                    </p:tgtEl>
+                  </p:cond>
+                </p:stCondLst>
+                <p:endSync evt="end" delay="0">
+                  <p:rtn val="all"/>
+                </p:endSync>
+                <p:childTnLst>
+                  <p:par>
+                    <p:cTn id="159" fill="hold">
+                      <p:stCondLst>
+                        <p:cond delay="0"/>
+                      </p:stCondLst>
+                      <p:childTnLst>
+                        <p:par>
+                          <p:cTn id="160" fill="hold">
+                            <p:stCondLst>
+                              <p:cond delay="0"/>
+                            </p:stCondLst>
+                            <p:childTnLst>
+                              <p:par>
+                                <p:cTn id="161" presetID="10" presetClass="entr" presetSubtype="0" fill="hold" grpId="0" nodeType="clickEffect">
+                                  <p:stCondLst>
+                                    <p:cond delay="0"/>
+                                  </p:stCondLst>
+                                  <p:childTnLst>
+                                    <p:set>
+                                      <p:cBhvr>
+                                        <p:cTn id="162" dur="1" fill="hold">
+                                          <p:stCondLst>
+                                            <p:cond delay="0"/>
+                                          </p:stCondLst>
+                                        </p:cTn>
+                                        <p:tgtEl>
+                                          <p:spTgt spid="104"/>
+                                        </p:tgtEl>
+                                        <p:attrNameLst>
+                                          <p:attrName>style.visibility</p:attrName>
+                                        </p:attrNameLst>
+                                      </p:cBhvr>
+                                      <p:to>
+                                        <p:strVal val="visible"/>
+                                      </p:to>
+                                    </p:set>
+                                    <p:animEffect transition="in" filter="fade">
+                                      <p:cBhvr>
+                                        <p:cTn id="163" dur="300"/>
+                                        <p:tgtEl>
+                                          <p:spTgt spid="104"/>
+                                        </p:tgtEl>
+                                      </p:cBhvr>
+                                    </p:animEffect>
+                                  </p:childTnLst>
+                                </p:cTn>
+                              </p:par>
+                            </p:childTnLst>
+                          </p:cTn>
+                        </p:par>
+                      </p:childTnLst>
+                    </p:cTn>
+                  </p:par>
+                </p:childTnLst>
+              </p:cTn>
+              <p:nextCondLst>
+                <p:cond evt="onNext" delay="0">
+                  <p:tgtEl>
+                    <p:sldTgt/>
+                  </p:tgtEl>
+                </p:cond>
+              </p:nextCondLst>
+            </p:seq>
+            <p:seq concurrent="1" nextAc="seek">
+              <p:cTn id="164" restart="whenNotActive" fill="hold" evtFilter="cancelBubble" nodeType="interactiveSeq">
+                <p:stCondLst>
+                  <p:cond evt="onClick" delay="0">
+                    <p:tgtEl>
+                      <p:spTgt spid="108"/>
+                    </p:tgtEl>
+                  </p:cond>
+                </p:stCondLst>
+                <p:endSync evt="end" delay="0">
+                  <p:rtn val="all"/>
+                </p:endSync>
+                <p:childTnLst>
+                  <p:par>
+                    <p:cTn id="165" fill="hold">
+                      <p:stCondLst>
+                        <p:cond delay="0"/>
+                      </p:stCondLst>
+                      <p:childTnLst>
+                        <p:par>
+                          <p:cTn id="166" fill="hold">
+                            <p:stCondLst>
+                              <p:cond delay="0"/>
+                            </p:stCondLst>
+                            <p:childTnLst>
+                              <p:par>
+                                <p:cTn id="167" presetID="10" presetClass="entr" presetSubtype="0" fill="hold" grpId="0" nodeType="clickEffect">
+                                  <p:stCondLst>
+                                    <p:cond delay="0"/>
+                                  </p:stCondLst>
+                                  <p:childTnLst>
+                                    <p:set>
+                                      <p:cBhvr>
+                                        <p:cTn id="168" dur="1" fill="hold">
+                                          <p:stCondLst>
+                                            <p:cond delay="0"/>
+                                          </p:stCondLst>
+                                        </p:cTn>
+                                        <p:tgtEl>
+                                          <p:spTgt spid="107"/>
+                                        </p:tgtEl>
+                                        <p:attrNameLst>
+                                          <p:attrName>style.visibility</p:attrName>
+                                        </p:attrNameLst>
+                                      </p:cBhvr>
+                                      <p:to>
+                                        <p:strVal val="visible"/>
+                                      </p:to>
+                                    </p:set>
+                                    <p:animEffect transition="in" filter="fade">
+                                      <p:cBhvr>
+                                        <p:cTn id="169" dur="300"/>
+                                        <p:tgtEl>
+                                          <p:spTgt spid="107"/>
+                                        </p:tgtEl>
+                                      </p:cBhvr>
+                                    </p:animEffect>
+                                  </p:childTnLst>
+                                </p:cTn>
+                              </p:par>
+                            </p:childTnLst>
+                          </p:cTn>
+                        </p:par>
+                      </p:childTnLst>
+                    </p:cTn>
+                  </p:par>
+                </p:childTnLst>
+              </p:cTn>
+              <p:nextCondLst>
+                <p:cond evt="onNext" delay="0">
+                  <p:tgtEl>
+                    <p:sldTgt/>
+                  </p:tgtEl>
+                </p:cond>
+              </p:nextCondLst>
+            </p:seq>
+            <p:seq concurrent="1" nextAc="seek">
+              <p:cTn id="170" restart="whenNotActive" fill="hold" evtFilter="cancelBubble" nodeType="interactiveSeq">
+                <p:stCondLst>
+                  <p:cond evt="onClick" delay="0">
+                    <p:tgtEl>
+                      <p:spTgt spid="111"/>
+                    </p:tgtEl>
+                  </p:cond>
+                </p:stCondLst>
+                <p:endSync evt="end" delay="0">
+                  <p:rtn val="all"/>
+                </p:endSync>
+                <p:childTnLst>
+                  <p:par>
+                    <p:cTn id="171" fill="hold">
+                      <p:stCondLst>
+                        <p:cond delay="0"/>
+                      </p:stCondLst>
+                      <p:childTnLst>
+                        <p:par>
+                          <p:cTn id="172" fill="hold">
+                            <p:stCondLst>
+                              <p:cond delay="0"/>
+                            </p:stCondLst>
+                            <p:childTnLst>
+                              <p:par>
+                                <p:cTn id="173" presetID="10" presetClass="entr" presetSubtype="0" fill="hold" grpId="0" nodeType="clickEffect">
+                                  <p:stCondLst>
+                                    <p:cond delay="0"/>
+                                  </p:stCondLst>
+                                  <p:childTnLst>
+                                    <p:set>
+                                      <p:cBhvr>
+                                        <p:cTn id="174" dur="1" fill="hold">
+                                          <p:stCondLst>
+                                            <p:cond delay="0"/>
+                                          </p:stCondLst>
+                                        </p:cTn>
+                                        <p:tgtEl>
+                                          <p:spTgt spid="110"/>
+                                        </p:tgtEl>
+                                        <p:attrNameLst>
+                                          <p:attrName>style.visibility</p:attrName>
+                                        </p:attrNameLst>
+                                      </p:cBhvr>
+                                      <p:to>
+                                        <p:strVal val="visible"/>
+                                      </p:to>
+                                    </p:set>
+                                    <p:animEffect transition="in" filter="fade">
+                                      <p:cBhvr>
+                                        <p:cTn id="175" dur="300"/>
+                                        <p:tgtEl>
+                                          <p:spTgt spid="110"/>
+                                        </p:tgtEl>
+                                      </p:cBhvr>
+                                    </p:animEffect>
+                                  </p:childTnLst>
+                                </p:cTn>
+                              </p:par>
+                            </p:childTnLst>
+                          </p:cTn>
+                        </p:par>
+                      </p:childTnLst>
+                    </p:cTn>
+                  </p:par>
+                </p:childTnLst>
+              </p:cTn>
+              <p:nextCondLst>
+                <p:cond evt="onNext" delay="0">
+                  <p:tgtEl>
+                    <p:sldTgt/>
+                  </p:tgtEl>
+                </p:cond>
+              </p:nextCondLst>
+            </p:seq>
+            <p:seq concurrent="1" nextAc="seek">
+              <p:cTn id="176" restart="whenNotActive" fill="hold" evtFilter="cancelBubble" nodeType="interactiveSeq">
+                <p:stCondLst>
+                  <p:cond evt="onClick" delay="0">
+                    <p:tgtEl>
+                      <p:spTgt spid="114"/>
+                    </p:tgtEl>
+                  </p:cond>
+                </p:stCondLst>
+                <p:endSync evt="end" delay="0">
+                  <p:rtn val="all"/>
+                </p:endSync>
+                <p:childTnLst>
+                  <p:par>
+                    <p:cTn id="177" fill="hold">
+                      <p:stCondLst>
+                        <p:cond delay="0"/>
+                      </p:stCondLst>
+                      <p:childTnLst>
+                        <p:par>
+                          <p:cTn id="178" fill="hold">
+                            <p:stCondLst>
+                              <p:cond delay="0"/>
+                            </p:stCondLst>
+                            <p:childTnLst>
+                              <p:par>
+                                <p:cTn id="179" presetID="10" presetClass="entr" presetSubtype="0" fill="hold" grpId="0" nodeType="clickEffect">
+                                  <p:stCondLst>
+                                    <p:cond delay="0"/>
+                                  </p:stCondLst>
+                                  <p:childTnLst>
+                                    <p:set>
+                                      <p:cBhvr>
+                                        <p:cTn id="180" dur="1" fill="hold">
+                                          <p:stCondLst>
+                                            <p:cond delay="0"/>
+                                          </p:stCondLst>
+                                        </p:cTn>
+                                        <p:tgtEl>
+                                          <p:spTgt spid="113"/>
+                                        </p:tgtEl>
+                                        <p:attrNameLst>
+                                          <p:attrName>style.visibility</p:attrName>
+                                        </p:attrNameLst>
+                                      </p:cBhvr>
+                                      <p:to>
+                                        <p:strVal val="visible"/>
+                                      </p:to>
+                                    </p:set>
+                                    <p:animEffect transition="in" filter="fade">
+                                      <p:cBhvr>
+                                        <p:cTn id="181" dur="300"/>
+                                        <p:tgtEl>
+                                          <p:spTgt spid="113"/>
                                         </p:tgtEl>
                                       </p:cBhvr>
                                     </p:animEffect>
@@ -17287,36 +18415,36 @@
       </p:par>
     </p:tnLst>
     <p:bldLst>
-      <p:bldP spid="12" grpId="0" animBg="1"/>
+      <p:bldP spid="11" grpId="0" animBg="1"/>
       <p:bldP spid="14" grpId="0" animBg="1"/>
-      <p:bldP spid="16" grpId="0" animBg="1"/>
-      <p:bldP spid="18" grpId="0" animBg="1"/>
+      <p:bldP spid="17" grpId="0" animBg="1"/>
       <p:bldP spid="20" grpId="0" animBg="1"/>
-      <p:bldP spid="26" grpId="0" animBg="1"/>
-      <p:bldP spid="28" grpId="0" animBg="1"/>
-      <p:bldP spid="30" grpId="0" animBg="1"/>
+      <p:bldP spid="23" grpId="0" animBg="1"/>
+      <p:bldP spid="29" grpId="0" animBg="1"/>
       <p:bldP spid="32" grpId="0" animBg="1"/>
-      <p:bldP spid="34" grpId="0" animBg="1"/>
-      <p:bldP spid="40" grpId="0" animBg="1"/>
-      <p:bldP spid="42" grpId="0" animBg="1"/>
-      <p:bldP spid="44" grpId="0" animBg="1"/>
-      <p:bldP spid="46" grpId="0" animBg="1"/>
-      <p:bldP spid="48" grpId="0" animBg="1"/>
-      <p:bldP spid="54" grpId="0" animBg="1"/>
+      <p:bldP spid="35" grpId="0" animBg="1"/>
+      <p:bldP spid="38" grpId="0" animBg="1"/>
+      <p:bldP spid="41" grpId="0" animBg="1"/>
+      <p:bldP spid="47" grpId="0" animBg="1"/>
+      <p:bldP spid="50" grpId="0" animBg="1"/>
+      <p:bldP spid="53" grpId="0" animBg="1"/>
       <p:bldP spid="56" grpId="0" animBg="1"/>
-      <p:bldP spid="58" grpId="0" animBg="1"/>
-      <p:bldP spid="60" grpId="0" animBg="1"/>
-      <p:bldP spid="62" grpId="0" animBg="1"/>
+      <p:bldP spid="59" grpId="0" animBg="1"/>
+      <p:bldP spid="65" grpId="0" animBg="1"/>
       <p:bldP spid="68" grpId="0" animBg="1"/>
-      <p:bldP spid="70" grpId="0" animBg="1"/>
-      <p:bldP spid="72" grpId="0" animBg="1"/>
+      <p:bldP spid="71" grpId="0" animBg="1"/>
       <p:bldP spid="74" grpId="0" animBg="1"/>
-      <p:bldP spid="76" grpId="0" animBg="1"/>
-      <p:bldP spid="82" grpId="0" animBg="1"/>
-      <p:bldP spid="84" grpId="0" animBg="1"/>
+      <p:bldP spid="77" grpId="0" animBg="1"/>
+      <p:bldP spid="83" grpId="0" animBg="1"/>
       <p:bldP spid="86" grpId="0" animBg="1"/>
-      <p:bldP spid="88" grpId="0" animBg="1"/>
-      <p:bldP spid="90" grpId="0" animBg="1"/>
+      <p:bldP spid="89" grpId="0" animBg="1"/>
+      <p:bldP spid="92" grpId="0" animBg="1"/>
+      <p:bldP spid="95" grpId="0" animBg="1"/>
+      <p:bldP spid="101" grpId="0" animBg="1"/>
+      <p:bldP spid="104" grpId="0" animBg="1"/>
+      <p:bldP spid="107" grpId="0" animBg="1"/>
+      <p:bldP spid="110" grpId="0" animBg="1"/>
+      <p:bldP spid="113" grpId="0" animBg="1"/>
     </p:bldLst>
   </p:timing>
 </p:sld>
@@ -21120,7 +22248,7 @@
                           <a:latin typeface="IBM Plex Sans Arabic"/>
                           <a:cs typeface="IBM Plex Sans Arabic"/>
                         </a:rPr>
-                        <a:t>انقر اسم المجموعة: نجمة لكل نقرة</a:t>
+                        <a:t>انقر النجمة الفارغة فتمتلئ</a:t>
                       </a:r>
                     </a:p>
                   </a:txBody>
@@ -29264,7 +30392,7 @@
         <p:cTn id="1" dur="indefinite" restart="never" nodeType="tmRoot">
           <p:childTnLst>
             <p:seq concurrent="1" nextAc="seek">
-              <p:cTn id="3" restart="whenNotActive" fill="hold" evtFilter="cancelBubble" nodeType="interactiveSeq">
+              <p:cTn id="2" restart="whenNotActive" fill="hold" evtFilter="cancelBubble" nodeType="interactiveSeq">
                 <p:stCondLst>
                   <p:cond evt="onClick" delay="0">
                     <p:tgtEl>
@@ -29277,9 +30405,9 @@
                 </p:endSync>
                 <p:childTnLst>
                   <p:par>
-                    <p:cTn id="15" fill="hold">
+                    <p:cTn id="3" fill="hold">
                       <p:stCondLst>
-                        <p:cond delay="indefinite"/>
+                        <p:cond delay="0"/>
                       </p:stCondLst>
                       <p:childTnLst>
                         <p:par>
@@ -29289,14 +30417,14 @@
                             </p:stCondLst>
                             <p:childTnLst>
                               <p:par>
-                                <p:cTn id="7" presetID="22" presetClass="exit" presetSubtype="8" fill="hold" grpId="0" nodeType="clickEffect">
+                                <p:cTn id="5" presetID="22" presetClass="exit" presetSubtype="8" fill="hold" grpId="0" nodeType="clickEffect">
                                   <p:stCondLst>
                                     <p:cond delay="0"/>
                                   </p:stCondLst>
                                   <p:childTnLst>
                                     <p:animEffect transition="out" filter="wipe(left)">
                                       <p:cBhvr>
-                                        <p:cTn id="5" dur="300000"/>
+                                        <p:cTn id="6" dur="300000"/>
                                         <p:tgtEl>
                                           <p:spTgt spid="7"/>
                                         </p:tgtEl>
@@ -29304,7 +30432,7 @@
                                     </p:animEffect>
                                     <p:set>
                                       <p:cBhvr>
-                                        <p:cTn id="6" dur="1" fill="hold">
+                                        <p:cTn id="7" dur="1" fill="hold">
                                           <p:stCondLst>
                                             <p:cond delay="299999"/>
                                           </p:stCondLst>
@@ -29333,14 +30461,14 @@
                             </p:stCondLst>
                             <p:childTnLst>
                               <p:par>
-                                <p:cTn id="11" presetID="10" presetClass="entr" presetSubtype="0" fill="hold" grpId="0" nodeType="afterEffect">
+                                <p:cTn id="9" presetID="10" presetClass="entr" presetSubtype="0" fill="hold" grpId="0" nodeType="afterEffect">
                                   <p:stCondLst>
                                     <p:cond delay="0"/>
                                   </p:stCondLst>
                                   <p:childTnLst>
                                     <p:set>
                                       <p:cBhvr>
-                                        <p:cTn id="9" dur="1" fill="hold">
+                                        <p:cTn id="10" dur="1" fill="hold">
                                           <p:stCondLst>
                                             <p:cond delay="0"/>
                                           </p:stCondLst>
@@ -29358,7 +30486,7 @@
                                     </p:set>
                                     <p:animEffect transition="in" filter="fade">
                                       <p:cBhvr>
-                                        <p:cTn id="10" dur="500"/>
+                                        <p:cTn id="11" dur="500"/>
                                         <p:tgtEl>
                                           <p:spTgt spid="8"/>
                                         </p:tgtEl>
@@ -29368,14 +30496,14 @@
                                 </p:cTn>
                               </p:par>
                               <p:par>
-                                <p:cTn id="14" presetID="10" presetClass="entr" presetSubtype="0" fill="hold" grpId="0" nodeType="withEffect">
+                                <p:cTn id="12" presetID="10" presetClass="entr" presetSubtype="0" fill="hold" grpId="0" nodeType="withEffect">
                                   <p:stCondLst>
                                     <p:cond delay="0"/>
                                   </p:stCondLst>
                                   <p:childTnLst>
                                     <p:set>
                                       <p:cBhvr>
-                                        <p:cTn id="12" dur="1" fill="hold">
+                                        <p:cTn id="13" dur="1" fill="hold">
                                           <p:stCondLst>
                                             <p:cond delay="0"/>
                                           </p:stCondLst>
@@ -29393,7 +30521,7 @@
                                     </p:set>
                                     <p:animEffect transition="in" filter="fade">
                                       <p:cBhvr>
-                                        <p:cTn id="13" dur="500"/>
+                                        <p:cTn id="14" dur="500"/>
                                         <p:tgtEl>
                                           <p:spTgt spid="9"/>
                                         </p:tgtEl>
@@ -31510,7 +32638,7 @@
         <p:cTn id="1" dur="indefinite" restart="never" nodeType="tmRoot">
           <p:childTnLst>
             <p:seq concurrent="1" nextAc="seek">
-              <p:cTn id="3" restart="whenNotActive" fill="hold" evtFilter="cancelBubble" nodeType="interactiveSeq">
+              <p:cTn id="2" restart="whenNotActive" fill="hold" evtFilter="cancelBubble" nodeType="interactiveSeq">
                 <p:stCondLst>
                   <p:cond evt="onClick" delay="0">
                     <p:tgtEl>
@@ -31523,9 +32651,9 @@
                 </p:endSync>
                 <p:childTnLst>
                   <p:par>
-                    <p:cTn id="15" fill="hold">
+                    <p:cTn id="3" fill="hold">
                       <p:stCondLst>
-                        <p:cond delay="indefinite"/>
+                        <p:cond delay="0"/>
                       </p:stCondLst>
                       <p:childTnLst>
                         <p:par>
@@ -31535,14 +32663,14 @@
                             </p:stCondLst>
                             <p:childTnLst>
                               <p:par>
-                                <p:cTn id="7" presetID="22" presetClass="exit" presetSubtype="8" fill="hold" grpId="0" nodeType="clickEffect">
+                                <p:cTn id="5" presetID="22" presetClass="exit" presetSubtype="8" fill="hold" grpId="0" nodeType="clickEffect">
                                   <p:stCondLst>
                                     <p:cond delay="0"/>
                                   </p:stCondLst>
                                   <p:childTnLst>
                                     <p:animEffect transition="out" filter="wipe(left)">
                                       <p:cBhvr>
-                                        <p:cTn id="5" dur="180000"/>
+                                        <p:cTn id="6" dur="180000"/>
                                         <p:tgtEl>
                                           <p:spTgt spid="7"/>
                                         </p:tgtEl>
@@ -31550,7 +32678,7 @@
                                     </p:animEffect>
                                     <p:set>
                                       <p:cBhvr>
-                                        <p:cTn id="6" dur="1" fill="hold">
+                                        <p:cTn id="7" dur="1" fill="hold">
                                           <p:stCondLst>
                                             <p:cond delay="179999"/>
                                           </p:stCondLst>
@@ -31579,14 +32707,14 @@
                             </p:stCondLst>
                             <p:childTnLst>
                               <p:par>
-                                <p:cTn id="11" presetID="10" presetClass="entr" presetSubtype="0" fill="hold" grpId="0" nodeType="afterEffect">
+                                <p:cTn id="9" presetID="10" presetClass="entr" presetSubtype="0" fill="hold" grpId="0" nodeType="afterEffect">
                                   <p:stCondLst>
                                     <p:cond delay="0"/>
                                   </p:stCondLst>
                                   <p:childTnLst>
                                     <p:set>
                                       <p:cBhvr>
-                                        <p:cTn id="9" dur="1" fill="hold">
+                                        <p:cTn id="10" dur="1" fill="hold">
                                           <p:stCondLst>
                                             <p:cond delay="0"/>
                                           </p:stCondLst>
@@ -31604,7 +32732,7 @@
                                     </p:set>
                                     <p:animEffect transition="in" filter="fade">
                                       <p:cBhvr>
-                                        <p:cTn id="10" dur="500"/>
+                                        <p:cTn id="11" dur="500"/>
                                         <p:tgtEl>
                                           <p:spTgt spid="8"/>
                                         </p:tgtEl>
@@ -31614,14 +32742,14 @@
                                 </p:cTn>
                               </p:par>
                               <p:par>
-                                <p:cTn id="14" presetID="10" presetClass="entr" presetSubtype="0" fill="hold" grpId="0" nodeType="withEffect">
+                                <p:cTn id="12" presetID="10" presetClass="entr" presetSubtype="0" fill="hold" grpId="0" nodeType="withEffect">
                                   <p:stCondLst>
                                     <p:cond delay="0"/>
                                   </p:stCondLst>
                                   <p:childTnLst>
                                     <p:set>
                                       <p:cBhvr>
-                                        <p:cTn id="12" dur="1" fill="hold">
+                                        <p:cTn id="13" dur="1" fill="hold">
                                           <p:stCondLst>
                                             <p:cond delay="0"/>
                                           </p:stCondLst>
@@ -31639,7 +32767,7 @@
                                     </p:set>
                                     <p:animEffect transition="in" filter="fade">
                                       <p:cBhvr>
-                                        <p:cTn id="13" dur="500"/>
+                                        <p:cTn id="14" dur="500"/>
                                         <p:tgtEl>
                                           <p:spTgt spid="9"/>
                                         </p:tgtEl>
@@ -33404,10 +34532,10 @@
         <p:cTn id="1" dur="indefinite" restart="never" nodeType="tmRoot">
           <p:childTnLst>
             <p:seq concurrent="1" nextAc="seek">
-              <p:cTn id="3" dur="indefinite" nodeType="mainSeq">
+              <p:cTn id="2" dur="indefinite" nodeType="mainSeq">
                 <p:childTnLst>
                   <p:par>
-                    <p:cTn id="14" fill="hold">
+                    <p:cTn id="3" fill="hold">
                       <p:stCondLst>
                         <p:cond delay="indefinite"/>
                       </p:stCondLst>
@@ -33419,14 +34547,14 @@
                             </p:stCondLst>
                             <p:childTnLst>
                               <p:par>
-                                <p:cTn id="7" presetID="10" presetClass="entr" presetSubtype="0" fill="hold" grpId="0" nodeType="clickEffect">
+                                <p:cTn id="5" presetID="10" presetClass="entr" presetSubtype="0" fill="hold" grpId="0" nodeType="clickEffect">
                                   <p:stCondLst>
                                     <p:cond delay="0"/>
                                   </p:stCondLst>
                                   <p:childTnLst>
                                     <p:set>
                                       <p:cBhvr>
-                                        <p:cTn id="5" dur="1" fill="hold">
+                                        <p:cTn id="6" dur="1" fill="hold">
                                           <p:stCondLst>
                                             <p:cond delay="0"/>
                                           </p:stCondLst>
@@ -33444,7 +34572,7 @@
                                     </p:set>
                                     <p:animEffect transition="in" filter="fade">
                                       <p:cBhvr>
-                                        <p:cTn id="6" dur="500"/>
+                                        <p:cTn id="7" dur="500"/>
                                         <p:tgtEl>
                                           <p:spTgt spid="19"/>
                                         </p:tgtEl>
@@ -33454,14 +34582,14 @@
                                 </p:cTn>
                               </p:par>
                               <p:par>
-                                <p:cTn id="10" presetID="10" presetClass="entr" presetSubtype="0" fill="hold" grpId="0" nodeType="withEffect">
+                                <p:cTn id="8" presetID="10" presetClass="entr" presetSubtype="0" fill="hold" grpId="0" nodeType="withEffect">
                                   <p:stCondLst>
                                     <p:cond delay="0"/>
                                   </p:stCondLst>
                                   <p:childTnLst>
                                     <p:set>
                                       <p:cBhvr>
-                                        <p:cTn id="8" dur="1" fill="hold">
+                                        <p:cTn id="9" dur="1" fill="hold">
                                           <p:stCondLst>
                                             <p:cond delay="0"/>
                                           </p:stCondLst>
@@ -33479,7 +34607,7 @@
                                     </p:set>
                                     <p:animEffect transition="in" filter="fade">
                                       <p:cBhvr>
-                                        <p:cTn id="9" dur="500"/>
+                                        <p:cTn id="10" dur="500"/>
                                         <p:tgtEl>
                                           <p:spTgt spid="20"/>
                                         </p:tgtEl>
@@ -33489,14 +34617,14 @@
                                 </p:cTn>
                               </p:par>
                               <p:par>
-                                <p:cTn id="13" presetID="10" presetClass="entr" presetSubtype="0" fill="hold" grpId="0" nodeType="withEffect">
+                                <p:cTn id="11" presetID="10" presetClass="entr" presetSubtype="0" fill="hold" grpId="0" nodeType="withEffect">
                                   <p:stCondLst>
                                     <p:cond delay="0"/>
                                   </p:stCondLst>
                                   <p:childTnLst>
                                     <p:set>
                                       <p:cBhvr>
-                                        <p:cTn id="11" dur="1" fill="hold">
+                                        <p:cTn id="12" dur="1" fill="hold">
                                           <p:stCondLst>
                                             <p:cond delay="0"/>
                                           </p:stCondLst>
@@ -33514,9 +34642,132 @@
                                     </p:set>
                                     <p:animEffect transition="in" filter="fade">
                                       <p:cBhvr>
-                                        <p:cTn id="12" dur="500"/>
+                                        <p:cTn id="13" dur="500"/>
                                         <p:tgtEl>
                                           <p:spTgt spid="21"/>
+                                        </p:tgtEl>
+                                      </p:cBhvr>
+                                    </p:animEffect>
+                                  </p:childTnLst>
+                                </p:cTn>
+                              </p:par>
+                            </p:childTnLst>
+                          </p:cTn>
+                        </p:par>
+                      </p:childTnLst>
+                    </p:cTn>
+                  </p:par>
+                  <p:par>
+                    <p:cTn id="14" fill="hold">
+                      <p:stCondLst>
+                        <p:cond delay="indefinite"/>
+                      </p:stCondLst>
+                      <p:childTnLst>
+                        <p:par>
+                          <p:cTn id="15" fill="hold">
+                            <p:stCondLst>
+                              <p:cond delay="0"/>
+                            </p:stCondLst>
+                            <p:childTnLst>
+                              <p:par>
+                                <p:cTn id="16" presetID="10" presetClass="entr" presetSubtype="0" fill="hold" grpId="0" nodeType="clickEffect">
+                                  <p:stCondLst>
+                                    <p:cond delay="0"/>
+                                  </p:stCondLst>
+                                  <p:childTnLst>
+                                    <p:set>
+                                      <p:cBhvr>
+                                        <p:cTn id="17" dur="1" fill="hold">
+                                          <p:stCondLst>
+                                            <p:cond delay="0"/>
+                                          </p:stCondLst>
+                                        </p:cTn>
+                                        <p:tgtEl>
+                                          <p:spTgt spid="22"/>
+                                        </p:tgtEl>
+                                        <p:attrNameLst>
+                                          <p:attrName>style.visibility</p:attrName>
+                                        </p:attrNameLst>
+                                      </p:cBhvr>
+                                      <p:to>
+                                        <p:strVal val="visible"/>
+                                      </p:to>
+                                    </p:set>
+                                    <p:animEffect transition="in" filter="fade">
+                                      <p:cBhvr>
+                                        <p:cTn id="18" dur="500"/>
+                                        <p:tgtEl>
+                                          <p:spTgt spid="22"/>
+                                        </p:tgtEl>
+                                      </p:cBhvr>
+                                    </p:animEffect>
+                                  </p:childTnLst>
+                                </p:cTn>
+                              </p:par>
+                              <p:par>
+                                <p:cTn id="19" presetID="10" presetClass="entr" presetSubtype="0" fill="hold" grpId="0" nodeType="withEffect">
+                                  <p:stCondLst>
+                                    <p:cond delay="0"/>
+                                  </p:stCondLst>
+                                  <p:childTnLst>
+                                    <p:set>
+                                      <p:cBhvr>
+                                        <p:cTn id="20" dur="1" fill="hold">
+                                          <p:stCondLst>
+                                            <p:cond delay="0"/>
+                                          </p:stCondLst>
+                                        </p:cTn>
+                                        <p:tgtEl>
+                                          <p:spTgt spid="23"/>
+                                        </p:tgtEl>
+                                        <p:attrNameLst>
+                                          <p:attrName>style.visibility</p:attrName>
+                                        </p:attrNameLst>
+                                      </p:cBhvr>
+                                      <p:to>
+                                        <p:strVal val="visible"/>
+                                      </p:to>
+                                    </p:set>
+                                    <p:animEffect transition="in" filter="fade">
+                                      <p:cBhvr>
+                                        <p:cTn id="21" dur="500"/>
+                                        <p:tgtEl>
+                                          <p:spTgt spid="23"/>
+                                        </p:tgtEl>
+                                      </p:cBhvr>
+                                    </p:animEffect>
+                                  </p:childTnLst>
+                                </p:cTn>
+                              </p:par>
+                              <p:par>
+                                <p:cTn id="22" presetID="10" presetClass="entr" presetSubtype="0" fill="hold" grpId="0" nodeType="withEffect">
+                                  <p:stCondLst>
+                                    <p:cond delay="0"/>
+                                  </p:stCondLst>
+                                  <p:childTnLst>
+                                    <p:set>
+                                      <p:cBhvr>
+                                        <p:cTn id="23" dur="1" fill="hold">
+                                          <p:stCondLst>
+                                            <p:cond delay="0"/>
+                                          </p:stCondLst>
+                                        </p:cTn>
+                                        <p:tgtEl>
+                                          <p:spTgt spid="24"/>
+                                        </p:tgtEl>
+                                        <p:attrNameLst>
+                                          <p:attrName>style.visibility</p:attrName>
+                                        </p:attrNameLst>
+                                      </p:cBhvr>
+                                      <p:to>
+                                        <p:strVal val="visible"/>
+                                      </p:to>
+                                    </p:set>
+                                    <p:animEffect transition="in" filter="fade">
+                                      <p:cBhvr>
+                                        <p:cTn id="24" dur="500"/>
+                                        <p:tgtEl>
+                                          <p:spTgt spid="24"/>
                                         </p:tgtEl>
                                       </p:cBhvr>
                                     </p:animEffect>
@@ -33536,143 +34787,20 @@
                       </p:stCondLst>
                       <p:childTnLst>
                         <p:par>
-                          <p:cTn id="15" fill="hold">
+                          <p:cTn id="26" fill="hold">
                             <p:stCondLst>
                               <p:cond delay="0"/>
                             </p:stCondLst>
                             <p:childTnLst>
                               <p:par>
-                                <p:cTn id="18" presetID="10" presetClass="entr" presetSubtype="0" fill="hold" grpId="0" nodeType="clickEffect">
+                                <p:cTn id="27" presetID="10" presetClass="entr" presetSubtype="0" fill="hold" grpId="0" nodeType="clickEffect">
                                   <p:stCondLst>
                                     <p:cond delay="0"/>
                                   </p:stCondLst>
                                   <p:childTnLst>
                                     <p:set>
                                       <p:cBhvr>
-                                        <p:cTn id="16" dur="1" fill="hold">
-                                          <p:stCondLst>
-                                            <p:cond delay="0"/>
-                                          </p:stCondLst>
-                                        </p:cTn>
-                                        <p:tgtEl>
-                                          <p:spTgt spid="22"/>
-                                        </p:tgtEl>
-                                        <p:attrNameLst>
-                                          <p:attrName>style.visibility</p:attrName>
-                                        </p:attrNameLst>
-                                      </p:cBhvr>
-                                      <p:to>
-                                        <p:strVal val="visible"/>
-                                      </p:to>
-                                    </p:set>
-                                    <p:animEffect transition="in" filter="fade">
-                                      <p:cBhvr>
-                                        <p:cTn id="17" dur="500"/>
-                                        <p:tgtEl>
-                                          <p:spTgt spid="22"/>
-                                        </p:tgtEl>
-                                      </p:cBhvr>
-                                    </p:animEffect>
-                                  </p:childTnLst>
-                                </p:cTn>
-                              </p:par>
-                              <p:par>
-                                <p:cTn id="21" presetID="10" presetClass="entr" presetSubtype="0" fill="hold" grpId="0" nodeType="withEffect">
-                                  <p:stCondLst>
-                                    <p:cond delay="0"/>
-                                  </p:stCondLst>
-                                  <p:childTnLst>
-                                    <p:set>
-                                      <p:cBhvr>
-                                        <p:cTn id="19" dur="1" fill="hold">
-                                          <p:stCondLst>
-                                            <p:cond delay="0"/>
-                                          </p:stCondLst>
-                                        </p:cTn>
-                                        <p:tgtEl>
-                                          <p:spTgt spid="23"/>
-                                        </p:tgtEl>
-                                        <p:attrNameLst>
-                                          <p:attrName>style.visibility</p:attrName>
-                                        </p:attrNameLst>
-                                      </p:cBhvr>
-                                      <p:to>
-                                        <p:strVal val="visible"/>
-                                      </p:to>
-                                    </p:set>
-                                    <p:animEffect transition="in" filter="fade">
-                                      <p:cBhvr>
-                                        <p:cTn id="20" dur="500"/>
-                                        <p:tgtEl>
-                                          <p:spTgt spid="23"/>
-                                        </p:tgtEl>
-                                      </p:cBhvr>
-                                    </p:animEffect>
-                                  </p:childTnLst>
-                                </p:cTn>
-                              </p:par>
-                              <p:par>
-                                <p:cTn id="24" presetID="10" presetClass="entr" presetSubtype="0" fill="hold" grpId="0" nodeType="withEffect">
-                                  <p:stCondLst>
-                                    <p:cond delay="0"/>
-                                  </p:stCondLst>
-                                  <p:childTnLst>
-                                    <p:set>
-                                      <p:cBhvr>
-                                        <p:cTn id="22" dur="1" fill="hold">
-                                          <p:stCondLst>
-                                            <p:cond delay="0"/>
-                                          </p:stCondLst>
-                                        </p:cTn>
-                                        <p:tgtEl>
-                                          <p:spTgt spid="24"/>
-                                        </p:tgtEl>
-                                        <p:attrNameLst>
-                                          <p:attrName>style.visibility</p:attrName>
-                                        </p:attrNameLst>
-                                      </p:cBhvr>
-                                      <p:to>
-                                        <p:strVal val="visible"/>
-                                      </p:to>
-                                    </p:set>
-                                    <p:animEffect transition="in" filter="fade">
-                                      <p:cBhvr>
-                                        <p:cTn id="23" dur="500"/>
-                                        <p:tgtEl>
-                                          <p:spTgt spid="24"/>
-                                        </p:tgtEl>
-                                      </p:cBhvr>
-                                    </p:animEffect>
-                                  </p:childTnLst>
-                                </p:cTn>
-                              </p:par>
-                            </p:childTnLst>
-                          </p:cTn>
-                        </p:par>
-                      </p:childTnLst>
-                    </p:cTn>
-                  </p:par>
-                  <p:par>
-                    <p:cTn id="36" fill="hold">
-                      <p:stCondLst>
-                        <p:cond delay="indefinite"/>
-                      </p:stCondLst>
-                      <p:childTnLst>
-                        <p:par>
-                          <p:cTn id="26" fill="hold">
-                            <p:stCondLst>
-                              <p:cond delay="0"/>
-                            </p:stCondLst>
-                            <p:childTnLst>
-                              <p:par>
-                                <p:cTn id="29" presetID="10" presetClass="entr" presetSubtype="0" fill="hold" grpId="0" nodeType="clickEffect">
-                                  <p:stCondLst>
-                                    <p:cond delay="0"/>
-                                  </p:stCondLst>
-                                  <p:childTnLst>
-                                    <p:set>
-                                      <p:cBhvr>
-                                        <p:cTn id="27" dur="1" fill="hold">
+                                        <p:cTn id="28" dur="1" fill="hold">
                                           <p:stCondLst>
                                             <p:cond delay="0"/>
                                           </p:stCondLst>
@@ -33690,7 +34818,7 @@
                                     </p:set>
                                     <p:animEffect transition="in" filter="fade">
                                       <p:cBhvr>
-                                        <p:cTn id="28" dur="500"/>
+                                        <p:cTn id="29" dur="500"/>
                                         <p:tgtEl>
                                           <p:spTgt spid="25"/>
                                         </p:tgtEl>
@@ -33700,14 +34828,14 @@
                                 </p:cTn>
                               </p:par>
                               <p:par>
-                                <p:cTn id="32" presetID="10" presetClass="entr" presetSubtype="0" fill="hold" grpId="0" nodeType="withEffect">
+                                <p:cTn id="30" presetID="10" presetClass="entr" presetSubtype="0" fill="hold" grpId="0" nodeType="withEffect">
                                   <p:stCondLst>
                                     <p:cond delay="0"/>
                                   </p:stCondLst>
                                   <p:childTnLst>
                                     <p:set>
                                       <p:cBhvr>
-                                        <p:cTn id="30" dur="1" fill="hold">
+                                        <p:cTn id="31" dur="1" fill="hold">
                                           <p:stCondLst>
                                             <p:cond delay="0"/>
                                           </p:stCondLst>
@@ -33725,7 +34853,7 @@
                                     </p:set>
                                     <p:animEffect transition="in" filter="fade">
                                       <p:cBhvr>
-                                        <p:cTn id="31" dur="500"/>
+                                        <p:cTn id="32" dur="500"/>
                                         <p:tgtEl>
                                           <p:spTgt spid="26"/>
                                         </p:tgtEl>
@@ -33735,14 +34863,14 @@
                                 </p:cTn>
                               </p:par>
                               <p:par>
-                                <p:cTn id="35" presetID="10" presetClass="entr" presetSubtype="0" fill="hold" grpId="0" nodeType="withEffect">
+                                <p:cTn id="33" presetID="10" presetClass="entr" presetSubtype="0" fill="hold" grpId="0" nodeType="withEffect">
                                   <p:stCondLst>
                                     <p:cond delay="0"/>
                                   </p:stCondLst>
                                   <p:childTnLst>
                                     <p:set>
                                       <p:cBhvr>
-                                        <p:cTn id="33" dur="1" fill="hold">
+                                        <p:cTn id="34" dur="1" fill="hold">
                                           <p:stCondLst>
                                             <p:cond delay="0"/>
                                           </p:stCondLst>
@@ -33760,7 +34888,7 @@
                                     </p:set>
                                     <p:animEffect transition="in" filter="fade">
                                       <p:cBhvr>
-                                        <p:cTn id="34" dur="500"/>
+                                        <p:cTn id="35" dur="500"/>
                                         <p:tgtEl>
                                           <p:spTgt spid="27"/>
                                         </p:tgtEl>
@@ -33793,7 +34921,7 @@
               </p:nextCondLst>
             </p:seq>
             <p:seq concurrent="1" nextAc="seek">
-              <p:cTn id="37" restart="whenNotActive" fill="hold" evtFilter="cancelBubble" nodeType="interactiveSeq">
+              <p:cTn id="36" restart="whenNotActive" fill="hold" evtFilter="cancelBubble" nodeType="interactiveSeq">
                 <p:stCondLst>
                   <p:cond evt="onClick" delay="0">
                     <p:tgtEl>
@@ -33806,9 +34934,9 @@
                 </p:endSync>
                 <p:childTnLst>
                   <p:par>
-                    <p:cTn id="49" fill="hold">
+                    <p:cTn id="37" fill="hold">
                       <p:stCondLst>
-                        <p:cond delay="indefinite"/>
+                        <p:cond delay="0"/>
                       </p:stCondLst>
                       <p:childTnLst>
                         <p:par>
@@ -33818,14 +34946,14 @@
                             </p:stCondLst>
                             <p:childTnLst>
                               <p:par>
-                                <p:cTn id="41" presetID="22" presetClass="exit" presetSubtype="8" fill="hold" grpId="0" nodeType="clickEffect">
+                                <p:cTn id="39" presetID="22" presetClass="exit" presetSubtype="8" fill="hold" grpId="0" nodeType="clickEffect">
                                   <p:stCondLst>
                                     <p:cond delay="0"/>
                                   </p:stCondLst>
                                   <p:childTnLst>
                                     <p:animEffect transition="out" filter="wipe(left)">
                                       <p:cBhvr>
-                                        <p:cTn id="39" dur="600000"/>
+                                        <p:cTn id="40" dur="600000"/>
                                         <p:tgtEl>
                                           <p:spTgt spid="7"/>
                                         </p:tgtEl>
@@ -33833,7 +34961,7 @@
                                     </p:animEffect>
                                     <p:set>
                                       <p:cBhvr>
-                                        <p:cTn id="40" dur="1" fill="hold">
+                                        <p:cTn id="41" dur="1" fill="hold">
                                           <p:stCondLst>
                                             <p:cond delay="599999"/>
                                           </p:stCondLst>
@@ -33862,14 +34990,14 @@
                             </p:stCondLst>
                             <p:childTnLst>
                               <p:par>
-                                <p:cTn id="45" presetID="10" presetClass="entr" presetSubtype="0" fill="hold" grpId="0" nodeType="afterEffect">
+                                <p:cTn id="43" presetID="10" presetClass="entr" presetSubtype="0" fill="hold" grpId="0" nodeType="afterEffect">
                                   <p:stCondLst>
                                     <p:cond delay="0"/>
                                   </p:stCondLst>
                                   <p:childTnLst>
                                     <p:set>
                                       <p:cBhvr>
-                                        <p:cTn id="43" dur="1" fill="hold">
+                                        <p:cTn id="44" dur="1" fill="hold">
                                           <p:stCondLst>
                                             <p:cond delay="0"/>
                                           </p:stCondLst>
@@ -33887,7 +35015,7 @@
                                     </p:set>
                                     <p:animEffect transition="in" filter="fade">
                                       <p:cBhvr>
-                                        <p:cTn id="44" dur="500"/>
+                                        <p:cTn id="45" dur="500"/>
                                         <p:tgtEl>
                                           <p:spTgt spid="8"/>
                                         </p:tgtEl>
@@ -33897,14 +35025,14 @@
                                 </p:cTn>
                               </p:par>
                               <p:par>
-                                <p:cTn id="48" presetID="10" presetClass="entr" presetSubtype="0" fill="hold" grpId="0" nodeType="withEffect">
+                                <p:cTn id="46" presetID="10" presetClass="entr" presetSubtype="0" fill="hold" grpId="0" nodeType="withEffect">
                                   <p:stCondLst>
                                     <p:cond delay="0"/>
                                   </p:stCondLst>
                                   <p:childTnLst>
                                     <p:set>
                                       <p:cBhvr>
-                                        <p:cTn id="46" dur="1" fill="hold">
+                                        <p:cTn id="47" dur="1" fill="hold">
                                           <p:stCondLst>
                                             <p:cond delay="0"/>
                                           </p:stCondLst>
@@ -33922,7 +35050,7 @@
                                     </p:set>
                                     <p:animEffect transition="in" filter="fade">
                                       <p:cBhvr>
-                                        <p:cTn id="47" dur="500"/>
+                                        <p:cTn id="48" dur="500"/>
                                         <p:tgtEl>
                                           <p:spTgt spid="9"/>
                                         </p:tgtEl>
@@ -35219,7 +36347,7 @@
         <p:cTn id="1" dur="indefinite" restart="never" nodeType="tmRoot">
           <p:childTnLst>
             <p:seq concurrent="1" nextAc="seek">
-              <p:cTn id="3" restart="whenNotActive" fill="hold" evtFilter="cancelBubble" nodeType="interactiveSeq">
+              <p:cTn id="2" restart="whenNotActive" fill="hold" evtFilter="cancelBubble" nodeType="interactiveSeq">
                 <p:stCondLst>
                   <p:cond evt="onClick" delay="0">
                     <p:tgtEl>
@@ -35232,9 +36360,9 @@
                 </p:endSync>
                 <p:childTnLst>
                   <p:par>
-                    <p:cTn id="14" fill="hold">
+                    <p:cTn id="3" fill="hold">
                       <p:stCondLst>
-                        <p:cond delay="indefinite"/>
+                        <p:cond delay="0"/>
                       </p:stCondLst>
                       <p:childTnLst>
                         <p:par>
@@ -35244,14 +36372,14 @@
                             </p:stCondLst>
                             <p:childTnLst>
                               <p:par>
-                                <p:cTn id="7" presetID="10" presetClass="entr" presetSubtype="0" fill="hold" grpId="0" nodeType="clickEffect">
+                                <p:cTn id="5" presetID="10" presetClass="entr" presetSubtype="0" fill="hold" grpId="0" nodeType="clickEffect">
                                   <p:stCondLst>
                                     <p:cond delay="0"/>
                                   </p:stCondLst>
                                   <p:childTnLst>
                                     <p:set>
                                       <p:cBhvr>
-                                        <p:cTn id="5" dur="1" fill="hold">
+                                        <p:cTn id="6" dur="1" fill="hold">
                                           <p:stCondLst>
                                             <p:cond delay="0"/>
                                           </p:stCondLst>
@@ -35269,7 +36397,7 @@
                                     </p:set>
                                     <p:animEffect transition="in" filter="fade">
                                       <p:cBhvr>
-                                        <p:cTn id="6" dur="300"/>
+                                        <p:cTn id="7" dur="300"/>
                                         <p:tgtEl>
                                           <p:spTgt spid="12"/>
                                         </p:tgtEl>
@@ -35279,14 +36407,14 @@
                                 </p:cTn>
                               </p:par>
                               <p:par>
-                                <p:cTn id="10" presetID="10" presetClass="entr" presetSubtype="0" fill="hold" grpId="0" nodeType="withEffect">
+                                <p:cTn id="8" presetID="10" presetClass="entr" presetSubtype="0" fill="hold" grpId="0" nodeType="withEffect">
                                   <p:stCondLst>
                                     <p:cond delay="0"/>
                                   </p:stCondLst>
                                   <p:childTnLst>
                                     <p:set>
                                       <p:cBhvr>
-                                        <p:cTn id="8" dur="1" fill="hold">
+                                        <p:cTn id="9" dur="1" fill="hold">
                                           <p:stCondLst>
                                             <p:cond delay="0"/>
                                           </p:stCondLst>
@@ -35304,7 +36432,7 @@
                                     </p:set>
                                     <p:animEffect transition="in" filter="fade">
                                       <p:cBhvr>
-                                        <p:cTn id="9" dur="300"/>
+                                        <p:cTn id="10" dur="300"/>
                                         <p:tgtEl>
                                           <p:spTgt spid="13"/>
                                         </p:tgtEl>
@@ -35314,14 +36442,14 @@
                                 </p:cTn>
                               </p:par>
                               <p:par>
-                                <p:cTn id="13" presetID="10" presetClass="entr" presetSubtype="0" fill="hold" grpId="0" nodeType="withEffect">
+                                <p:cTn id="11" presetID="10" presetClass="entr" presetSubtype="0" fill="hold" grpId="0" nodeType="withEffect">
                                   <p:stCondLst>
                                     <p:cond delay="0"/>
                                   </p:stCondLst>
                                   <p:childTnLst>
                                     <p:set>
                                       <p:cBhvr>
-                                        <p:cTn id="11" dur="1" fill="hold">
+                                        <p:cTn id="12" dur="1" fill="hold">
                                           <p:stCondLst>
                                             <p:cond delay="0"/>
                                           </p:stCondLst>
@@ -35339,7 +36467,7 @@
                                     </p:set>
                                     <p:animEffect transition="in" filter="fade">
                                       <p:cBhvr>
-                                        <p:cTn id="12" dur="300"/>
+                                        <p:cTn id="13" dur="300"/>
                                         <p:tgtEl>
                                           <p:spTgt spid="14"/>
                                         </p:tgtEl>
@@ -35365,7 +36493,7 @@
               </p:nextCondLst>
             </p:seq>
             <p:seq concurrent="1" nextAc="seek">
-              <p:cTn id="15" restart="whenNotActive" fill="hold" evtFilter="cancelBubble" nodeType="interactiveSeq">
+              <p:cTn id="14" restart="whenNotActive" fill="hold" evtFilter="cancelBubble" nodeType="interactiveSeq">
                 <p:stCondLst>
                   <p:cond evt="onClick" delay="0">
                     <p:tgtEl>
@@ -35378,9 +36506,9 @@
                 </p:endSync>
                 <p:childTnLst>
                   <p:par>
-                    <p:cTn id="26" fill="hold">
+                    <p:cTn id="15" fill="hold">
                       <p:stCondLst>
-                        <p:cond delay="indefinite"/>
+                        <p:cond delay="0"/>
                       </p:stCondLst>
                       <p:childTnLst>
                         <p:par>
@@ -35390,14 +36518,14 @@
                             </p:stCondLst>
                             <p:childTnLst>
                               <p:par>
-                                <p:cTn id="19" presetID="10" presetClass="entr" presetSubtype="0" fill="hold" grpId="0" nodeType="clickEffect">
+                                <p:cTn id="17" presetID="10" presetClass="entr" presetSubtype="0" fill="hold" grpId="0" nodeType="clickEffect">
                                   <p:stCondLst>
                                     <p:cond delay="0"/>
                                   </p:stCondLst>
                                   <p:childTnLst>
                                     <p:set>
                                       <p:cBhvr>
-                                        <p:cTn id="17" dur="1" fill="hold">
+                                        <p:cTn id="18" dur="1" fill="hold">
                                           <p:stCondLst>
                                             <p:cond delay="0"/>
                                           </p:stCondLst>
@@ -35415,7 +36543,7 @@
                                     </p:set>
                                     <p:animEffect transition="in" filter="fade">
                                       <p:cBhvr>
-                                        <p:cTn id="18" dur="300"/>
+                                        <p:cTn id="19" dur="300"/>
                                         <p:tgtEl>
                                           <p:spTgt spid="20"/>
                                         </p:tgtEl>
@@ -35425,14 +36553,14 @@
                                 </p:cTn>
                               </p:par>
                               <p:par>
-                                <p:cTn id="22" presetID="10" presetClass="entr" presetSubtype="0" fill="hold" grpId="0" nodeType="withEffect">
+                                <p:cTn id="20" presetID="10" presetClass="entr" presetSubtype="0" fill="hold" grpId="0" nodeType="withEffect">
                                   <p:stCondLst>
                                     <p:cond delay="0"/>
                                   </p:stCondLst>
                                   <p:childTnLst>
                                     <p:set>
                                       <p:cBhvr>
-                                        <p:cTn id="20" dur="1" fill="hold">
+                                        <p:cTn id="21" dur="1" fill="hold">
                                           <p:stCondLst>
                                             <p:cond delay="0"/>
                                           </p:stCondLst>
@@ -35450,7 +36578,7 @@
                                     </p:set>
                                     <p:animEffect transition="in" filter="fade">
                                       <p:cBhvr>
-                                        <p:cTn id="21" dur="300"/>
+                                        <p:cTn id="22" dur="300"/>
                                         <p:tgtEl>
                                           <p:spTgt spid="21"/>
                                         </p:tgtEl>
@@ -35460,14 +36588,14 @@
                                 </p:cTn>
                               </p:par>
                               <p:par>
-                                <p:cTn id="25" presetID="10" presetClass="entr" presetSubtype="0" fill="hold" grpId="0" nodeType="withEffect">
+                                <p:cTn id="23" presetID="10" presetClass="entr" presetSubtype="0" fill="hold" grpId="0" nodeType="withEffect">
                                   <p:stCondLst>
                                     <p:cond delay="0"/>
                                   </p:stCondLst>
                                   <p:childTnLst>
                                     <p:set>
                                       <p:cBhvr>
-                                        <p:cTn id="23" dur="1" fill="hold">
+                                        <p:cTn id="24" dur="1" fill="hold">
                                           <p:stCondLst>
                                             <p:cond delay="0"/>
                                           </p:stCondLst>
@@ -35485,7 +36613,7 @@
                                     </p:set>
                                     <p:animEffect transition="in" filter="fade">
                                       <p:cBhvr>
-                                        <p:cTn id="24" dur="300"/>
+                                        <p:cTn id="25" dur="300"/>
                                         <p:tgtEl>
                                           <p:spTgt spid="22"/>
                                         </p:tgtEl>
@@ -35511,7 +36639,7 @@
               </p:nextCondLst>
             </p:seq>
             <p:seq concurrent="1" nextAc="seek">
-              <p:cTn id="27" restart="whenNotActive" fill="hold" evtFilter="cancelBubble" nodeType="interactiveSeq">
+              <p:cTn id="26" restart="whenNotActive" fill="hold" evtFilter="cancelBubble" nodeType="interactiveSeq">
                 <p:stCondLst>
                   <p:cond evt="onClick" delay="0">
                     <p:tgtEl>
@@ -35524,9 +36652,9 @@
                 </p:endSync>
                 <p:childTnLst>
                   <p:par>
-                    <p:cTn id="38" fill="hold">
+                    <p:cTn id="27" fill="hold">
                       <p:stCondLst>
-                        <p:cond delay="indefinite"/>
+                        <p:cond delay="0"/>
                       </p:stCondLst>
                       <p:childTnLst>
                         <p:par>
@@ -35536,14 +36664,14 @@
                             </p:stCondLst>
                             <p:childTnLst>
                               <p:par>
-                                <p:cTn id="31" presetID="10" presetClass="entr" presetSubtype="0" fill="hold" grpId="0" nodeType="clickEffect">
+                                <p:cTn id="29" presetID="10" presetClass="entr" presetSubtype="0" fill="hold" grpId="0" nodeType="clickEffect">
                                   <p:stCondLst>
                                     <p:cond delay="0"/>
                                   </p:stCondLst>
                                   <p:childTnLst>
                                     <p:set>
                                       <p:cBhvr>
-                                        <p:cTn id="29" dur="1" fill="hold">
+                                        <p:cTn id="30" dur="1" fill="hold">
                                           <p:stCondLst>
                                             <p:cond delay="0"/>
                                           </p:stCondLst>
@@ -35561,7 +36689,7 @@
                                     </p:set>
                                     <p:animEffect transition="in" filter="fade">
                                       <p:cBhvr>
-                                        <p:cTn id="30" dur="300"/>
+                                        <p:cTn id="31" dur="300"/>
                                         <p:tgtEl>
                                           <p:spTgt spid="28"/>
                                         </p:tgtEl>
@@ -35571,14 +36699,14 @@
                                 </p:cTn>
                               </p:par>
                               <p:par>
-                                <p:cTn id="34" presetID="10" presetClass="entr" presetSubtype="0" fill="hold" grpId="0" nodeType="withEffect">
+                                <p:cTn id="32" presetID="10" presetClass="entr" presetSubtype="0" fill="hold" grpId="0" nodeType="withEffect">
                                   <p:stCondLst>
                                     <p:cond delay="0"/>
                                   </p:stCondLst>
                                   <p:childTnLst>
                                     <p:set>
                                       <p:cBhvr>
-                                        <p:cTn id="32" dur="1" fill="hold">
+                                        <p:cTn id="33" dur="1" fill="hold">
                                           <p:stCondLst>
                                             <p:cond delay="0"/>
                                           </p:stCondLst>
@@ -35596,7 +36724,7 @@
                                     </p:set>
                                     <p:animEffect transition="in" filter="fade">
                                       <p:cBhvr>
-                                        <p:cTn id="33" dur="300"/>
+                                        <p:cTn id="34" dur="300"/>
                                         <p:tgtEl>
                                           <p:spTgt spid="29"/>
                                         </p:tgtEl>
@@ -35606,14 +36734,14 @@
                                 </p:cTn>
                               </p:par>
                               <p:par>
-                                <p:cTn id="37" presetID="10" presetClass="entr" presetSubtype="0" fill="hold" grpId="0" nodeType="withEffect">
+                                <p:cTn id="35" presetID="10" presetClass="entr" presetSubtype="0" fill="hold" grpId="0" nodeType="withEffect">
                                   <p:stCondLst>
                                     <p:cond delay="0"/>
                                   </p:stCondLst>
                                   <p:childTnLst>
                                     <p:set>
                                       <p:cBhvr>
-                                        <p:cTn id="35" dur="1" fill="hold">
+                                        <p:cTn id="36" dur="1" fill="hold">
                                           <p:stCondLst>
                                             <p:cond delay="0"/>
                                           </p:stCondLst>
@@ -35631,7 +36759,7 @@
                                     </p:set>
                                     <p:animEffect transition="in" filter="fade">
                                       <p:cBhvr>
-                                        <p:cTn id="36" dur="300"/>
+                                        <p:cTn id="37" dur="300"/>
                                         <p:tgtEl>
                                           <p:spTgt spid="30"/>
                                         </p:tgtEl>
@@ -35657,7 +36785,7 @@
               </p:nextCondLst>
             </p:seq>
             <p:seq concurrent="1" nextAc="seek">
-              <p:cTn id="39" restart="whenNotActive" fill="hold" evtFilter="cancelBubble" nodeType="interactiveSeq">
+              <p:cTn id="38" restart="whenNotActive" fill="hold" evtFilter="cancelBubble" nodeType="interactiveSeq">
                 <p:stCondLst>
                   <p:cond evt="onClick" delay="0">
                     <p:tgtEl>
@@ -35670,9 +36798,9 @@
                 </p:endSync>
                 <p:childTnLst>
                   <p:par>
-                    <p:cTn id="50" fill="hold">
+                    <p:cTn id="39" fill="hold">
                       <p:stCondLst>
-                        <p:cond delay="indefinite"/>
+                        <p:cond delay="0"/>
                       </p:stCondLst>
                       <p:childTnLst>
                         <p:par>
@@ -35682,14 +36810,14 @@
                             </p:stCondLst>
                             <p:childTnLst>
                               <p:par>
-                                <p:cTn id="43" presetID="10" presetClass="entr" presetSubtype="0" fill="hold" grpId="0" nodeType="clickEffect">
+                                <p:cTn id="41" presetID="10" presetClass="entr" presetSubtype="0" fill="hold" grpId="0" nodeType="clickEffect">
                                   <p:stCondLst>
                                     <p:cond delay="0"/>
                                   </p:stCondLst>
                                   <p:childTnLst>
                                     <p:set>
                                       <p:cBhvr>
-                                        <p:cTn id="41" dur="1" fill="hold">
+                                        <p:cTn id="42" dur="1" fill="hold">
                                           <p:stCondLst>
                                             <p:cond delay="0"/>
                                           </p:stCondLst>
@@ -35707,7 +36835,7 @@
                                     </p:set>
                                     <p:animEffect transition="in" filter="fade">
                                       <p:cBhvr>
-                                        <p:cTn id="42" dur="300"/>
+                                        <p:cTn id="43" dur="300"/>
                                         <p:tgtEl>
                                           <p:spTgt spid="36"/>
                                         </p:tgtEl>
@@ -35717,14 +36845,14 @@
                                 </p:cTn>
                               </p:par>
                               <p:par>
-                                <p:cTn id="46" presetID="10" presetClass="entr" presetSubtype="0" fill="hold" grpId="0" nodeType="withEffect">
+                                <p:cTn id="44" presetID="10" presetClass="entr" presetSubtype="0" fill="hold" grpId="0" nodeType="withEffect">
                                   <p:stCondLst>
                                     <p:cond delay="0"/>
                                   </p:stCondLst>
                                   <p:childTnLst>
                                     <p:set>
                                       <p:cBhvr>
-                                        <p:cTn id="44" dur="1" fill="hold">
+                                        <p:cTn id="45" dur="1" fill="hold">
                                           <p:stCondLst>
                                             <p:cond delay="0"/>
                                           </p:stCondLst>
@@ -35742,7 +36870,7 @@
                                     </p:set>
                                     <p:animEffect transition="in" filter="fade">
                                       <p:cBhvr>
-                                        <p:cTn id="45" dur="300"/>
+                                        <p:cTn id="46" dur="300"/>
                                         <p:tgtEl>
                                           <p:spTgt spid="37"/>
                                         </p:tgtEl>
@@ -35752,14 +36880,14 @@
                                 </p:cTn>
                               </p:par>
                               <p:par>
-                                <p:cTn id="49" presetID="10" presetClass="entr" presetSubtype="0" fill="hold" grpId="0" nodeType="withEffect">
+                                <p:cTn id="47" presetID="10" presetClass="entr" presetSubtype="0" fill="hold" grpId="0" nodeType="withEffect">
                                   <p:stCondLst>
                                     <p:cond delay="0"/>
                                   </p:stCondLst>
                                   <p:childTnLst>
                                     <p:set>
                                       <p:cBhvr>
-                                        <p:cTn id="47" dur="1" fill="hold">
+                                        <p:cTn id="48" dur="1" fill="hold">
                                           <p:stCondLst>
                                             <p:cond delay="0"/>
                                           </p:stCondLst>
@@ -35777,7 +36905,7 @@
                                     </p:set>
                                     <p:animEffect transition="in" filter="fade">
                                       <p:cBhvr>
-                                        <p:cTn id="48" dur="300"/>
+                                        <p:cTn id="49" dur="300"/>
                                         <p:tgtEl>
                                           <p:spTgt spid="38"/>
                                         </p:tgtEl>

--- a/docs/model-lesson/model-lesson-template.pptx
+++ b/docs/model-lesson/model-lesson-template.pptx
@@ -1759,7 +1759,7 @@
             <a:pPr rtl="1" algn="r"/>
             <a:r>
               <a:rPr lang="ar-SA" dirty="0"/>
-              <a:t>المؤقت: في كل شريحة مرحلة شارة زمن داكنة؛ انقر عليها فيبدأ شريط رفيع داخلها يتناقص بالمدة الحقيقية، وعند انتهائه تتحول إلى «انتهى الوقت». الانتقال السلس وإنهاء الحصة في وقتها مؤشر واضح على إدارة الوقت.</a:t>
+              <a:t>المؤقت: في كل شريحة مرحلة شارة زمن داكنة؛ انقر عليها فيبدأ شريط رفيع داخلها يتناقص بالمدة الحقيقية، وعند انتهائه تظهر «انتهى الوقت» بجانبها مع جرس قصير. الانتقال السلس وإنهاء الحصة في وقتها مؤشر واضح على إدارة الوقت.</a:t>
             </a:r>
           </a:p>
         </p:txBody>
@@ -1939,7 +1939,14 @@
             <a:pPr rtl="1" algn="r"/>
             <a:r>
               <a:rPr lang="ar-SA" dirty="0"/>
-              <a:t>لا أصوات في العرض عمدًا، والانتقال بين الشرائح تلاشٍ هادئ.</a:t>
+              <a:t>الأصوات ثلاثة فقط وقصيرة: جرس عند انتهاء المؤقت، ونغمة صاعدة للإجابة الصحيحة، ونغمة هابطة للخاطئة. والانتقال بين الشرائح تلاشٍ هادئ بلا صوت.</a:t>
+            </a:r>
+          </a:p>
+          <a:p>
+            <a:pPr rtl="1" algn="r"/>
+            <a:r>
+              <a:rPr lang="ar-SA" dirty="0"/>
+              <a:t>لإيقاف صوت: من «حركات» افتح «جزء الحركة»، وانقر سهم الحركة ← «خيارات التأثير» ← «الصوت: [بلا صوت]». أو اخفض صوت الحاسب.</a:t>
             </a:r>
           </a:p>
           <a:p>
@@ -3062,7 +3069,7 @@
             <a:pPr rtl="1" algn="r"/>
             <a:r>
               <a:rPr lang="ar-SA" dirty="0"/>
-              <a:t>تفاعل الشريحة: بعد أن يرفع الطلاب بطاقاتهم، انقر على أي خيار فيظهر حوله إطار وشارة: أخضر «إجابة صحيحة» أو أحمر «فكّر مجددًا». ثم اطلب من صاحب إجابة خاطئة أن يشرح تفكيره (تغذية راجعة فورية).</a:t>
+              <a:t>تفاعل الشريحة: بعد أن يرفع الطلاب بطاقاتهم، انقر على أي خيار فيظهر حوله إطار وشارة مع صوت قصير: أخضر «إجابة صحيحة» بنغمة صاعدة، أو أحمر «فكّر مجددًا» بنغمة هابطة. ثم اطلب من صاحب إجابة خاطئة أن يشرح تفكيره (تغذية راجعة فورية).</a:t>
             </a:r>
           </a:p>
           <a:p>
@@ -5955,17 +5962,38 @@
                                       </p:cBhvr>
                                     </p:animEffect>
                                   </p:childTnLst>
+                                  <p:subTnLst>
+                                    <p:audio>
+                                      <p:cMediaNode showWhenStopped="0">
+                                        <p:cTn id="12" display="0" masterRel="sameClick">
+                                          <p:stCondLst>
+                                            <p:cond delay="0"/>
+                                          </p:stCondLst>
+                                          <p:endCondLst>
+                                            <p:cond evt="onNext" delay="0">
+                                              <p:tgtEl>
+                                                <p:sldTgt/>
+                                              </p:tgtEl>
+                                            </p:cond>
+                                          </p:endCondLst>
+                                        </p:cTn>
+                                        <p:tgtEl>
+                                          <p:sndTgt r:embed="rIdS0" name="timeup.wav"/>
+                                        </p:tgtEl>
+                                      </p:cMediaNode>
+                                    </p:audio>
+                                  </p:subTnLst>
                                 </p:cTn>
                               </p:par>
                               <p:par>
-                                <p:cTn id="12" presetID="10" presetClass="entr" presetSubtype="0" fill="hold" grpId="0" nodeType="withEffect">
+                                <p:cTn id="13" presetID="10" presetClass="entr" presetSubtype="0" fill="hold" grpId="0" nodeType="withEffect">
                                   <p:stCondLst>
                                     <p:cond delay="0"/>
                                   </p:stCondLst>
                                   <p:childTnLst>
                                     <p:set>
                                       <p:cBhvr>
-                                        <p:cTn id="13" dur="1" fill="hold">
+                                        <p:cTn id="14" dur="1" fill="hold">
                                           <p:stCondLst>
                                             <p:cond delay="0"/>
                                           </p:stCondLst>
@@ -5983,7 +6011,7 @@
                                     </p:set>
                                     <p:animEffect transition="in" filter="fade">
                                       <p:cBhvr>
-                                        <p:cTn id="14" dur="500"/>
+                                        <p:cTn id="15" dur="500"/>
                                         <p:tgtEl>
                                           <p:spTgt spid="8"/>
                                         </p:tgtEl>
@@ -10032,17 +10060,38 @@
                                       </p:cBhvr>
                                     </p:animEffect>
                                   </p:childTnLst>
+                                  <p:subTnLst>
+                                    <p:audio>
+                                      <p:cMediaNode showWhenStopped="0">
+                                        <p:cTn id="12" display="0" masterRel="sameClick">
+                                          <p:stCondLst>
+                                            <p:cond delay="0"/>
+                                          </p:stCondLst>
+                                          <p:endCondLst>
+                                            <p:cond evt="onNext" delay="0">
+                                              <p:tgtEl>
+                                                <p:sldTgt/>
+                                              </p:tgtEl>
+                                            </p:cond>
+                                          </p:endCondLst>
+                                        </p:cTn>
+                                        <p:tgtEl>
+                                          <p:sndTgt r:embed="rIdS0" name="timeup.wav"/>
+                                        </p:tgtEl>
+                                      </p:cMediaNode>
+                                    </p:audio>
+                                  </p:subTnLst>
                                 </p:cTn>
                               </p:par>
                               <p:par>
-                                <p:cTn id="12" presetID="10" presetClass="entr" presetSubtype="0" fill="hold" grpId="0" nodeType="withEffect">
+                                <p:cTn id="13" presetID="10" presetClass="entr" presetSubtype="0" fill="hold" grpId="0" nodeType="withEffect">
                                   <p:stCondLst>
                                     <p:cond delay="0"/>
                                   </p:stCondLst>
                                   <p:childTnLst>
                                     <p:set>
                                       <p:cBhvr>
-                                        <p:cTn id="13" dur="1" fill="hold">
+                                        <p:cTn id="14" dur="1" fill="hold">
                                           <p:stCondLst>
                                             <p:cond delay="0"/>
                                           </p:stCondLst>
@@ -10060,7 +10109,7 @@
                                     </p:set>
                                     <p:animEffect transition="in" filter="fade">
                                       <p:cBhvr>
-                                        <p:cTn id="14" dur="500"/>
+                                        <p:cTn id="15" dur="500"/>
                                         <p:tgtEl>
                                           <p:spTgt spid="8"/>
                                         </p:tgtEl>
@@ -11106,17 +11155,38 @@
                                       </p:cBhvr>
                                     </p:animEffect>
                                   </p:childTnLst>
+                                  <p:subTnLst>
+                                    <p:audio>
+                                      <p:cMediaNode showWhenStopped="0">
+                                        <p:cTn id="12" display="0" masterRel="sameClick">
+                                          <p:stCondLst>
+                                            <p:cond delay="0"/>
+                                          </p:stCondLst>
+                                          <p:endCondLst>
+                                            <p:cond evt="onNext" delay="0">
+                                              <p:tgtEl>
+                                                <p:sldTgt/>
+                                              </p:tgtEl>
+                                            </p:cond>
+                                          </p:endCondLst>
+                                        </p:cTn>
+                                        <p:tgtEl>
+                                          <p:sndTgt r:embed="rIdS0" name="timeup.wav"/>
+                                        </p:tgtEl>
+                                      </p:cMediaNode>
+                                    </p:audio>
+                                  </p:subTnLst>
                                 </p:cTn>
                               </p:par>
                               <p:par>
-                                <p:cTn id="12" presetID="10" presetClass="entr" presetSubtype="0" fill="hold" grpId="0" nodeType="withEffect">
+                                <p:cTn id="13" presetID="10" presetClass="entr" presetSubtype="0" fill="hold" grpId="0" nodeType="withEffect">
                                   <p:stCondLst>
                                     <p:cond delay="0"/>
                                   </p:stCondLst>
                                   <p:childTnLst>
                                     <p:set>
                                       <p:cBhvr>
-                                        <p:cTn id="13" dur="1" fill="hold">
+                                        <p:cTn id="14" dur="1" fill="hold">
                                           <p:stCondLst>
                                             <p:cond delay="0"/>
                                           </p:stCondLst>
@@ -11134,7 +11204,7 @@
                                     </p:set>
                                     <p:animEffect transition="in" filter="fade">
                                       <p:cBhvr>
-                                        <p:cTn id="14" dur="500"/>
+                                        <p:cTn id="15" dur="500"/>
                                         <p:tgtEl>
                                           <p:spTgt spid="8"/>
                                         </p:tgtEl>
@@ -12140,17 +12210,38 @@
                                       </p:cBhvr>
                                     </p:animEffect>
                                   </p:childTnLst>
+                                  <p:subTnLst>
+                                    <p:audio>
+                                      <p:cMediaNode showWhenStopped="0">
+                                        <p:cTn id="12" display="0" masterRel="sameClick">
+                                          <p:stCondLst>
+                                            <p:cond delay="0"/>
+                                          </p:stCondLst>
+                                          <p:endCondLst>
+                                            <p:cond evt="onNext" delay="0">
+                                              <p:tgtEl>
+                                                <p:sldTgt/>
+                                              </p:tgtEl>
+                                            </p:cond>
+                                          </p:endCondLst>
+                                        </p:cTn>
+                                        <p:tgtEl>
+                                          <p:sndTgt r:embed="rIdS0" name="timeup.wav"/>
+                                        </p:tgtEl>
+                                      </p:cMediaNode>
+                                    </p:audio>
+                                  </p:subTnLst>
                                 </p:cTn>
                               </p:par>
                               <p:par>
-                                <p:cTn id="12" presetID="10" presetClass="entr" presetSubtype="0" fill="hold" grpId="0" nodeType="withEffect">
+                                <p:cTn id="13" presetID="10" presetClass="entr" presetSubtype="0" fill="hold" grpId="0" nodeType="withEffect">
                                   <p:stCondLst>
                                     <p:cond delay="0"/>
                                   </p:stCondLst>
                                   <p:childTnLst>
                                     <p:set>
                                       <p:cBhvr>
-                                        <p:cTn id="13" dur="1" fill="hold">
+                                        <p:cTn id="14" dur="1" fill="hold">
                                           <p:stCondLst>
                                             <p:cond delay="0"/>
                                           </p:stCondLst>
@@ -12168,7 +12259,7 @@
                                     </p:set>
                                     <p:animEffect transition="in" filter="fade">
                                       <p:cBhvr>
-                                        <p:cTn id="14" dur="500"/>
+                                        <p:cTn id="15" dur="500"/>
                                         <p:tgtEl>
                                           <p:spTgt spid="8"/>
                                         </p:tgtEl>
@@ -21230,7 +21321,7 @@
                           <a:latin typeface="IBM Plex Sans Arabic"/>
                           <a:cs typeface="IBM Plex Sans Arabic"/>
                         </a:rPr>
-                        <a:t>انقر شارة الزمن الداكنة: شريط يتناقص ثم «انتهى الوقت»</a:t>
+                        <a:t>انقر شارة الزمن: شريط يتناقص ثم «انتهى الوقت» وجرس</a:t>
                       </a:r>
                     </a:p>
                   </a:txBody>
@@ -21632,7 +21723,7 @@
                           <a:latin typeface="IBM Plex Sans Arabic"/>
                           <a:cs typeface="IBM Plex Sans Arabic"/>
                         </a:rPr>
-                        <a:t>انقر الخيار: أخضر صحيح، أحمر فكّر مجددًا</a:t>
+                        <a:t>انقر الخيار: أخضر بنغمة صاعدة، أحمر بنغمة هابطة</a:t>
                       </a:r>
                     </a:p>
                   </a:txBody>
@@ -30103,17 +30194,38 @@
                                       </p:cBhvr>
                                     </p:animEffect>
                                   </p:childTnLst>
+                                  <p:subTnLst>
+                                    <p:audio>
+                                      <p:cMediaNode showWhenStopped="0">
+                                        <p:cTn id="12" display="0" masterRel="sameClick">
+                                          <p:stCondLst>
+                                            <p:cond delay="0"/>
+                                          </p:stCondLst>
+                                          <p:endCondLst>
+                                            <p:cond evt="onNext" delay="0">
+                                              <p:tgtEl>
+                                                <p:sldTgt/>
+                                              </p:tgtEl>
+                                            </p:cond>
+                                          </p:endCondLst>
+                                        </p:cTn>
+                                        <p:tgtEl>
+                                          <p:sndTgt r:embed="rIdS0" name="timeup.wav"/>
+                                        </p:tgtEl>
+                                      </p:cMediaNode>
+                                    </p:audio>
+                                  </p:subTnLst>
                                 </p:cTn>
                               </p:par>
                               <p:par>
-                                <p:cTn id="12" presetID="10" presetClass="entr" presetSubtype="0" fill="hold" grpId="0" nodeType="withEffect">
+                                <p:cTn id="13" presetID="10" presetClass="entr" presetSubtype="0" fill="hold" grpId="0" nodeType="withEffect">
                                   <p:stCondLst>
                                     <p:cond delay="0"/>
                                   </p:stCondLst>
                                   <p:childTnLst>
                                     <p:set>
                                       <p:cBhvr>
-                                        <p:cTn id="13" dur="1" fill="hold">
+                                        <p:cTn id="14" dur="1" fill="hold">
                                           <p:stCondLst>
                                             <p:cond delay="0"/>
                                           </p:stCondLst>
@@ -30131,7 +30243,7 @@
                                     </p:set>
                                     <p:animEffect transition="in" filter="fade">
                                       <p:cBhvr>
-                                        <p:cTn id="14" dur="500"/>
+                                        <p:cTn id="15" dur="500"/>
                                         <p:tgtEl>
                                           <p:spTgt spid="8"/>
                                         </p:tgtEl>
@@ -32307,17 +32419,38 @@
                                       </p:cBhvr>
                                     </p:animEffect>
                                   </p:childTnLst>
+                                  <p:subTnLst>
+                                    <p:audio>
+                                      <p:cMediaNode showWhenStopped="0">
+                                        <p:cTn id="12" display="0" masterRel="sameClick">
+                                          <p:stCondLst>
+                                            <p:cond delay="0"/>
+                                          </p:stCondLst>
+                                          <p:endCondLst>
+                                            <p:cond evt="onNext" delay="0">
+                                              <p:tgtEl>
+                                                <p:sldTgt/>
+                                              </p:tgtEl>
+                                            </p:cond>
+                                          </p:endCondLst>
+                                        </p:cTn>
+                                        <p:tgtEl>
+                                          <p:sndTgt r:embed="rIdS0" name="timeup.wav"/>
+                                        </p:tgtEl>
+                                      </p:cMediaNode>
+                                    </p:audio>
+                                  </p:subTnLst>
                                 </p:cTn>
                               </p:par>
                               <p:par>
-                                <p:cTn id="12" presetID="10" presetClass="entr" presetSubtype="0" fill="hold" grpId="0" nodeType="withEffect">
+                                <p:cTn id="13" presetID="10" presetClass="entr" presetSubtype="0" fill="hold" grpId="0" nodeType="withEffect">
                                   <p:stCondLst>
                                     <p:cond delay="0"/>
                                   </p:stCondLst>
                                   <p:childTnLst>
                                     <p:set>
                                       <p:cBhvr>
-                                        <p:cTn id="13" dur="1" fill="hold">
+                                        <p:cTn id="14" dur="1" fill="hold">
                                           <p:stCondLst>
                                             <p:cond delay="0"/>
                                           </p:stCondLst>
@@ -32335,7 +32468,7 @@
                                     </p:set>
                                     <p:animEffect transition="in" filter="fade">
                                       <p:cBhvr>
-                                        <p:cTn id="14" dur="500"/>
+                                        <p:cTn id="15" dur="500"/>
                                         <p:tgtEl>
                                           <p:spTgt spid="8"/>
                                         </p:tgtEl>
@@ -34548,17 +34681,38 @@
                                       </p:cBhvr>
                                     </p:animEffect>
                                   </p:childTnLst>
+                                  <p:subTnLst>
+                                    <p:audio>
+                                      <p:cMediaNode showWhenStopped="0">
+                                        <p:cTn id="46" display="0" masterRel="sameClick">
+                                          <p:stCondLst>
+                                            <p:cond delay="0"/>
+                                          </p:stCondLst>
+                                          <p:endCondLst>
+                                            <p:cond evt="onNext" delay="0">
+                                              <p:tgtEl>
+                                                <p:sldTgt/>
+                                              </p:tgtEl>
+                                            </p:cond>
+                                          </p:endCondLst>
+                                        </p:cTn>
+                                        <p:tgtEl>
+                                          <p:sndTgt r:embed="rIdS0" name="timeup.wav"/>
+                                        </p:tgtEl>
+                                      </p:cMediaNode>
+                                    </p:audio>
+                                  </p:subTnLst>
                                 </p:cTn>
                               </p:par>
                               <p:par>
-                                <p:cTn id="46" presetID="10" presetClass="entr" presetSubtype="0" fill="hold" grpId="0" nodeType="withEffect">
+                                <p:cTn id="47" presetID="10" presetClass="entr" presetSubtype="0" fill="hold" grpId="0" nodeType="withEffect">
                                   <p:stCondLst>
                                     <p:cond delay="0"/>
                                   </p:stCondLst>
                                   <p:childTnLst>
                                     <p:set>
                                       <p:cBhvr>
-                                        <p:cTn id="47" dur="1" fill="hold">
+                                        <p:cTn id="48" dur="1" fill="hold">
                                           <p:stCondLst>
                                             <p:cond delay="0"/>
                                           </p:stCondLst>
@@ -34576,7 +34730,7 @@
                                     </p:set>
                                     <p:animEffect transition="in" filter="fade">
                                       <p:cBhvr>
-                                        <p:cTn id="48" dur="500"/>
+                                        <p:cTn id="49" dur="500"/>
                                         <p:tgtEl>
                                           <p:spTgt spid="8"/>
                                         </p:tgtEl>
@@ -35762,17 +35916,38 @@
                                       </p:cBhvr>
                                     </p:animEffect>
                                   </p:childTnLst>
+                                  <p:subTnLst>
+                                    <p:audio>
+                                      <p:cMediaNode showWhenStopped="0">
+                                        <p:cTn id="8" display="0" masterRel="sameClick">
+                                          <p:stCondLst>
+                                            <p:cond delay="0"/>
+                                          </p:stCondLst>
+                                          <p:endCondLst>
+                                            <p:cond evt="onNext" delay="0">
+                                              <p:tgtEl>
+                                                <p:sldTgt/>
+                                              </p:tgtEl>
+                                            </p:cond>
+                                          </p:endCondLst>
+                                        </p:cTn>
+                                        <p:tgtEl>
+                                          <p:sndTgt r:embed="rIdS0" name="correct.wav"/>
+                                        </p:tgtEl>
+                                      </p:cMediaNode>
+                                    </p:audio>
+                                  </p:subTnLst>
                                 </p:cTn>
                               </p:par>
                               <p:par>
-                                <p:cTn id="8" presetID="10" presetClass="entr" presetSubtype="0" fill="hold" grpId="0" nodeType="withEffect">
+                                <p:cTn id="9" presetID="10" presetClass="entr" presetSubtype="0" fill="hold" grpId="0" nodeType="withEffect">
                                   <p:stCondLst>
                                     <p:cond delay="0"/>
                                   </p:stCondLst>
                                   <p:childTnLst>
                                     <p:set>
                                       <p:cBhvr>
-                                        <p:cTn id="9" dur="1" fill="hold">
+                                        <p:cTn id="10" dur="1" fill="hold">
                                           <p:stCondLst>
                                             <p:cond delay="0"/>
                                           </p:stCondLst>
@@ -35790,7 +35965,7 @@
                                     </p:set>
                                     <p:animEffect transition="in" filter="fade">
                                       <p:cBhvr>
-                                        <p:cTn id="10" dur="300"/>
+                                        <p:cTn id="11" dur="300"/>
                                         <p:tgtEl>
                                           <p:spTgt spid="12"/>
                                         </p:tgtEl>
@@ -35800,14 +35975,14 @@
                                 </p:cTn>
                               </p:par>
                               <p:par>
-                                <p:cTn id="11" presetID="10" presetClass="entr" presetSubtype="0" fill="hold" grpId="0" nodeType="withEffect">
+                                <p:cTn id="12" presetID="10" presetClass="entr" presetSubtype="0" fill="hold" grpId="0" nodeType="withEffect">
                                   <p:stCondLst>
                                     <p:cond delay="0"/>
                                   </p:stCondLst>
                                   <p:childTnLst>
                                     <p:set>
                                       <p:cBhvr>
-                                        <p:cTn id="12" dur="1" fill="hold">
+                                        <p:cTn id="13" dur="1" fill="hold">
                                           <p:stCondLst>
                                             <p:cond delay="0"/>
                                           </p:stCondLst>
@@ -35825,7 +36000,7 @@
                                     </p:set>
                                     <p:animEffect transition="in" filter="fade">
                                       <p:cBhvr>
-                                        <p:cTn id="13" dur="300"/>
+                                        <p:cTn id="14" dur="300"/>
                                         <p:tgtEl>
                                           <p:spTgt spid="13"/>
                                         </p:tgtEl>
@@ -35851,7 +36026,7 @@
               </p:nextCondLst>
             </p:seq>
             <p:seq concurrent="1" nextAc="seek">
-              <p:cTn id="14" restart="whenNotActive" fill="hold" evtFilter="cancelBubble" nodeType="interactiveSeq">
+              <p:cTn id="15" restart="whenNotActive" fill="hold" evtFilter="cancelBubble" nodeType="interactiveSeq">
                 <p:stCondLst>
                   <p:cond evt="onClick" delay="0">
                     <p:tgtEl>
@@ -35864,26 +36039,26 @@
                 </p:endSync>
                 <p:childTnLst>
                   <p:par>
-                    <p:cTn id="15" fill="hold">
+                    <p:cTn id="16" fill="hold">
                       <p:stCondLst>
                         <p:cond delay="0"/>
                       </p:stCondLst>
                       <p:childTnLst>
                         <p:par>
-                          <p:cTn id="16" fill="hold">
+                          <p:cTn id="17" fill="hold">
                             <p:stCondLst>
                               <p:cond delay="0"/>
                             </p:stCondLst>
                             <p:childTnLst>
                               <p:par>
-                                <p:cTn id="17" presetID="10" presetClass="entr" presetSubtype="0" fill="hold" grpId="0" nodeType="clickEffect">
+                                <p:cTn id="18" presetID="10" presetClass="entr" presetSubtype="0" fill="hold" grpId="0" nodeType="clickEffect">
                                   <p:stCondLst>
                                     <p:cond delay="0"/>
                                   </p:stCondLst>
                                   <p:childTnLst>
                                     <p:set>
                                       <p:cBhvr>
-                                        <p:cTn id="18" dur="1" fill="hold">
+                                        <p:cTn id="19" dur="1" fill="hold">
                                           <p:stCondLst>
                                             <p:cond delay="0"/>
                                           </p:stCondLst>
@@ -35901,24 +36076,45 @@
                                     </p:set>
                                     <p:animEffect transition="in" filter="fade">
                                       <p:cBhvr>
-                                        <p:cTn id="19" dur="300"/>
+                                        <p:cTn id="20" dur="300"/>
                                         <p:tgtEl>
                                           <p:spTgt spid="17"/>
                                         </p:tgtEl>
                                       </p:cBhvr>
                                     </p:animEffect>
                                   </p:childTnLst>
+                                  <p:subTnLst>
+                                    <p:audio>
+                                      <p:cMediaNode showWhenStopped="0">
+                                        <p:cTn id="21" display="0" masterRel="sameClick">
+                                          <p:stCondLst>
+                                            <p:cond delay="0"/>
+                                          </p:stCondLst>
+                                          <p:endCondLst>
+                                            <p:cond evt="onNext" delay="0">
+                                              <p:tgtEl>
+                                                <p:sldTgt/>
+                                              </p:tgtEl>
+                                            </p:cond>
+                                          </p:endCondLst>
+                                        </p:cTn>
+                                        <p:tgtEl>
+                                          <p:sndTgt r:embed="rIdS1" name="wrong.wav"/>
+                                        </p:tgtEl>
+                                      </p:cMediaNode>
+                                    </p:audio>
+                                  </p:subTnLst>
                                 </p:cTn>
                               </p:par>
                               <p:par>
-                                <p:cTn id="20" presetID="10" presetClass="entr" presetSubtype="0" fill="hold" grpId="0" nodeType="withEffect">
+                                <p:cTn id="22" presetID="10" presetClass="entr" presetSubtype="0" fill="hold" grpId="0" nodeType="withEffect">
                                   <p:stCondLst>
                                     <p:cond delay="0"/>
                                   </p:stCondLst>
                                   <p:childTnLst>
                                     <p:set>
                                       <p:cBhvr>
-                                        <p:cTn id="21" dur="1" fill="hold">
+                                        <p:cTn id="23" dur="1" fill="hold">
                                           <p:stCondLst>
                                             <p:cond delay="0"/>
                                           </p:stCondLst>
@@ -35936,7 +36132,7 @@
                                     </p:set>
                                     <p:animEffect transition="in" filter="fade">
                                       <p:cBhvr>
-                                        <p:cTn id="22" dur="300"/>
+                                        <p:cTn id="24" dur="300"/>
                                         <p:tgtEl>
                                           <p:spTgt spid="18"/>
                                         </p:tgtEl>
@@ -35946,14 +36142,14 @@
                                 </p:cTn>
                               </p:par>
                               <p:par>
-                                <p:cTn id="23" presetID="10" presetClass="entr" presetSubtype="0" fill="hold" grpId="0" nodeType="withEffect">
+                                <p:cTn id="25" presetID="10" presetClass="entr" presetSubtype="0" fill="hold" grpId="0" nodeType="withEffect">
                                   <p:stCondLst>
                                     <p:cond delay="0"/>
                                   </p:stCondLst>
                                   <p:childTnLst>
                                     <p:set>
                                       <p:cBhvr>
-                                        <p:cTn id="24" dur="1" fill="hold">
+                                        <p:cTn id="26" dur="1" fill="hold">
                                           <p:stCondLst>
                                             <p:cond delay="0"/>
                                           </p:stCondLst>
@@ -35971,7 +36167,7 @@
                                     </p:set>
                                     <p:animEffect transition="in" filter="fade">
                                       <p:cBhvr>
-                                        <p:cTn id="25" dur="300"/>
+                                        <p:cTn id="27" dur="300"/>
                                         <p:tgtEl>
                                           <p:spTgt spid="19"/>
                                         </p:tgtEl>
@@ -35997,7 +36193,7 @@
               </p:nextCondLst>
             </p:seq>
             <p:seq concurrent="1" nextAc="seek">
-              <p:cTn id="26" restart="whenNotActive" fill="hold" evtFilter="cancelBubble" nodeType="interactiveSeq">
+              <p:cTn id="28" restart="whenNotActive" fill="hold" evtFilter="cancelBubble" nodeType="interactiveSeq">
                 <p:stCondLst>
                   <p:cond evt="onClick" delay="0">
                     <p:tgtEl>
@@ -36010,26 +36206,26 @@
                 </p:endSync>
                 <p:childTnLst>
                   <p:par>
-                    <p:cTn id="27" fill="hold">
+                    <p:cTn id="29" fill="hold">
                       <p:stCondLst>
                         <p:cond delay="0"/>
                       </p:stCondLst>
                       <p:childTnLst>
                         <p:par>
-                          <p:cTn id="28" fill="hold">
+                          <p:cTn id="30" fill="hold">
                             <p:stCondLst>
                               <p:cond delay="0"/>
                             </p:stCondLst>
                             <p:childTnLst>
                               <p:par>
-                                <p:cTn id="29" presetID="10" presetClass="entr" presetSubtype="0" fill="hold" grpId="0" nodeType="clickEffect">
+                                <p:cTn id="31" presetID="10" presetClass="entr" presetSubtype="0" fill="hold" grpId="0" nodeType="clickEffect">
                                   <p:stCondLst>
                                     <p:cond delay="0"/>
                                   </p:stCondLst>
                                   <p:childTnLst>
                                     <p:set>
                                       <p:cBhvr>
-                                        <p:cTn id="30" dur="1" fill="hold">
+                                        <p:cTn id="32" dur="1" fill="hold">
                                           <p:stCondLst>
                                             <p:cond delay="0"/>
                                           </p:stCondLst>
@@ -36047,24 +36243,45 @@
                                     </p:set>
                                     <p:animEffect transition="in" filter="fade">
                                       <p:cBhvr>
-                                        <p:cTn id="31" dur="300"/>
+                                        <p:cTn id="33" dur="300"/>
                                         <p:tgtEl>
                                           <p:spTgt spid="23"/>
                                         </p:tgtEl>
                                       </p:cBhvr>
                                     </p:animEffect>
                                   </p:childTnLst>
+                                  <p:subTnLst>
+                                    <p:audio>
+                                      <p:cMediaNode showWhenStopped="0">
+                                        <p:cTn id="34" display="0" masterRel="sameClick">
+                                          <p:stCondLst>
+                                            <p:cond delay="0"/>
+                                          </p:stCondLst>
+                                          <p:endCondLst>
+                                            <p:cond evt="onNext" delay="0">
+                                              <p:tgtEl>
+                                                <p:sldTgt/>
+                                              </p:tgtEl>
+                                            </p:cond>
+                                          </p:endCondLst>
+                                        </p:cTn>
+                                        <p:tgtEl>
+                                          <p:sndTgt r:embed="rIdS1" name="wrong.wav"/>
+                                        </p:tgtEl>
+                                      </p:cMediaNode>
+                                    </p:audio>
+                                  </p:subTnLst>
                                 </p:cTn>
                               </p:par>
                               <p:par>
-                                <p:cTn id="32" presetID="10" presetClass="entr" presetSubtype="0" fill="hold" grpId="0" nodeType="withEffect">
+                                <p:cTn id="35" presetID="10" presetClass="entr" presetSubtype="0" fill="hold" grpId="0" nodeType="withEffect">
                                   <p:stCondLst>
                                     <p:cond delay="0"/>
                                   </p:stCondLst>
                                   <p:childTnLst>
                                     <p:set>
                                       <p:cBhvr>
-                                        <p:cTn id="33" dur="1" fill="hold">
+                                        <p:cTn id="36" dur="1" fill="hold">
                                           <p:stCondLst>
                                             <p:cond delay="0"/>
                                           </p:stCondLst>
@@ -36082,7 +36299,7 @@
                                     </p:set>
                                     <p:animEffect transition="in" filter="fade">
                                       <p:cBhvr>
-                                        <p:cTn id="34" dur="300"/>
+                                        <p:cTn id="37" dur="300"/>
                                         <p:tgtEl>
                                           <p:spTgt spid="24"/>
                                         </p:tgtEl>
@@ -36092,14 +36309,14 @@
                                 </p:cTn>
                               </p:par>
                               <p:par>
-                                <p:cTn id="35" presetID="10" presetClass="entr" presetSubtype="0" fill="hold" grpId="0" nodeType="withEffect">
+                                <p:cTn id="38" presetID="10" presetClass="entr" presetSubtype="0" fill="hold" grpId="0" nodeType="withEffect">
                                   <p:stCondLst>
                                     <p:cond delay="0"/>
                                   </p:stCondLst>
                                   <p:childTnLst>
                                     <p:set>
                                       <p:cBhvr>
-                                        <p:cTn id="36" dur="1" fill="hold">
+                                        <p:cTn id="39" dur="1" fill="hold">
                                           <p:stCondLst>
                                             <p:cond delay="0"/>
                                           </p:stCondLst>
@@ -36117,7 +36334,7 @@
                                     </p:set>
                                     <p:animEffect transition="in" filter="fade">
                                       <p:cBhvr>
-                                        <p:cTn id="37" dur="300"/>
+                                        <p:cTn id="40" dur="300"/>
                                         <p:tgtEl>
                                           <p:spTgt spid="25"/>
                                         </p:tgtEl>
@@ -36143,7 +36360,7 @@
               </p:nextCondLst>
             </p:seq>
             <p:seq concurrent="1" nextAc="seek">
-              <p:cTn id="38" restart="whenNotActive" fill="hold" evtFilter="cancelBubble" nodeType="interactiveSeq">
+              <p:cTn id="41" restart="whenNotActive" fill="hold" evtFilter="cancelBubble" nodeType="interactiveSeq">
                 <p:stCondLst>
                   <p:cond evt="onClick" delay="0">
                     <p:tgtEl>
@@ -36156,26 +36373,26 @@
                 </p:endSync>
                 <p:childTnLst>
                   <p:par>
-                    <p:cTn id="39" fill="hold">
+                    <p:cTn id="42" fill="hold">
                       <p:stCondLst>
                         <p:cond delay="0"/>
                       </p:stCondLst>
                       <p:childTnLst>
                         <p:par>
-                          <p:cTn id="40" fill="hold">
+                          <p:cTn id="43" fill="hold">
                             <p:stCondLst>
                               <p:cond delay="0"/>
                             </p:stCondLst>
                             <p:childTnLst>
                               <p:par>
-                                <p:cTn id="41" presetID="10" presetClass="entr" presetSubtype="0" fill="hold" grpId="0" nodeType="clickEffect">
+                                <p:cTn id="44" presetID="10" presetClass="entr" presetSubtype="0" fill="hold" grpId="0" nodeType="clickEffect">
                                   <p:stCondLst>
                                     <p:cond delay="0"/>
                                   </p:stCondLst>
                                   <p:childTnLst>
                                     <p:set>
                                       <p:cBhvr>
-                                        <p:cTn id="42" dur="1" fill="hold">
+                                        <p:cTn id="45" dur="1" fill="hold">
                                           <p:stCondLst>
                                             <p:cond delay="0"/>
                                           </p:stCondLst>
@@ -36193,24 +36410,45 @@
                                     </p:set>
                                     <p:animEffect transition="in" filter="fade">
                                       <p:cBhvr>
-                                        <p:cTn id="43" dur="300"/>
+                                        <p:cTn id="46" dur="300"/>
                                         <p:tgtEl>
                                           <p:spTgt spid="29"/>
                                         </p:tgtEl>
                                       </p:cBhvr>
                                     </p:animEffect>
                                   </p:childTnLst>
+                                  <p:subTnLst>
+                                    <p:audio>
+                                      <p:cMediaNode showWhenStopped="0">
+                                        <p:cTn id="47" display="0" masterRel="sameClick">
+                                          <p:stCondLst>
+                                            <p:cond delay="0"/>
+                                          </p:stCondLst>
+                                          <p:endCondLst>
+                                            <p:cond evt="onNext" delay="0">
+                                              <p:tgtEl>
+                                                <p:sldTgt/>
+                                              </p:tgtEl>
+                                            </p:cond>
+                                          </p:endCondLst>
+                                        </p:cTn>
+                                        <p:tgtEl>
+                                          <p:sndTgt r:embed="rIdS1" name="wrong.wav"/>
+                                        </p:tgtEl>
+                                      </p:cMediaNode>
+                                    </p:audio>
+                                  </p:subTnLst>
                                 </p:cTn>
                               </p:par>
                               <p:par>
-                                <p:cTn id="44" presetID="10" presetClass="entr" presetSubtype="0" fill="hold" grpId="0" nodeType="withEffect">
+                                <p:cTn id="48" presetID="10" presetClass="entr" presetSubtype="0" fill="hold" grpId="0" nodeType="withEffect">
                                   <p:stCondLst>
                                     <p:cond delay="0"/>
                                   </p:stCondLst>
                                   <p:childTnLst>
                                     <p:set>
                                       <p:cBhvr>
-                                        <p:cTn id="45" dur="1" fill="hold">
+                                        <p:cTn id="49" dur="1" fill="hold">
                                           <p:stCondLst>
                                             <p:cond delay="0"/>
                                           </p:stCondLst>
@@ -36228,7 +36466,7 @@
                                     </p:set>
                                     <p:animEffect transition="in" filter="fade">
                                       <p:cBhvr>
-                                        <p:cTn id="46" dur="300"/>
+                                        <p:cTn id="50" dur="300"/>
                                         <p:tgtEl>
                                           <p:spTgt spid="30"/>
                                         </p:tgtEl>
@@ -36238,14 +36476,14 @@
                                 </p:cTn>
                               </p:par>
                               <p:par>
-                                <p:cTn id="47" presetID="10" presetClass="entr" presetSubtype="0" fill="hold" grpId="0" nodeType="withEffect">
+                                <p:cTn id="51" presetID="10" presetClass="entr" presetSubtype="0" fill="hold" grpId="0" nodeType="withEffect">
                                   <p:stCondLst>
                                     <p:cond delay="0"/>
                                   </p:stCondLst>
                                   <p:childTnLst>
                                     <p:set>
                                       <p:cBhvr>
-                                        <p:cTn id="48" dur="1" fill="hold">
+                                        <p:cTn id="52" dur="1" fill="hold">
                                           <p:stCondLst>
                                             <p:cond delay="0"/>
                                           </p:stCondLst>
@@ -36263,7 +36501,7 @@
                                     </p:set>
                                     <p:animEffect transition="in" filter="fade">
                                       <p:cBhvr>
-                                        <p:cTn id="49" dur="300"/>
+                                        <p:cTn id="53" dur="300"/>
                                         <p:tgtEl>
                                           <p:spTgt spid="31"/>
                                         </p:tgtEl>

--- a/docs/model-lesson/model-lesson-template.pptx
+++ b/docs/model-lesson/model-lesson-template.pptx
@@ -1364,7 +1364,7 @@
             <a:pPr rtl="1" algn="r"/>
             <a:r>
               <a:rPr lang="ar-SA" dirty="0"/>
-              <a:t>أعلن الفريق الفائز في نقاط المجموعات واحتفِ بإنجازه، واشكر من تحسّن أداؤه.</a:t>
+              <a:t>انقر «★ لوحة التميز» (أو تقدّم شريحة واحدة) واملأ نجوم كل مجموعة، ثم أعلن الفريق الفائز واحتفِ بإنجازه، واشكر من تحسّن أداؤه.</a:t>
             </a:r>
           </a:p>
           <a:p>
@@ -2466,7 +2466,14 @@
             <a:pPr rtl="1" algn="r"/>
             <a:r>
               <a:rPr lang="ar-SA" dirty="0"/>
-              <a:t>نقاط المجموعات: ارسم جدولًا صغيرًا على طرف السبورة بأسماء الفرق، وأضف النجوم أثناء الحصة، وأعلن الفائز في خلاصة الحصة. هذا يخدم بند «أساليب التحفيز» (الثناء والمكافأة والاحتفاء بالمنجزات).</a:t>
+              <a:t>لوحة التميز: ارسم جدولًا صغيرًا على طرف السبورة بأسماء الفرق، وأضف النجوم أثناء الحصة، ثم اكشفها في «لوحة التميز» في الخلاصة وأعلن الفائز. هذا يخدم بند «أساليب التحفيز» (الثناء والمكافأة والاحتفاء بالمنجزات).</a:t>
+            </a:r>
+          </a:p>
+          <a:p>
+            <a:pPr rtl="1" algn="r"/>
+            <a:r>
+              <a:rPr lang="ar-SA" dirty="0"/>
+              <a:t>زر «★ لوحة التميز» يعرض اللوحة للطلاب الآن ليعرفوا كيف تُحسب النقاط، وزر «رجوع» فيها يعيدك إلى هنا.</a:t>
             </a:r>
           </a:p>
           <a:p>
@@ -12095,6 +12102,54 @@
           </a:p>
         </p:txBody>
       </p:sp>
+      <p:sp>
+        <p:nvSpPr>
+          <p:cNvPr id="26" name="زر ★ لوحة التميز 26">
+            <a:hlinkClick r:id="rIdL2" action="ppaction://hlinksldjump"/>
+          </p:cNvPr>
+          <p:cNvSpPr/>
+          <p:nvPr/>
+        </p:nvSpPr>
+        <p:spPr>
+          <a:xfrm>
+            <a:off x="731520" y="4041648"/>
+            <a:ext cx="1463040" cy="292608"/>
+          </a:xfrm>
+          <a:prstGeom prst="roundRect">
+            <a:avLst>
+              <a:gd name="adj" fmla="val 50000"/>
+            </a:avLst>
+          </a:prstGeom>
+          <a:solidFill>
+            <a:srgbClr val="FFF6DA"/>
+          </a:solidFill>
+          <a:ln w="12700">
+            <a:solidFill>
+              <a:srgbClr val="E9D49A"/>
+            </a:solidFill>
+            <a:prstDash val="solid"/>
+          </a:ln>
+        </p:spPr>
+        <p:txBody>
+          <a:bodyPr wrap="square" lIns="0" tIns="0" rIns="0" bIns="0" rtlCol="1" anchor="ctr"/>
+          <a:lstStyle/>
+          <a:p>
+            <a:pPr rtl="1" algn="ctr">
+              <a:buNone/>
+            </a:pPr>
+            <a:r>
+              <a:rPr lang="ar-SA" altLang="en-US" sz="1100" b="1" dirty="0">
+                <a:solidFill>
+                  <a:srgbClr val="9A7B22"/>
+                </a:solidFill>
+                <a:latin typeface="IBM Plex Sans Arabic"/>
+                <a:cs typeface="IBM Plex Sans Arabic"/>
+              </a:rPr>
+              <a:t>★ لوحة التميز</a:t>
+            </a:r>
+          </a:p>
+        </p:txBody>
+      </p:sp>
     </p:spTree>
   </p:cSld>
   <p:clrMapOvr>
@@ -12435,7 +12490,7 @@
                 <a:latin typeface="IBM Plex Sans Arabic"/>
                 <a:cs typeface="IBM Plex Sans Arabic"/>
               </a:rPr>
-              <a:t>لوحة نقاط المجموعات</a:t>
+              <a:t>لوحة التميز</a:t>
             </a:r>
             <a:endParaRPr lang="ar-SA" sz="3000" dirty="0"/>
           </a:p>
@@ -15831,8 +15886,8 @@
         </p:nvSpPr>
         <p:spPr>
           <a:xfrm>
-            <a:off x="457200" y="4315968"/>
-            <a:ext cx="8229600" cy="228600"/>
+            <a:off x="1463040" y="4315968"/>
+            <a:ext cx="7223760" cy="228600"/>
           </a:xfrm>
           <a:prstGeom prst="rect">
             <a:avLst/>
@@ -15857,6 +15912,54 @@
               <a:t>انقر على النجمة الفارغة لتمتلئ.</a:t>
             </a:r>
             <a:endParaRPr lang="ar-SA" sz="1000" dirty="0"/>
+          </a:p>
+        </p:txBody>
+      </p:sp>
+      <p:sp>
+        <p:nvSpPr>
+          <p:cNvPr id="86" name="زر ↩ رجوع 86">
+            <a:hlinkClick r:id="" action="ppaction://hlinkshowjump?jump=lastslideviewed"/>
+          </p:cNvPr>
+          <p:cNvSpPr/>
+          <p:nvPr/>
+        </p:nvSpPr>
+        <p:spPr>
+          <a:xfrm>
+            <a:off x="457200" y="4288536"/>
+            <a:ext cx="868680" cy="274320"/>
+          </a:xfrm>
+          <a:prstGeom prst="roundRect">
+            <a:avLst>
+              <a:gd name="adj" fmla="val 50000"/>
+            </a:avLst>
+          </a:prstGeom>
+          <a:solidFill>
+            <a:srgbClr val="FFFFFF"/>
+          </a:solidFill>
+          <a:ln w="12700">
+            <a:solidFill>
+              <a:srgbClr val="D5E7DC"/>
+            </a:solidFill>
+            <a:prstDash val="solid"/>
+          </a:ln>
+        </p:spPr>
+        <p:txBody>
+          <a:bodyPr wrap="square" lIns="0" tIns="0" rIns="0" bIns="0" rtlCol="1" anchor="ctr"/>
+          <a:lstStyle/>
+          <a:p>
+            <a:pPr rtl="1" algn="ctr">
+              <a:buNone/>
+            </a:pPr>
+            <a:r>
+              <a:rPr lang="ar-SA" altLang="en-US" sz="1000" b="1" dirty="0">
+                <a:solidFill>
+                  <a:srgbClr val="3E6350"/>
+                </a:solidFill>
+                <a:latin typeface="IBM Plex Sans Arabic"/>
+                <a:cs typeface="IBM Plex Sans Arabic"/>
+              </a:rPr>
+              <a:t>↩ رجوع</a:t>
+            </a:r>
           </a:p>
         </p:txBody>
       </p:sp>
@@ -21947,7 +22050,7 @@
                           <a:latin typeface="IBM Plex Sans Arabic"/>
                           <a:cs typeface="IBM Plex Sans Arabic"/>
                         </a:rPr>
-                        <a:t>لوحة النقاط</a:t>
+                        <a:t>بعد الخلاصة</a:t>
                       </a:r>
                     </a:p>
                   </a:txBody>
@@ -21991,7 +22094,7 @@
                           <a:latin typeface="IBM Plex Sans Arabic"/>
                           <a:cs typeface="IBM Plex Sans Arabic"/>
                         </a:rPr>
-                        <a:t>انقر النجمة الفارغة فتمتلئ</a:t>
+                        <a:t>انقر النجمة الفارغة فتمتلئ؛ وزرها في الاتفاقات والخلاصة</a:t>
                       </a:r>
                     </a:p>
                   </a:txBody>
@@ -22035,7 +22138,7 @@
                           <a:latin typeface="IBM Plex Sans Arabic"/>
                           <a:cs typeface="IBM Plex Sans Arabic"/>
                         </a:rPr>
-                        <a:t>نقاط المجموعات</a:t>
+                        <a:t>لوحة التميز</a:t>
                       </a:r>
                     </a:p>
                   </a:txBody>
@@ -24787,7 +24890,7 @@
                           <a:latin typeface="IBM Plex Sans Arabic"/>
                           <a:cs typeface="IBM Plex Sans Arabic"/>
                         </a:rPr>
-                        <a:t>نقاط المجموعات، والاحتفاء بالفائز</a:t>
+                        <a:t>لوحة التميز، والاحتفاء بالفائز</a:t>
                       </a:r>
                     </a:p>
                   </a:txBody>
@@ -29292,8 +29395,8 @@
         </p:nvSpPr>
         <p:spPr>
           <a:xfrm>
-            <a:off x="960120" y="4023360"/>
-            <a:ext cx="7178040" cy="457200"/>
+            <a:off x="2331720" y="4023360"/>
+            <a:ext cx="5806440" cy="457200"/>
           </a:xfrm>
           <a:prstGeom prst="rect">
             <a:avLst/>
@@ -29315,7 +29418,7 @@
                 <a:latin typeface="IBM Plex Sans Arabic"/>
                 <a:cs typeface="IBM Plex Sans Arabic"/>
               </a:rPr>
-              <a:t>نقاط المجموعات: </a:t>
+              <a:t>لوحة التميز: </a:t>
             </a:r>
             <a:r>
               <a:rPr lang="ar-SA" altLang="en-US" sz="1200" dirty="0">
@@ -29325,9 +29428,57 @@
                 <a:latin typeface="IBM Plex Sans Arabic"/>
                 <a:cs typeface="IBM Plex Sans Arabic"/>
               </a:rPr>
-              <a:t>كل إجابة صحيحة أو تعاون مميز نجمةٌ لفريقك، ونحتفي بالفريق الفائز في نهاية الحصة.</a:t>
+              <a:t>كل إجابة صحيحة أو تعاون مميز نجمةٌ لفريقك.</a:t>
             </a:r>
             <a:endParaRPr lang="ar-SA" sz="1200" dirty="0"/>
+          </a:p>
+        </p:txBody>
+      </p:sp>
+      <p:sp>
+        <p:nvSpPr>
+          <p:cNvPr id="35" name="زر ★ لوحة التميز 35">
+            <a:hlinkClick r:id="rIdL1" action="ppaction://hlinksldjump"/>
+          </p:cNvPr>
+          <p:cNvSpPr/>
+          <p:nvPr/>
+        </p:nvSpPr>
+        <p:spPr>
+          <a:xfrm>
+            <a:off x="896112" y="4105656"/>
+            <a:ext cx="1325880" cy="292608"/>
+          </a:xfrm>
+          <a:prstGeom prst="roundRect">
+            <a:avLst>
+              <a:gd name="adj" fmla="val 50000"/>
+            </a:avLst>
+          </a:prstGeom>
+          <a:solidFill>
+            <a:srgbClr val="FFF6DA"/>
+          </a:solidFill>
+          <a:ln w="12700">
+            <a:solidFill>
+              <a:srgbClr val="E9D49A"/>
+            </a:solidFill>
+            <a:prstDash val="solid"/>
+          </a:ln>
+        </p:spPr>
+        <p:txBody>
+          <a:bodyPr wrap="square" lIns="0" tIns="0" rIns="0" bIns="0" rtlCol="1" anchor="ctr"/>
+          <a:lstStyle/>
+          <a:p>
+            <a:pPr rtl="1" algn="ctr">
+              <a:buNone/>
+            </a:pPr>
+            <a:r>
+              <a:rPr lang="ar-SA" altLang="en-US" sz="1100" b="1" dirty="0">
+                <a:solidFill>
+                  <a:srgbClr val="9A7B22"/>
+                </a:solidFill>
+                <a:latin typeface="IBM Plex Sans Arabic"/>
+                <a:cs typeface="IBM Plex Sans Arabic"/>
+              </a:rPr>
+              <a:t>★ لوحة التميز</a:t>
+            </a:r>
           </a:p>
         </p:txBody>
       </p:sp>

--- a/docs/model-lesson/model-lesson-template.pptx
+++ b/docs/model-lesson/model-lesson-template.pptx
@@ -604,6 +604,13 @@
               <a:t>الشرائح الست الأخيرة مخفية (دليل المعلم): لا تظهر أثناء العرض، راجعها قبل الزيارة.</a:t>
             </a:r>
           </a:p>
+          <a:p>
+            <a:pPr rtl="1" algn="r"/>
+            <a:r>
+              <a:rPr lang="ar-SA" dirty="0"/>
+              <a:t>بعد إكمال التعديل احفظ نسخة للعرض: ملف ← حفظ باسم ← نوع الملف ← «عرض PowerPoint (.ppsx)»، فتفتح مباشرة في وضع العرض وتعمل الأزرار من أول نقرة.</a:t>
+            </a:r>
+          </a:p>
         </p:txBody>
       </p:sp>
       <p:sp>
@@ -1926,6 +1933,13 @@
             <a:r>
               <a:rPr lang="ar-SA" dirty="0"/>
               <a:t>التفاعل يعمل كاملًا في PowerPoint على الحاسب (ويندوز وماك). في PowerPoint على الويب أو الجوال يعمل جزئيًا، ولا يعمل في Google Slides؛ فاعرض من حاسب الفصل.</a:t>
+            </a:r>
+          </a:p>
+          <a:p>
+            <a:pPr rtl="1" algn="r"/>
+            <a:r>
+              <a:rPr lang="ar-SA" dirty="0"/>
+              <a:t>بعد التعديل احفظ نسختين: الأصلية (pptx) للتعديل لاحقًا، ونسخة للعرض من: ملف ← حفظ باسم ← نوع الملف ← «عرض PowerPoint (.ppsx)». نسخة العرض تفتح مباشرة في وضع العرض. لا تحفظه PDF لأنه يُفقده التفاعل.</a:t>
             </a:r>
           </a:p>
           <a:p>

--- a/docs/model-lesson/model-lesson-template.pptx
+++ b/docs/model-lesson/model-lesson-template.pptx
@@ -608,7 +608,7 @@
             <a:pPr rtl="1" algn="r"/>
             <a:r>
               <a:rPr lang="ar-SA" dirty="0"/>
-              <a:t>بعد إكمال التعديل احفظ نسخة للعرض: ملف ← حفظ باسم ← نوع الملف ← «عرض PowerPoint (.ppsx)»، فتفتح مباشرة في وضع العرض وتعمل الأزرار من أول نقرة.</a:t>
+              <a:t>بعد إكمال التعديل احفظ نسخة للعرض: File ← Save As ← Save as type ← PowerPoint Show (*.ppsx) (وفي الواجهة العربية «عرض PowerPoint»)، فتفتح مباشرة في وضع العرض وتعمل الأزرار من أول نقرة.</a:t>
             </a:r>
           </a:p>
         </p:txBody>
@@ -1939,7 +1939,7 @@
             <a:pPr rtl="1" algn="r"/>
             <a:r>
               <a:rPr lang="ar-SA" dirty="0"/>
-              <a:t>بعد التعديل احفظ نسختين: الأصلية (pptx) للتعديل لاحقًا، ونسخة للعرض من: ملف ← حفظ باسم ← نوع الملف ← «عرض PowerPoint (.ppsx)». نسخة العرض تفتح مباشرة في وضع العرض. لا تحفظه PDF لأنه يُفقده التفاعل.</a:t>
+              <a:t>بعد التعديل احفظ نسختين: الأصلية (pptx) للتعديل لاحقًا، ونسخة للعرض من: File ← Save As ← Save as type ← PowerPoint Show (*.ppsx) (وفي الواجهة العربية «عرض PowerPoint»). نسخة العرض تفتح مباشرة في وضع العرض. لا تحفظه PDF لأنه يُفقده التفاعل.</a:t>
             </a:r>
           </a:p>
           <a:p>
